--- a/presentations/spec-driven-api-test-automation/output/output.pptx
+++ b/presentations/spec-driven-api-test-automation/output/output.pptx
@@ -2,25 +2,26 @@
 <file path=ppt/presentation.xml><?xml version="1.0" encoding="utf-8"?>
 <p:presentation xmlns:p="http://schemas.openxmlformats.org/presentationml/2006/main">
   <p:sldMasterIdLst>
-    <p:sldMasterId xmlns:r="http://schemas.openxmlformats.org/officeDocument/2006/relationships" id="2147483648" r:id="R6ef33e42d2fc4c71"/>
+    <p:sldMasterId xmlns:r="http://schemas.openxmlformats.org/officeDocument/2006/relationships" id="2147483648" r:id="R373ddaed127a4331"/>
   </p:sldMasterIdLst>
   <p:notesMasterIdLst>
-    <p:notesMasterId xmlns:r="http://schemas.openxmlformats.org/officeDocument/2006/relationships" r:id="R7415a39c3fbb4b58"/>
+    <p:notesMasterId xmlns:r="http://schemas.openxmlformats.org/officeDocument/2006/relationships" r:id="R99f37340a6114c0d"/>
   </p:notesMasterIdLst>
   <p:sldIdLst>
-    <p:sldId xmlns:r="http://schemas.openxmlformats.org/officeDocument/2006/relationships" id="256" r:id="Rc83c34eaa4df4e21"/>
-    <p:sldId xmlns:r="http://schemas.openxmlformats.org/officeDocument/2006/relationships" id="257" r:id="R4b2ddaf588fe4554"/>
-    <p:sldId xmlns:r="http://schemas.openxmlformats.org/officeDocument/2006/relationships" id="258" r:id="Ra1e098621c104c01"/>
-    <p:sldId xmlns:r="http://schemas.openxmlformats.org/officeDocument/2006/relationships" id="259" r:id="R7daa50e0d1b24ff2"/>
-    <p:sldId xmlns:r="http://schemas.openxmlformats.org/officeDocument/2006/relationships" id="260" r:id="R0feaf905ec234adc"/>
-    <p:sldId xmlns:r="http://schemas.openxmlformats.org/officeDocument/2006/relationships" id="261" r:id="Rabbb4db3c89b46c1"/>
-    <p:sldId xmlns:r="http://schemas.openxmlformats.org/officeDocument/2006/relationships" id="262" r:id="R2cf37ec4d2d94ce0"/>
-    <p:sldId xmlns:r="http://schemas.openxmlformats.org/officeDocument/2006/relationships" id="263" r:id="R8ef318658b864961"/>
-    <p:sldId xmlns:r="http://schemas.openxmlformats.org/officeDocument/2006/relationships" id="264" r:id="Red8f34269f5e4c13"/>
-    <p:sldId xmlns:r="http://schemas.openxmlformats.org/officeDocument/2006/relationships" id="265" r:id="Rcbe82835a2fc4d5a"/>
-    <p:sldId xmlns:r="http://schemas.openxmlformats.org/officeDocument/2006/relationships" id="266" r:id="Re8a7a3c2fe0143e7"/>
-    <p:sldId xmlns:r="http://schemas.openxmlformats.org/officeDocument/2006/relationships" id="267" r:id="R0f9f7a48a68e4271"/>
-    <p:sldId xmlns:r="http://schemas.openxmlformats.org/officeDocument/2006/relationships" id="268" r:id="R88326b988ebc4ca4"/>
+    <p:sldId xmlns:r="http://schemas.openxmlformats.org/officeDocument/2006/relationships" id="256" r:id="R239548811f5d4063"/>
+    <p:sldId xmlns:r="http://schemas.openxmlformats.org/officeDocument/2006/relationships" id="257" r:id="Re4ea34d1281c42c7"/>
+    <p:sldId xmlns:r="http://schemas.openxmlformats.org/officeDocument/2006/relationships" id="258" r:id="R14ecc4447f6843a9"/>
+    <p:sldId xmlns:r="http://schemas.openxmlformats.org/officeDocument/2006/relationships" id="259" r:id="Re866c3352a074166"/>
+    <p:sldId xmlns:r="http://schemas.openxmlformats.org/officeDocument/2006/relationships" id="260" r:id="R55a64d2f3d47432b"/>
+    <p:sldId xmlns:r="http://schemas.openxmlformats.org/officeDocument/2006/relationships" id="261" r:id="R0fb81a50791a4ca3"/>
+    <p:sldId xmlns:r="http://schemas.openxmlformats.org/officeDocument/2006/relationships" id="262" r:id="Rdc989f43db2a4bc0"/>
+    <p:sldId xmlns:r="http://schemas.openxmlformats.org/officeDocument/2006/relationships" id="263" r:id="R457435e9dcb046bb"/>
+    <p:sldId xmlns:r="http://schemas.openxmlformats.org/officeDocument/2006/relationships" id="264" r:id="R184c4a57f2994ec7"/>
+    <p:sldId xmlns:r="http://schemas.openxmlformats.org/officeDocument/2006/relationships" id="265" r:id="R4d06313554164ac7"/>
+    <p:sldId xmlns:r="http://schemas.openxmlformats.org/officeDocument/2006/relationships" id="266" r:id="R89fa7246227d479d"/>
+    <p:sldId xmlns:r="http://schemas.openxmlformats.org/officeDocument/2006/relationships" id="267" r:id="Rd2effbcf85df417d"/>
+    <p:sldId xmlns:r="http://schemas.openxmlformats.org/officeDocument/2006/relationships" id="268" r:id="R9e6b8e93a5bf4db1"/>
+    <p:sldId xmlns:r="http://schemas.openxmlformats.org/officeDocument/2006/relationships" id="269" r:id="R666835f5cd794ac2"/>
   </p:sldIdLst>
   <p:sldSz cx="18288000" cy="10287000"/>
   <p:notesSz cx="6858000" cy="9144000"/>
@@ -793,6 +794,72 @@
 </p:notes>
 </file>
 
+<file path=ppt/notesSlides/notesSlide14.xml><?xml version="1.0" encoding="utf-8"?>
+<p:notes xmlns:p="http://schemas.openxmlformats.org/presentationml/2006/main">
+  <p:cSld>
+    <p:spTree>
+      <p:nvGrpSpPr>
+        <p:cNvPr id="1" name=""/>
+        <p:cNvGrpSpPr/>
+        <p:nvPr/>
+      </p:nvGrpSpPr>
+      <p:grpSpPr>
+        <a:xfrm xmlns:a="http://schemas.openxmlformats.org/drawingml/2006/main"/>
+      </p:grpSpPr>
+      <p:sp>
+        <p:nvSpPr>
+          <p:cNvPr id="2" name="Slide Image Placeholder 1"/>
+          <p:cNvSpPr>
+            <a:spLocks xmlns:a="http://schemas.openxmlformats.org/drawingml/2006/main" noGrp="1"/>
+          </p:cNvSpPr>
+          <p:nvPr>
+            <p:ph type="sldImg" idx="0"/>
+          </p:nvPr>
+        </p:nvSpPr>
+        <p:spPr/>
+      </p:sp>
+      <p:sp>
+        <p:nvSpPr>
+          <p:cNvPr id="3" name="Notes Placeholder 2"/>
+          <p:cNvSpPr>
+            <a:spLocks xmlns:a="http://schemas.openxmlformats.org/drawingml/2006/main" noGrp="1"/>
+          </p:cNvSpPr>
+          <p:nvPr>
+            <p:ph type="body" idx="1"/>
+          </p:nvPr>
+        </p:nvSpPr>
+        <p:spPr/>
+        <p:txBody>
+          <a:bodyPr xmlns:a="http://schemas.openxmlformats.org/drawingml/2006/main"/>
+          <a:lstStyle xmlns:a="http://schemas.openxmlformats.org/drawingml/2006/main"/>
+          <a:p xmlns:a="http://schemas.openxmlformats.org/drawingml/2006/main"/>
+        </p:txBody>
+      </p:sp>
+      <p:sp>
+        <p:nvSpPr>
+          <p:cNvPr id="4" name="Slide Number Placeholder 3"/>
+          <p:cNvSpPr>
+            <a:spLocks xmlns:a="http://schemas.openxmlformats.org/drawingml/2006/main" noGrp="1"/>
+          </p:cNvSpPr>
+          <p:nvPr>
+            <p:ph type="sldNum" idx="5"/>
+          </p:nvPr>
+        </p:nvSpPr>
+        <p:spPr/>
+        <p:txBody>
+          <a:bodyPr xmlns:a="http://schemas.openxmlformats.org/drawingml/2006/main"/>
+          <a:lstStyle xmlns:a="http://schemas.openxmlformats.org/drawingml/2006/main"/>
+          <a:p xmlns:a="http://schemas.openxmlformats.org/drawingml/2006/main"/>
+        </p:txBody>
+      </p:sp>
+    </p:spTree>
+  </p:cSld>
+  <p:clrMapOvr>
+    <a:masterClrMapping xmlns:a="http://schemas.openxmlformats.org/drawingml/2006/main"/>
+  </p:clrMapOvr>
+</p:notes>
+</file>
+
 <file path=ppt/notesSlides/notesSlide2.xml><?xml version="1.0" encoding="utf-8"?>
 <p:notes xmlns:p="http://schemas.openxmlformats.org/presentationml/2006/main">
   <p:cSld>
@@ -1359,7 +1426,7 @@
   </p:cSld>
   <p:clrMap bg1="lt1" tx1="dk1" bg2="lt2" tx2="dk2" accent1="accent1" accent2="accent2" accent3="accent3" accent4="accent4" accent5="accent5" accent6="accent6" hlink="hlink" folHlink="folHlink"/>
   <p:sldLayoutIdLst>
-    <p:sldLayoutId xmlns:r="http://schemas.openxmlformats.org/officeDocument/2006/relationships" id="2147483649" r:id="R89e8c6dbfa874064"/>
+    <p:sldLayoutId xmlns:r="http://schemas.openxmlformats.org/officeDocument/2006/relationships" id="2147483649" r:id="R0fe4acfb05e041cc"/>
   </p:sldLayoutIdLst>
   <p:txStyles>
     <p:titleStyle>
@@ -1658,7 +1725,7 @@
           <p:cNvPr id="1" name="cover-bg">
             <a:extLst xmlns:a="http://schemas.openxmlformats.org/drawingml/2006/main">
               <a:ext uri="{FF2B5EF4-FFF2-40B4-BE49-F238E27FC236}">
-                <a16:creationId xmlns:a16="http://schemas.microsoft.com/office/drawing/2014/main" id="{EE8CB3B0-34CD-4427-8B9B-486BEC2C81CC}"/>
+                <a16:creationId xmlns:a16="http://schemas.microsoft.com/office/drawing/2014/main" id="{9E77904A-A1B5-4720-9642-33A00E7F9238}"/>
               </a:ext>
             </a:extLst>
           </p:cNvPr>
@@ -1685,7 +1752,7 @@
           <p:cNvPr id="2" name="pill-TEACHING DECK">
             <a:extLst xmlns:a="http://schemas.openxmlformats.org/drawingml/2006/main">
               <a:ext uri="{FF2B5EF4-FFF2-40B4-BE49-F238E27FC236}">
-                <a16:creationId xmlns:a16="http://schemas.microsoft.com/office/drawing/2014/main" id="{D762E2D8-08DB-46EE-90C2-A4B69EEC08DC}"/>
+                <a16:creationId xmlns:a16="http://schemas.microsoft.com/office/drawing/2014/main" id="{742262D1-023F-481F-BC83-6984291FE2F1}"/>
               </a:ext>
             </a:extLst>
           </p:cNvPr>
@@ -1714,7 +1781,7 @@
           <p:cNvPr id="3" name="">
             <a:extLst xmlns:a="http://schemas.openxmlformats.org/drawingml/2006/main">
               <a:ext uri="{FF2B5EF4-FFF2-40B4-BE49-F238E27FC236}">
-                <a16:creationId xmlns:a16="http://schemas.microsoft.com/office/drawing/2014/main" id="{5BE860C8-31E0-4A7E-BE07-D5EE005BA783}"/>
+                <a16:creationId xmlns:a16="http://schemas.microsoft.com/office/drawing/2014/main" id="{FEA20A50-3C8A-4B8E-B417-29F83B5AA0B5}"/>
               </a:ext>
             </a:extLst>
           </p:cNvPr>
@@ -1763,7 +1830,7 @@
           <p:cNvPr id="4" name="cover-title">
             <a:extLst xmlns:a="http://schemas.openxmlformats.org/drawingml/2006/main">
               <a:ext uri="{FF2B5EF4-FFF2-40B4-BE49-F238E27FC236}">
-                <a16:creationId xmlns:a16="http://schemas.microsoft.com/office/drawing/2014/main" id="{E9B53696-DEF5-4BEE-A0F0-982F0C965D9B}"/>
+                <a16:creationId xmlns:a16="http://schemas.microsoft.com/office/drawing/2014/main" id="{4FCF0E6D-9EC4-4280-ACAC-6A51418972FE}"/>
               </a:ext>
             </a:extLst>
           </p:cNvPr>
@@ -1854,7 +1921,7 @@
           <p:cNvPr id="5" name="">
             <a:extLst xmlns:a="http://schemas.openxmlformats.org/drawingml/2006/main">
               <a:ext uri="{FF2B5EF4-FFF2-40B4-BE49-F238E27FC236}">
-                <a16:creationId xmlns:a16="http://schemas.microsoft.com/office/drawing/2014/main" id="{8B93283D-E7BF-4AD9-A998-51F6A7F52550}"/>
+                <a16:creationId xmlns:a16="http://schemas.microsoft.com/office/drawing/2014/main" id="{4A1F6355-2E4B-43C4-B183-FDF48DC49834}"/>
               </a:ext>
             </a:extLst>
           </p:cNvPr>
@@ -1903,7 +1970,7 @@
           <p:cNvPr id="6" name="">
             <a:extLst xmlns:a="http://schemas.openxmlformats.org/drawingml/2006/main">
               <a:ext uri="{FF2B5EF4-FFF2-40B4-BE49-F238E27FC236}">
-                <a16:creationId xmlns:a16="http://schemas.microsoft.com/office/drawing/2014/main" id="{2DB96ED6-5F16-4D52-8779-DB903242AFBD}"/>
+                <a16:creationId xmlns:a16="http://schemas.microsoft.com/office/drawing/2014/main" id="{78466678-8625-41A1-986B-11EE39BF3436}"/>
               </a:ext>
             </a:extLst>
           </p:cNvPr>
@@ -1952,7 +2019,7 @@
           <p:cNvPr id="7" name="">
             <a:extLst xmlns:a="http://schemas.openxmlformats.org/drawingml/2006/main">
               <a:ext uri="{FF2B5EF4-FFF2-40B4-BE49-F238E27FC236}">
-                <a16:creationId xmlns:a16="http://schemas.microsoft.com/office/drawing/2014/main" id="{8312CF59-E219-4105-8ECD-1530014CEB8F}"/>
+                <a16:creationId xmlns:a16="http://schemas.microsoft.com/office/drawing/2014/main" id="{97318EC0-B7D0-4A72-BE0A-098C07E3E4D5}"/>
               </a:ext>
             </a:extLst>
           </p:cNvPr>
@@ -2001,7 +2068,7 @@
           <p:cNvPr id="8" name="">
             <a:extLst xmlns:a="http://schemas.openxmlformats.org/drawingml/2006/main">
               <a:ext uri="{FF2B5EF4-FFF2-40B4-BE49-F238E27FC236}">
-                <a16:creationId xmlns:a16="http://schemas.microsoft.com/office/drawing/2014/main" id="{042EE546-6032-4A3A-96E7-06FA886F643B}"/>
+                <a16:creationId xmlns:a16="http://schemas.microsoft.com/office/drawing/2014/main" id="{44110191-2AA4-44C1-80EF-71955A0D803F}"/>
               </a:ext>
             </a:extLst>
           </p:cNvPr>
@@ -2054,12 +2121,12 @@
           <p:nvPr/>
         </p:nvPicPr>
         <p:blipFill>
-          <a:blip xmlns:r="http://schemas.openxmlformats.org/officeDocument/2006/relationships" xmlns:a="http://schemas.openxmlformats.org/drawingml/2006/main" r:embed="Rd8d96c0214504b44"/>
+          <a:blip xmlns:r="http://schemas.openxmlformats.org/officeDocument/2006/relationships" xmlns:a="http://schemas.openxmlformats.org/drawingml/2006/main" r:embed="Rdbe52f85d7a74b6c"/>
           <a:stretch xmlns:a="http://schemas.openxmlformats.org/drawingml/2006/main"/>
         </p:blipFill>
         <p:spPr>
           <a:xfrm xmlns:a="http://schemas.openxmlformats.org/drawingml/2006/main">
-            <a:off x="12195785" y="2030730"/>
+            <a:off x="12195785" y="1862138"/>
             <a:ext cx="4088179" cy="4095750"/>
           </a:xfrm>
           <a:prstGeom xmlns:a="http://schemas.openxmlformats.org/drawingml/2006/main" prst="rect">
@@ -2072,23 +2139,23 @@
           <p:cNvPr id="10" name="code-block">
             <a:extLst xmlns:a="http://schemas.openxmlformats.org/drawingml/2006/main">
               <a:ext uri="{FF2B5EF4-FFF2-40B4-BE49-F238E27FC236}">
-                <a16:creationId xmlns:a16="http://schemas.microsoft.com/office/drawing/2014/main" id="{83883BCA-C13D-498C-89F8-D9E96C07DFD8}"/>
-              </a:ext>
-            </a:extLst>
-          </p:cNvPr>
-          <p:cNvSpPr>
-            <a:spLocks xmlns:a="http://schemas.openxmlformats.org/drawingml/2006/main" noGrp="1"/>
-          </p:cNvSpPr>
-          <p:nvPr/>
-        </p:nvSpPr>
-        <p:spPr>
-          <a:xfrm xmlns:a="http://schemas.openxmlformats.org/drawingml/2006/main">
-            <a:off x="11525250" y="6450330"/>
-            <a:ext cx="5429250" cy="1805940"/>
+                <a16:creationId xmlns:a16="http://schemas.microsoft.com/office/drawing/2014/main" id="{4AE48D9A-48BB-41AC-914D-888D90648C6B}"/>
+              </a:ext>
+            </a:extLst>
+          </p:cNvPr>
+          <p:cNvSpPr>
+            <a:spLocks xmlns:a="http://schemas.openxmlformats.org/drawingml/2006/main" noGrp="1"/>
+          </p:cNvSpPr>
+          <p:nvPr/>
+        </p:nvSpPr>
+        <p:spPr>
+          <a:xfrm xmlns:a="http://schemas.openxmlformats.org/drawingml/2006/main">
+            <a:off x="11525250" y="6281738"/>
+            <a:ext cx="5429250" cy="2143125"/>
           </a:xfrm>
           <a:prstGeom xmlns:a="http://schemas.openxmlformats.org/drawingml/2006/main" prst="roundRect">
             <a:avLst>
-              <a:gd name="adj" fmla="val 10549"/>
+              <a:gd name="adj" fmla="val 8889"/>
             </a:avLst>
           </a:prstGeom>
           <a:solidFill xmlns:a="http://schemas.openxmlformats.org/drawingml/2006/main">
@@ -2101,19 +2168,19 @@
           <p:cNvPr id="11" name="">
             <a:extLst xmlns:a="http://schemas.openxmlformats.org/drawingml/2006/main">
               <a:ext uri="{FF2B5EF4-FFF2-40B4-BE49-F238E27FC236}">
-                <a16:creationId xmlns:a16="http://schemas.microsoft.com/office/drawing/2014/main" id="{033BFD5E-6E16-4D08-85B7-0416DEABBA3B}"/>
-              </a:ext>
-            </a:extLst>
-          </p:cNvPr>
-          <p:cNvSpPr>
-            <a:spLocks xmlns:a="http://schemas.openxmlformats.org/drawingml/2006/main" noGrp="1"/>
-          </p:cNvSpPr>
-          <p:nvPr/>
-        </p:nvSpPr>
-        <p:spPr>
-          <a:xfrm xmlns:a="http://schemas.openxmlformats.org/drawingml/2006/main">
-            <a:off x="11791950" y="6686550"/>
-            <a:ext cx="4895850" cy="1352550"/>
+                <a16:creationId xmlns:a16="http://schemas.microsoft.com/office/drawing/2014/main" id="{A96C8DF0-89B9-4EB3-9721-5FCE862B5632}"/>
+              </a:ext>
+            </a:extLst>
+          </p:cNvPr>
+          <p:cNvSpPr>
+            <a:spLocks xmlns:a="http://schemas.openxmlformats.org/drawingml/2006/main" noGrp="1"/>
+          </p:cNvSpPr>
+          <p:nvPr/>
+        </p:nvSpPr>
+        <p:spPr>
+          <a:xfrm xmlns:a="http://schemas.openxmlformats.org/drawingml/2006/main">
+            <a:off x="11791950" y="6515100"/>
+            <a:ext cx="4895850" cy="1695450"/>
           </a:xfrm>
           <a:prstGeom xmlns:a="http://schemas.openxmlformats.org/drawingml/2006/main" prst="rect">
             <a:avLst/>
@@ -2162,6 +2229,27 @@
                 </a:solidFill>
               </a:rPr>
               <a:t>  -&gt; generate-tests.ts</a:t>
+            </a:r>
+          </a:p>
+          <a:p xmlns:a="http://schemas.openxmlformats.org/drawingml/2006/main">
+            <a:pPr>
+              <a:lnSpc>
+                <a:spcPct val="118000"/>
+              </a:lnSpc>
+              <a:buNone/>
+              <a:defRPr sz="1875" b="0" i="0">
+                <a:solidFill>
+                  <a:srgbClr val="D1E7FF"/>
+                </a:solidFill>
+              </a:defRPr>
+            </a:pPr>
+            <a:r>
+              <a:rPr sz="1875" b="0" i="0">
+                <a:solidFill>
+                  <a:srgbClr val="D1E7FF"/>
+                </a:solidFill>
+              </a:rPr>
+              <a:t>  -&gt; generate-edge-tests.ts</a:t>
             </a:r>
           </a:p>
           <a:p xmlns:a="http://schemas.openxmlformats.org/drawingml/2006/main">
@@ -2211,7 +2299,7 @@
     </p:spTree>
     <p:extLst>
       <p:ext uri="{BB962C8B-B14F-4D97-AF65-F5344CB8AC3E}">
-        <p14:creationId xmlns:p14="http://schemas.microsoft.com/office/powerpoint/2010/main" val="685865137"/>
+        <p14:creationId xmlns:p14="http://schemas.microsoft.com/office/powerpoint/2010/main" val="784384157"/>
       </p:ext>
     </p:extLst>
   </p:cSld>
@@ -2235,7 +2323,7 @@
           <p:cNvPr id="1" name="slide-bg">
             <a:extLst xmlns:a="http://schemas.openxmlformats.org/drawingml/2006/main">
               <a:ext uri="{FF2B5EF4-FFF2-40B4-BE49-F238E27FC236}">
-                <a16:creationId xmlns:a16="http://schemas.microsoft.com/office/drawing/2014/main" id="{C58D1B42-308F-4AB2-B5FA-C94215AA3255}"/>
+                <a16:creationId xmlns:a16="http://schemas.microsoft.com/office/drawing/2014/main" id="{2DF53D2B-152F-4CC1-B85E-F87012AFF319}"/>
               </a:ext>
             </a:extLst>
           </p:cNvPr>
@@ -2259,10 +2347,10 @@
       </p:sp>
       <p:sp>
         <p:nvSpPr>
-          <p:cNvPr id="2" name="slide-title">
-            <a:extLst xmlns:a="http://schemas.openxmlformats.org/drawingml/2006/main">
-              <a:ext uri="{FF2B5EF4-FFF2-40B4-BE49-F238E27FC236}">
-                <a16:creationId xmlns:a16="http://schemas.microsoft.com/office/drawing/2014/main" id="{479AD880-00B1-4476-BE4F-E4842805813C}"/>
+          <p:cNvPr id="2" name="edge-slide-title">
+            <a:extLst xmlns:a="http://schemas.openxmlformats.org/drawingml/2006/main">
+              <a:ext uri="{FF2B5EF4-FFF2-40B4-BE49-F238E27FC236}">
+                <a16:creationId xmlns:a16="http://schemas.microsoft.com/office/drawing/2014/main" id="{76CE5747-0AD7-430B-B6E0-A4F3B6FC0BBB}"/>
               </a:ext>
             </a:extLst>
           </p:cNvPr>
@@ -2274,7 +2362,7 @@
         <p:spPr>
           <a:xfrm xmlns:a="http://schemas.openxmlformats.org/drawingml/2006/main">
             <a:off x="819150" y="533400"/>
-            <a:ext cx="6610350" cy="628650"/>
+            <a:ext cx="7239000" cy="723900"/>
           </a:xfrm>
           <a:prstGeom xmlns:a="http://schemas.openxmlformats.org/drawingml/2006/main" prst="rect">
             <a:avLst/>
@@ -2301,29 +2389,29 @@
                   <a:srgbClr val="172033"/>
                 </a:solidFill>
               </a:rPr>
-              <a:t>Run against the demo API</a:t>
-            </a:r>
-          </a:p>
-        </p:txBody>
-      </p:sp>
-      <p:sp>
-        <p:nvSpPr>
-          <p:cNvPr id="3" name="slide-subtitle">
-            <a:extLst xmlns:a="http://schemas.openxmlformats.org/drawingml/2006/main">
-              <a:ext uri="{FF2B5EF4-FFF2-40B4-BE49-F238E27FC236}">
-                <a16:creationId xmlns:a16="http://schemas.microsoft.com/office/drawing/2014/main" id="{3A1A06C7-DE98-4151-A56B-7EFBA8C8F7A9}"/>
-              </a:ext>
-            </a:extLst>
-          </p:cNvPr>
-          <p:cNvSpPr>
-            <a:spLocks xmlns:a="http://schemas.openxmlformats.org/drawingml/2006/main" noGrp="1"/>
-          </p:cNvSpPr>
-          <p:nvPr/>
-        </p:nvSpPr>
-        <p:spPr>
-          <a:xfrm xmlns:a="http://schemas.openxmlformats.org/drawingml/2006/main">
-            <a:off x="819150" y="1314450"/>
-            <a:ext cx="5657850" cy="342900"/>
+              <a:t>Edge tests</a:t>
+            </a:r>
+          </a:p>
+        </p:txBody>
+      </p:sp>
+      <p:sp>
+        <p:nvSpPr>
+          <p:cNvPr id="3" name="edge-slide-subtitle">
+            <a:extLst xmlns:a="http://schemas.openxmlformats.org/drawingml/2006/main">
+              <a:ext uri="{FF2B5EF4-FFF2-40B4-BE49-F238E27FC236}">
+                <a16:creationId xmlns:a16="http://schemas.microsoft.com/office/drawing/2014/main" id="{CAC61C7B-E5D6-4CD9-9648-CBD4594C6D54}"/>
+              </a:ext>
+            </a:extLst>
+          </p:cNvPr>
+          <p:cNvSpPr>
+            <a:spLocks xmlns:a="http://schemas.openxmlformats.org/drawingml/2006/main" noGrp="1"/>
+          </p:cNvSpPr>
+          <p:nvPr/>
+        </p:nvSpPr>
+        <p:spPr>
+          <a:xfrm xmlns:a="http://schemas.openxmlformats.org/drawingml/2006/main">
+            <a:off x="819150" y="1409700"/>
+            <a:ext cx="8953500" cy="342900"/>
           </a:xfrm>
           <a:prstGeom xmlns:a="http://schemas.openxmlformats.org/drawingml/2006/main" prst="rect">
             <a:avLst/>
@@ -2350,33 +2438,33 @@
                   <a:srgbClr val="596579"/>
                 </a:solidFill>
               </a:rPr>
-              <a:t>`npm test` proves the whole learning loop end to end.</a:t>
-            </a:r>
-          </a:p>
-        </p:txBody>
-      </p:sp>
-      <p:sp>
-        <p:nvSpPr>
-          <p:cNvPr id="4" name="">
-            <a:extLst xmlns:a="http://schemas.openxmlformats.org/drawingml/2006/main">
-              <a:ext uri="{FF2B5EF4-FFF2-40B4-BE49-F238E27FC236}">
-                <a16:creationId xmlns:a16="http://schemas.microsoft.com/office/drawing/2014/main" id="{B521E922-20F4-42B4-A515-463187E6BC7B}"/>
-              </a:ext>
-            </a:extLst>
-          </p:cNvPr>
-          <p:cNvSpPr>
-            <a:spLocks xmlns:a="http://schemas.openxmlformats.org/drawingml/2006/main" noGrp="1"/>
-          </p:cNvSpPr>
-          <p:nvPr/>
-        </p:nvSpPr>
-        <p:spPr>
-          <a:xfrm xmlns:a="http://schemas.openxmlformats.org/drawingml/2006/main">
-            <a:off x="1924050" y="3657600"/>
-            <a:ext cx="2095500" cy="895350"/>
+              <a:t>Step 6: negative tests need invalid requests, not just successful response examples.</a:t>
+            </a:r>
+          </a:p>
+        </p:txBody>
+      </p:sp>
+      <p:sp>
+        <p:nvSpPr>
+          <p:cNvPr id="4" name="edge-signal-Required input?">
+            <a:extLst xmlns:a="http://schemas.openxmlformats.org/drawingml/2006/main">
+              <a:ext uri="{FF2B5EF4-FFF2-40B4-BE49-F238E27FC236}">
+                <a16:creationId xmlns:a16="http://schemas.microsoft.com/office/drawing/2014/main" id="{BE44D879-4A87-465D-9F40-0EF23A18C9BA}"/>
+              </a:ext>
+            </a:extLst>
+          </p:cNvPr>
+          <p:cNvSpPr>
+            <a:spLocks xmlns:a="http://schemas.openxmlformats.org/drawingml/2006/main" noGrp="1"/>
+          </p:cNvSpPr>
+          <p:nvPr/>
+        </p:nvSpPr>
+        <p:spPr>
+          <a:xfrm xmlns:a="http://schemas.openxmlformats.org/drawingml/2006/main">
+            <a:off x="819150" y="2998946"/>
+            <a:ext cx="4191000" cy="1219200"/>
           </a:xfrm>
           <a:prstGeom xmlns:a="http://schemas.openxmlformats.org/drawingml/2006/main" prst="roundRect">
             <a:avLst>
-              <a:gd name="adj" fmla="val 25532"/>
+              <a:gd name="adj" fmla="val 18750"/>
             </a:avLst>
           </a:prstGeom>
           <a:solidFill xmlns:a="http://schemas.openxmlformats.org/drawingml/2006/main">
@@ -2389,19 +2477,19 @@
           <p:cNvPr id="5" name="">
             <a:extLst xmlns:a="http://schemas.openxmlformats.org/drawingml/2006/main">
               <a:ext uri="{FF2B5EF4-FFF2-40B4-BE49-F238E27FC236}">
-                <a16:creationId xmlns:a16="http://schemas.microsoft.com/office/drawing/2014/main" id="{34FE6D3D-00E5-48FE-A1A2-08DDA36E7549}"/>
-              </a:ext>
-            </a:extLst>
-          </p:cNvPr>
-          <p:cNvSpPr>
-            <a:spLocks xmlns:a="http://schemas.openxmlformats.org/drawingml/2006/main" noGrp="1"/>
-          </p:cNvSpPr>
-          <p:nvPr/>
-        </p:nvSpPr>
-        <p:spPr>
-          <a:xfrm xmlns:a="http://schemas.openxmlformats.org/drawingml/2006/main">
-            <a:off x="2095500" y="3962400"/>
-            <a:ext cx="1752600" cy="304800"/>
+                <a16:creationId xmlns:a16="http://schemas.microsoft.com/office/drawing/2014/main" id="{E3A3D753-F608-454C-815E-4FDB89913824}"/>
+              </a:ext>
+            </a:extLst>
+          </p:cNvPr>
+          <p:cNvSpPr>
+            <a:spLocks xmlns:a="http://schemas.openxmlformats.org/drawingml/2006/main" noGrp="1"/>
+          </p:cNvSpPr>
+          <p:nvPr/>
+        </p:nvSpPr>
+        <p:spPr>
+          <a:xfrm xmlns:a="http://schemas.openxmlformats.org/drawingml/2006/main">
+            <a:off x="1047750" y="3295650"/>
+            <a:ext cx="3733800" cy="304800"/>
           </a:xfrm>
           <a:prstGeom xmlns:a="http://schemas.openxmlformats.org/drawingml/2006/main" prst="rect">
             <a:avLst/>
@@ -2416,19 +2504,19 @@
                 <a:spcPct val="100000"/>
               </a:lnSpc>
               <a:buNone/>
-              <a:defRPr sz="1875" b="1" i="0">
+              <a:defRPr sz="1950" b="1" i="0">
                 <a:solidFill>
                   <a:srgbClr val="65B32E"/>
                 </a:solidFill>
               </a:defRPr>
             </a:pPr>
             <a:r>
-              <a:rPr sz="1875" b="1" i="0">
+              <a:rPr sz="1950" b="1" i="0">
                 <a:solidFill>
                   <a:srgbClr val="65B32E"/>
                 </a:solidFill>
               </a:rPr>
-              <a:t>npm test</a:t>
+              <a:t>Required input?</a:t>
             </a:r>
           </a:p>
         </p:txBody>
@@ -2438,121 +2526,72 @@
           <p:cNvPr id="6" name="">
             <a:extLst xmlns:a="http://schemas.openxmlformats.org/drawingml/2006/main">
               <a:ext uri="{FF2B5EF4-FFF2-40B4-BE49-F238E27FC236}">
-                <a16:creationId xmlns:a16="http://schemas.microsoft.com/office/drawing/2014/main" id="{21F2C3FE-E625-4D7F-BB69-96004C7BB45C}"/>
-              </a:ext>
-            </a:extLst>
-          </p:cNvPr>
-          <p:cNvSpPr>
-            <a:spLocks xmlns:a="http://schemas.openxmlformats.org/drawingml/2006/main" noGrp="1"/>
-          </p:cNvSpPr>
-          <p:nvPr/>
-        </p:nvSpPr>
-        <p:spPr>
-          <a:xfrm xmlns:a="http://schemas.openxmlformats.org/drawingml/2006/main">
-            <a:off x="2343150" y="4648200"/>
-            <a:ext cx="1257300" cy="457200"/>
-          </a:xfrm>
-          <a:prstGeom xmlns:a="http://schemas.openxmlformats.org/drawingml/2006/main" prst="rect">
-            <a:avLst/>
-          </a:prstGeom>
-        </p:spPr>
-        <p:txBody>
-          <a:bodyPr xmlns:a="http://schemas.openxmlformats.org/drawingml/2006/main" lIns="0" tIns="0" rIns="0" bIns="0"/>
-          <a:lstStyle xmlns:a="http://schemas.openxmlformats.org/drawingml/2006/main"/>
-          <a:p xmlns:a="http://schemas.openxmlformats.org/drawingml/2006/main">
-            <a:pPr>
-              <a:lnSpc>
-                <a:spcPct val="110000"/>
-              </a:lnSpc>
-              <a:buNone/>
-              <a:defRPr sz="1350" b="0" i="0">
-                <a:solidFill>
-                  <a:srgbClr val="596579"/>
-                </a:solidFill>
-              </a:defRPr>
-            </a:pPr>
-            <a:r>
-              <a:rPr sz="1350" b="0" i="0">
-                <a:solidFill>
-                  <a:srgbClr val="596579"/>
-                </a:solidFill>
-              </a:rPr>
-              <a:t>single command</a:t>
-            </a:r>
-          </a:p>
-        </p:txBody>
-      </p:sp>
-      <p:sp>
-        <p:nvSpPr>
-          <p:cNvPr id="7" name="">
-            <a:extLst xmlns:a="http://schemas.openxmlformats.org/drawingml/2006/main">
-              <a:ext uri="{FF2B5EF4-FFF2-40B4-BE49-F238E27FC236}">
-                <a16:creationId xmlns:a16="http://schemas.microsoft.com/office/drawing/2014/main" id="{76AE0681-15D3-485B-9133-70065B801A4E}"/>
-              </a:ext>
-            </a:extLst>
-          </p:cNvPr>
-          <p:cNvSpPr>
-            <a:spLocks xmlns:a="http://schemas.openxmlformats.org/drawingml/2006/main" noGrp="1"/>
-          </p:cNvSpPr>
-          <p:nvPr/>
-        </p:nvSpPr>
-        <p:spPr>
-          <a:xfrm xmlns:a="http://schemas.openxmlformats.org/drawingml/2006/main">
-            <a:off x="4171950" y="4171950"/>
-            <a:ext cx="590550" cy="419100"/>
-          </a:xfrm>
-          <a:prstGeom xmlns:a="http://schemas.openxmlformats.org/drawingml/2006/main" prst="rect">
-            <a:avLst/>
-          </a:prstGeom>
-        </p:spPr>
-        <p:txBody>
-          <a:bodyPr xmlns:a="http://schemas.openxmlformats.org/drawingml/2006/main" lIns="0" tIns="0" rIns="0" bIns="0"/>
-          <a:lstStyle xmlns:a="http://schemas.openxmlformats.org/drawingml/2006/main"/>
-          <a:p xmlns:a="http://schemas.openxmlformats.org/drawingml/2006/main">
-            <a:pPr>
-              <a:lnSpc>
-                <a:spcPct val="100000"/>
-              </a:lnSpc>
-              <a:buNone/>
-              <a:defRPr sz="2850" b="1" i="0">
-                <a:solidFill>
-                  <a:srgbClr val="596579"/>
-                </a:solidFill>
-              </a:defRPr>
-            </a:pPr>
-            <a:r>
-              <a:rPr sz="2850" b="1" i="0">
-                <a:solidFill>
-                  <a:srgbClr val="596579"/>
-                </a:solidFill>
-              </a:rPr>
-              <a:t>-&gt;</a:t>
-            </a:r>
-          </a:p>
-        </p:txBody>
-      </p:sp>
-      <p:sp>
-        <p:nvSpPr>
-          <p:cNvPr id="8" name="">
-            <a:extLst xmlns:a="http://schemas.openxmlformats.org/drawingml/2006/main">
-              <a:ext uri="{FF2B5EF4-FFF2-40B4-BE49-F238E27FC236}">
-                <a16:creationId xmlns:a16="http://schemas.microsoft.com/office/drawing/2014/main" id="{A38512F0-FDB0-4F01-92A0-709E351671C7}"/>
-              </a:ext>
-            </a:extLst>
-          </p:cNvPr>
-          <p:cNvSpPr>
-            <a:spLocks xmlns:a="http://schemas.openxmlformats.org/drawingml/2006/main" noGrp="1"/>
-          </p:cNvSpPr>
-          <p:nvPr/>
-        </p:nvSpPr>
-        <p:spPr>
-          <a:xfrm xmlns:a="http://schemas.openxmlformats.org/drawingml/2006/main">
-            <a:off x="4914900" y="3657600"/>
-            <a:ext cx="2095500" cy="895350"/>
+                <a16:creationId xmlns:a16="http://schemas.microsoft.com/office/drawing/2014/main" id="{84A1EECB-4E00-4547-A0F3-DE9CAF80D28F}"/>
+              </a:ext>
+            </a:extLst>
+          </p:cNvPr>
+          <p:cNvSpPr>
+            <a:spLocks xmlns:a="http://schemas.openxmlformats.org/drawingml/2006/main" noGrp="1"/>
+          </p:cNvSpPr>
+          <p:nvPr/>
+        </p:nvSpPr>
+        <p:spPr>
+          <a:xfrm xmlns:a="http://schemas.openxmlformats.org/drawingml/2006/main">
+            <a:off x="1047750" y="3676650"/>
+            <a:ext cx="3733800" cy="247650"/>
+          </a:xfrm>
+          <a:prstGeom xmlns:a="http://schemas.openxmlformats.org/drawingml/2006/main" prst="rect">
+            <a:avLst/>
+          </a:prstGeom>
+        </p:spPr>
+        <p:txBody>
+          <a:bodyPr xmlns:a="http://schemas.openxmlformats.org/drawingml/2006/main" lIns="0" tIns="0" rIns="0" bIns="0"/>
+          <a:lstStyle xmlns:a="http://schemas.openxmlformats.org/drawingml/2006/main"/>
+          <a:p xmlns:a="http://schemas.openxmlformats.org/drawingml/2006/main">
+            <a:pPr>
+              <a:lnSpc>
+                <a:spcPct val="108000"/>
+              </a:lnSpc>
+              <a:buNone/>
+              <a:defRPr sz="1425" b="0" i="0">
+                <a:solidFill>
+                  <a:srgbClr val="596579"/>
+                </a:solidFill>
+              </a:defRPr>
+            </a:pPr>
+            <a:r>
+              <a:rPr sz="1425" b="0" i="0">
+                <a:solidFill>
+                  <a:srgbClr val="596579"/>
+                </a:solidFill>
+              </a:rPr>
+              <a:t>Omit query, header, or body.</a:t>
+            </a:r>
+          </a:p>
+        </p:txBody>
+      </p:sp>
+      <p:sp>
+        <p:nvSpPr>
+          <p:cNvPr id="7" name="edge-signal-Schema constraint?">
+            <a:extLst xmlns:a="http://schemas.openxmlformats.org/drawingml/2006/main">
+              <a:ext uri="{FF2B5EF4-FFF2-40B4-BE49-F238E27FC236}">
+                <a16:creationId xmlns:a16="http://schemas.microsoft.com/office/drawing/2014/main" id="{75388863-A7FE-40CD-83FB-998126D22932}"/>
+              </a:ext>
+            </a:extLst>
+          </p:cNvPr>
+          <p:cNvSpPr>
+            <a:spLocks xmlns:a="http://schemas.openxmlformats.org/drawingml/2006/main" noGrp="1"/>
+          </p:cNvSpPr>
+          <p:nvPr/>
+        </p:nvSpPr>
+        <p:spPr>
+          <a:xfrm xmlns:a="http://schemas.openxmlformats.org/drawingml/2006/main">
+            <a:off x="819150" y="4370546"/>
+            <a:ext cx="4191000" cy="1219200"/>
           </a:xfrm>
           <a:prstGeom xmlns:a="http://schemas.openxmlformats.org/drawingml/2006/main" prst="roundRect">
             <a:avLst>
-              <a:gd name="adj" fmla="val 25532"/>
+              <a:gd name="adj" fmla="val 18750"/>
             </a:avLst>
           </a:prstGeom>
           <a:solidFill xmlns:a="http://schemas.openxmlformats.org/drawingml/2006/main">
@@ -2562,173 +2601,124 @@
       </p:sp>
       <p:sp>
         <p:nvSpPr>
+          <p:cNvPr id="8" name="">
+            <a:extLst xmlns:a="http://schemas.openxmlformats.org/drawingml/2006/main">
+              <a:ext uri="{FF2B5EF4-FFF2-40B4-BE49-F238E27FC236}">
+                <a16:creationId xmlns:a16="http://schemas.microsoft.com/office/drawing/2014/main" id="{04432786-CF4E-46EA-97BF-C813F4FE64E0}"/>
+              </a:ext>
+            </a:extLst>
+          </p:cNvPr>
+          <p:cNvSpPr>
+            <a:spLocks xmlns:a="http://schemas.openxmlformats.org/drawingml/2006/main" noGrp="1"/>
+          </p:cNvSpPr>
+          <p:nvPr/>
+        </p:nvSpPr>
+        <p:spPr>
+          <a:xfrm xmlns:a="http://schemas.openxmlformats.org/drawingml/2006/main">
+            <a:off x="1047750" y="4667250"/>
+            <a:ext cx="3733800" cy="304800"/>
+          </a:xfrm>
+          <a:prstGeom xmlns:a="http://schemas.openxmlformats.org/drawingml/2006/main" prst="rect">
+            <a:avLst/>
+          </a:prstGeom>
+        </p:spPr>
+        <p:txBody>
+          <a:bodyPr xmlns:a="http://schemas.openxmlformats.org/drawingml/2006/main" lIns="0" tIns="0" rIns="0" bIns="0"/>
+          <a:lstStyle xmlns:a="http://schemas.openxmlformats.org/drawingml/2006/main"/>
+          <a:p xmlns:a="http://schemas.openxmlformats.org/drawingml/2006/main">
+            <a:pPr>
+              <a:lnSpc>
+                <a:spcPct val="100000"/>
+              </a:lnSpc>
+              <a:buNone/>
+              <a:defRPr sz="1950" b="1" i="0">
+                <a:solidFill>
+                  <a:srgbClr val="2563EB"/>
+                </a:solidFill>
+              </a:defRPr>
+            </a:pPr>
+            <a:r>
+              <a:rPr sz="1950" b="1" i="0">
+                <a:solidFill>
+                  <a:srgbClr val="2563EB"/>
+                </a:solidFill>
+              </a:rPr>
+              <a:t>Schema constraint?</a:t>
+            </a:r>
+          </a:p>
+        </p:txBody>
+      </p:sp>
+      <p:sp>
+        <p:nvSpPr>
           <p:cNvPr id="9" name="">
             <a:extLst xmlns:a="http://schemas.openxmlformats.org/drawingml/2006/main">
               <a:ext uri="{FF2B5EF4-FFF2-40B4-BE49-F238E27FC236}">
-                <a16:creationId xmlns:a16="http://schemas.microsoft.com/office/drawing/2014/main" id="{53C81F05-B897-42B4-AE89-3F8C0A3B304B}"/>
-              </a:ext>
-            </a:extLst>
-          </p:cNvPr>
-          <p:cNvSpPr>
-            <a:spLocks xmlns:a="http://schemas.openxmlformats.org/drawingml/2006/main" noGrp="1"/>
-          </p:cNvSpPr>
-          <p:nvPr/>
-        </p:nvSpPr>
-        <p:spPr>
-          <a:xfrm xmlns:a="http://schemas.openxmlformats.org/drawingml/2006/main">
-            <a:off x="5086350" y="3962400"/>
-            <a:ext cx="1752600" cy="304800"/>
-          </a:xfrm>
-          <a:prstGeom xmlns:a="http://schemas.openxmlformats.org/drawingml/2006/main" prst="rect">
-            <a:avLst/>
-          </a:prstGeom>
-        </p:spPr>
-        <p:txBody>
-          <a:bodyPr xmlns:a="http://schemas.openxmlformats.org/drawingml/2006/main" lIns="0" tIns="0" rIns="0" bIns="0"/>
-          <a:lstStyle xmlns:a="http://schemas.openxmlformats.org/drawingml/2006/main"/>
-          <a:p xmlns:a="http://schemas.openxmlformats.org/drawingml/2006/main">
-            <a:pPr>
-              <a:lnSpc>
-                <a:spcPct val="100000"/>
-              </a:lnSpc>
-              <a:buNone/>
-              <a:defRPr sz="1875" b="1" i="0">
-                <a:solidFill>
-                  <a:srgbClr val="2563EB"/>
-                </a:solidFill>
-              </a:defRPr>
-            </a:pPr>
-            <a:r>
-              <a:rPr sz="1875" b="1" i="0">
-                <a:solidFill>
-                  <a:srgbClr val="2563EB"/>
-                </a:solidFill>
-              </a:rPr>
-              <a:t>generate</a:t>
-            </a:r>
-          </a:p>
-        </p:txBody>
-      </p:sp>
-      <p:sp>
-        <p:nvSpPr>
-          <p:cNvPr id="10" name="">
-            <a:extLst xmlns:a="http://schemas.openxmlformats.org/drawingml/2006/main">
-              <a:ext uri="{FF2B5EF4-FFF2-40B4-BE49-F238E27FC236}">
-                <a16:creationId xmlns:a16="http://schemas.microsoft.com/office/drawing/2014/main" id="{51EC1C00-F95D-486B-82E5-DB9DE7300A29}"/>
-              </a:ext>
-            </a:extLst>
-          </p:cNvPr>
-          <p:cNvSpPr>
-            <a:spLocks xmlns:a="http://schemas.openxmlformats.org/drawingml/2006/main" noGrp="1"/>
-          </p:cNvSpPr>
-          <p:nvPr/>
-        </p:nvSpPr>
-        <p:spPr>
-          <a:xfrm xmlns:a="http://schemas.openxmlformats.org/drawingml/2006/main">
-            <a:off x="5429250" y="4648200"/>
-            <a:ext cx="1066800" cy="457200"/>
-          </a:xfrm>
-          <a:prstGeom xmlns:a="http://schemas.openxmlformats.org/drawingml/2006/main" prst="rect">
-            <a:avLst/>
-          </a:prstGeom>
-        </p:spPr>
-        <p:txBody>
-          <a:bodyPr xmlns:a="http://schemas.openxmlformats.org/drawingml/2006/main" lIns="0" tIns="0" rIns="0" bIns="0"/>
-          <a:lstStyle xmlns:a="http://schemas.openxmlformats.org/drawingml/2006/main"/>
-          <a:p xmlns:a="http://schemas.openxmlformats.org/drawingml/2006/main">
-            <a:pPr>
-              <a:lnSpc>
-                <a:spcPct val="110000"/>
-              </a:lnSpc>
-              <a:buNone/>
-              <a:defRPr sz="1350" b="0" i="0">
-                <a:solidFill>
-                  <a:srgbClr val="596579"/>
-                </a:solidFill>
-              </a:defRPr>
-            </a:pPr>
-            <a:r>
-              <a:rPr sz="1350" b="0" i="0">
-                <a:solidFill>
-                  <a:srgbClr val="596579"/>
-                </a:solidFill>
-              </a:rPr>
-              <a:t>routes + tests</a:t>
-            </a:r>
-          </a:p>
-        </p:txBody>
-      </p:sp>
-      <p:sp>
-        <p:nvSpPr>
-          <p:cNvPr id="11" name="">
-            <a:extLst xmlns:a="http://schemas.openxmlformats.org/drawingml/2006/main">
-              <a:ext uri="{FF2B5EF4-FFF2-40B4-BE49-F238E27FC236}">
-                <a16:creationId xmlns:a16="http://schemas.microsoft.com/office/drawing/2014/main" id="{399AD8AF-FBDD-494F-AAFF-B226C23CBA14}"/>
-              </a:ext>
-            </a:extLst>
-          </p:cNvPr>
-          <p:cNvSpPr>
-            <a:spLocks xmlns:a="http://schemas.openxmlformats.org/drawingml/2006/main" noGrp="1"/>
-          </p:cNvSpPr>
-          <p:nvPr/>
-        </p:nvSpPr>
-        <p:spPr>
-          <a:xfrm xmlns:a="http://schemas.openxmlformats.org/drawingml/2006/main">
-            <a:off x="7162800" y="4171950"/>
-            <a:ext cx="590550" cy="419100"/>
-          </a:xfrm>
-          <a:prstGeom xmlns:a="http://schemas.openxmlformats.org/drawingml/2006/main" prst="rect">
-            <a:avLst/>
-          </a:prstGeom>
-        </p:spPr>
-        <p:txBody>
-          <a:bodyPr xmlns:a="http://schemas.openxmlformats.org/drawingml/2006/main" lIns="0" tIns="0" rIns="0" bIns="0"/>
-          <a:lstStyle xmlns:a="http://schemas.openxmlformats.org/drawingml/2006/main"/>
-          <a:p xmlns:a="http://schemas.openxmlformats.org/drawingml/2006/main">
-            <a:pPr>
-              <a:lnSpc>
-                <a:spcPct val="100000"/>
-              </a:lnSpc>
-              <a:buNone/>
-              <a:defRPr sz="2850" b="1" i="0">
-                <a:solidFill>
-                  <a:srgbClr val="596579"/>
-                </a:solidFill>
-              </a:defRPr>
-            </a:pPr>
-            <a:r>
-              <a:rPr sz="2850" b="1" i="0">
-                <a:solidFill>
-                  <a:srgbClr val="596579"/>
-                </a:solidFill>
-              </a:rPr>
-              <a:t>-&gt;</a:t>
-            </a:r>
-          </a:p>
-        </p:txBody>
-      </p:sp>
-      <p:sp>
-        <p:nvSpPr>
-          <p:cNvPr id="12" name="">
-            <a:extLst xmlns:a="http://schemas.openxmlformats.org/drawingml/2006/main">
-              <a:ext uri="{FF2B5EF4-FFF2-40B4-BE49-F238E27FC236}">
-                <a16:creationId xmlns:a16="http://schemas.microsoft.com/office/drawing/2014/main" id="{D8B550FD-5053-452B-B748-92F9A262A541}"/>
-              </a:ext>
-            </a:extLst>
-          </p:cNvPr>
-          <p:cNvSpPr>
-            <a:spLocks xmlns:a="http://schemas.openxmlformats.org/drawingml/2006/main" noGrp="1"/>
-          </p:cNvSpPr>
-          <p:nvPr/>
-        </p:nvSpPr>
-        <p:spPr>
-          <a:xfrm xmlns:a="http://schemas.openxmlformats.org/drawingml/2006/main">
-            <a:off x="7905750" y="3771900"/>
-            <a:ext cx="2095500" cy="895350"/>
+                <a16:creationId xmlns:a16="http://schemas.microsoft.com/office/drawing/2014/main" id="{F8FD392C-FD3A-48E5-9C5E-26EB6DC63E8F}"/>
+              </a:ext>
+            </a:extLst>
+          </p:cNvPr>
+          <p:cNvSpPr>
+            <a:spLocks xmlns:a="http://schemas.openxmlformats.org/drawingml/2006/main" noGrp="1"/>
+          </p:cNvSpPr>
+          <p:nvPr/>
+        </p:nvSpPr>
+        <p:spPr>
+          <a:xfrm xmlns:a="http://schemas.openxmlformats.org/drawingml/2006/main">
+            <a:off x="1047750" y="5048250"/>
+            <a:ext cx="3733800" cy="247650"/>
+          </a:xfrm>
+          <a:prstGeom xmlns:a="http://schemas.openxmlformats.org/drawingml/2006/main" prst="rect">
+            <a:avLst/>
+          </a:prstGeom>
+        </p:spPr>
+        <p:txBody>
+          <a:bodyPr xmlns:a="http://schemas.openxmlformats.org/drawingml/2006/main" lIns="0" tIns="0" rIns="0" bIns="0"/>
+          <a:lstStyle xmlns:a="http://schemas.openxmlformats.org/drawingml/2006/main"/>
+          <a:p xmlns:a="http://schemas.openxmlformats.org/drawingml/2006/main">
+            <a:pPr>
+              <a:lnSpc>
+                <a:spcPct val="108000"/>
+              </a:lnSpc>
+              <a:buNone/>
+              <a:defRPr sz="1425" b="0" i="0">
+                <a:solidFill>
+                  <a:srgbClr val="596579"/>
+                </a:solidFill>
+              </a:defRPr>
+            </a:pPr>
+            <a:r>
+              <a:rPr sz="1425" b="0" i="0">
+                <a:solidFill>
+                  <a:srgbClr val="596579"/>
+                </a:solidFill>
+              </a:rPr>
+              <a:t>Mutate type, enum, min/max, or format.</a:t>
+            </a:r>
+          </a:p>
+        </p:txBody>
+      </p:sp>
+      <p:sp>
+        <p:nvSpPr>
+          <p:cNvPr id="10" name="edge-signal-Security?">
+            <a:extLst xmlns:a="http://schemas.openxmlformats.org/drawingml/2006/main">
+              <a:ext uri="{FF2B5EF4-FFF2-40B4-BE49-F238E27FC236}">
+                <a16:creationId xmlns:a16="http://schemas.microsoft.com/office/drawing/2014/main" id="{7A95A51B-32F0-45A5-80C2-9E2DAD06589C}"/>
+              </a:ext>
+            </a:extLst>
+          </p:cNvPr>
+          <p:cNvSpPr>
+            <a:spLocks xmlns:a="http://schemas.openxmlformats.org/drawingml/2006/main" noGrp="1"/>
+          </p:cNvSpPr>
+          <p:nvPr/>
+        </p:nvSpPr>
+        <p:spPr>
+          <a:xfrm xmlns:a="http://schemas.openxmlformats.org/drawingml/2006/main">
+            <a:off x="819150" y="5742146"/>
+            <a:ext cx="4191000" cy="1219200"/>
           </a:xfrm>
           <a:prstGeom xmlns:a="http://schemas.openxmlformats.org/drawingml/2006/main" prst="roundRect">
             <a:avLst>
-              <a:gd name="adj" fmla="val 25532"/>
+              <a:gd name="adj" fmla="val 18750"/>
             </a:avLst>
           </a:prstGeom>
           <a:solidFill xmlns:a="http://schemas.openxmlformats.org/drawingml/2006/main">
@@ -2738,22 +2728,22 @@
       </p:sp>
       <p:sp>
         <p:nvSpPr>
-          <p:cNvPr id="13" name="">
-            <a:extLst xmlns:a="http://schemas.openxmlformats.org/drawingml/2006/main">
-              <a:ext uri="{FF2B5EF4-FFF2-40B4-BE49-F238E27FC236}">
-                <a16:creationId xmlns:a16="http://schemas.microsoft.com/office/drawing/2014/main" id="{FA14F1D7-8E76-4796-8330-5DA187912BA8}"/>
-              </a:ext>
-            </a:extLst>
-          </p:cNvPr>
-          <p:cNvSpPr>
-            <a:spLocks xmlns:a="http://schemas.openxmlformats.org/drawingml/2006/main" noGrp="1"/>
-          </p:cNvSpPr>
-          <p:nvPr/>
-        </p:nvSpPr>
-        <p:spPr>
-          <a:xfrm xmlns:a="http://schemas.openxmlformats.org/drawingml/2006/main">
-            <a:off x="8077200" y="4076700"/>
-            <a:ext cx="1752600" cy="304800"/>
+          <p:cNvPr id="11" name="">
+            <a:extLst xmlns:a="http://schemas.openxmlformats.org/drawingml/2006/main">
+              <a:ext uri="{FF2B5EF4-FFF2-40B4-BE49-F238E27FC236}">
+                <a16:creationId xmlns:a16="http://schemas.microsoft.com/office/drawing/2014/main" id="{C6F1157F-EEBA-4321-96BD-4D6F5DEFD3E7}"/>
+              </a:ext>
+            </a:extLst>
+          </p:cNvPr>
+          <p:cNvSpPr>
+            <a:spLocks xmlns:a="http://schemas.openxmlformats.org/drawingml/2006/main" noGrp="1"/>
+          </p:cNvSpPr>
+          <p:nvPr/>
+        </p:nvSpPr>
+        <p:spPr>
+          <a:xfrm xmlns:a="http://schemas.openxmlformats.org/drawingml/2006/main">
+            <a:off x="1047750" y="6038850"/>
+            <a:ext cx="3733800" cy="304800"/>
           </a:xfrm>
           <a:prstGeom xmlns:a="http://schemas.openxmlformats.org/drawingml/2006/main" prst="rect">
             <a:avLst/>
@@ -2768,143 +2758,94 @@
                 <a:spcPct val="100000"/>
               </a:lnSpc>
               <a:buNone/>
-              <a:defRPr sz="1875" b="1" i="0">
+              <a:defRPr sz="1950" b="1" i="0">
                 <a:solidFill>
                   <a:srgbClr val="F97316"/>
                 </a:solidFill>
               </a:defRPr>
             </a:pPr>
             <a:r>
-              <a:rPr sz="1875" b="1" i="0">
+              <a:rPr sz="1950" b="1" i="0">
                 <a:solidFill>
                   <a:srgbClr val="F97316"/>
                 </a:solidFill>
               </a:rPr>
-              <a:t>webServer</a:t>
-            </a:r>
-          </a:p>
-        </p:txBody>
-      </p:sp>
-      <p:sp>
-        <p:nvSpPr>
-          <p:cNvPr id="14" name="">
-            <a:extLst xmlns:a="http://schemas.openxmlformats.org/drawingml/2006/main">
-              <a:ext uri="{FF2B5EF4-FFF2-40B4-BE49-F238E27FC236}">
-                <a16:creationId xmlns:a16="http://schemas.microsoft.com/office/drawing/2014/main" id="{E2C0C694-6DBA-4A1C-A774-B59A12E99ECA}"/>
-              </a:ext>
-            </a:extLst>
-          </p:cNvPr>
-          <p:cNvSpPr>
-            <a:spLocks xmlns:a="http://schemas.openxmlformats.org/drawingml/2006/main" noGrp="1"/>
-          </p:cNvSpPr>
-          <p:nvPr/>
-        </p:nvSpPr>
-        <p:spPr>
-          <a:xfrm xmlns:a="http://schemas.openxmlformats.org/drawingml/2006/main">
-            <a:off x="8401050" y="4762500"/>
-            <a:ext cx="1104900" cy="228600"/>
-          </a:xfrm>
-          <a:prstGeom xmlns:a="http://schemas.openxmlformats.org/drawingml/2006/main" prst="rect">
-            <a:avLst/>
-          </a:prstGeom>
-        </p:spPr>
-        <p:txBody>
-          <a:bodyPr xmlns:a="http://schemas.openxmlformats.org/drawingml/2006/main" lIns="0" tIns="0" rIns="0" bIns="0"/>
-          <a:lstStyle xmlns:a="http://schemas.openxmlformats.org/drawingml/2006/main"/>
-          <a:p xmlns:a="http://schemas.openxmlformats.org/drawingml/2006/main">
-            <a:pPr>
-              <a:lnSpc>
-                <a:spcPct val="110000"/>
-              </a:lnSpc>
-              <a:buNone/>
-              <a:defRPr sz="1350" b="0" i="0">
-                <a:solidFill>
-                  <a:srgbClr val="596579"/>
-                </a:solidFill>
-              </a:defRPr>
-            </a:pPr>
-            <a:r>
-              <a:rPr sz="1350" b="0" i="0">
-                <a:solidFill>
-                  <a:srgbClr val="596579"/>
-                </a:solidFill>
-              </a:rPr>
-              <a:t>starts Express</a:t>
-            </a:r>
-          </a:p>
-        </p:txBody>
-      </p:sp>
-      <p:sp>
-        <p:nvSpPr>
-          <p:cNvPr id="15" name="">
-            <a:extLst xmlns:a="http://schemas.openxmlformats.org/drawingml/2006/main">
-              <a:ext uri="{FF2B5EF4-FFF2-40B4-BE49-F238E27FC236}">
-                <a16:creationId xmlns:a16="http://schemas.microsoft.com/office/drawing/2014/main" id="{3A9AC18C-1091-448B-A3AC-5E904D94130E}"/>
-              </a:ext>
-            </a:extLst>
-          </p:cNvPr>
-          <p:cNvSpPr>
-            <a:spLocks xmlns:a="http://schemas.openxmlformats.org/drawingml/2006/main" noGrp="1"/>
-          </p:cNvSpPr>
-          <p:nvPr/>
-        </p:nvSpPr>
-        <p:spPr>
-          <a:xfrm xmlns:a="http://schemas.openxmlformats.org/drawingml/2006/main">
-            <a:off x="10153650" y="4171950"/>
-            <a:ext cx="590550" cy="419100"/>
-          </a:xfrm>
-          <a:prstGeom xmlns:a="http://schemas.openxmlformats.org/drawingml/2006/main" prst="rect">
-            <a:avLst/>
-          </a:prstGeom>
-        </p:spPr>
-        <p:txBody>
-          <a:bodyPr xmlns:a="http://schemas.openxmlformats.org/drawingml/2006/main" lIns="0" tIns="0" rIns="0" bIns="0"/>
-          <a:lstStyle xmlns:a="http://schemas.openxmlformats.org/drawingml/2006/main"/>
-          <a:p xmlns:a="http://schemas.openxmlformats.org/drawingml/2006/main">
-            <a:pPr>
-              <a:lnSpc>
-                <a:spcPct val="100000"/>
-              </a:lnSpc>
-              <a:buNone/>
-              <a:defRPr sz="2850" b="1" i="0">
-                <a:solidFill>
-                  <a:srgbClr val="596579"/>
-                </a:solidFill>
-              </a:defRPr>
-            </a:pPr>
-            <a:r>
-              <a:rPr sz="2850" b="1" i="0">
-                <a:solidFill>
-                  <a:srgbClr val="596579"/>
-                </a:solidFill>
-              </a:rPr>
-              <a:t>-&gt;</a:t>
-            </a:r>
-          </a:p>
-        </p:txBody>
-      </p:sp>
-      <p:sp>
-        <p:nvSpPr>
-          <p:cNvPr id="16" name="">
-            <a:extLst xmlns:a="http://schemas.openxmlformats.org/drawingml/2006/main">
-              <a:ext uri="{FF2B5EF4-FFF2-40B4-BE49-F238E27FC236}">
-                <a16:creationId xmlns:a16="http://schemas.microsoft.com/office/drawing/2014/main" id="{E9935AD2-5935-4A8B-8FAB-7FEE7780C2AF}"/>
-              </a:ext>
-            </a:extLst>
-          </p:cNvPr>
-          <p:cNvSpPr>
-            <a:spLocks xmlns:a="http://schemas.openxmlformats.org/drawingml/2006/main" noGrp="1"/>
-          </p:cNvSpPr>
-          <p:nvPr/>
-        </p:nvSpPr>
-        <p:spPr>
-          <a:xfrm xmlns:a="http://schemas.openxmlformats.org/drawingml/2006/main">
-            <a:off x="10896600" y="3657600"/>
-            <a:ext cx="2286000" cy="895350"/>
+              <a:t>Security?</a:t>
+            </a:r>
+          </a:p>
+        </p:txBody>
+      </p:sp>
+      <p:sp>
+        <p:nvSpPr>
+          <p:cNvPr id="12" name="">
+            <a:extLst xmlns:a="http://schemas.openxmlformats.org/drawingml/2006/main">
+              <a:ext uri="{FF2B5EF4-FFF2-40B4-BE49-F238E27FC236}">
+                <a16:creationId xmlns:a16="http://schemas.microsoft.com/office/drawing/2014/main" id="{35E57673-A5BE-4BC6-AD53-F81E07D60B1B}"/>
+              </a:ext>
+            </a:extLst>
+          </p:cNvPr>
+          <p:cNvSpPr>
+            <a:spLocks xmlns:a="http://schemas.openxmlformats.org/drawingml/2006/main" noGrp="1"/>
+          </p:cNvSpPr>
+          <p:nvPr/>
+        </p:nvSpPr>
+        <p:spPr>
+          <a:xfrm xmlns:a="http://schemas.openxmlformats.org/drawingml/2006/main">
+            <a:off x="1047750" y="6419850"/>
+            <a:ext cx="3733800" cy="247650"/>
+          </a:xfrm>
+          <a:prstGeom xmlns:a="http://schemas.openxmlformats.org/drawingml/2006/main" prst="rect">
+            <a:avLst/>
+          </a:prstGeom>
+        </p:spPr>
+        <p:txBody>
+          <a:bodyPr xmlns:a="http://schemas.openxmlformats.org/drawingml/2006/main" lIns="0" tIns="0" rIns="0" bIns="0"/>
+          <a:lstStyle xmlns:a="http://schemas.openxmlformats.org/drawingml/2006/main"/>
+          <a:p xmlns:a="http://schemas.openxmlformats.org/drawingml/2006/main">
+            <a:pPr>
+              <a:lnSpc>
+                <a:spcPct val="108000"/>
+              </a:lnSpc>
+              <a:buNone/>
+              <a:defRPr sz="1425" b="0" i="0">
+                <a:solidFill>
+                  <a:srgbClr val="596579"/>
+                </a:solidFill>
+              </a:defRPr>
+            </a:pPr>
+            <a:r>
+              <a:rPr sz="1425" b="0" i="0">
+                <a:solidFill>
+                  <a:srgbClr val="596579"/>
+                </a:solidFill>
+              </a:rPr>
+              <a:t>Send request without auth.</a:t>
+            </a:r>
+          </a:p>
+        </p:txBody>
+      </p:sp>
+      <p:sp>
+        <p:nvSpPr>
+          <p:cNvPr id="13" name="edge-signal-No route?">
+            <a:extLst xmlns:a="http://schemas.openxmlformats.org/drawingml/2006/main">
+              <a:ext uri="{FF2B5EF4-FFF2-40B4-BE49-F238E27FC236}">
+                <a16:creationId xmlns:a16="http://schemas.microsoft.com/office/drawing/2014/main" id="{9CA990D5-C7CF-42E8-9539-E6F4DD7E99B0}"/>
+              </a:ext>
+            </a:extLst>
+          </p:cNvPr>
+          <p:cNvSpPr>
+            <a:spLocks xmlns:a="http://schemas.openxmlformats.org/drawingml/2006/main" noGrp="1"/>
+          </p:cNvSpPr>
+          <p:nvPr/>
+        </p:nvSpPr>
+        <p:spPr>
+          <a:xfrm xmlns:a="http://schemas.openxmlformats.org/drawingml/2006/main">
+            <a:off x="819150" y="7113746"/>
+            <a:ext cx="4191000" cy="1219200"/>
           </a:xfrm>
           <a:prstGeom xmlns:a="http://schemas.openxmlformats.org/drawingml/2006/main" prst="roundRect">
             <a:avLst>
-              <a:gd name="adj" fmla="val 25532"/>
+              <a:gd name="adj" fmla="val 18750"/>
             </a:avLst>
           </a:prstGeom>
           <a:solidFill xmlns:a="http://schemas.openxmlformats.org/drawingml/2006/main">
@@ -2914,22 +2855,22 @@
       </p:sp>
       <p:sp>
         <p:nvSpPr>
-          <p:cNvPr id="17" name="">
-            <a:extLst xmlns:a="http://schemas.openxmlformats.org/drawingml/2006/main">
-              <a:ext uri="{FF2B5EF4-FFF2-40B4-BE49-F238E27FC236}">
-                <a16:creationId xmlns:a16="http://schemas.microsoft.com/office/drawing/2014/main" id="{CFF1BEF2-F1EF-4357-8491-2201BACE2AD4}"/>
-              </a:ext>
-            </a:extLst>
-          </p:cNvPr>
-          <p:cNvSpPr>
-            <a:spLocks xmlns:a="http://schemas.openxmlformats.org/drawingml/2006/main" noGrp="1"/>
-          </p:cNvSpPr>
-          <p:nvPr/>
-        </p:nvSpPr>
-        <p:spPr>
-          <a:xfrm xmlns:a="http://schemas.openxmlformats.org/drawingml/2006/main">
-            <a:off x="11068050" y="3962400"/>
-            <a:ext cx="1943100" cy="304800"/>
+          <p:cNvPr id="14" name="">
+            <a:extLst xmlns:a="http://schemas.openxmlformats.org/drawingml/2006/main">
+              <a:ext uri="{FF2B5EF4-FFF2-40B4-BE49-F238E27FC236}">
+                <a16:creationId xmlns:a16="http://schemas.microsoft.com/office/drawing/2014/main" id="{8EE157CB-E5F2-47AD-AD54-A5140AEA7779}"/>
+              </a:ext>
+            </a:extLst>
+          </p:cNvPr>
+          <p:cNvSpPr>
+            <a:spLocks xmlns:a="http://schemas.openxmlformats.org/drawingml/2006/main" noGrp="1"/>
+          </p:cNvSpPr>
+          <p:nvPr/>
+        </p:nvSpPr>
+        <p:spPr>
+          <a:xfrm xmlns:a="http://schemas.openxmlformats.org/drawingml/2006/main">
+            <a:off x="1047750" y="7410450"/>
+            <a:ext cx="3733800" cy="304800"/>
           </a:xfrm>
           <a:prstGeom xmlns:a="http://schemas.openxmlformats.org/drawingml/2006/main" prst="rect">
             <a:avLst/>
@@ -2944,270 +2885,94 @@
                 <a:spcPct val="100000"/>
               </a:lnSpc>
               <a:buNone/>
-              <a:defRPr sz="1875" b="1" i="0">
+              <a:defRPr sz="1950" b="1" i="0">
                 <a:solidFill>
                   <a:srgbClr val="2F7D32"/>
                 </a:solidFill>
               </a:defRPr>
             </a:pPr>
             <a:r>
-              <a:rPr sz="1875" b="1" i="0">
+              <a:rPr sz="1950" b="1" i="0">
                 <a:solidFill>
                   <a:srgbClr val="2F7D32"/>
                 </a:solidFill>
               </a:rPr>
-              <a:t>request fixture</a:t>
-            </a:r>
-          </a:p>
-        </p:txBody>
-      </p:sp>
-      <p:sp>
-        <p:nvSpPr>
-          <p:cNvPr id="18" name="">
-            <a:extLst xmlns:a="http://schemas.openxmlformats.org/drawingml/2006/main">
-              <a:ext uri="{FF2B5EF4-FFF2-40B4-BE49-F238E27FC236}">
-                <a16:creationId xmlns:a16="http://schemas.microsoft.com/office/drawing/2014/main" id="{3A0AABBA-97E5-4BC4-A367-B7ABE5ED15B3}"/>
-              </a:ext>
-            </a:extLst>
-          </p:cNvPr>
-          <p:cNvSpPr>
-            <a:spLocks xmlns:a="http://schemas.openxmlformats.org/drawingml/2006/main" noGrp="1"/>
-          </p:cNvSpPr>
-          <p:nvPr/>
-        </p:nvSpPr>
-        <p:spPr>
-          <a:xfrm xmlns:a="http://schemas.openxmlformats.org/drawingml/2006/main">
-            <a:off x="11563350" y="4648200"/>
-            <a:ext cx="952500" cy="457200"/>
-          </a:xfrm>
-          <a:prstGeom xmlns:a="http://schemas.openxmlformats.org/drawingml/2006/main" prst="rect">
-            <a:avLst/>
-          </a:prstGeom>
-        </p:spPr>
-        <p:txBody>
-          <a:bodyPr xmlns:a="http://schemas.openxmlformats.org/drawingml/2006/main" lIns="0" tIns="0" rIns="0" bIns="0"/>
-          <a:lstStyle xmlns:a="http://schemas.openxmlformats.org/drawingml/2006/main"/>
-          <a:p xmlns:a="http://schemas.openxmlformats.org/drawingml/2006/main">
-            <a:pPr>
-              <a:lnSpc>
-                <a:spcPct val="110000"/>
-              </a:lnSpc>
-              <a:buNone/>
-              <a:defRPr sz="1350" b="0" i="0">
-                <a:solidFill>
-                  <a:srgbClr val="596579"/>
-                </a:solidFill>
-              </a:defRPr>
-            </a:pPr>
-            <a:r>
-              <a:rPr sz="1350" b="0" i="0">
-                <a:solidFill>
-                  <a:srgbClr val="596579"/>
-                </a:solidFill>
-              </a:rPr>
-              <a:t>calls the API</a:t>
-            </a:r>
-          </a:p>
-        </p:txBody>
-      </p:sp>
-      <p:sp>
-        <p:nvSpPr>
-          <p:cNvPr id="19" name="">
-            <a:extLst xmlns:a="http://schemas.openxmlformats.org/drawingml/2006/main">
-              <a:ext uri="{FF2B5EF4-FFF2-40B4-BE49-F238E27FC236}">
-                <a16:creationId xmlns:a16="http://schemas.microsoft.com/office/drawing/2014/main" id="{C36F8CE3-2681-4A58-AF97-BC4F40F38C03}"/>
-              </a:ext>
-            </a:extLst>
-          </p:cNvPr>
-          <p:cNvSpPr>
-            <a:spLocks xmlns:a="http://schemas.openxmlformats.org/drawingml/2006/main" noGrp="1"/>
-          </p:cNvSpPr>
-          <p:nvPr/>
-        </p:nvSpPr>
-        <p:spPr>
-          <a:xfrm xmlns:a="http://schemas.openxmlformats.org/drawingml/2006/main">
-            <a:off x="13335000" y="4171950"/>
-            <a:ext cx="590550" cy="419100"/>
-          </a:xfrm>
-          <a:prstGeom xmlns:a="http://schemas.openxmlformats.org/drawingml/2006/main" prst="rect">
-            <a:avLst/>
-          </a:prstGeom>
-        </p:spPr>
-        <p:txBody>
-          <a:bodyPr xmlns:a="http://schemas.openxmlformats.org/drawingml/2006/main" lIns="0" tIns="0" rIns="0" bIns="0"/>
-          <a:lstStyle xmlns:a="http://schemas.openxmlformats.org/drawingml/2006/main"/>
-          <a:p xmlns:a="http://schemas.openxmlformats.org/drawingml/2006/main">
-            <a:pPr>
-              <a:lnSpc>
-                <a:spcPct val="100000"/>
-              </a:lnSpc>
-              <a:buNone/>
-              <a:defRPr sz="2850" b="1" i="0">
-                <a:solidFill>
-                  <a:srgbClr val="596579"/>
-                </a:solidFill>
-              </a:defRPr>
-            </a:pPr>
-            <a:r>
-              <a:rPr sz="2850" b="1" i="0">
-                <a:solidFill>
-                  <a:srgbClr val="596579"/>
-                </a:solidFill>
-              </a:rPr>
-              <a:t>-&gt;</a:t>
-            </a:r>
-          </a:p>
-        </p:txBody>
-      </p:sp>
-      <p:sp>
-        <p:nvSpPr>
-          <p:cNvPr id="20" name="">
-            <a:extLst xmlns:a="http://schemas.openxmlformats.org/drawingml/2006/main">
-              <a:ext uri="{FF2B5EF4-FFF2-40B4-BE49-F238E27FC236}">
-                <a16:creationId xmlns:a16="http://schemas.microsoft.com/office/drawing/2014/main" id="{3EDAB6B0-B9DF-4DE5-9B95-A519FA3F239A}"/>
-              </a:ext>
-            </a:extLst>
-          </p:cNvPr>
-          <p:cNvSpPr>
-            <a:spLocks xmlns:a="http://schemas.openxmlformats.org/drawingml/2006/main" noGrp="1"/>
-          </p:cNvSpPr>
-          <p:nvPr/>
-        </p:nvSpPr>
-        <p:spPr>
-          <a:xfrm xmlns:a="http://schemas.openxmlformats.org/drawingml/2006/main">
-            <a:off x="14077950" y="3657600"/>
-            <a:ext cx="2286000" cy="895350"/>
+              <a:t>No route?</a:t>
+            </a:r>
+          </a:p>
+        </p:txBody>
+      </p:sp>
+      <p:sp>
+        <p:nvSpPr>
+          <p:cNvPr id="15" name="">
+            <a:extLst xmlns:a="http://schemas.openxmlformats.org/drawingml/2006/main">
+              <a:ext uri="{FF2B5EF4-FFF2-40B4-BE49-F238E27FC236}">
+                <a16:creationId xmlns:a16="http://schemas.microsoft.com/office/drawing/2014/main" id="{D45AE8AA-EABE-4458-A0ED-73161D79AC54}"/>
+              </a:ext>
+            </a:extLst>
+          </p:cNvPr>
+          <p:cNvSpPr>
+            <a:spLocks xmlns:a="http://schemas.openxmlformats.org/drawingml/2006/main" noGrp="1"/>
+          </p:cNvSpPr>
+          <p:nvPr/>
+        </p:nvSpPr>
+        <p:spPr>
+          <a:xfrm xmlns:a="http://schemas.openxmlformats.org/drawingml/2006/main">
+            <a:off x="1047750" y="7791450"/>
+            <a:ext cx="3733800" cy="247650"/>
+          </a:xfrm>
+          <a:prstGeom xmlns:a="http://schemas.openxmlformats.org/drawingml/2006/main" prst="rect">
+            <a:avLst/>
+          </a:prstGeom>
+        </p:spPr>
+        <p:txBody>
+          <a:bodyPr xmlns:a="http://schemas.openxmlformats.org/drawingml/2006/main" lIns="0" tIns="0" rIns="0" bIns="0"/>
+          <a:lstStyle xmlns:a="http://schemas.openxmlformats.org/drawingml/2006/main"/>
+          <a:p xmlns:a="http://schemas.openxmlformats.org/drawingml/2006/main">
+            <a:pPr>
+              <a:lnSpc>
+                <a:spcPct val="108000"/>
+              </a:lnSpc>
+              <a:buNone/>
+              <a:defRPr sz="1425" b="0" i="0">
+                <a:solidFill>
+                  <a:srgbClr val="596579"/>
+                </a:solidFill>
+              </a:defRPr>
+            </a:pPr>
+            <a:r>
+              <a:rPr sz="1425" b="0" i="0">
+                <a:solidFill>
+                  <a:srgbClr val="596579"/>
+                </a:solidFill>
+              </a:rPr>
+              <a:t>Check undocumented path returns 404.</a:t>
+            </a:r>
+          </a:p>
+        </p:txBody>
+      </p:sp>
+      <p:sp>
+        <p:nvSpPr>
+          <p:cNvPr id="16" name="code-block">
+            <a:extLst xmlns:a="http://schemas.openxmlformats.org/drawingml/2006/main">
+              <a:ext uri="{FF2B5EF4-FFF2-40B4-BE49-F238E27FC236}">
+                <a16:creationId xmlns:a16="http://schemas.microsoft.com/office/drawing/2014/main" id="{9F4D63DD-4448-4A50-9E82-BED82E554E88}"/>
+              </a:ext>
+            </a:extLst>
+          </p:cNvPr>
+          <p:cNvSpPr>
+            <a:spLocks xmlns:a="http://schemas.openxmlformats.org/drawingml/2006/main" noGrp="1"/>
+          </p:cNvSpPr>
+          <p:nvPr/>
+        </p:nvSpPr>
+        <p:spPr>
+          <a:xfrm xmlns:a="http://schemas.openxmlformats.org/drawingml/2006/main">
+            <a:off x="9401175" y="3638645"/>
+            <a:ext cx="8067675" cy="2884932"/>
           </a:xfrm>
           <a:prstGeom xmlns:a="http://schemas.openxmlformats.org/drawingml/2006/main" prst="roundRect">
             <a:avLst>
-              <a:gd name="adj" fmla="val 25532"/>
-            </a:avLst>
-          </a:prstGeom>
-          <a:solidFill xmlns:a="http://schemas.openxmlformats.org/drawingml/2006/main">
-            <a:srgbClr val="FFFFFF"/>
-          </a:solidFill>
-        </p:spPr>
-      </p:sp>
-      <p:sp>
-        <p:nvSpPr>
-          <p:cNvPr id="21" name="">
-            <a:extLst xmlns:a="http://schemas.openxmlformats.org/drawingml/2006/main">
-              <a:ext uri="{FF2B5EF4-FFF2-40B4-BE49-F238E27FC236}">
-                <a16:creationId xmlns:a16="http://schemas.microsoft.com/office/drawing/2014/main" id="{0F3702A3-FBE6-460A-A48B-02F1EF173A89}"/>
-              </a:ext>
-            </a:extLst>
-          </p:cNvPr>
-          <p:cNvSpPr>
-            <a:spLocks xmlns:a="http://schemas.openxmlformats.org/drawingml/2006/main" noGrp="1"/>
-          </p:cNvSpPr>
-          <p:nvPr/>
-        </p:nvSpPr>
-        <p:spPr>
-          <a:xfrm xmlns:a="http://schemas.openxmlformats.org/drawingml/2006/main">
-            <a:off x="14249400" y="3962400"/>
-            <a:ext cx="1943100" cy="304800"/>
-          </a:xfrm>
-          <a:prstGeom xmlns:a="http://schemas.openxmlformats.org/drawingml/2006/main" prst="rect">
-            <a:avLst/>
-          </a:prstGeom>
-        </p:spPr>
-        <p:txBody>
-          <a:bodyPr xmlns:a="http://schemas.openxmlformats.org/drawingml/2006/main" lIns="0" tIns="0" rIns="0" bIns="0"/>
-          <a:lstStyle xmlns:a="http://schemas.openxmlformats.org/drawingml/2006/main"/>
-          <a:p xmlns:a="http://schemas.openxmlformats.org/drawingml/2006/main">
-            <a:pPr>
-              <a:lnSpc>
-                <a:spcPct val="100000"/>
-              </a:lnSpc>
-              <a:buNone/>
-              <a:defRPr sz="1875" b="1" i="0">
-                <a:solidFill>
-                  <a:srgbClr val="65B32E"/>
-                </a:solidFill>
-              </a:defRPr>
-            </a:pPr>
-            <a:r>
-              <a:rPr sz="1875" b="1" i="0">
-                <a:solidFill>
-                  <a:srgbClr val="65B32E"/>
-                </a:solidFill>
-              </a:rPr>
-              <a:t>assertions pass</a:t>
-            </a:r>
-          </a:p>
-        </p:txBody>
-      </p:sp>
-      <p:sp>
-        <p:nvSpPr>
-          <p:cNvPr id="22" name="">
-            <a:extLst xmlns:a="http://schemas.openxmlformats.org/drawingml/2006/main">
-              <a:ext uri="{FF2B5EF4-FFF2-40B4-BE49-F238E27FC236}">
-                <a16:creationId xmlns:a16="http://schemas.microsoft.com/office/drawing/2014/main" id="{7BCD7716-0139-4711-A09D-A1A0A78B04B9}"/>
-              </a:ext>
-            </a:extLst>
-          </p:cNvPr>
-          <p:cNvSpPr>
-            <a:spLocks xmlns:a="http://schemas.openxmlformats.org/drawingml/2006/main" noGrp="1"/>
-          </p:cNvSpPr>
-          <p:nvPr/>
-        </p:nvSpPr>
-        <p:spPr>
-          <a:xfrm xmlns:a="http://schemas.openxmlformats.org/drawingml/2006/main">
-            <a:off x="14668500" y="4648200"/>
-            <a:ext cx="1104900" cy="457200"/>
-          </a:xfrm>
-          <a:prstGeom xmlns:a="http://schemas.openxmlformats.org/drawingml/2006/main" prst="rect">
-            <a:avLst/>
-          </a:prstGeom>
-        </p:spPr>
-        <p:txBody>
-          <a:bodyPr xmlns:a="http://schemas.openxmlformats.org/drawingml/2006/main" lIns="0" tIns="0" rIns="0" bIns="0"/>
-          <a:lstStyle xmlns:a="http://schemas.openxmlformats.org/drawingml/2006/main"/>
-          <a:p xmlns:a="http://schemas.openxmlformats.org/drawingml/2006/main">
-            <a:pPr>
-              <a:lnSpc>
-                <a:spcPct val="110000"/>
-              </a:lnSpc>
-              <a:buNone/>
-              <a:defRPr sz="1350" b="0" i="0">
-                <a:solidFill>
-                  <a:srgbClr val="596579"/>
-                </a:solidFill>
-              </a:defRPr>
-            </a:pPr>
-            <a:r>
-              <a:rPr sz="1350" b="0" i="0">
-                <a:solidFill>
-                  <a:srgbClr val="596579"/>
-                </a:solidFill>
-              </a:rPr>
-              <a:t>contract holds</a:t>
-            </a:r>
-          </a:p>
-        </p:txBody>
-      </p:sp>
-      <p:sp>
-        <p:nvSpPr>
-          <p:cNvPr id="23" name="code-block">
-            <a:extLst xmlns:a="http://schemas.openxmlformats.org/drawingml/2006/main">
-              <a:ext uri="{FF2B5EF4-FFF2-40B4-BE49-F238E27FC236}">
-                <a16:creationId xmlns:a16="http://schemas.microsoft.com/office/drawing/2014/main" id="{52307D06-98B7-4CF8-A242-756C0E59D5A3}"/>
-              </a:ext>
-            </a:extLst>
-          </p:cNvPr>
-          <p:cNvSpPr>
-            <a:spLocks xmlns:a="http://schemas.openxmlformats.org/drawingml/2006/main" noGrp="1"/>
-          </p:cNvSpPr>
-          <p:nvPr/>
-        </p:nvSpPr>
-        <p:spPr>
-          <a:xfrm xmlns:a="http://schemas.openxmlformats.org/drawingml/2006/main">
-            <a:off x="819150" y="7126605"/>
-            <a:ext cx="16649700" cy="2143125"/>
-          </a:xfrm>
-          <a:prstGeom xmlns:a="http://schemas.openxmlformats.org/drawingml/2006/main" prst="roundRect">
-            <a:avLst>
-              <a:gd name="adj" fmla="val 8889"/>
+              <a:gd name="adj" fmla="val 6603"/>
             </a:avLst>
           </a:prstGeom>
           <a:solidFill xmlns:a="http://schemas.openxmlformats.org/drawingml/2006/main">
@@ -3217,22 +2982,22 @@
       </p:sp>
       <p:sp>
         <p:nvSpPr>
-          <p:cNvPr id="24" name="">
-            <a:extLst xmlns:a="http://schemas.openxmlformats.org/drawingml/2006/main">
-              <a:ext uri="{FF2B5EF4-FFF2-40B4-BE49-F238E27FC236}">
-                <a16:creationId xmlns:a16="http://schemas.microsoft.com/office/drawing/2014/main" id="{1531F053-E29C-4A1C-BE7D-ADB77DF9ACD9}"/>
-              </a:ext>
-            </a:extLst>
-          </p:cNvPr>
-          <p:cNvSpPr>
-            <a:spLocks xmlns:a="http://schemas.openxmlformats.org/drawingml/2006/main" noGrp="1"/>
-          </p:cNvSpPr>
-          <p:nvPr/>
-        </p:nvSpPr>
-        <p:spPr>
-          <a:xfrm xmlns:a="http://schemas.openxmlformats.org/drawingml/2006/main">
-            <a:off x="1085850" y="7353300"/>
-            <a:ext cx="16116300" cy="1695450"/>
+          <p:cNvPr id="17" name="">
+            <a:extLst xmlns:a="http://schemas.openxmlformats.org/drawingml/2006/main">
+              <a:ext uri="{FF2B5EF4-FFF2-40B4-BE49-F238E27FC236}">
+                <a16:creationId xmlns:a16="http://schemas.microsoft.com/office/drawing/2014/main" id="{78051490-6B16-47EA-8BCA-60C0F469D8AB}"/>
+              </a:ext>
+            </a:extLst>
+          </p:cNvPr>
+          <p:cNvSpPr>
+            <a:spLocks xmlns:a="http://schemas.openxmlformats.org/drawingml/2006/main" noGrp="1"/>
+          </p:cNvSpPr>
+          <p:nvPr/>
+        </p:nvSpPr>
+        <p:spPr>
+          <a:xfrm xmlns:a="http://schemas.openxmlformats.org/drawingml/2006/main">
+            <a:off x="9677400" y="3867150"/>
+            <a:ext cx="7543800" cy="2438400"/>
           </a:xfrm>
           <a:prstGeom xmlns:a="http://schemas.openxmlformats.org/drawingml/2006/main" prst="rect">
             <a:avLst/>
@@ -3247,113 +3012,230 @@
                 <a:spcPct val="118000"/>
               </a:lnSpc>
               <a:buNone/>
+              <a:defRPr sz="1500" b="0" i="0">
+                <a:solidFill>
+                  <a:srgbClr val="D1E7FF"/>
+                </a:solidFill>
+              </a:defRPr>
+            </a:pPr>
+            <a:r>
+              <a:rPr sz="1500" b="0" i="0">
+                <a:solidFill>
+                  <a:srgbClr val="D1E7FF"/>
+                </a:solidFill>
+              </a:rPr>
+              <a:t>npm run generate:edge-tests</a:t>
+            </a:r>
+          </a:p>
+          <a:p xmlns:a="http://schemas.openxmlformats.org/drawingml/2006/main">
+            <a:pPr>
+              <a:lnSpc>
+                <a:spcPct val="118000"/>
+              </a:lnSpc>
+              <a:buNone/>
+              <a:defRPr sz="1500" b="0" i="0">
+                <a:solidFill>
+                  <a:srgbClr val="D1E7FF"/>
+                </a:solidFill>
+              </a:defRPr>
+            </a:pPr>
+            <a:r>
+              <a:rPr sz="1500" b="0" i="0">
+                <a:solidFill>
+                  <a:srgbClr val="D1E7FF"/>
+                </a:solidFill>
+              </a:rPr>
+              <a:t>npm run test:edge</a:t>
+            </a:r>
+          </a:p>
+          <a:p xmlns:a="http://schemas.openxmlformats.org/drawingml/2006/main">
+            <a:r>
+              <a:t/>
+            </a:r>
+          </a:p>
+          <a:p xmlns:a="http://schemas.openxmlformats.org/drawingml/2006/main">
+            <a:pPr>
+              <a:lnSpc>
+                <a:spcPct val="118000"/>
+              </a:lnSpc>
+              <a:buNone/>
+              <a:defRPr sz="1500" b="0" i="0">
+                <a:solidFill>
+                  <a:srgbClr val="D1E7FF"/>
+                </a:solidFill>
+              </a:defRPr>
+            </a:pPr>
+            <a:r>
+              <a:rPr sz="1500" b="0" i="0">
+                <a:solidFill>
+                  <a:srgbClr val="D1E7FF"/>
+                </a:solidFill>
+              </a:rPr>
+              <a:t>test('rejects missing required query parameter', async ({ request }) =&gt; {</a:t>
+            </a:r>
+          </a:p>
+          <a:p xmlns:a="http://schemas.openxmlformats.org/drawingml/2006/main">
+            <a:pPr>
+              <a:lnSpc>
+                <a:spcPct val="118000"/>
+              </a:lnSpc>
+              <a:buNone/>
+              <a:defRPr sz="1500" b="0" i="0">
+                <a:solidFill>
+                  <a:srgbClr val="D1E7FF"/>
+                </a:solidFill>
+              </a:defRPr>
+            </a:pPr>
+            <a:r>
+              <a:rPr sz="1500" b="0" i="0">
+                <a:solidFill>
+                  <a:srgbClr val="D1E7FF"/>
+                </a:solidFill>
+              </a:rPr>
+              <a:t>  const response = await request.fetch('/users', {</a:t>
+            </a:r>
+          </a:p>
+          <a:p xmlns:a="http://schemas.openxmlformats.org/drawingml/2006/main">
+            <a:pPr>
+              <a:lnSpc>
+                <a:spcPct val="118000"/>
+              </a:lnSpc>
+              <a:buNone/>
+              <a:defRPr sz="1500" b="0" i="0">
+                <a:solidFill>
+                  <a:srgbClr val="D1E7FF"/>
+                </a:solidFill>
+              </a:defRPr>
+            </a:pPr>
+            <a:r>
+              <a:rPr sz="1500" b="0" i="0">
+                <a:solidFill>
+                  <a:srgbClr val="D1E7FF"/>
+                </a:solidFill>
+              </a:rPr>
+              <a:t>    method: 'GET'</a:t>
+            </a:r>
+          </a:p>
+          <a:p xmlns:a="http://schemas.openxmlformats.org/drawingml/2006/main">
+            <a:pPr>
+              <a:lnSpc>
+                <a:spcPct val="118000"/>
+              </a:lnSpc>
+              <a:buNone/>
+              <a:defRPr sz="1500" b="0" i="0">
+                <a:solidFill>
+                  <a:srgbClr val="D1E7FF"/>
+                </a:solidFill>
+              </a:defRPr>
+            </a:pPr>
+            <a:r>
+              <a:rPr sz="1500" b="0" i="0">
+                <a:solidFill>
+                  <a:srgbClr val="D1E7FF"/>
+                </a:solidFill>
+              </a:rPr>
+              <a:t>  })</a:t>
+            </a:r>
+          </a:p>
+          <a:p xmlns:a="http://schemas.openxmlformats.org/drawingml/2006/main">
+            <a:pPr>
+              <a:lnSpc>
+                <a:spcPct val="118000"/>
+              </a:lnSpc>
+              <a:buNone/>
+              <a:defRPr sz="1500" b="0" i="0">
+                <a:solidFill>
+                  <a:srgbClr val="D1E7FF"/>
+                </a:solidFill>
+              </a:defRPr>
+            </a:pPr>
+            <a:r>
+              <a:rPr sz="1500" b="0" i="0">
+                <a:solidFill>
+                  <a:srgbClr val="D1E7FF"/>
+                </a:solidFill>
+              </a:rPr>
+              <a:t>  expect(response.status()).toBe(400)</a:t>
+            </a:r>
+          </a:p>
+          <a:p xmlns:a="http://schemas.openxmlformats.org/drawingml/2006/main">
+            <a:pPr>
+              <a:lnSpc>
+                <a:spcPct val="118000"/>
+              </a:lnSpc>
+              <a:buNone/>
+              <a:defRPr sz="1500" b="0" i="0">
+                <a:solidFill>
+                  <a:srgbClr val="D1E7FF"/>
+                </a:solidFill>
+              </a:defRPr>
+            </a:pPr>
+            <a:r>
+              <a:rPr sz="1500" b="0" i="0">
+                <a:solidFill>
+                  <a:srgbClr val="D1E7FF"/>
+                </a:solidFill>
+              </a:rPr>
+              <a:t>})</a:t>
+            </a:r>
+          </a:p>
+        </p:txBody>
+      </p:sp>
+      <p:sp>
+        <p:nvSpPr>
+          <p:cNvPr id="18" name="">
+            <a:extLst xmlns:a="http://schemas.openxmlformats.org/drawingml/2006/main">
+              <a:ext uri="{FF2B5EF4-FFF2-40B4-BE49-F238E27FC236}">
+                <a16:creationId xmlns:a16="http://schemas.microsoft.com/office/drawing/2014/main" id="{D2C46C3E-D6A1-449C-9985-6130B6FD992D}"/>
+              </a:ext>
+            </a:extLst>
+          </p:cNvPr>
+          <p:cNvSpPr>
+            <a:spLocks xmlns:a="http://schemas.openxmlformats.org/drawingml/2006/main" noGrp="1"/>
+          </p:cNvSpPr>
+          <p:nvPr/>
+        </p:nvSpPr>
+        <p:spPr>
+          <a:xfrm xmlns:a="http://schemas.openxmlformats.org/drawingml/2006/main">
+            <a:off x="9410700" y="6724650"/>
+            <a:ext cx="7105650" cy="971550"/>
+          </a:xfrm>
+          <a:prstGeom xmlns:a="http://schemas.openxmlformats.org/drawingml/2006/main" prst="rect">
+            <a:avLst/>
+          </a:prstGeom>
+        </p:spPr>
+        <p:txBody>
+          <a:bodyPr xmlns:a="http://schemas.openxmlformats.org/drawingml/2006/main" lIns="0" tIns="0" rIns="0" bIns="0"/>
+          <a:lstStyle xmlns:a="http://schemas.openxmlformats.org/drawingml/2006/main"/>
+          <a:p xmlns:a="http://schemas.openxmlformats.org/drawingml/2006/main">
+            <a:pPr>
+              <a:lnSpc>
+                <a:spcPct val="112000"/>
+              </a:lnSpc>
+              <a:buNone/>
               <a:defRPr sz="1875" b="0" i="0">
                 <a:solidFill>
-                  <a:srgbClr val="D1E7FF"/>
+                  <a:srgbClr val="596579"/>
                 </a:solidFill>
               </a:defRPr>
             </a:pPr>
             <a:r>
               <a:rPr sz="1875" b="0" i="0">
                 <a:solidFill>
-                  <a:srgbClr val="D1E7FF"/>
-                </a:solidFill>
-              </a:rPr>
-              <a:t>&gt; npm test</a:t>
-            </a:r>
-          </a:p>
-          <a:p xmlns:a="http://schemas.openxmlformats.org/drawingml/2006/main">
-            <a:pPr>
-              <a:lnSpc>
-                <a:spcPct val="118000"/>
-              </a:lnSpc>
-              <a:buNone/>
-              <a:defRPr sz="1875" b="0" i="0">
-                <a:solidFill>
-                  <a:srgbClr val="D1E7FF"/>
-                </a:solidFill>
-              </a:defRPr>
-            </a:pPr>
-            <a:r>
-              <a:rPr sz="1875" b="0" i="0">
-                <a:solidFill>
-                  <a:srgbClr val="D1E7FF"/>
-                </a:solidFill>
-              </a:rPr>
-              <a:t>Generated 2 API routes</a:t>
-            </a:r>
-          </a:p>
-          <a:p xmlns:a="http://schemas.openxmlformats.org/drawingml/2006/main">
-            <a:pPr>
-              <a:lnSpc>
-                <a:spcPct val="118000"/>
-              </a:lnSpc>
-              <a:buNone/>
-              <a:defRPr sz="1875" b="0" i="0">
-                <a:solidFill>
-                  <a:srgbClr val="D1E7FF"/>
-                </a:solidFill>
-              </a:defRPr>
-            </a:pPr>
-            <a:r>
-              <a:rPr sz="1875" b="0" i="0">
-                <a:solidFill>
-                  <a:srgbClr val="D1E7FF"/>
-                </a:solidFill>
-              </a:rPr>
-              <a:t>Generated 2 Playwright API tests</a:t>
-            </a:r>
-          </a:p>
-          <a:p xmlns:a="http://schemas.openxmlformats.org/drawingml/2006/main">
-            <a:pPr>
-              <a:lnSpc>
-                <a:spcPct val="118000"/>
-              </a:lnSpc>
-              <a:buNone/>
-              <a:defRPr sz="1875" b="0" i="0">
-                <a:solidFill>
-                  <a:srgbClr val="D1E7FF"/>
-                </a:solidFill>
-              </a:defRPr>
-            </a:pPr>
-            <a:r>
-              <a:rPr sz="1875" b="0" i="0">
-                <a:solidFill>
-                  <a:srgbClr val="D1E7FF"/>
-                </a:solidFill>
-              </a:rPr>
-              <a:t>API server listening at http://127.0.0.1:3774</a:t>
-            </a:r>
-          </a:p>
-          <a:p xmlns:a="http://schemas.openxmlformats.org/drawingml/2006/main">
-            <a:pPr>
-              <a:lnSpc>
-                <a:spcPct val="118000"/>
-              </a:lnSpc>
-              <a:buNone/>
-              <a:defRPr sz="1875" b="0" i="0">
-                <a:solidFill>
-                  <a:srgbClr val="D1E7FF"/>
-                </a:solidFill>
-              </a:defRPr>
-            </a:pPr>
-            <a:r>
-              <a:rPr sz="1875" b="0" i="0">
-                <a:solidFill>
-                  <a:srgbClr val="D1E7FF"/>
-                </a:solidFill>
-              </a:rPr>
-              <a:t>2 passed</a:t>
-            </a:r>
-          </a:p>
-        </p:txBody>
-      </p:sp>
-      <p:sp>
-        <p:nvSpPr>
-          <p:cNvPr id="25" name="">
-            <a:extLst xmlns:a="http://schemas.openxmlformats.org/drawingml/2006/main">
-              <a:ext uri="{FF2B5EF4-FFF2-40B4-BE49-F238E27FC236}">
-                <a16:creationId xmlns:a16="http://schemas.microsoft.com/office/drawing/2014/main" id="{61F771BC-955B-44D0-822F-E72C594F0D24}"/>
+                  <a:srgbClr val="596579"/>
+                </a:solidFill>
+              </a:rPr>
+              <a:t>The sample spec produces the universal unknown-route edge test. Specs with required params, request bodies, auth, enums, and constraints produce richer negative tests.</a:t>
+            </a:r>
+          </a:p>
+        </p:txBody>
+      </p:sp>
+      <p:sp>
+        <p:nvSpPr>
+          <p:cNvPr id="19" name="">
+            <a:extLst xmlns:a="http://schemas.openxmlformats.org/drawingml/2006/main">
+              <a:ext uri="{FF2B5EF4-FFF2-40B4-BE49-F238E27FC236}">
+                <a16:creationId xmlns:a16="http://schemas.microsoft.com/office/drawing/2014/main" id="{B517A08E-FF1B-4A43-8583-D1FAAF574806}"/>
               </a:ext>
             </a:extLst>
           </p:cNvPr>
@@ -3392,7 +3274,7 @@
                   <a:srgbClr val="8B7D68"/>
                 </a:solidFill>
               </a:rPr>
-              <a:t>Playwright webServer handles local startup, so learners do not need a second terminal.</a:t>
+              <a:t>Implementation anchor: scripts/generate-edge-tests.ts</a:t>
             </a:r>
           </a:p>
         </p:txBody>
@@ -3400,7 +3282,7 @@
     </p:spTree>
     <p:extLst>
       <p:ext uri="{BB962C8B-B14F-4D97-AF65-F5344CB8AC3E}">
-        <p14:creationId xmlns:p14="http://schemas.microsoft.com/office/powerpoint/2010/main" val="1404112641"/>
+        <p14:creationId xmlns:p14="http://schemas.microsoft.com/office/powerpoint/2010/main" val="2011721715"/>
       </p:ext>
     </p:extLst>
   </p:cSld>
@@ -3424,7 +3306,7 @@
           <p:cNvPr id="1" name="slide-bg">
             <a:extLst xmlns:a="http://schemas.openxmlformats.org/drawingml/2006/main">
               <a:ext uri="{FF2B5EF4-FFF2-40B4-BE49-F238E27FC236}">
-                <a16:creationId xmlns:a16="http://schemas.microsoft.com/office/drawing/2014/main" id="{CE704BB7-F928-428E-AC2E-4977F182EAE8}"/>
+                <a16:creationId xmlns:a16="http://schemas.microsoft.com/office/drawing/2014/main" id="{4C6CB98A-5C91-463A-93CD-FB920D232D53}"/>
               </a:ext>
             </a:extLst>
           </p:cNvPr>
@@ -3451,7 +3333,7 @@
           <p:cNvPr id="2" name="slide-title">
             <a:extLst xmlns:a="http://schemas.openxmlformats.org/drawingml/2006/main">
               <a:ext uri="{FF2B5EF4-FFF2-40B4-BE49-F238E27FC236}">
-                <a16:creationId xmlns:a16="http://schemas.microsoft.com/office/drawing/2014/main" id="{997A0114-CA81-47B0-973E-E7683C32AEA0}"/>
+                <a16:creationId xmlns:a16="http://schemas.microsoft.com/office/drawing/2014/main" id="{4B5DC1FC-96BF-4F74-A454-A876877316C4}"/>
               </a:ext>
             </a:extLst>
           </p:cNvPr>
@@ -3463,7 +3345,7 @@
         <p:spPr>
           <a:xfrm xmlns:a="http://schemas.openxmlformats.org/drawingml/2006/main">
             <a:off x="819150" y="533400"/>
-            <a:ext cx="4876800" cy="628650"/>
+            <a:ext cx="6610350" cy="628650"/>
           </a:xfrm>
           <a:prstGeom xmlns:a="http://schemas.openxmlformats.org/drawingml/2006/main" prst="rect">
             <a:avLst/>
@@ -3490,7 +3372,7 @@
                   <a:srgbClr val="172033"/>
                 </a:solidFill>
               </a:rPr>
-              <a:t>Provided API mode</a:t>
+              <a:t>Run against the demo API</a:t>
             </a:r>
           </a:p>
         </p:txBody>
@@ -3500,7 +3382,7 @@
           <p:cNvPr id="3" name="slide-subtitle">
             <a:extLst xmlns:a="http://schemas.openxmlformats.org/drawingml/2006/main">
               <a:ext uri="{FF2B5EF4-FFF2-40B4-BE49-F238E27FC236}">
-                <a16:creationId xmlns:a16="http://schemas.microsoft.com/office/drawing/2014/main" id="{5B97E8D7-B99F-4FF2-8AD7-F0DFC63B93DA}"/>
+                <a16:creationId xmlns:a16="http://schemas.microsoft.com/office/drawing/2014/main" id="{70405F11-53FE-48E0-A3F1-AE75247BE810}"/>
               </a:ext>
             </a:extLst>
           </p:cNvPr>
@@ -3512,7 +3394,7 @@
         <p:spPr>
           <a:xfrm xmlns:a="http://schemas.openxmlformats.org/drawingml/2006/main">
             <a:off x="819150" y="1314450"/>
-            <a:ext cx="8096250" cy="666750"/>
+            <a:ext cx="5657850" cy="342900"/>
           </a:xfrm>
           <a:prstGeom xmlns:a="http://schemas.openxmlformats.org/drawingml/2006/main" prst="rect">
             <a:avLst/>
@@ -3539,7 +3421,7 @@
                   <a:srgbClr val="596579"/>
                 </a:solidFill>
               </a:rPr>
-              <a:t>`BASE_URL` switches generated tests from demo mode to target-API mode.</a:t>
+              <a:t>`npm test` proves the whole learning loop end to end.</a:t>
             </a:r>
           </a:p>
         </p:txBody>
@@ -3549,72 +3431,854 @@
           <p:cNvPr id="4" name="">
             <a:extLst xmlns:a="http://schemas.openxmlformats.org/drawingml/2006/main">
               <a:ext uri="{FF2B5EF4-FFF2-40B4-BE49-F238E27FC236}">
-                <a16:creationId xmlns:a16="http://schemas.microsoft.com/office/drawing/2014/main" id="{070273D0-8931-4B2B-BE06-8048D977286D}"/>
-              </a:ext>
-            </a:extLst>
-          </p:cNvPr>
-          <p:cNvSpPr>
-            <a:spLocks xmlns:a="http://schemas.openxmlformats.org/drawingml/2006/main" noGrp="1"/>
-          </p:cNvSpPr>
-          <p:nvPr/>
-        </p:nvSpPr>
-        <p:spPr>
-          <a:xfrm xmlns:a="http://schemas.openxmlformats.org/drawingml/2006/main">
-            <a:off x="819150" y="4400550"/>
-            <a:ext cx="8077200" cy="419100"/>
-          </a:xfrm>
-          <a:prstGeom xmlns:a="http://schemas.openxmlformats.org/drawingml/2006/main" prst="rect">
-            <a:avLst/>
-          </a:prstGeom>
-        </p:spPr>
-        <p:txBody>
-          <a:bodyPr xmlns:a="http://schemas.openxmlformats.org/drawingml/2006/main" lIns="0" tIns="0" rIns="0" bIns="0"/>
-          <a:lstStyle xmlns:a="http://schemas.openxmlformats.org/drawingml/2006/main"/>
-          <a:p xmlns:a="http://schemas.openxmlformats.org/drawingml/2006/main">
-            <a:pPr>
-              <a:lnSpc>
-                <a:spcPct val="100000"/>
-              </a:lnSpc>
-              <a:buNone/>
-              <a:defRPr sz="2700" b="1" i="0">
-                <a:solidFill>
-                  <a:srgbClr val="2F7D32"/>
-                </a:solidFill>
-              </a:defRPr>
-            </a:pPr>
-            <a:r>
-              <a:rPr sz="2700" b="1" i="0">
-                <a:solidFill>
-                  <a:srgbClr val="2F7D32"/>
-                </a:solidFill>
-              </a:rPr>
-              <a:t>1. Generate from any spec</a:t>
-            </a:r>
-          </a:p>
-        </p:txBody>
-      </p:sp>
-      <p:sp>
-        <p:nvSpPr>
-          <p:cNvPr id="5" name="code-block">
-            <a:extLst xmlns:a="http://schemas.openxmlformats.org/drawingml/2006/main">
-              <a:ext uri="{FF2B5EF4-FFF2-40B4-BE49-F238E27FC236}">
-                <a16:creationId xmlns:a16="http://schemas.microsoft.com/office/drawing/2014/main" id="{3268E293-5302-4E6F-9AD0-24DADBDC941C}"/>
-              </a:ext>
-            </a:extLst>
-          </p:cNvPr>
-          <p:cNvSpPr>
-            <a:spLocks xmlns:a="http://schemas.openxmlformats.org/drawingml/2006/main" noGrp="1"/>
-          </p:cNvSpPr>
-          <p:nvPr/>
-        </p:nvSpPr>
-        <p:spPr>
-          <a:xfrm xmlns:a="http://schemas.openxmlformats.org/drawingml/2006/main">
-            <a:off x="819150" y="5028248"/>
-            <a:ext cx="8067675" cy="1347368"/>
+                <a16:creationId xmlns:a16="http://schemas.microsoft.com/office/drawing/2014/main" id="{C10C9E8D-7009-42A2-A2AB-37DE0A1FB204}"/>
+              </a:ext>
+            </a:extLst>
+          </p:cNvPr>
+          <p:cNvSpPr>
+            <a:spLocks xmlns:a="http://schemas.openxmlformats.org/drawingml/2006/main" noGrp="1"/>
+          </p:cNvSpPr>
+          <p:nvPr/>
+        </p:nvSpPr>
+        <p:spPr>
+          <a:xfrm xmlns:a="http://schemas.openxmlformats.org/drawingml/2006/main">
+            <a:off x="1924050" y="3486150"/>
+            <a:ext cx="2095500" cy="895350"/>
           </a:xfrm>
           <a:prstGeom xmlns:a="http://schemas.openxmlformats.org/drawingml/2006/main" prst="roundRect">
             <a:avLst>
-              <a:gd name="adj" fmla="val 14139"/>
+              <a:gd name="adj" fmla="val 25532"/>
+            </a:avLst>
+          </a:prstGeom>
+          <a:solidFill xmlns:a="http://schemas.openxmlformats.org/drawingml/2006/main">
+            <a:srgbClr val="FFFFFF"/>
+          </a:solidFill>
+        </p:spPr>
+      </p:sp>
+      <p:sp>
+        <p:nvSpPr>
+          <p:cNvPr id="5" name="">
+            <a:extLst xmlns:a="http://schemas.openxmlformats.org/drawingml/2006/main">
+              <a:ext uri="{FF2B5EF4-FFF2-40B4-BE49-F238E27FC236}">
+                <a16:creationId xmlns:a16="http://schemas.microsoft.com/office/drawing/2014/main" id="{76ED994A-19EF-4400-8047-2AB48C5D41CC}"/>
+              </a:ext>
+            </a:extLst>
+          </p:cNvPr>
+          <p:cNvSpPr>
+            <a:spLocks xmlns:a="http://schemas.openxmlformats.org/drawingml/2006/main" noGrp="1"/>
+          </p:cNvSpPr>
+          <p:nvPr/>
+        </p:nvSpPr>
+        <p:spPr>
+          <a:xfrm xmlns:a="http://schemas.openxmlformats.org/drawingml/2006/main">
+            <a:off x="2095500" y="3790950"/>
+            <a:ext cx="1752600" cy="304800"/>
+          </a:xfrm>
+          <a:prstGeom xmlns:a="http://schemas.openxmlformats.org/drawingml/2006/main" prst="rect">
+            <a:avLst/>
+          </a:prstGeom>
+        </p:spPr>
+        <p:txBody>
+          <a:bodyPr xmlns:a="http://schemas.openxmlformats.org/drawingml/2006/main" lIns="0" tIns="0" rIns="0" bIns="0"/>
+          <a:lstStyle xmlns:a="http://schemas.openxmlformats.org/drawingml/2006/main"/>
+          <a:p xmlns:a="http://schemas.openxmlformats.org/drawingml/2006/main">
+            <a:pPr>
+              <a:lnSpc>
+                <a:spcPct val="100000"/>
+              </a:lnSpc>
+              <a:buNone/>
+              <a:defRPr sz="1875" b="1" i="0">
+                <a:solidFill>
+                  <a:srgbClr val="65B32E"/>
+                </a:solidFill>
+              </a:defRPr>
+            </a:pPr>
+            <a:r>
+              <a:rPr sz="1875" b="1" i="0">
+                <a:solidFill>
+                  <a:srgbClr val="65B32E"/>
+                </a:solidFill>
+              </a:rPr>
+              <a:t>npm test</a:t>
+            </a:r>
+          </a:p>
+        </p:txBody>
+      </p:sp>
+      <p:sp>
+        <p:nvSpPr>
+          <p:cNvPr id="6" name="">
+            <a:extLst xmlns:a="http://schemas.openxmlformats.org/drawingml/2006/main">
+              <a:ext uri="{FF2B5EF4-FFF2-40B4-BE49-F238E27FC236}">
+                <a16:creationId xmlns:a16="http://schemas.microsoft.com/office/drawing/2014/main" id="{2560EE73-13FE-45AC-B431-2AF2B23CC1BD}"/>
+              </a:ext>
+            </a:extLst>
+          </p:cNvPr>
+          <p:cNvSpPr>
+            <a:spLocks xmlns:a="http://schemas.openxmlformats.org/drawingml/2006/main" noGrp="1"/>
+          </p:cNvSpPr>
+          <p:nvPr/>
+        </p:nvSpPr>
+        <p:spPr>
+          <a:xfrm xmlns:a="http://schemas.openxmlformats.org/drawingml/2006/main">
+            <a:off x="2343150" y="4476750"/>
+            <a:ext cx="1257300" cy="457200"/>
+          </a:xfrm>
+          <a:prstGeom xmlns:a="http://schemas.openxmlformats.org/drawingml/2006/main" prst="rect">
+            <a:avLst/>
+          </a:prstGeom>
+        </p:spPr>
+        <p:txBody>
+          <a:bodyPr xmlns:a="http://schemas.openxmlformats.org/drawingml/2006/main" lIns="0" tIns="0" rIns="0" bIns="0"/>
+          <a:lstStyle xmlns:a="http://schemas.openxmlformats.org/drawingml/2006/main"/>
+          <a:p xmlns:a="http://schemas.openxmlformats.org/drawingml/2006/main">
+            <a:pPr>
+              <a:lnSpc>
+                <a:spcPct val="110000"/>
+              </a:lnSpc>
+              <a:buNone/>
+              <a:defRPr sz="1350" b="0" i="0">
+                <a:solidFill>
+                  <a:srgbClr val="596579"/>
+                </a:solidFill>
+              </a:defRPr>
+            </a:pPr>
+            <a:r>
+              <a:rPr sz="1350" b="0" i="0">
+                <a:solidFill>
+                  <a:srgbClr val="596579"/>
+                </a:solidFill>
+              </a:rPr>
+              <a:t>single command</a:t>
+            </a:r>
+          </a:p>
+        </p:txBody>
+      </p:sp>
+      <p:sp>
+        <p:nvSpPr>
+          <p:cNvPr id="7" name="">
+            <a:extLst xmlns:a="http://schemas.openxmlformats.org/drawingml/2006/main">
+              <a:ext uri="{FF2B5EF4-FFF2-40B4-BE49-F238E27FC236}">
+                <a16:creationId xmlns:a16="http://schemas.microsoft.com/office/drawing/2014/main" id="{3A9CAF90-3123-4E0D-9FFE-9C1541D54FB6}"/>
+              </a:ext>
+            </a:extLst>
+          </p:cNvPr>
+          <p:cNvSpPr>
+            <a:spLocks xmlns:a="http://schemas.openxmlformats.org/drawingml/2006/main" noGrp="1"/>
+          </p:cNvSpPr>
+          <p:nvPr/>
+        </p:nvSpPr>
+        <p:spPr>
+          <a:xfrm xmlns:a="http://schemas.openxmlformats.org/drawingml/2006/main">
+            <a:off x="4171950" y="4000500"/>
+            <a:ext cx="590550" cy="419100"/>
+          </a:xfrm>
+          <a:prstGeom xmlns:a="http://schemas.openxmlformats.org/drawingml/2006/main" prst="rect">
+            <a:avLst/>
+          </a:prstGeom>
+        </p:spPr>
+        <p:txBody>
+          <a:bodyPr xmlns:a="http://schemas.openxmlformats.org/drawingml/2006/main" lIns="0" tIns="0" rIns="0" bIns="0"/>
+          <a:lstStyle xmlns:a="http://schemas.openxmlformats.org/drawingml/2006/main"/>
+          <a:p xmlns:a="http://schemas.openxmlformats.org/drawingml/2006/main">
+            <a:pPr>
+              <a:lnSpc>
+                <a:spcPct val="100000"/>
+              </a:lnSpc>
+              <a:buNone/>
+              <a:defRPr sz="2850" b="1" i="0">
+                <a:solidFill>
+                  <a:srgbClr val="596579"/>
+                </a:solidFill>
+              </a:defRPr>
+            </a:pPr>
+            <a:r>
+              <a:rPr sz="2850" b="1" i="0">
+                <a:solidFill>
+                  <a:srgbClr val="596579"/>
+                </a:solidFill>
+              </a:rPr>
+              <a:t>-&gt;</a:t>
+            </a:r>
+          </a:p>
+        </p:txBody>
+      </p:sp>
+      <p:sp>
+        <p:nvSpPr>
+          <p:cNvPr id="8" name="">
+            <a:extLst xmlns:a="http://schemas.openxmlformats.org/drawingml/2006/main">
+              <a:ext uri="{FF2B5EF4-FFF2-40B4-BE49-F238E27FC236}">
+                <a16:creationId xmlns:a16="http://schemas.microsoft.com/office/drawing/2014/main" id="{DC88C0BD-7A05-4AF9-B249-2BFD1EC2A2D7}"/>
+              </a:ext>
+            </a:extLst>
+          </p:cNvPr>
+          <p:cNvSpPr>
+            <a:spLocks xmlns:a="http://schemas.openxmlformats.org/drawingml/2006/main" noGrp="1"/>
+          </p:cNvSpPr>
+          <p:nvPr/>
+        </p:nvSpPr>
+        <p:spPr>
+          <a:xfrm xmlns:a="http://schemas.openxmlformats.org/drawingml/2006/main">
+            <a:off x="4914900" y="3600450"/>
+            <a:ext cx="2095500" cy="895350"/>
+          </a:xfrm>
+          <a:prstGeom xmlns:a="http://schemas.openxmlformats.org/drawingml/2006/main" prst="roundRect">
+            <a:avLst>
+              <a:gd name="adj" fmla="val 25532"/>
+            </a:avLst>
+          </a:prstGeom>
+          <a:solidFill xmlns:a="http://schemas.openxmlformats.org/drawingml/2006/main">
+            <a:srgbClr val="FFFFFF"/>
+          </a:solidFill>
+        </p:spPr>
+      </p:sp>
+      <p:sp>
+        <p:nvSpPr>
+          <p:cNvPr id="9" name="">
+            <a:extLst xmlns:a="http://schemas.openxmlformats.org/drawingml/2006/main">
+              <a:ext uri="{FF2B5EF4-FFF2-40B4-BE49-F238E27FC236}">
+                <a16:creationId xmlns:a16="http://schemas.microsoft.com/office/drawing/2014/main" id="{2AC35E60-6660-4030-A844-FC73F23B63B1}"/>
+              </a:ext>
+            </a:extLst>
+          </p:cNvPr>
+          <p:cNvSpPr>
+            <a:spLocks xmlns:a="http://schemas.openxmlformats.org/drawingml/2006/main" noGrp="1"/>
+          </p:cNvSpPr>
+          <p:nvPr/>
+        </p:nvSpPr>
+        <p:spPr>
+          <a:xfrm xmlns:a="http://schemas.openxmlformats.org/drawingml/2006/main">
+            <a:off x="5086350" y="3905250"/>
+            <a:ext cx="1752600" cy="304800"/>
+          </a:xfrm>
+          <a:prstGeom xmlns:a="http://schemas.openxmlformats.org/drawingml/2006/main" prst="rect">
+            <a:avLst/>
+          </a:prstGeom>
+        </p:spPr>
+        <p:txBody>
+          <a:bodyPr xmlns:a="http://schemas.openxmlformats.org/drawingml/2006/main" lIns="0" tIns="0" rIns="0" bIns="0"/>
+          <a:lstStyle xmlns:a="http://schemas.openxmlformats.org/drawingml/2006/main"/>
+          <a:p xmlns:a="http://schemas.openxmlformats.org/drawingml/2006/main">
+            <a:pPr>
+              <a:lnSpc>
+                <a:spcPct val="100000"/>
+              </a:lnSpc>
+              <a:buNone/>
+              <a:defRPr sz="1875" b="1" i="0">
+                <a:solidFill>
+                  <a:srgbClr val="2563EB"/>
+                </a:solidFill>
+              </a:defRPr>
+            </a:pPr>
+            <a:r>
+              <a:rPr sz="1875" b="1" i="0">
+                <a:solidFill>
+                  <a:srgbClr val="2563EB"/>
+                </a:solidFill>
+              </a:rPr>
+              <a:t>generate</a:t>
+            </a:r>
+          </a:p>
+        </p:txBody>
+      </p:sp>
+      <p:sp>
+        <p:nvSpPr>
+          <p:cNvPr id="10" name="">
+            <a:extLst xmlns:a="http://schemas.openxmlformats.org/drawingml/2006/main">
+              <a:ext uri="{FF2B5EF4-FFF2-40B4-BE49-F238E27FC236}">
+                <a16:creationId xmlns:a16="http://schemas.microsoft.com/office/drawing/2014/main" id="{75AE6CF0-941B-485C-B491-0E6E388E6C73}"/>
+              </a:ext>
+            </a:extLst>
+          </p:cNvPr>
+          <p:cNvSpPr>
+            <a:spLocks xmlns:a="http://schemas.openxmlformats.org/drawingml/2006/main" noGrp="1"/>
+          </p:cNvSpPr>
+          <p:nvPr/>
+        </p:nvSpPr>
+        <p:spPr>
+          <a:xfrm xmlns:a="http://schemas.openxmlformats.org/drawingml/2006/main">
+            <a:off x="5143500" y="4591050"/>
+            <a:ext cx="1638300" cy="228600"/>
+          </a:xfrm>
+          <a:prstGeom xmlns:a="http://schemas.openxmlformats.org/drawingml/2006/main" prst="rect">
+            <a:avLst/>
+          </a:prstGeom>
+        </p:spPr>
+        <p:txBody>
+          <a:bodyPr xmlns:a="http://schemas.openxmlformats.org/drawingml/2006/main" lIns="0" tIns="0" rIns="0" bIns="0"/>
+          <a:lstStyle xmlns:a="http://schemas.openxmlformats.org/drawingml/2006/main"/>
+          <a:p xmlns:a="http://schemas.openxmlformats.org/drawingml/2006/main">
+            <a:pPr>
+              <a:lnSpc>
+                <a:spcPct val="110000"/>
+              </a:lnSpc>
+              <a:buNone/>
+              <a:defRPr sz="1350" b="0" i="0">
+                <a:solidFill>
+                  <a:srgbClr val="596579"/>
+                </a:solidFill>
+              </a:defRPr>
+            </a:pPr>
+            <a:r>
+              <a:rPr sz="1350" b="0" i="0">
+                <a:solidFill>
+                  <a:srgbClr val="596579"/>
+                </a:solidFill>
+              </a:rPr>
+              <a:t>routes + tests + edge</a:t>
+            </a:r>
+          </a:p>
+        </p:txBody>
+      </p:sp>
+      <p:sp>
+        <p:nvSpPr>
+          <p:cNvPr id="11" name="">
+            <a:extLst xmlns:a="http://schemas.openxmlformats.org/drawingml/2006/main">
+              <a:ext uri="{FF2B5EF4-FFF2-40B4-BE49-F238E27FC236}">
+                <a16:creationId xmlns:a16="http://schemas.microsoft.com/office/drawing/2014/main" id="{FF913944-5E24-46FC-8518-5505F3FC6CA7}"/>
+              </a:ext>
+            </a:extLst>
+          </p:cNvPr>
+          <p:cNvSpPr>
+            <a:spLocks xmlns:a="http://schemas.openxmlformats.org/drawingml/2006/main" noGrp="1"/>
+          </p:cNvSpPr>
+          <p:nvPr/>
+        </p:nvSpPr>
+        <p:spPr>
+          <a:xfrm xmlns:a="http://schemas.openxmlformats.org/drawingml/2006/main">
+            <a:off x="7162800" y="4000500"/>
+            <a:ext cx="590550" cy="419100"/>
+          </a:xfrm>
+          <a:prstGeom xmlns:a="http://schemas.openxmlformats.org/drawingml/2006/main" prst="rect">
+            <a:avLst/>
+          </a:prstGeom>
+        </p:spPr>
+        <p:txBody>
+          <a:bodyPr xmlns:a="http://schemas.openxmlformats.org/drawingml/2006/main" lIns="0" tIns="0" rIns="0" bIns="0"/>
+          <a:lstStyle xmlns:a="http://schemas.openxmlformats.org/drawingml/2006/main"/>
+          <a:p xmlns:a="http://schemas.openxmlformats.org/drawingml/2006/main">
+            <a:pPr>
+              <a:lnSpc>
+                <a:spcPct val="100000"/>
+              </a:lnSpc>
+              <a:buNone/>
+              <a:defRPr sz="2850" b="1" i="0">
+                <a:solidFill>
+                  <a:srgbClr val="596579"/>
+                </a:solidFill>
+              </a:defRPr>
+            </a:pPr>
+            <a:r>
+              <a:rPr sz="2850" b="1" i="0">
+                <a:solidFill>
+                  <a:srgbClr val="596579"/>
+                </a:solidFill>
+              </a:rPr>
+              <a:t>-&gt;</a:t>
+            </a:r>
+          </a:p>
+        </p:txBody>
+      </p:sp>
+      <p:sp>
+        <p:nvSpPr>
+          <p:cNvPr id="12" name="">
+            <a:extLst xmlns:a="http://schemas.openxmlformats.org/drawingml/2006/main">
+              <a:ext uri="{FF2B5EF4-FFF2-40B4-BE49-F238E27FC236}">
+                <a16:creationId xmlns:a16="http://schemas.microsoft.com/office/drawing/2014/main" id="{D88562FC-7154-407A-B599-70865F3B61A9}"/>
+              </a:ext>
+            </a:extLst>
+          </p:cNvPr>
+          <p:cNvSpPr>
+            <a:spLocks xmlns:a="http://schemas.openxmlformats.org/drawingml/2006/main" noGrp="1"/>
+          </p:cNvSpPr>
+          <p:nvPr/>
+        </p:nvSpPr>
+        <p:spPr>
+          <a:xfrm xmlns:a="http://schemas.openxmlformats.org/drawingml/2006/main">
+            <a:off x="7905750" y="3600450"/>
+            <a:ext cx="2095500" cy="895350"/>
+          </a:xfrm>
+          <a:prstGeom xmlns:a="http://schemas.openxmlformats.org/drawingml/2006/main" prst="roundRect">
+            <a:avLst>
+              <a:gd name="adj" fmla="val 25532"/>
+            </a:avLst>
+          </a:prstGeom>
+          <a:solidFill xmlns:a="http://schemas.openxmlformats.org/drawingml/2006/main">
+            <a:srgbClr val="FFFFFF"/>
+          </a:solidFill>
+        </p:spPr>
+      </p:sp>
+      <p:sp>
+        <p:nvSpPr>
+          <p:cNvPr id="13" name="">
+            <a:extLst xmlns:a="http://schemas.openxmlformats.org/drawingml/2006/main">
+              <a:ext uri="{FF2B5EF4-FFF2-40B4-BE49-F238E27FC236}">
+                <a16:creationId xmlns:a16="http://schemas.microsoft.com/office/drawing/2014/main" id="{E3489D8E-2E4C-4E54-81FC-12314B190732}"/>
+              </a:ext>
+            </a:extLst>
+          </p:cNvPr>
+          <p:cNvSpPr>
+            <a:spLocks xmlns:a="http://schemas.openxmlformats.org/drawingml/2006/main" noGrp="1"/>
+          </p:cNvSpPr>
+          <p:nvPr/>
+        </p:nvSpPr>
+        <p:spPr>
+          <a:xfrm xmlns:a="http://schemas.openxmlformats.org/drawingml/2006/main">
+            <a:off x="8077200" y="3905250"/>
+            <a:ext cx="1752600" cy="304800"/>
+          </a:xfrm>
+          <a:prstGeom xmlns:a="http://schemas.openxmlformats.org/drawingml/2006/main" prst="rect">
+            <a:avLst/>
+          </a:prstGeom>
+        </p:spPr>
+        <p:txBody>
+          <a:bodyPr xmlns:a="http://schemas.openxmlformats.org/drawingml/2006/main" lIns="0" tIns="0" rIns="0" bIns="0"/>
+          <a:lstStyle xmlns:a="http://schemas.openxmlformats.org/drawingml/2006/main"/>
+          <a:p xmlns:a="http://schemas.openxmlformats.org/drawingml/2006/main">
+            <a:pPr>
+              <a:lnSpc>
+                <a:spcPct val="100000"/>
+              </a:lnSpc>
+              <a:buNone/>
+              <a:defRPr sz="1875" b="1" i="0">
+                <a:solidFill>
+                  <a:srgbClr val="F97316"/>
+                </a:solidFill>
+              </a:defRPr>
+            </a:pPr>
+            <a:r>
+              <a:rPr sz="1875" b="1" i="0">
+                <a:solidFill>
+                  <a:srgbClr val="F97316"/>
+                </a:solidFill>
+              </a:rPr>
+              <a:t>webServer</a:t>
+            </a:r>
+          </a:p>
+        </p:txBody>
+      </p:sp>
+      <p:sp>
+        <p:nvSpPr>
+          <p:cNvPr id="14" name="">
+            <a:extLst xmlns:a="http://schemas.openxmlformats.org/drawingml/2006/main">
+              <a:ext uri="{FF2B5EF4-FFF2-40B4-BE49-F238E27FC236}">
+                <a16:creationId xmlns:a16="http://schemas.microsoft.com/office/drawing/2014/main" id="{3D5ADF3B-8E78-4A20-A3B6-0D00D83CD710}"/>
+              </a:ext>
+            </a:extLst>
+          </p:cNvPr>
+          <p:cNvSpPr>
+            <a:spLocks xmlns:a="http://schemas.openxmlformats.org/drawingml/2006/main" noGrp="1"/>
+          </p:cNvSpPr>
+          <p:nvPr/>
+        </p:nvSpPr>
+        <p:spPr>
+          <a:xfrm xmlns:a="http://schemas.openxmlformats.org/drawingml/2006/main">
+            <a:off x="8401050" y="4591050"/>
+            <a:ext cx="1104900" cy="228600"/>
+          </a:xfrm>
+          <a:prstGeom xmlns:a="http://schemas.openxmlformats.org/drawingml/2006/main" prst="rect">
+            <a:avLst/>
+          </a:prstGeom>
+        </p:spPr>
+        <p:txBody>
+          <a:bodyPr xmlns:a="http://schemas.openxmlformats.org/drawingml/2006/main" lIns="0" tIns="0" rIns="0" bIns="0"/>
+          <a:lstStyle xmlns:a="http://schemas.openxmlformats.org/drawingml/2006/main"/>
+          <a:p xmlns:a="http://schemas.openxmlformats.org/drawingml/2006/main">
+            <a:pPr>
+              <a:lnSpc>
+                <a:spcPct val="110000"/>
+              </a:lnSpc>
+              <a:buNone/>
+              <a:defRPr sz="1350" b="0" i="0">
+                <a:solidFill>
+                  <a:srgbClr val="596579"/>
+                </a:solidFill>
+              </a:defRPr>
+            </a:pPr>
+            <a:r>
+              <a:rPr sz="1350" b="0" i="0">
+                <a:solidFill>
+                  <a:srgbClr val="596579"/>
+                </a:solidFill>
+              </a:rPr>
+              <a:t>starts Express</a:t>
+            </a:r>
+          </a:p>
+        </p:txBody>
+      </p:sp>
+      <p:sp>
+        <p:nvSpPr>
+          <p:cNvPr id="15" name="">
+            <a:extLst xmlns:a="http://schemas.openxmlformats.org/drawingml/2006/main">
+              <a:ext uri="{FF2B5EF4-FFF2-40B4-BE49-F238E27FC236}">
+                <a16:creationId xmlns:a16="http://schemas.microsoft.com/office/drawing/2014/main" id="{0FBCEFE2-B319-4CF8-B466-80B0A0A05B3C}"/>
+              </a:ext>
+            </a:extLst>
+          </p:cNvPr>
+          <p:cNvSpPr>
+            <a:spLocks xmlns:a="http://schemas.openxmlformats.org/drawingml/2006/main" noGrp="1"/>
+          </p:cNvSpPr>
+          <p:nvPr/>
+        </p:nvSpPr>
+        <p:spPr>
+          <a:xfrm xmlns:a="http://schemas.openxmlformats.org/drawingml/2006/main">
+            <a:off x="10153650" y="4000500"/>
+            <a:ext cx="590550" cy="419100"/>
+          </a:xfrm>
+          <a:prstGeom xmlns:a="http://schemas.openxmlformats.org/drawingml/2006/main" prst="rect">
+            <a:avLst/>
+          </a:prstGeom>
+        </p:spPr>
+        <p:txBody>
+          <a:bodyPr xmlns:a="http://schemas.openxmlformats.org/drawingml/2006/main" lIns="0" tIns="0" rIns="0" bIns="0"/>
+          <a:lstStyle xmlns:a="http://schemas.openxmlformats.org/drawingml/2006/main"/>
+          <a:p xmlns:a="http://schemas.openxmlformats.org/drawingml/2006/main">
+            <a:pPr>
+              <a:lnSpc>
+                <a:spcPct val="100000"/>
+              </a:lnSpc>
+              <a:buNone/>
+              <a:defRPr sz="2850" b="1" i="0">
+                <a:solidFill>
+                  <a:srgbClr val="596579"/>
+                </a:solidFill>
+              </a:defRPr>
+            </a:pPr>
+            <a:r>
+              <a:rPr sz="2850" b="1" i="0">
+                <a:solidFill>
+                  <a:srgbClr val="596579"/>
+                </a:solidFill>
+              </a:rPr>
+              <a:t>-&gt;</a:t>
+            </a:r>
+          </a:p>
+        </p:txBody>
+      </p:sp>
+      <p:sp>
+        <p:nvSpPr>
+          <p:cNvPr id="16" name="">
+            <a:extLst xmlns:a="http://schemas.openxmlformats.org/drawingml/2006/main">
+              <a:ext uri="{FF2B5EF4-FFF2-40B4-BE49-F238E27FC236}">
+                <a16:creationId xmlns:a16="http://schemas.microsoft.com/office/drawing/2014/main" id="{7564081E-732C-40C9-92EC-59A6F12629A9}"/>
+              </a:ext>
+            </a:extLst>
+          </p:cNvPr>
+          <p:cNvSpPr>
+            <a:spLocks xmlns:a="http://schemas.openxmlformats.org/drawingml/2006/main" noGrp="1"/>
+          </p:cNvSpPr>
+          <p:nvPr/>
+        </p:nvSpPr>
+        <p:spPr>
+          <a:xfrm xmlns:a="http://schemas.openxmlformats.org/drawingml/2006/main">
+            <a:off x="10896600" y="3486150"/>
+            <a:ext cx="2286000" cy="895350"/>
+          </a:xfrm>
+          <a:prstGeom xmlns:a="http://schemas.openxmlformats.org/drawingml/2006/main" prst="roundRect">
+            <a:avLst>
+              <a:gd name="adj" fmla="val 25532"/>
+            </a:avLst>
+          </a:prstGeom>
+          <a:solidFill xmlns:a="http://schemas.openxmlformats.org/drawingml/2006/main">
+            <a:srgbClr val="FFFFFF"/>
+          </a:solidFill>
+        </p:spPr>
+      </p:sp>
+      <p:sp>
+        <p:nvSpPr>
+          <p:cNvPr id="17" name="">
+            <a:extLst xmlns:a="http://schemas.openxmlformats.org/drawingml/2006/main">
+              <a:ext uri="{FF2B5EF4-FFF2-40B4-BE49-F238E27FC236}">
+                <a16:creationId xmlns:a16="http://schemas.microsoft.com/office/drawing/2014/main" id="{720E54BA-0E7D-4746-867E-3A0554E0E623}"/>
+              </a:ext>
+            </a:extLst>
+          </p:cNvPr>
+          <p:cNvSpPr>
+            <a:spLocks xmlns:a="http://schemas.openxmlformats.org/drawingml/2006/main" noGrp="1"/>
+          </p:cNvSpPr>
+          <p:nvPr/>
+        </p:nvSpPr>
+        <p:spPr>
+          <a:xfrm xmlns:a="http://schemas.openxmlformats.org/drawingml/2006/main">
+            <a:off x="11068050" y="3790950"/>
+            <a:ext cx="1943100" cy="304800"/>
+          </a:xfrm>
+          <a:prstGeom xmlns:a="http://schemas.openxmlformats.org/drawingml/2006/main" prst="rect">
+            <a:avLst/>
+          </a:prstGeom>
+        </p:spPr>
+        <p:txBody>
+          <a:bodyPr xmlns:a="http://schemas.openxmlformats.org/drawingml/2006/main" lIns="0" tIns="0" rIns="0" bIns="0"/>
+          <a:lstStyle xmlns:a="http://schemas.openxmlformats.org/drawingml/2006/main"/>
+          <a:p xmlns:a="http://schemas.openxmlformats.org/drawingml/2006/main">
+            <a:pPr>
+              <a:lnSpc>
+                <a:spcPct val="100000"/>
+              </a:lnSpc>
+              <a:buNone/>
+              <a:defRPr sz="1875" b="1" i="0">
+                <a:solidFill>
+                  <a:srgbClr val="2F7D32"/>
+                </a:solidFill>
+              </a:defRPr>
+            </a:pPr>
+            <a:r>
+              <a:rPr sz="1875" b="1" i="0">
+                <a:solidFill>
+                  <a:srgbClr val="2F7D32"/>
+                </a:solidFill>
+              </a:rPr>
+              <a:t>request fixture</a:t>
+            </a:r>
+          </a:p>
+        </p:txBody>
+      </p:sp>
+      <p:sp>
+        <p:nvSpPr>
+          <p:cNvPr id="18" name="">
+            <a:extLst xmlns:a="http://schemas.openxmlformats.org/drawingml/2006/main">
+              <a:ext uri="{FF2B5EF4-FFF2-40B4-BE49-F238E27FC236}">
+                <a16:creationId xmlns:a16="http://schemas.microsoft.com/office/drawing/2014/main" id="{1023F0BF-21F7-4677-85F4-9A9F1E8BDD9E}"/>
+              </a:ext>
+            </a:extLst>
+          </p:cNvPr>
+          <p:cNvSpPr>
+            <a:spLocks xmlns:a="http://schemas.openxmlformats.org/drawingml/2006/main" noGrp="1"/>
+          </p:cNvSpPr>
+          <p:nvPr/>
+        </p:nvSpPr>
+        <p:spPr>
+          <a:xfrm xmlns:a="http://schemas.openxmlformats.org/drawingml/2006/main">
+            <a:off x="11563350" y="4476750"/>
+            <a:ext cx="952500" cy="457200"/>
+          </a:xfrm>
+          <a:prstGeom xmlns:a="http://schemas.openxmlformats.org/drawingml/2006/main" prst="rect">
+            <a:avLst/>
+          </a:prstGeom>
+        </p:spPr>
+        <p:txBody>
+          <a:bodyPr xmlns:a="http://schemas.openxmlformats.org/drawingml/2006/main" lIns="0" tIns="0" rIns="0" bIns="0"/>
+          <a:lstStyle xmlns:a="http://schemas.openxmlformats.org/drawingml/2006/main"/>
+          <a:p xmlns:a="http://schemas.openxmlformats.org/drawingml/2006/main">
+            <a:pPr>
+              <a:lnSpc>
+                <a:spcPct val="110000"/>
+              </a:lnSpc>
+              <a:buNone/>
+              <a:defRPr sz="1350" b="0" i="0">
+                <a:solidFill>
+                  <a:srgbClr val="596579"/>
+                </a:solidFill>
+              </a:defRPr>
+            </a:pPr>
+            <a:r>
+              <a:rPr sz="1350" b="0" i="0">
+                <a:solidFill>
+                  <a:srgbClr val="596579"/>
+                </a:solidFill>
+              </a:rPr>
+              <a:t>calls the API</a:t>
+            </a:r>
+          </a:p>
+        </p:txBody>
+      </p:sp>
+      <p:sp>
+        <p:nvSpPr>
+          <p:cNvPr id="19" name="">
+            <a:extLst xmlns:a="http://schemas.openxmlformats.org/drawingml/2006/main">
+              <a:ext uri="{FF2B5EF4-FFF2-40B4-BE49-F238E27FC236}">
+                <a16:creationId xmlns:a16="http://schemas.microsoft.com/office/drawing/2014/main" id="{CBE4AE1F-61B9-4F76-AD68-59C20270815E}"/>
+              </a:ext>
+            </a:extLst>
+          </p:cNvPr>
+          <p:cNvSpPr>
+            <a:spLocks xmlns:a="http://schemas.openxmlformats.org/drawingml/2006/main" noGrp="1"/>
+          </p:cNvSpPr>
+          <p:nvPr/>
+        </p:nvSpPr>
+        <p:spPr>
+          <a:xfrm xmlns:a="http://schemas.openxmlformats.org/drawingml/2006/main">
+            <a:off x="13335000" y="4000500"/>
+            <a:ext cx="590550" cy="419100"/>
+          </a:xfrm>
+          <a:prstGeom xmlns:a="http://schemas.openxmlformats.org/drawingml/2006/main" prst="rect">
+            <a:avLst/>
+          </a:prstGeom>
+        </p:spPr>
+        <p:txBody>
+          <a:bodyPr xmlns:a="http://schemas.openxmlformats.org/drawingml/2006/main" lIns="0" tIns="0" rIns="0" bIns="0"/>
+          <a:lstStyle xmlns:a="http://schemas.openxmlformats.org/drawingml/2006/main"/>
+          <a:p xmlns:a="http://schemas.openxmlformats.org/drawingml/2006/main">
+            <a:pPr>
+              <a:lnSpc>
+                <a:spcPct val="100000"/>
+              </a:lnSpc>
+              <a:buNone/>
+              <a:defRPr sz="2850" b="1" i="0">
+                <a:solidFill>
+                  <a:srgbClr val="596579"/>
+                </a:solidFill>
+              </a:defRPr>
+            </a:pPr>
+            <a:r>
+              <a:rPr sz="2850" b="1" i="0">
+                <a:solidFill>
+                  <a:srgbClr val="596579"/>
+                </a:solidFill>
+              </a:rPr>
+              <a:t>-&gt;</a:t>
+            </a:r>
+          </a:p>
+        </p:txBody>
+      </p:sp>
+      <p:sp>
+        <p:nvSpPr>
+          <p:cNvPr id="20" name="">
+            <a:extLst xmlns:a="http://schemas.openxmlformats.org/drawingml/2006/main">
+              <a:ext uri="{FF2B5EF4-FFF2-40B4-BE49-F238E27FC236}">
+                <a16:creationId xmlns:a16="http://schemas.microsoft.com/office/drawing/2014/main" id="{645ADB09-44A9-408C-9986-BBE11FDBFE5A}"/>
+              </a:ext>
+            </a:extLst>
+          </p:cNvPr>
+          <p:cNvSpPr>
+            <a:spLocks xmlns:a="http://schemas.openxmlformats.org/drawingml/2006/main" noGrp="1"/>
+          </p:cNvSpPr>
+          <p:nvPr/>
+        </p:nvSpPr>
+        <p:spPr>
+          <a:xfrm xmlns:a="http://schemas.openxmlformats.org/drawingml/2006/main">
+            <a:off x="14077950" y="3486150"/>
+            <a:ext cx="2286000" cy="895350"/>
+          </a:xfrm>
+          <a:prstGeom xmlns:a="http://schemas.openxmlformats.org/drawingml/2006/main" prst="roundRect">
+            <a:avLst>
+              <a:gd name="adj" fmla="val 25532"/>
+            </a:avLst>
+          </a:prstGeom>
+          <a:solidFill xmlns:a="http://schemas.openxmlformats.org/drawingml/2006/main">
+            <a:srgbClr val="FFFFFF"/>
+          </a:solidFill>
+        </p:spPr>
+      </p:sp>
+      <p:sp>
+        <p:nvSpPr>
+          <p:cNvPr id="21" name="">
+            <a:extLst xmlns:a="http://schemas.openxmlformats.org/drawingml/2006/main">
+              <a:ext uri="{FF2B5EF4-FFF2-40B4-BE49-F238E27FC236}">
+                <a16:creationId xmlns:a16="http://schemas.microsoft.com/office/drawing/2014/main" id="{385EBE6D-2DB1-4F4C-85BC-A3B0D1D2032F}"/>
+              </a:ext>
+            </a:extLst>
+          </p:cNvPr>
+          <p:cNvSpPr>
+            <a:spLocks xmlns:a="http://schemas.openxmlformats.org/drawingml/2006/main" noGrp="1"/>
+          </p:cNvSpPr>
+          <p:nvPr/>
+        </p:nvSpPr>
+        <p:spPr>
+          <a:xfrm xmlns:a="http://schemas.openxmlformats.org/drawingml/2006/main">
+            <a:off x="14249400" y="3790950"/>
+            <a:ext cx="1943100" cy="304800"/>
+          </a:xfrm>
+          <a:prstGeom xmlns:a="http://schemas.openxmlformats.org/drawingml/2006/main" prst="rect">
+            <a:avLst/>
+          </a:prstGeom>
+        </p:spPr>
+        <p:txBody>
+          <a:bodyPr xmlns:a="http://schemas.openxmlformats.org/drawingml/2006/main" lIns="0" tIns="0" rIns="0" bIns="0"/>
+          <a:lstStyle xmlns:a="http://schemas.openxmlformats.org/drawingml/2006/main"/>
+          <a:p xmlns:a="http://schemas.openxmlformats.org/drawingml/2006/main">
+            <a:pPr>
+              <a:lnSpc>
+                <a:spcPct val="100000"/>
+              </a:lnSpc>
+              <a:buNone/>
+              <a:defRPr sz="1875" b="1" i="0">
+                <a:solidFill>
+                  <a:srgbClr val="65B32E"/>
+                </a:solidFill>
+              </a:defRPr>
+            </a:pPr>
+            <a:r>
+              <a:rPr sz="1875" b="1" i="0">
+                <a:solidFill>
+                  <a:srgbClr val="65B32E"/>
+                </a:solidFill>
+              </a:rPr>
+              <a:t>assertions pass</a:t>
+            </a:r>
+          </a:p>
+        </p:txBody>
+      </p:sp>
+      <p:sp>
+        <p:nvSpPr>
+          <p:cNvPr id="22" name="">
+            <a:extLst xmlns:a="http://schemas.openxmlformats.org/drawingml/2006/main">
+              <a:ext uri="{FF2B5EF4-FFF2-40B4-BE49-F238E27FC236}">
+                <a16:creationId xmlns:a16="http://schemas.microsoft.com/office/drawing/2014/main" id="{AAA93586-7221-4B7B-ABE3-F08F76702E2A}"/>
+              </a:ext>
+            </a:extLst>
+          </p:cNvPr>
+          <p:cNvSpPr>
+            <a:spLocks xmlns:a="http://schemas.openxmlformats.org/drawingml/2006/main" noGrp="1"/>
+          </p:cNvSpPr>
+          <p:nvPr/>
+        </p:nvSpPr>
+        <p:spPr>
+          <a:xfrm xmlns:a="http://schemas.openxmlformats.org/drawingml/2006/main">
+            <a:off x="14668500" y="4476750"/>
+            <a:ext cx="1104900" cy="457200"/>
+          </a:xfrm>
+          <a:prstGeom xmlns:a="http://schemas.openxmlformats.org/drawingml/2006/main" prst="rect">
+            <a:avLst/>
+          </a:prstGeom>
+        </p:spPr>
+        <p:txBody>
+          <a:bodyPr xmlns:a="http://schemas.openxmlformats.org/drawingml/2006/main" lIns="0" tIns="0" rIns="0" bIns="0"/>
+          <a:lstStyle xmlns:a="http://schemas.openxmlformats.org/drawingml/2006/main"/>
+          <a:p xmlns:a="http://schemas.openxmlformats.org/drawingml/2006/main">
+            <a:pPr>
+              <a:lnSpc>
+                <a:spcPct val="110000"/>
+              </a:lnSpc>
+              <a:buNone/>
+              <a:defRPr sz="1350" b="0" i="0">
+                <a:solidFill>
+                  <a:srgbClr val="596579"/>
+                </a:solidFill>
+              </a:defRPr>
+            </a:pPr>
+            <a:r>
+              <a:rPr sz="1350" b="0" i="0">
+                <a:solidFill>
+                  <a:srgbClr val="596579"/>
+                </a:solidFill>
+              </a:rPr>
+              <a:t>contract holds</a:t>
+            </a:r>
+          </a:p>
+        </p:txBody>
+      </p:sp>
+      <p:sp>
+        <p:nvSpPr>
+          <p:cNvPr id="23" name="code-block">
+            <a:extLst xmlns:a="http://schemas.openxmlformats.org/drawingml/2006/main">
+              <a:ext uri="{FF2B5EF4-FFF2-40B4-BE49-F238E27FC236}">
+                <a16:creationId xmlns:a16="http://schemas.microsoft.com/office/drawing/2014/main" id="{C6869B58-8A0E-49DA-86A1-565A6F44651A}"/>
+              </a:ext>
+            </a:extLst>
+          </p:cNvPr>
+          <p:cNvSpPr>
+            <a:spLocks xmlns:a="http://schemas.openxmlformats.org/drawingml/2006/main" noGrp="1"/>
+          </p:cNvSpPr>
+          <p:nvPr/>
+        </p:nvSpPr>
+        <p:spPr>
+          <a:xfrm xmlns:a="http://schemas.openxmlformats.org/drawingml/2006/main">
+            <a:off x="819150" y="6789420"/>
+            <a:ext cx="16649700" cy="2480310"/>
+          </a:xfrm>
+          <a:prstGeom xmlns:a="http://schemas.openxmlformats.org/drawingml/2006/main" prst="roundRect">
+            <a:avLst>
+              <a:gd name="adj" fmla="val 7680"/>
             </a:avLst>
           </a:prstGeom>
           <a:solidFill xmlns:a="http://schemas.openxmlformats.org/drawingml/2006/main">
@@ -3624,22 +4288,22 @@
       </p:sp>
       <p:sp>
         <p:nvSpPr>
-          <p:cNvPr id="6" name="">
-            <a:extLst xmlns:a="http://schemas.openxmlformats.org/drawingml/2006/main">
-              <a:ext uri="{FF2B5EF4-FFF2-40B4-BE49-F238E27FC236}">
-                <a16:creationId xmlns:a16="http://schemas.microsoft.com/office/drawing/2014/main" id="{F2F444E9-B281-448E-A595-1CB96F7B34DE}"/>
-              </a:ext>
-            </a:extLst>
-          </p:cNvPr>
-          <p:cNvSpPr>
-            <a:spLocks xmlns:a="http://schemas.openxmlformats.org/drawingml/2006/main" noGrp="1"/>
-          </p:cNvSpPr>
-          <p:nvPr/>
-        </p:nvSpPr>
-        <p:spPr>
-          <a:xfrm xmlns:a="http://schemas.openxmlformats.org/drawingml/2006/main">
-            <a:off x="1085850" y="5257800"/>
-            <a:ext cx="7543800" cy="895350"/>
+          <p:cNvPr id="24" name="">
+            <a:extLst xmlns:a="http://schemas.openxmlformats.org/drawingml/2006/main">
+              <a:ext uri="{FF2B5EF4-FFF2-40B4-BE49-F238E27FC236}">
+                <a16:creationId xmlns:a16="http://schemas.microsoft.com/office/drawing/2014/main" id="{78915C6A-8338-4765-81D7-619042E47A3E}"/>
+              </a:ext>
+            </a:extLst>
+          </p:cNvPr>
+          <p:cNvSpPr>
+            <a:spLocks xmlns:a="http://schemas.openxmlformats.org/drawingml/2006/main" noGrp="1"/>
+          </p:cNvSpPr>
+          <p:nvPr/>
+        </p:nvSpPr>
+        <p:spPr>
+          <a:xfrm xmlns:a="http://schemas.openxmlformats.org/drawingml/2006/main">
+            <a:off x="1085850" y="7010400"/>
+            <a:ext cx="16116300" cy="2038350"/>
           </a:xfrm>
           <a:prstGeom xmlns:a="http://schemas.openxmlformats.org/drawingml/2006/main" prst="rect">
             <a:avLst/>
@@ -3654,19 +4318,19 @@
                 <a:spcPct val="118000"/>
               </a:lnSpc>
               <a:buNone/>
-              <a:defRPr sz="1650" b="0" i="0">
-                <a:solidFill>
-                  <a:srgbClr val="D1E7FF"/>
-                </a:solidFill>
-              </a:defRPr>
-            </a:pPr>
-            <a:r>
-              <a:rPr sz="1650" b="0" i="0">
-                <a:solidFill>
-                  <a:srgbClr val="D1E7FF"/>
-                </a:solidFill>
-              </a:rPr>
-              <a:t>npm run generate:from-spec -- \</a:t>
+              <a:defRPr sz="1875" b="0" i="0">
+                <a:solidFill>
+                  <a:srgbClr val="D1E7FF"/>
+                </a:solidFill>
+              </a:defRPr>
+            </a:pPr>
+            <a:r>
+              <a:rPr sz="1875" b="0" i="0">
+                <a:solidFill>
+                  <a:srgbClr val="D1E7FF"/>
+                </a:solidFill>
+              </a:rPr>
+              <a:t>&gt; npm test</a:t>
             </a:r>
           </a:p>
           <a:p xmlns:a="http://schemas.openxmlformats.org/drawingml/2006/main">
@@ -3675,19 +4339,19 @@
                 <a:spcPct val="118000"/>
               </a:lnSpc>
               <a:buNone/>
-              <a:defRPr sz="1650" b="0" i="0">
-                <a:solidFill>
-                  <a:srgbClr val="D1E7FF"/>
-                </a:solidFill>
-              </a:defRPr>
-            </a:pPr>
-            <a:r>
-              <a:rPr sz="1650" b="0" i="0">
-                <a:solidFill>
-                  <a:srgbClr val="D1E7FF"/>
-                </a:solidFill>
-              </a:rPr>
-              <a:t>  --spec ./path/to/openapi.yaml \</a:t>
+              <a:defRPr sz="1875" b="0" i="0">
+                <a:solidFill>
+                  <a:srgbClr val="D1E7FF"/>
+                </a:solidFill>
+              </a:defRPr>
+            </a:pPr>
+            <a:r>
+              <a:rPr sz="1875" b="0" i="0">
+                <a:solidFill>
+                  <a:srgbClr val="D1E7FF"/>
+                </a:solidFill>
+              </a:rPr>
+              <a:t>Generated 2 API routes</a:t>
             </a:r>
           </a:p>
           <a:p xmlns:a="http://schemas.openxmlformats.org/drawingml/2006/main">
@@ -3696,176 +4360,21 @@
                 <a:spcPct val="118000"/>
               </a:lnSpc>
               <a:buNone/>
-              <a:defRPr sz="1650" b="0" i="0">
-                <a:solidFill>
-                  <a:srgbClr val="D1E7FF"/>
-                </a:solidFill>
-              </a:defRPr>
-            </a:pPr>
-            <a:r>
-              <a:rPr sz="1650" b="0" i="0">
-                <a:solidFill>
-                  <a:srgbClr val="D1E7FF"/>
-                </a:solidFill>
-              </a:rPr>
-              <a:t>  --output tests/generated/openapi.spec.ts</a:t>
-            </a:r>
-          </a:p>
-        </p:txBody>
-      </p:sp>
-      <p:sp>
-        <p:nvSpPr>
-          <p:cNvPr id="7" name="">
-            <a:extLst xmlns:a="http://schemas.openxmlformats.org/drawingml/2006/main">
-              <a:ext uri="{FF2B5EF4-FFF2-40B4-BE49-F238E27FC236}">
-                <a16:creationId xmlns:a16="http://schemas.microsoft.com/office/drawing/2014/main" id="{01F2B7E8-2354-40A1-9AE6-DE88668528B0}"/>
-              </a:ext>
-            </a:extLst>
-          </p:cNvPr>
-          <p:cNvSpPr>
-            <a:spLocks xmlns:a="http://schemas.openxmlformats.org/drawingml/2006/main" noGrp="1"/>
-          </p:cNvSpPr>
-          <p:nvPr/>
-        </p:nvSpPr>
-        <p:spPr>
-          <a:xfrm xmlns:a="http://schemas.openxmlformats.org/drawingml/2006/main">
-            <a:off x="819150" y="6591300"/>
-            <a:ext cx="6477000" cy="571500"/>
-          </a:xfrm>
-          <a:prstGeom xmlns:a="http://schemas.openxmlformats.org/drawingml/2006/main" prst="rect">
-            <a:avLst/>
-          </a:prstGeom>
-        </p:spPr>
-        <p:txBody>
-          <a:bodyPr xmlns:a="http://schemas.openxmlformats.org/drawingml/2006/main" lIns="0" tIns="0" rIns="0" bIns="0"/>
-          <a:lstStyle xmlns:a="http://schemas.openxmlformats.org/drawingml/2006/main"/>
-          <a:p xmlns:a="http://schemas.openxmlformats.org/drawingml/2006/main">
-            <a:pPr>
-              <a:lnSpc>
-                <a:spcPct val="100000"/>
-              </a:lnSpc>
-              <a:buNone/>
               <a:defRPr sz="1875" b="0" i="0">
                 <a:solidFill>
-                  <a:srgbClr val="596579"/>
+                  <a:srgbClr val="D1E7FF"/>
                 </a:solidFill>
               </a:defRPr>
             </a:pPr>
             <a:r>
               <a:rPr sz="1875" b="0" i="0">
                 <a:solidFill>
-                  <a:srgbClr val="596579"/>
-                </a:solidFill>
-              </a:rPr>
-              <a:t>The input can be a local YAML/JSON file or an HTTP(S) URL.</a:t>
-            </a:r>
-          </a:p>
-        </p:txBody>
-      </p:sp>
-      <p:sp>
-        <p:nvSpPr>
-          <p:cNvPr id="8" name="">
-            <a:extLst xmlns:a="http://schemas.openxmlformats.org/drawingml/2006/main">
-              <a:ext uri="{FF2B5EF4-FFF2-40B4-BE49-F238E27FC236}">
-                <a16:creationId xmlns:a16="http://schemas.microsoft.com/office/drawing/2014/main" id="{24CBD22D-63B0-49BE-A706-70D6A1267525}"/>
-              </a:ext>
-            </a:extLst>
-          </p:cNvPr>
-          <p:cNvSpPr>
-            <a:spLocks xmlns:a="http://schemas.openxmlformats.org/drawingml/2006/main" noGrp="1"/>
-          </p:cNvSpPr>
-          <p:nvPr/>
-        </p:nvSpPr>
-        <p:spPr>
-          <a:xfrm xmlns:a="http://schemas.openxmlformats.org/drawingml/2006/main">
-            <a:off x="9410700" y="4533900"/>
-            <a:ext cx="8077200" cy="419100"/>
-          </a:xfrm>
-          <a:prstGeom xmlns:a="http://schemas.openxmlformats.org/drawingml/2006/main" prst="rect">
-            <a:avLst/>
-          </a:prstGeom>
-        </p:spPr>
-        <p:txBody>
-          <a:bodyPr xmlns:a="http://schemas.openxmlformats.org/drawingml/2006/main" lIns="0" tIns="0" rIns="0" bIns="0"/>
-          <a:lstStyle xmlns:a="http://schemas.openxmlformats.org/drawingml/2006/main"/>
-          <a:p xmlns:a="http://schemas.openxmlformats.org/drawingml/2006/main">
-            <a:pPr>
-              <a:lnSpc>
-                <a:spcPct val="100000"/>
-              </a:lnSpc>
-              <a:buNone/>
-              <a:defRPr sz="2700" b="1" i="0">
-                <a:solidFill>
-                  <a:srgbClr val="2563EB"/>
-                </a:solidFill>
-              </a:defRPr>
-            </a:pPr>
-            <a:r>
-              <a:rPr sz="2700" b="1" i="0">
-                <a:solidFill>
-                  <a:srgbClr val="2563EB"/>
-                </a:solidFill>
-              </a:rPr>
-              <a:t>2. Run against the target</a:t>
-            </a:r>
-          </a:p>
-        </p:txBody>
-      </p:sp>
-      <p:sp>
-        <p:nvSpPr>
-          <p:cNvPr id="9" name="code-block">
-            <a:extLst xmlns:a="http://schemas.openxmlformats.org/drawingml/2006/main">
-              <a:ext uri="{FF2B5EF4-FFF2-40B4-BE49-F238E27FC236}">
-                <a16:creationId xmlns:a16="http://schemas.microsoft.com/office/drawing/2014/main" id="{B634D3CE-86FC-470D-BFD1-3080412D3941}"/>
-              </a:ext>
-            </a:extLst>
-          </p:cNvPr>
-          <p:cNvSpPr>
-            <a:spLocks xmlns:a="http://schemas.openxmlformats.org/drawingml/2006/main" noGrp="1"/>
-          </p:cNvSpPr>
-          <p:nvPr/>
-        </p:nvSpPr>
-        <p:spPr>
-          <a:xfrm xmlns:a="http://schemas.openxmlformats.org/drawingml/2006/main">
-            <a:off x="9401175" y="5147577"/>
-            <a:ext cx="8067675" cy="1131570"/>
-          </a:xfrm>
-          <a:prstGeom xmlns:a="http://schemas.openxmlformats.org/drawingml/2006/main" prst="roundRect">
-            <a:avLst>
-              <a:gd name="adj" fmla="val 16835"/>
-            </a:avLst>
-          </a:prstGeom>
-          <a:solidFill xmlns:a="http://schemas.openxmlformats.org/drawingml/2006/main">
-            <a:srgbClr val="111827"/>
-          </a:solidFill>
-        </p:spPr>
-      </p:sp>
-      <p:sp>
-        <p:nvSpPr>
-          <p:cNvPr id="10" name="">
-            <a:extLst xmlns:a="http://schemas.openxmlformats.org/drawingml/2006/main">
-              <a:ext uri="{FF2B5EF4-FFF2-40B4-BE49-F238E27FC236}">
-                <a16:creationId xmlns:a16="http://schemas.microsoft.com/office/drawing/2014/main" id="{911AF2A4-EBCB-4002-AF62-7F99DE663EB4}"/>
-              </a:ext>
-            </a:extLst>
-          </p:cNvPr>
-          <p:cNvSpPr>
-            <a:spLocks xmlns:a="http://schemas.openxmlformats.org/drawingml/2006/main" noGrp="1"/>
-          </p:cNvSpPr>
-          <p:nvPr/>
-        </p:nvSpPr>
-        <p:spPr>
-          <a:xfrm xmlns:a="http://schemas.openxmlformats.org/drawingml/2006/main">
-            <a:off x="9677400" y="5372100"/>
-            <a:ext cx="7543800" cy="685800"/>
-          </a:xfrm>
-          <a:prstGeom xmlns:a="http://schemas.openxmlformats.org/drawingml/2006/main" prst="rect">
-            <a:avLst/>
-          </a:prstGeom>
-        </p:spPr>
-        <p:txBody>
-          <a:bodyPr xmlns:a="http://schemas.openxmlformats.org/drawingml/2006/main" lIns="0" tIns="0" rIns="0" bIns="0"/>
-          <a:lstStyle xmlns:a="http://schemas.openxmlformats.org/drawingml/2006/main"/>
+                  <a:srgbClr val="D1E7FF"/>
+                </a:solidFill>
+              </a:rPr>
+              <a:t>Generated 2 Playwright API tests</a:t>
+            </a:r>
+          </a:p>
           <a:p xmlns:a="http://schemas.openxmlformats.org/drawingml/2006/main">
             <a:pPr>
               <a:lnSpc>
@@ -3884,7 +4393,7 @@
                   <a:srgbClr val="D1E7FF"/>
                 </a:solidFill>
               </a:rPr>
-              <a:t>BASE_URL=https://api.example.com \</a:t>
+              <a:t>Generated 1 Playwright edge test</a:t>
             </a:r>
           </a:p>
           <a:p xmlns:a="http://schemas.openxmlformats.org/drawingml/2006/main">
@@ -3905,144 +4414,38 @@
                   <a:srgbClr val="D1E7FF"/>
                 </a:solidFill>
               </a:rPr>
-              <a:t>  npm run test:generated</a:t>
-            </a:r>
-          </a:p>
-        </p:txBody>
-      </p:sp>
-      <p:sp>
-        <p:nvSpPr>
-          <p:cNvPr id="11" name="pill-BASE_URL set">
-            <a:extLst xmlns:a="http://schemas.openxmlformats.org/drawingml/2006/main">
-              <a:ext uri="{FF2B5EF4-FFF2-40B4-BE49-F238E27FC236}">
-                <a16:creationId xmlns:a16="http://schemas.microsoft.com/office/drawing/2014/main" id="{0AF2904F-E31F-4BCB-8C8F-55960A68577F}"/>
-              </a:ext>
-            </a:extLst>
-          </p:cNvPr>
-          <p:cNvSpPr>
-            <a:spLocks xmlns:a="http://schemas.openxmlformats.org/drawingml/2006/main" noGrp="1"/>
-          </p:cNvSpPr>
-          <p:nvPr/>
-        </p:nvSpPr>
-        <p:spPr>
-          <a:xfrm xmlns:a="http://schemas.openxmlformats.org/drawingml/2006/main">
-            <a:off x="9401175" y="6515100"/>
-            <a:ext cx="2381250" cy="514350"/>
-          </a:xfrm>
-          <a:prstGeom xmlns:a="http://schemas.openxmlformats.org/drawingml/2006/main" prst="roundRect">
-            <a:avLst>
-              <a:gd name="adj" fmla="val 50000"/>
-            </a:avLst>
-          </a:prstGeom>
-          <a:solidFill xmlns:a="http://schemas.openxmlformats.org/drawingml/2006/main">
-            <a:srgbClr val="2563EB"/>
-          </a:solidFill>
-        </p:spPr>
-      </p:sp>
-      <p:sp>
-        <p:nvSpPr>
-          <p:cNvPr id="12" name="">
-            <a:extLst xmlns:a="http://schemas.openxmlformats.org/drawingml/2006/main">
-              <a:ext uri="{FF2B5EF4-FFF2-40B4-BE49-F238E27FC236}">
-                <a16:creationId xmlns:a16="http://schemas.microsoft.com/office/drawing/2014/main" id="{6AE3FE82-C588-4942-B54A-D949FE2443D9}"/>
-              </a:ext>
-            </a:extLst>
-          </p:cNvPr>
-          <p:cNvSpPr>
-            <a:spLocks xmlns:a="http://schemas.openxmlformats.org/drawingml/2006/main" noGrp="1"/>
-          </p:cNvSpPr>
-          <p:nvPr/>
-        </p:nvSpPr>
-        <p:spPr>
-          <a:xfrm xmlns:a="http://schemas.openxmlformats.org/drawingml/2006/main">
-            <a:off x="9563100" y="6667500"/>
-            <a:ext cx="2057400" cy="228600"/>
-          </a:xfrm>
-          <a:prstGeom xmlns:a="http://schemas.openxmlformats.org/drawingml/2006/main" prst="rect">
-            <a:avLst/>
-          </a:prstGeom>
-        </p:spPr>
-        <p:txBody>
-          <a:bodyPr xmlns:a="http://schemas.openxmlformats.org/drawingml/2006/main" lIns="0" tIns="0" rIns="0" bIns="0"/>
-          <a:lstStyle xmlns:a="http://schemas.openxmlformats.org/drawingml/2006/main"/>
-          <a:p xmlns:a="http://schemas.openxmlformats.org/drawingml/2006/main">
-            <a:pPr>
-              <a:lnSpc>
-                <a:spcPct val="100000"/>
-              </a:lnSpc>
-              <a:buNone/>
-              <a:defRPr sz="1575" b="1" i="0">
-                <a:solidFill>
-                  <a:srgbClr val="FFFFFF"/>
-                </a:solidFill>
-              </a:defRPr>
-            </a:pPr>
-            <a:r>
-              <a:rPr sz="1575" b="1" i="0">
-                <a:solidFill>
-                  <a:srgbClr val="FFFFFF"/>
-                </a:solidFill>
-              </a:rPr>
-              <a:t>BASE_URL set</a:t>
-            </a:r>
-          </a:p>
-        </p:txBody>
-      </p:sp>
-      <p:sp>
-        <p:nvSpPr>
-          <p:cNvPr id="13" name="">
-            <a:extLst xmlns:a="http://schemas.openxmlformats.org/drawingml/2006/main">
-              <a:ext uri="{FF2B5EF4-FFF2-40B4-BE49-F238E27FC236}">
-                <a16:creationId xmlns:a16="http://schemas.microsoft.com/office/drawing/2014/main" id="{0A4AAE1B-EC30-40E1-8AB5-D4989F4CAD1F}"/>
-              </a:ext>
-            </a:extLst>
-          </p:cNvPr>
-          <p:cNvSpPr>
-            <a:spLocks xmlns:a="http://schemas.openxmlformats.org/drawingml/2006/main" noGrp="1"/>
-          </p:cNvSpPr>
-          <p:nvPr/>
-        </p:nvSpPr>
-        <p:spPr>
-          <a:xfrm xmlns:a="http://schemas.openxmlformats.org/drawingml/2006/main">
-            <a:off x="11925300" y="6496050"/>
-            <a:ext cx="3733800" cy="533400"/>
-          </a:xfrm>
-          <a:prstGeom xmlns:a="http://schemas.openxmlformats.org/drawingml/2006/main" prst="rect">
-            <a:avLst/>
-          </a:prstGeom>
-        </p:spPr>
-        <p:txBody>
-          <a:bodyPr xmlns:a="http://schemas.openxmlformats.org/drawingml/2006/main" lIns="0" tIns="0" rIns="0" bIns="0"/>
-          <a:lstStyle xmlns:a="http://schemas.openxmlformats.org/drawingml/2006/main"/>
-          <a:p xmlns:a="http://schemas.openxmlformats.org/drawingml/2006/main">
-            <a:pPr>
-              <a:lnSpc>
-                <a:spcPct val="100000"/>
-              </a:lnSpc>
-              <a:buNone/>
-              <a:defRPr sz="1800" b="0" i="0">
-                <a:solidFill>
-                  <a:srgbClr val="596579"/>
-                </a:solidFill>
-              </a:defRPr>
-            </a:pPr>
-            <a:r>
-              <a:rPr sz="1800" b="0" i="0">
-                <a:solidFill>
-                  <a:srgbClr val="596579"/>
-                </a:solidFill>
-              </a:rPr>
-              <a:t>Playwright skips local server startup.</a:t>
-            </a:r>
-          </a:p>
-        </p:txBody>
-      </p:sp>
-      <p:sp>
-        <p:nvSpPr>
-          <p:cNvPr id="14" name="">
-            <a:extLst xmlns:a="http://schemas.openxmlformats.org/drawingml/2006/main">
-              <a:ext uri="{FF2B5EF4-FFF2-40B4-BE49-F238E27FC236}">
-                <a16:creationId xmlns:a16="http://schemas.microsoft.com/office/drawing/2014/main" id="{A752FBEE-806E-4519-9576-3F3E4E5B1C45}"/>
+              <a:t>API server listening at http://127.0.0.1:3774</a:t>
+            </a:r>
+          </a:p>
+          <a:p xmlns:a="http://schemas.openxmlformats.org/drawingml/2006/main">
+            <a:pPr>
+              <a:lnSpc>
+                <a:spcPct val="118000"/>
+              </a:lnSpc>
+              <a:buNone/>
+              <a:defRPr sz="1875" b="0" i="0">
+                <a:solidFill>
+                  <a:srgbClr val="D1E7FF"/>
+                </a:solidFill>
+              </a:defRPr>
+            </a:pPr>
+            <a:r>
+              <a:rPr sz="1875" b="0" i="0">
+                <a:solidFill>
+                  <a:srgbClr val="D1E7FF"/>
+                </a:solidFill>
+              </a:rPr>
+              <a:t>3 passed</a:t>
+            </a:r>
+          </a:p>
+        </p:txBody>
+      </p:sp>
+      <p:sp>
+        <p:nvSpPr>
+          <p:cNvPr id="25" name="">
+            <a:extLst xmlns:a="http://schemas.openxmlformats.org/drawingml/2006/main">
+              <a:ext uri="{FF2B5EF4-FFF2-40B4-BE49-F238E27FC236}">
+                <a16:creationId xmlns:a16="http://schemas.microsoft.com/office/drawing/2014/main" id="{24778F89-958B-43D0-A12F-83D8A9603394}"/>
               </a:ext>
             </a:extLst>
           </p:cNvPr>
@@ -4081,7 +4484,7 @@
                   <a:srgbClr val="8B7D68"/>
                 </a:solidFill>
               </a:rPr>
-              <a:t>Spec-driven API test automation learning project</a:t>
+              <a:t>Playwright webServer handles local startup, so learners do not need a second terminal.</a:t>
             </a:r>
           </a:p>
         </p:txBody>
@@ -4089,7 +4492,7 @@
     </p:spTree>
     <p:extLst>
       <p:ext uri="{BB962C8B-B14F-4D97-AF65-F5344CB8AC3E}">
-        <p14:creationId xmlns:p14="http://schemas.microsoft.com/office/powerpoint/2010/main" val="958736633"/>
+        <p14:creationId xmlns:p14="http://schemas.microsoft.com/office/powerpoint/2010/main" val="1734089726"/>
       </p:ext>
     </p:extLst>
   </p:cSld>
@@ -4113,7 +4516,7 @@
           <p:cNvPr id="1" name="slide-bg">
             <a:extLst xmlns:a="http://schemas.openxmlformats.org/drawingml/2006/main">
               <a:ext uri="{FF2B5EF4-FFF2-40B4-BE49-F238E27FC236}">
-                <a16:creationId xmlns:a16="http://schemas.microsoft.com/office/drawing/2014/main" id="{3C18D240-5351-4997-BFBB-3D8F8DC50F5B}"/>
+                <a16:creationId xmlns:a16="http://schemas.microsoft.com/office/drawing/2014/main" id="{358D8D61-F5EC-4D3D-BE2D-CC0EB1B86110}"/>
               </a:ext>
             </a:extLst>
           </p:cNvPr>
@@ -4140,7 +4543,7 @@
           <p:cNvPr id="2" name="slide-title">
             <a:extLst xmlns:a="http://schemas.openxmlformats.org/drawingml/2006/main">
               <a:ext uri="{FF2B5EF4-FFF2-40B4-BE49-F238E27FC236}">
-                <a16:creationId xmlns:a16="http://schemas.microsoft.com/office/drawing/2014/main" id="{E8C114ED-5714-4B83-B077-BF77B8B5FBDA}"/>
+                <a16:creationId xmlns:a16="http://schemas.microsoft.com/office/drawing/2014/main" id="{FBA04D1B-CAC5-421B-9E3D-8B686BC4C8B2}"/>
               </a:ext>
             </a:extLst>
           </p:cNvPr>
@@ -4152,7 +4555,7 @@
         <p:spPr>
           <a:xfrm xmlns:a="http://schemas.openxmlformats.org/drawingml/2006/main">
             <a:off x="819150" y="533400"/>
-            <a:ext cx="7677150" cy="1257300"/>
+            <a:ext cx="4876800" cy="628650"/>
           </a:xfrm>
           <a:prstGeom xmlns:a="http://schemas.openxmlformats.org/drawingml/2006/main" prst="rect">
             <a:avLst/>
@@ -4179,7 +4582,7 @@
                   <a:srgbClr val="172033"/>
                 </a:solidFill>
               </a:rPr>
-              <a:t>Limits and next improvements</a:t>
+              <a:t>Provided API mode</a:t>
             </a:r>
           </a:p>
         </p:txBody>
@@ -4189,19 +4592,19 @@
           <p:cNvPr id="3" name="slide-subtitle">
             <a:extLst xmlns:a="http://schemas.openxmlformats.org/drawingml/2006/main">
               <a:ext uri="{FF2B5EF4-FFF2-40B4-BE49-F238E27FC236}">
-                <a16:creationId xmlns:a16="http://schemas.microsoft.com/office/drawing/2014/main" id="{9EB023CB-3A99-4CC3-B0BB-352A8ADB5B4F}"/>
-              </a:ext>
-            </a:extLst>
-          </p:cNvPr>
-          <p:cNvSpPr>
-            <a:spLocks xmlns:a="http://schemas.openxmlformats.org/drawingml/2006/main" noGrp="1"/>
-          </p:cNvSpPr>
-          <p:nvPr/>
-        </p:nvSpPr>
-        <p:spPr>
-          <a:xfrm xmlns:a="http://schemas.openxmlformats.org/drawingml/2006/main">
-            <a:off x="819150" y="1943100"/>
-            <a:ext cx="8134350" cy="342900"/>
+                <a16:creationId xmlns:a16="http://schemas.microsoft.com/office/drawing/2014/main" id="{40988C02-37C2-4C67-A1D4-BC17B2FD1AF2}"/>
+              </a:ext>
+            </a:extLst>
+          </p:cNvPr>
+          <p:cNvSpPr>
+            <a:spLocks xmlns:a="http://schemas.openxmlformats.org/drawingml/2006/main" noGrp="1"/>
+          </p:cNvSpPr>
+          <p:nvPr/>
+        </p:nvSpPr>
+        <p:spPr>
+          <a:xfrm xmlns:a="http://schemas.openxmlformats.org/drawingml/2006/main">
+            <a:off x="819150" y="1314450"/>
+            <a:ext cx="8001000" cy="666750"/>
           </a:xfrm>
           <a:prstGeom xmlns:a="http://schemas.openxmlformats.org/drawingml/2006/main" prst="rect">
             <a:avLst/>
@@ -4228,7 +4631,7 @@
                   <a:srgbClr val="596579"/>
                 </a:solidFill>
               </a:rPr>
-              <a:t>The current generator is intentionally teachable. The next upgrades are clear.</a:t>
+              <a:t>BASE_URL switches generated tests from demo mode to target-API mode.</a:t>
             </a:r>
           </a:p>
         </p:txBody>
@@ -4238,19 +4641,19 @@
           <p:cNvPr id="4" name="">
             <a:extLst xmlns:a="http://schemas.openxmlformats.org/drawingml/2006/main">
               <a:ext uri="{FF2B5EF4-FFF2-40B4-BE49-F238E27FC236}">
-                <a16:creationId xmlns:a16="http://schemas.microsoft.com/office/drawing/2014/main" id="{2EE367C5-37C7-4AD8-81DE-7F0695F47DC3}"/>
-              </a:ext>
-            </a:extLst>
-          </p:cNvPr>
-          <p:cNvSpPr>
-            <a:spLocks xmlns:a="http://schemas.openxmlformats.org/drawingml/2006/main" noGrp="1"/>
-          </p:cNvSpPr>
-          <p:nvPr/>
-        </p:nvSpPr>
-        <p:spPr>
-          <a:xfrm xmlns:a="http://schemas.openxmlformats.org/drawingml/2006/main">
-            <a:off x="819150" y="3581400"/>
-            <a:ext cx="8039100" cy="495300"/>
+                <a16:creationId xmlns:a16="http://schemas.microsoft.com/office/drawing/2014/main" id="{5B0AD23C-81C2-4366-B138-75C310E58446}"/>
+              </a:ext>
+            </a:extLst>
+          </p:cNvPr>
+          <p:cNvSpPr>
+            <a:spLocks xmlns:a="http://schemas.openxmlformats.org/drawingml/2006/main" noGrp="1"/>
+          </p:cNvSpPr>
+          <p:nvPr/>
+        </p:nvSpPr>
+        <p:spPr>
+          <a:xfrm xmlns:a="http://schemas.openxmlformats.org/drawingml/2006/main">
+            <a:off x="819150" y="4000500"/>
+            <a:ext cx="8077200" cy="419100"/>
           </a:xfrm>
           <a:prstGeom xmlns:a="http://schemas.openxmlformats.org/drawingml/2006/main" prst="rect">
             <a:avLst/>
@@ -4265,560 +4668,229 @@
                 <a:spcPct val="100000"/>
               </a:lnSpc>
               <a:buNone/>
-              <a:defRPr sz="3150" b="1" i="0">
-                <a:solidFill>
-                  <a:srgbClr val="F97316"/>
-                </a:solidFill>
-              </a:defRPr>
-            </a:pPr>
-            <a:r>
-              <a:rPr sz="3150" b="1" i="0">
-                <a:solidFill>
-                  <a:srgbClr val="F97316"/>
-                </a:solidFill>
-              </a:rPr>
-              <a:t>Current limits</a:t>
-            </a:r>
-          </a:p>
-        </p:txBody>
-      </p:sp>
-      <p:sp>
-        <p:nvSpPr>
-          <p:cNvPr id="5" name="">
-            <a:extLst xmlns:a="http://schemas.openxmlformats.org/drawingml/2006/main">
-              <a:ext uri="{FF2B5EF4-FFF2-40B4-BE49-F238E27FC236}">
-                <a16:creationId xmlns:a16="http://schemas.microsoft.com/office/drawing/2014/main" id="{69C11E99-067A-453A-8416-97F75C677F81}"/>
-              </a:ext>
-            </a:extLst>
-          </p:cNvPr>
-          <p:cNvSpPr>
-            <a:spLocks xmlns:a="http://schemas.openxmlformats.org/drawingml/2006/main" noGrp="1"/>
-          </p:cNvSpPr>
-          <p:nvPr/>
-        </p:nvSpPr>
-        <p:spPr>
-          <a:xfrm xmlns:a="http://schemas.openxmlformats.org/drawingml/2006/main">
-            <a:off x="819150" y="4457700"/>
-            <a:ext cx="800100" cy="838200"/>
-          </a:xfrm>
-          <a:prstGeom xmlns:a="http://schemas.openxmlformats.org/drawingml/2006/main" prst="rect">
-            <a:avLst/>
-          </a:prstGeom>
-        </p:spPr>
-        <p:txBody>
-          <a:bodyPr xmlns:a="http://schemas.openxmlformats.org/drawingml/2006/main" lIns="0" tIns="0" rIns="0" bIns="0"/>
-          <a:lstStyle xmlns:a="http://schemas.openxmlformats.org/drawingml/2006/main"/>
-          <a:p xmlns:a="http://schemas.openxmlformats.org/drawingml/2006/main">
-            <a:pPr>
-              <a:lnSpc>
-                <a:spcPct val="100000"/>
-              </a:lnSpc>
-              <a:buNone/>
-              <a:defRPr sz="5400" b="1" i="0">
-                <a:solidFill>
-                  <a:srgbClr val="F97316"/>
-                </a:solidFill>
-              </a:defRPr>
-            </a:pPr>
-            <a:r>
-              <a:rPr sz="5400" b="1" i="0">
-                <a:solidFill>
-                  <a:srgbClr val="F97316"/>
-                </a:solidFill>
-              </a:rPr>
-              <a:t>L1</a:t>
-            </a:r>
-          </a:p>
-        </p:txBody>
-      </p:sp>
-      <p:sp>
-        <p:nvSpPr>
-          <p:cNvPr id="6" name="">
-            <a:extLst xmlns:a="http://schemas.openxmlformats.org/drawingml/2006/main">
-              <a:ext uri="{FF2B5EF4-FFF2-40B4-BE49-F238E27FC236}">
-                <a16:creationId xmlns:a16="http://schemas.microsoft.com/office/drawing/2014/main" id="{DB681357-79DE-43DD-8CF8-52923C222259}"/>
-              </a:ext>
-            </a:extLst>
-          </p:cNvPr>
-          <p:cNvSpPr>
-            <a:spLocks xmlns:a="http://schemas.openxmlformats.org/drawingml/2006/main" noGrp="1"/>
-          </p:cNvSpPr>
-          <p:nvPr/>
-        </p:nvSpPr>
-        <p:spPr>
-          <a:xfrm xmlns:a="http://schemas.openxmlformats.org/drawingml/2006/main">
-            <a:off x="1866900" y="4495800"/>
-            <a:ext cx="6991350" cy="400050"/>
-          </a:xfrm>
-          <a:prstGeom xmlns:a="http://schemas.openxmlformats.org/drawingml/2006/main" prst="rect">
-            <a:avLst/>
-          </a:prstGeom>
-        </p:spPr>
-        <p:txBody>
-          <a:bodyPr xmlns:a="http://schemas.openxmlformats.org/drawingml/2006/main" lIns="0" tIns="0" rIns="0" bIns="0"/>
-          <a:lstStyle xmlns:a="http://schemas.openxmlformats.org/drawingml/2006/main"/>
-          <a:p xmlns:a="http://schemas.openxmlformats.org/drawingml/2006/main">
-            <a:pPr>
-              <a:lnSpc>
-                <a:spcPct val="100000"/>
-              </a:lnSpc>
-              <a:buNone/>
-              <a:defRPr sz="2550" b="1" i="0">
-                <a:solidFill>
-                  <a:srgbClr val="172033"/>
-                </a:solidFill>
-              </a:defRPr>
-            </a:pPr>
-            <a:r>
-              <a:rPr sz="2550" b="1" i="0">
-                <a:solidFill>
-                  <a:srgbClr val="172033"/>
-                </a:solidFill>
-              </a:rPr>
-              <a:t>$ref parameters</a:t>
-            </a:r>
-          </a:p>
-        </p:txBody>
-      </p:sp>
-      <p:sp>
-        <p:nvSpPr>
-          <p:cNvPr id="7" name="">
-            <a:extLst xmlns:a="http://schemas.openxmlformats.org/drawingml/2006/main">
-              <a:ext uri="{FF2B5EF4-FFF2-40B4-BE49-F238E27FC236}">
-                <a16:creationId xmlns:a16="http://schemas.microsoft.com/office/drawing/2014/main" id="{8955CFB7-790E-4ABD-9058-9BF81D3C445F}"/>
-              </a:ext>
-            </a:extLst>
-          </p:cNvPr>
-          <p:cNvSpPr>
-            <a:spLocks xmlns:a="http://schemas.openxmlformats.org/drawingml/2006/main" noGrp="1"/>
-          </p:cNvSpPr>
-          <p:nvPr/>
-        </p:nvSpPr>
-        <p:spPr>
-          <a:xfrm xmlns:a="http://schemas.openxmlformats.org/drawingml/2006/main">
-            <a:off x="1866900" y="4972050"/>
-            <a:ext cx="1885950" cy="304800"/>
-          </a:xfrm>
-          <a:prstGeom xmlns:a="http://schemas.openxmlformats.org/drawingml/2006/main" prst="rect">
-            <a:avLst/>
-          </a:prstGeom>
-        </p:spPr>
-        <p:txBody>
-          <a:bodyPr xmlns:a="http://schemas.openxmlformats.org/drawingml/2006/main" lIns="0" tIns="0" rIns="0" bIns="0"/>
-          <a:lstStyle xmlns:a="http://schemas.openxmlformats.org/drawingml/2006/main"/>
-          <a:p xmlns:a="http://schemas.openxmlformats.org/drawingml/2006/main">
-            <a:pPr>
-              <a:lnSpc>
-                <a:spcPct val="106000"/>
-              </a:lnSpc>
-              <a:buNone/>
-              <a:defRPr sz="1800" b="0" i="0">
-                <a:solidFill>
-                  <a:srgbClr val="596579"/>
-                </a:solidFill>
-              </a:defRPr>
-            </a:pPr>
-            <a:r>
-              <a:rPr sz="1800" b="0" i="0">
-                <a:solidFill>
-                  <a:srgbClr val="596579"/>
-                </a:solidFill>
-              </a:rPr>
-              <a:t>Not expanded yet.</a:t>
-            </a:r>
-          </a:p>
-        </p:txBody>
-      </p:sp>
-      <p:sp>
-        <p:nvSpPr>
-          <p:cNvPr id="8" name="">
-            <a:extLst xmlns:a="http://schemas.openxmlformats.org/drawingml/2006/main">
-              <a:ext uri="{FF2B5EF4-FFF2-40B4-BE49-F238E27FC236}">
-                <a16:creationId xmlns:a16="http://schemas.microsoft.com/office/drawing/2014/main" id="{5CB59F32-63E6-4DCA-9EB3-9075C98D704C}"/>
-              </a:ext>
-            </a:extLst>
-          </p:cNvPr>
-          <p:cNvSpPr>
-            <a:spLocks xmlns:a="http://schemas.openxmlformats.org/drawingml/2006/main" noGrp="1"/>
-          </p:cNvSpPr>
-          <p:nvPr/>
-        </p:nvSpPr>
-        <p:spPr>
-          <a:xfrm xmlns:a="http://schemas.openxmlformats.org/drawingml/2006/main">
-            <a:off x="819150" y="5867400"/>
-            <a:ext cx="800100" cy="838200"/>
-          </a:xfrm>
-          <a:prstGeom xmlns:a="http://schemas.openxmlformats.org/drawingml/2006/main" prst="rect">
-            <a:avLst/>
-          </a:prstGeom>
-        </p:spPr>
-        <p:txBody>
-          <a:bodyPr xmlns:a="http://schemas.openxmlformats.org/drawingml/2006/main" lIns="0" tIns="0" rIns="0" bIns="0"/>
-          <a:lstStyle xmlns:a="http://schemas.openxmlformats.org/drawingml/2006/main"/>
-          <a:p xmlns:a="http://schemas.openxmlformats.org/drawingml/2006/main">
-            <a:pPr>
-              <a:lnSpc>
-                <a:spcPct val="100000"/>
-              </a:lnSpc>
-              <a:buNone/>
-              <a:defRPr sz="5400" b="1" i="0">
-                <a:solidFill>
-                  <a:srgbClr val="F97316"/>
-                </a:solidFill>
-              </a:defRPr>
-            </a:pPr>
-            <a:r>
-              <a:rPr sz="5400" b="1" i="0">
-                <a:solidFill>
-                  <a:srgbClr val="F97316"/>
-                </a:solidFill>
-              </a:rPr>
-              <a:t>L2</a:t>
-            </a:r>
-          </a:p>
-        </p:txBody>
-      </p:sp>
-      <p:sp>
-        <p:nvSpPr>
-          <p:cNvPr id="9" name="">
-            <a:extLst xmlns:a="http://schemas.openxmlformats.org/drawingml/2006/main">
-              <a:ext uri="{FF2B5EF4-FFF2-40B4-BE49-F238E27FC236}">
-                <a16:creationId xmlns:a16="http://schemas.microsoft.com/office/drawing/2014/main" id="{EFE04E46-4440-49AE-8FBE-F7014DA5BF4A}"/>
-              </a:ext>
-            </a:extLst>
-          </p:cNvPr>
-          <p:cNvSpPr>
-            <a:spLocks xmlns:a="http://schemas.openxmlformats.org/drawingml/2006/main" noGrp="1"/>
-          </p:cNvSpPr>
-          <p:nvPr/>
-        </p:nvSpPr>
-        <p:spPr>
-          <a:xfrm xmlns:a="http://schemas.openxmlformats.org/drawingml/2006/main">
-            <a:off x="1866900" y="5772150"/>
-            <a:ext cx="6991350" cy="400050"/>
-          </a:xfrm>
-          <a:prstGeom xmlns:a="http://schemas.openxmlformats.org/drawingml/2006/main" prst="rect">
-            <a:avLst/>
-          </a:prstGeom>
-        </p:spPr>
-        <p:txBody>
-          <a:bodyPr xmlns:a="http://schemas.openxmlformats.org/drawingml/2006/main" lIns="0" tIns="0" rIns="0" bIns="0"/>
-          <a:lstStyle xmlns:a="http://schemas.openxmlformats.org/drawingml/2006/main"/>
-          <a:p xmlns:a="http://schemas.openxmlformats.org/drawingml/2006/main">
-            <a:pPr>
-              <a:lnSpc>
-                <a:spcPct val="100000"/>
-              </a:lnSpc>
-              <a:buNone/>
-              <a:defRPr sz="2550" b="1" i="0">
-                <a:solidFill>
-                  <a:srgbClr val="172033"/>
-                </a:solidFill>
-              </a:defRPr>
-            </a:pPr>
-            <a:r>
-              <a:rPr sz="2550" b="1" i="0">
-                <a:solidFill>
-                  <a:srgbClr val="172033"/>
-                </a:solidFill>
-              </a:rPr>
-              <a:t>Schema-only bodies</a:t>
-            </a:r>
-          </a:p>
-        </p:txBody>
-      </p:sp>
-      <p:sp>
-        <p:nvSpPr>
-          <p:cNvPr id="10" name="">
-            <a:extLst xmlns:a="http://schemas.openxmlformats.org/drawingml/2006/main">
-              <a:ext uri="{FF2B5EF4-FFF2-40B4-BE49-F238E27FC236}">
-                <a16:creationId xmlns:a16="http://schemas.microsoft.com/office/drawing/2014/main" id="{8F8D430F-D49D-4320-B4F2-1E9C1F94925E}"/>
-              </a:ext>
-            </a:extLst>
-          </p:cNvPr>
-          <p:cNvSpPr>
-            <a:spLocks xmlns:a="http://schemas.openxmlformats.org/drawingml/2006/main" noGrp="1"/>
-          </p:cNvSpPr>
-          <p:nvPr/>
-        </p:nvSpPr>
-        <p:spPr>
-          <a:xfrm xmlns:a="http://schemas.openxmlformats.org/drawingml/2006/main">
-            <a:off x="1866900" y="6229350"/>
-            <a:ext cx="2686050" cy="590550"/>
-          </a:xfrm>
-          <a:prstGeom xmlns:a="http://schemas.openxmlformats.org/drawingml/2006/main" prst="rect">
-            <a:avLst/>
-          </a:prstGeom>
-        </p:spPr>
-        <p:txBody>
-          <a:bodyPr xmlns:a="http://schemas.openxmlformats.org/drawingml/2006/main" lIns="0" tIns="0" rIns="0" bIns="0"/>
-          <a:lstStyle xmlns:a="http://schemas.openxmlformats.org/drawingml/2006/main"/>
-          <a:p xmlns:a="http://schemas.openxmlformats.org/drawingml/2006/main">
-            <a:pPr>
-              <a:lnSpc>
-                <a:spcPct val="106000"/>
-              </a:lnSpc>
-              <a:buNone/>
-              <a:defRPr sz="1800" b="0" i="0">
-                <a:solidFill>
-                  <a:srgbClr val="596579"/>
-                </a:solidFill>
-              </a:defRPr>
-            </a:pPr>
-            <a:r>
-              <a:rPr sz="1800" b="0" i="0">
-                <a:solidFill>
-                  <a:srgbClr val="596579"/>
-                </a:solidFill>
-              </a:rPr>
-              <a:t>Produce status-only tests.</a:t>
-            </a:r>
-          </a:p>
-        </p:txBody>
-      </p:sp>
-      <p:sp>
-        <p:nvSpPr>
-          <p:cNvPr id="11" name="">
-            <a:extLst xmlns:a="http://schemas.openxmlformats.org/drawingml/2006/main">
-              <a:ext uri="{FF2B5EF4-FFF2-40B4-BE49-F238E27FC236}">
-                <a16:creationId xmlns:a16="http://schemas.microsoft.com/office/drawing/2014/main" id="{3E9E8ED3-6739-4039-864E-EEDFE05605FE}"/>
-              </a:ext>
-            </a:extLst>
-          </p:cNvPr>
-          <p:cNvSpPr>
-            <a:spLocks xmlns:a="http://schemas.openxmlformats.org/drawingml/2006/main" noGrp="1"/>
-          </p:cNvSpPr>
-          <p:nvPr/>
-        </p:nvSpPr>
-        <p:spPr>
-          <a:xfrm xmlns:a="http://schemas.openxmlformats.org/drawingml/2006/main">
-            <a:off x="819150" y="7277100"/>
-            <a:ext cx="800100" cy="838200"/>
-          </a:xfrm>
-          <a:prstGeom xmlns:a="http://schemas.openxmlformats.org/drawingml/2006/main" prst="rect">
-            <a:avLst/>
-          </a:prstGeom>
-        </p:spPr>
-        <p:txBody>
-          <a:bodyPr xmlns:a="http://schemas.openxmlformats.org/drawingml/2006/main" lIns="0" tIns="0" rIns="0" bIns="0"/>
-          <a:lstStyle xmlns:a="http://schemas.openxmlformats.org/drawingml/2006/main"/>
-          <a:p xmlns:a="http://schemas.openxmlformats.org/drawingml/2006/main">
-            <a:pPr>
-              <a:lnSpc>
-                <a:spcPct val="100000"/>
-              </a:lnSpc>
-              <a:buNone/>
-              <a:defRPr sz="5400" b="1" i="0">
-                <a:solidFill>
-                  <a:srgbClr val="F97316"/>
-                </a:solidFill>
-              </a:defRPr>
-            </a:pPr>
-            <a:r>
-              <a:rPr sz="5400" b="1" i="0">
-                <a:solidFill>
-                  <a:srgbClr val="F97316"/>
-                </a:solidFill>
-              </a:rPr>
-              <a:t>L3</a:t>
-            </a:r>
-          </a:p>
-        </p:txBody>
-      </p:sp>
-      <p:sp>
-        <p:nvSpPr>
-          <p:cNvPr id="12" name="">
-            <a:extLst xmlns:a="http://schemas.openxmlformats.org/drawingml/2006/main">
-              <a:ext uri="{FF2B5EF4-FFF2-40B4-BE49-F238E27FC236}">
-                <a16:creationId xmlns:a16="http://schemas.microsoft.com/office/drawing/2014/main" id="{C2F1D024-30D7-4506-9208-235608AFCF6E}"/>
-              </a:ext>
-            </a:extLst>
-          </p:cNvPr>
-          <p:cNvSpPr>
-            <a:spLocks xmlns:a="http://schemas.openxmlformats.org/drawingml/2006/main" noGrp="1"/>
-          </p:cNvSpPr>
-          <p:nvPr/>
-        </p:nvSpPr>
-        <p:spPr>
-          <a:xfrm xmlns:a="http://schemas.openxmlformats.org/drawingml/2006/main">
-            <a:off x="1866900" y="7315200"/>
-            <a:ext cx="6991350" cy="400050"/>
-          </a:xfrm>
-          <a:prstGeom xmlns:a="http://schemas.openxmlformats.org/drawingml/2006/main" prst="rect">
-            <a:avLst/>
-          </a:prstGeom>
-        </p:spPr>
-        <p:txBody>
-          <a:bodyPr xmlns:a="http://schemas.openxmlformats.org/drawingml/2006/main" lIns="0" tIns="0" rIns="0" bIns="0"/>
-          <a:lstStyle xmlns:a="http://schemas.openxmlformats.org/drawingml/2006/main"/>
-          <a:p xmlns:a="http://schemas.openxmlformats.org/drawingml/2006/main">
-            <a:pPr>
-              <a:lnSpc>
-                <a:spcPct val="100000"/>
-              </a:lnSpc>
-              <a:buNone/>
-              <a:defRPr sz="2550" b="1" i="0">
-                <a:solidFill>
-                  <a:srgbClr val="172033"/>
-                </a:solidFill>
-              </a:defRPr>
-            </a:pPr>
-            <a:r>
-              <a:rPr sz="2550" b="1" i="0">
-                <a:solidFill>
-                  <a:srgbClr val="172033"/>
-                </a:solidFill>
-              </a:rPr>
-              <a:t>Auth</a:t>
-            </a:r>
-          </a:p>
-        </p:txBody>
-      </p:sp>
-      <p:sp>
-        <p:nvSpPr>
-          <p:cNvPr id="13" name="">
-            <a:extLst xmlns:a="http://schemas.openxmlformats.org/drawingml/2006/main">
-              <a:ext uri="{FF2B5EF4-FFF2-40B4-BE49-F238E27FC236}">
-                <a16:creationId xmlns:a16="http://schemas.microsoft.com/office/drawing/2014/main" id="{143AC20E-CF5B-4F7D-A8B8-3578E03C2AAA}"/>
-              </a:ext>
-            </a:extLst>
-          </p:cNvPr>
-          <p:cNvSpPr>
-            <a:spLocks xmlns:a="http://schemas.openxmlformats.org/drawingml/2006/main" noGrp="1"/>
-          </p:cNvSpPr>
-          <p:nvPr/>
-        </p:nvSpPr>
-        <p:spPr>
-          <a:xfrm xmlns:a="http://schemas.openxmlformats.org/drawingml/2006/main">
-            <a:off x="1866900" y="7791450"/>
-            <a:ext cx="3676650" cy="304800"/>
-          </a:xfrm>
-          <a:prstGeom xmlns:a="http://schemas.openxmlformats.org/drawingml/2006/main" prst="rect">
-            <a:avLst/>
-          </a:prstGeom>
-        </p:spPr>
-        <p:txBody>
-          <a:bodyPr xmlns:a="http://schemas.openxmlformats.org/drawingml/2006/main" lIns="0" tIns="0" rIns="0" bIns="0"/>
-          <a:lstStyle xmlns:a="http://schemas.openxmlformats.org/drawingml/2006/main"/>
-          <a:p xmlns:a="http://schemas.openxmlformats.org/drawingml/2006/main">
-            <a:pPr>
-              <a:lnSpc>
-                <a:spcPct val="106000"/>
-              </a:lnSpc>
-              <a:buNone/>
-              <a:defRPr sz="1800" b="0" i="0">
-                <a:solidFill>
-                  <a:srgbClr val="596579"/>
-                </a:solidFill>
-              </a:defRPr>
-            </a:pPr>
-            <a:r>
-              <a:rPr sz="1800" b="0" i="0">
-                <a:solidFill>
-                  <a:srgbClr val="596579"/>
-                </a:solidFill>
-              </a:rPr>
-              <a:t>Configured separately in Playwright.</a:t>
-            </a:r>
-          </a:p>
-        </p:txBody>
-      </p:sp>
-      <p:sp>
-        <p:nvSpPr>
-          <p:cNvPr id="14" name="">
-            <a:extLst xmlns:a="http://schemas.openxmlformats.org/drawingml/2006/main">
-              <a:ext uri="{FF2B5EF4-FFF2-40B4-BE49-F238E27FC236}">
-                <a16:creationId xmlns:a16="http://schemas.microsoft.com/office/drawing/2014/main" id="{77A54C39-371C-4681-9614-FFB9873F97A3}"/>
-              </a:ext>
-            </a:extLst>
-          </p:cNvPr>
-          <p:cNvSpPr>
-            <a:spLocks xmlns:a="http://schemas.openxmlformats.org/drawingml/2006/main" noGrp="1"/>
-          </p:cNvSpPr>
-          <p:nvPr/>
-        </p:nvSpPr>
-        <p:spPr>
-          <a:xfrm xmlns:a="http://schemas.openxmlformats.org/drawingml/2006/main">
-            <a:off x="9429750" y="4248150"/>
-            <a:ext cx="8039100" cy="495300"/>
-          </a:xfrm>
-          <a:prstGeom xmlns:a="http://schemas.openxmlformats.org/drawingml/2006/main" prst="rect">
-            <a:avLst/>
-          </a:prstGeom>
-        </p:spPr>
-        <p:txBody>
-          <a:bodyPr xmlns:a="http://schemas.openxmlformats.org/drawingml/2006/main" lIns="0" tIns="0" rIns="0" bIns="0"/>
-          <a:lstStyle xmlns:a="http://schemas.openxmlformats.org/drawingml/2006/main"/>
-          <a:p xmlns:a="http://schemas.openxmlformats.org/drawingml/2006/main">
-            <a:pPr>
-              <a:lnSpc>
-                <a:spcPct val="100000"/>
-              </a:lnSpc>
-              <a:buNone/>
-              <a:defRPr sz="3150" b="1" i="0">
+              <a:defRPr sz="2700" b="1" i="0">
                 <a:solidFill>
                   <a:srgbClr val="2F7D32"/>
                 </a:solidFill>
               </a:defRPr>
             </a:pPr>
             <a:r>
-              <a:rPr sz="3150" b="1" i="0">
+              <a:rPr sz="2700" b="1" i="0">
                 <a:solidFill>
                   <a:srgbClr val="2F7D32"/>
                 </a:solidFill>
               </a:rPr>
-              <a:t>Upgrade path</a:t>
-            </a:r>
-          </a:p>
-        </p:txBody>
-      </p:sp>
-      <p:sp>
-        <p:nvSpPr>
-          <p:cNvPr id="15" name="">
-            <a:extLst xmlns:a="http://schemas.openxmlformats.org/drawingml/2006/main">
-              <a:ext uri="{FF2B5EF4-FFF2-40B4-BE49-F238E27FC236}">
-                <a16:creationId xmlns:a16="http://schemas.microsoft.com/office/drawing/2014/main" id="{CFE3F9C4-87AA-4432-B072-C651382058B8}"/>
-              </a:ext>
-            </a:extLst>
-          </p:cNvPr>
-          <p:cNvSpPr>
-            <a:spLocks xmlns:a="http://schemas.openxmlformats.org/drawingml/2006/main" noGrp="1"/>
-          </p:cNvSpPr>
-          <p:nvPr/>
-        </p:nvSpPr>
-        <p:spPr>
-          <a:xfrm xmlns:a="http://schemas.openxmlformats.org/drawingml/2006/main">
-            <a:off x="9429750" y="4953000"/>
-            <a:ext cx="1714500" cy="895350"/>
+              <a:t>1. Generate from any spec</a:t>
+            </a:r>
+          </a:p>
+        </p:txBody>
+      </p:sp>
+      <p:sp>
+        <p:nvSpPr>
+          <p:cNvPr id="5" name="code-block">
+            <a:extLst xmlns:a="http://schemas.openxmlformats.org/drawingml/2006/main">
+              <a:ext uri="{FF2B5EF4-FFF2-40B4-BE49-F238E27FC236}">
+                <a16:creationId xmlns:a16="http://schemas.microsoft.com/office/drawing/2014/main" id="{245C5462-8FFC-40CB-9A03-D64067C4C8AE}"/>
+              </a:ext>
+            </a:extLst>
+          </p:cNvPr>
+          <p:cNvSpPr>
+            <a:spLocks xmlns:a="http://schemas.openxmlformats.org/drawingml/2006/main" noGrp="1"/>
+          </p:cNvSpPr>
+          <p:nvPr/>
+        </p:nvSpPr>
+        <p:spPr>
+          <a:xfrm xmlns:a="http://schemas.openxmlformats.org/drawingml/2006/main">
+            <a:off x="819150" y="4623626"/>
+            <a:ext cx="8067675" cy="2156612"/>
           </a:xfrm>
           <a:prstGeom xmlns:a="http://schemas.openxmlformats.org/drawingml/2006/main" prst="roundRect">
             <a:avLst>
-              <a:gd name="adj" fmla="val 25532"/>
+              <a:gd name="adj" fmla="val 8833"/>
             </a:avLst>
           </a:prstGeom>
           <a:solidFill xmlns:a="http://schemas.openxmlformats.org/drawingml/2006/main">
-            <a:srgbClr val="FFFFFF"/>
+            <a:srgbClr val="111827"/>
           </a:solidFill>
         </p:spPr>
       </p:sp>
       <p:sp>
         <p:nvSpPr>
-          <p:cNvPr id="16" name="">
-            <a:extLst xmlns:a="http://schemas.openxmlformats.org/drawingml/2006/main">
-              <a:ext uri="{FF2B5EF4-FFF2-40B4-BE49-F238E27FC236}">
-                <a16:creationId xmlns:a16="http://schemas.microsoft.com/office/drawing/2014/main" id="{04586BE1-15B9-485B-BE26-C9A61C3553AB}"/>
-              </a:ext>
-            </a:extLst>
-          </p:cNvPr>
-          <p:cNvSpPr>
-            <a:spLocks xmlns:a="http://schemas.openxmlformats.org/drawingml/2006/main" noGrp="1"/>
-          </p:cNvSpPr>
-          <p:nvPr/>
-        </p:nvSpPr>
-        <p:spPr>
-          <a:xfrm xmlns:a="http://schemas.openxmlformats.org/drawingml/2006/main">
-            <a:off x="9601200" y="5257800"/>
-            <a:ext cx="1371600" cy="304800"/>
+          <p:cNvPr id="6" name="">
+            <a:extLst xmlns:a="http://schemas.openxmlformats.org/drawingml/2006/main">
+              <a:ext uri="{FF2B5EF4-FFF2-40B4-BE49-F238E27FC236}">
+                <a16:creationId xmlns:a16="http://schemas.microsoft.com/office/drawing/2014/main" id="{5FEF5151-3A1C-41E0-83FD-38E07D65DF00}"/>
+              </a:ext>
+            </a:extLst>
+          </p:cNvPr>
+          <p:cNvSpPr>
+            <a:spLocks xmlns:a="http://schemas.openxmlformats.org/drawingml/2006/main" noGrp="1"/>
+          </p:cNvSpPr>
+          <p:nvPr/>
+        </p:nvSpPr>
+        <p:spPr>
+          <a:xfrm xmlns:a="http://schemas.openxmlformats.org/drawingml/2006/main">
+            <a:off x="1085850" y="4857750"/>
+            <a:ext cx="7543800" cy="1714500"/>
+          </a:xfrm>
+          <a:prstGeom xmlns:a="http://schemas.openxmlformats.org/drawingml/2006/main" prst="rect">
+            <a:avLst/>
+          </a:prstGeom>
+        </p:spPr>
+        <p:txBody>
+          <a:bodyPr xmlns:a="http://schemas.openxmlformats.org/drawingml/2006/main" lIns="0" tIns="0" rIns="0" bIns="0"/>
+          <a:lstStyle xmlns:a="http://schemas.openxmlformats.org/drawingml/2006/main"/>
+          <a:p xmlns:a="http://schemas.openxmlformats.org/drawingml/2006/main">
+            <a:pPr>
+              <a:lnSpc>
+                <a:spcPct val="118000"/>
+              </a:lnSpc>
+              <a:buNone/>
+              <a:defRPr sz="1350" b="0" i="0">
+                <a:solidFill>
+                  <a:srgbClr val="D1E7FF"/>
+                </a:solidFill>
+              </a:defRPr>
+            </a:pPr>
+            <a:r>
+              <a:rPr sz="1350" b="0" i="0">
+                <a:solidFill>
+                  <a:srgbClr val="D1E7FF"/>
+                </a:solidFill>
+              </a:rPr>
+              <a:t>npm run generate:from-spec -- \</a:t>
+            </a:r>
+          </a:p>
+          <a:p xmlns:a="http://schemas.openxmlformats.org/drawingml/2006/main">
+            <a:pPr>
+              <a:lnSpc>
+                <a:spcPct val="118000"/>
+              </a:lnSpc>
+              <a:buNone/>
+              <a:defRPr sz="1350" b="0" i="0">
+                <a:solidFill>
+                  <a:srgbClr val="D1E7FF"/>
+                </a:solidFill>
+              </a:defRPr>
+            </a:pPr>
+            <a:r>
+              <a:rPr sz="1350" b="0" i="0">
+                <a:solidFill>
+                  <a:srgbClr val="D1E7FF"/>
+                </a:solidFill>
+              </a:rPr>
+              <a:t>  --spec ./path/to/openapi.yaml \</a:t>
+            </a:r>
+          </a:p>
+          <a:p xmlns:a="http://schemas.openxmlformats.org/drawingml/2006/main">
+            <a:pPr>
+              <a:lnSpc>
+                <a:spcPct val="118000"/>
+              </a:lnSpc>
+              <a:buNone/>
+              <a:defRPr sz="1350" b="0" i="0">
+                <a:solidFill>
+                  <a:srgbClr val="D1E7FF"/>
+                </a:solidFill>
+              </a:defRPr>
+            </a:pPr>
+            <a:r>
+              <a:rPr sz="1350" b="0" i="0">
+                <a:solidFill>
+                  <a:srgbClr val="D1E7FF"/>
+                </a:solidFill>
+              </a:rPr>
+              <a:t>  --output tests/generated/openapi.spec.ts</a:t>
+            </a:r>
+          </a:p>
+          <a:p xmlns:a="http://schemas.openxmlformats.org/drawingml/2006/main">
+            <a:r>
+              <a:t/>
+            </a:r>
+          </a:p>
+          <a:p xmlns:a="http://schemas.openxmlformats.org/drawingml/2006/main">
+            <a:pPr>
+              <a:lnSpc>
+                <a:spcPct val="118000"/>
+              </a:lnSpc>
+              <a:buNone/>
+              <a:defRPr sz="1350" b="0" i="0">
+                <a:solidFill>
+                  <a:srgbClr val="D1E7FF"/>
+                </a:solidFill>
+              </a:defRPr>
+            </a:pPr>
+            <a:r>
+              <a:rPr sz="1350" b="0" i="0">
+                <a:solidFill>
+                  <a:srgbClr val="D1E7FF"/>
+                </a:solidFill>
+              </a:rPr>
+              <a:t>npm run generate:edge-from-spec -- \</a:t>
+            </a:r>
+          </a:p>
+          <a:p xmlns:a="http://schemas.openxmlformats.org/drawingml/2006/main">
+            <a:pPr>
+              <a:lnSpc>
+                <a:spcPct val="118000"/>
+              </a:lnSpc>
+              <a:buNone/>
+              <a:defRPr sz="1350" b="0" i="0">
+                <a:solidFill>
+                  <a:srgbClr val="D1E7FF"/>
+                </a:solidFill>
+              </a:defRPr>
+            </a:pPr>
+            <a:r>
+              <a:rPr sz="1350" b="0" i="0">
+                <a:solidFill>
+                  <a:srgbClr val="D1E7FF"/>
+                </a:solidFill>
+              </a:rPr>
+              <a:t>  --spec ./path/to/openapi.yaml \</a:t>
+            </a:r>
+          </a:p>
+          <a:p xmlns:a="http://schemas.openxmlformats.org/drawingml/2006/main">
+            <a:pPr>
+              <a:lnSpc>
+                <a:spcPct val="118000"/>
+              </a:lnSpc>
+              <a:buNone/>
+              <a:defRPr sz="1350" b="0" i="0">
+                <a:solidFill>
+                  <a:srgbClr val="D1E7FF"/>
+                </a:solidFill>
+              </a:defRPr>
+            </a:pPr>
+            <a:r>
+              <a:rPr sz="1350" b="0" i="0">
+                <a:solidFill>
+                  <a:srgbClr val="D1E7FF"/>
+                </a:solidFill>
+              </a:rPr>
+              <a:t>  --output tests/generated/openapi.edge.spec.ts</a:t>
+            </a:r>
+          </a:p>
+        </p:txBody>
+      </p:sp>
+      <p:sp>
+        <p:nvSpPr>
+          <p:cNvPr id="7" name="">
+            <a:extLst xmlns:a="http://schemas.openxmlformats.org/drawingml/2006/main">
+              <a:ext uri="{FF2B5EF4-FFF2-40B4-BE49-F238E27FC236}">
+                <a16:creationId xmlns:a16="http://schemas.microsoft.com/office/drawing/2014/main" id="{4D57465C-101A-4445-A702-9CF335AF5354}"/>
+              </a:ext>
+            </a:extLst>
+          </p:cNvPr>
+          <p:cNvSpPr>
+            <a:spLocks xmlns:a="http://schemas.openxmlformats.org/drawingml/2006/main" noGrp="1"/>
+          </p:cNvSpPr>
+          <p:nvPr/>
+        </p:nvSpPr>
+        <p:spPr>
+          <a:xfrm xmlns:a="http://schemas.openxmlformats.org/drawingml/2006/main">
+            <a:off x="819150" y="6991350"/>
+            <a:ext cx="6477000" cy="571500"/>
           </a:xfrm>
           <a:prstGeom xmlns:a="http://schemas.openxmlformats.org/drawingml/2006/main" prst="rect">
             <a:avLst/>
@@ -4833,90 +4905,41 @@
                 <a:spcPct val="100000"/>
               </a:lnSpc>
               <a:buNone/>
-              <a:defRPr sz="1875" b="1" i="0">
-                <a:solidFill>
-                  <a:srgbClr val="65B32E"/>
-                </a:solidFill>
-              </a:defRPr>
-            </a:pPr>
-            <a:r>
-              <a:rPr sz="1875" b="1" i="0">
-                <a:solidFill>
-                  <a:srgbClr val="65B32E"/>
-                </a:solidFill>
-              </a:rPr>
-              <a:t>Edit spec</a:t>
-            </a:r>
-          </a:p>
-        </p:txBody>
-      </p:sp>
-      <p:sp>
-        <p:nvSpPr>
-          <p:cNvPr id="17" name="">
-            <a:extLst xmlns:a="http://schemas.openxmlformats.org/drawingml/2006/main">
-              <a:ext uri="{FF2B5EF4-FFF2-40B4-BE49-F238E27FC236}">
-                <a16:creationId xmlns:a16="http://schemas.microsoft.com/office/drawing/2014/main" id="{259B72D8-8C8E-49BE-BFCC-D7F1957BB713}"/>
-              </a:ext>
-            </a:extLst>
-          </p:cNvPr>
-          <p:cNvSpPr>
-            <a:spLocks xmlns:a="http://schemas.openxmlformats.org/drawingml/2006/main" noGrp="1"/>
-          </p:cNvSpPr>
-          <p:nvPr/>
-        </p:nvSpPr>
-        <p:spPr>
-          <a:xfrm xmlns:a="http://schemas.openxmlformats.org/drawingml/2006/main">
-            <a:off x="9467850" y="5943600"/>
-            <a:ext cx="1638300" cy="457200"/>
-          </a:xfrm>
-          <a:prstGeom xmlns:a="http://schemas.openxmlformats.org/drawingml/2006/main" prst="rect">
-            <a:avLst/>
-          </a:prstGeom>
-        </p:spPr>
-        <p:txBody>
-          <a:bodyPr xmlns:a="http://schemas.openxmlformats.org/drawingml/2006/main" lIns="0" tIns="0" rIns="0" bIns="0"/>
-          <a:lstStyle xmlns:a="http://schemas.openxmlformats.org/drawingml/2006/main"/>
-          <a:p xmlns:a="http://schemas.openxmlformats.org/drawingml/2006/main">
-            <a:pPr>
-              <a:lnSpc>
-                <a:spcPct val="110000"/>
-              </a:lnSpc>
-              <a:buNone/>
-              <a:defRPr sz="1350" b="0" i="0">
-                <a:solidFill>
-                  <a:srgbClr val="596579"/>
-                </a:solidFill>
-              </a:defRPr>
-            </a:pPr>
-            <a:r>
-              <a:rPr sz="1350" b="0" i="0">
-                <a:solidFill>
-                  <a:srgbClr val="596579"/>
-                </a:solidFill>
-              </a:rPr>
-              <a:t>examples + schemas</a:t>
-            </a:r>
-          </a:p>
-        </p:txBody>
-      </p:sp>
-      <p:sp>
-        <p:nvSpPr>
-          <p:cNvPr id="18" name="">
-            <a:extLst xmlns:a="http://schemas.openxmlformats.org/drawingml/2006/main">
-              <a:ext uri="{FF2B5EF4-FFF2-40B4-BE49-F238E27FC236}">
-                <a16:creationId xmlns:a16="http://schemas.microsoft.com/office/drawing/2014/main" id="{FA6806C6-3AB1-46F0-BD0F-D64F763C721C}"/>
-              </a:ext>
-            </a:extLst>
-          </p:cNvPr>
-          <p:cNvSpPr>
-            <a:spLocks xmlns:a="http://schemas.openxmlformats.org/drawingml/2006/main" noGrp="1"/>
-          </p:cNvSpPr>
-          <p:nvPr/>
-        </p:nvSpPr>
-        <p:spPr>
-          <a:xfrm xmlns:a="http://schemas.openxmlformats.org/drawingml/2006/main">
-            <a:off x="11258550" y="5467350"/>
-            <a:ext cx="590550" cy="419100"/>
+              <a:defRPr sz="1875" b="0" i="0">
+                <a:solidFill>
+                  <a:srgbClr val="596579"/>
+                </a:solidFill>
+              </a:defRPr>
+            </a:pPr>
+            <a:r>
+              <a:rPr sz="1875" b="0" i="0">
+                <a:solidFill>
+                  <a:srgbClr val="596579"/>
+                </a:solidFill>
+              </a:rPr>
+              <a:t>The input can be a local YAML/JSON file or an HTTP(S) URL.</a:t>
+            </a:r>
+          </a:p>
+        </p:txBody>
+      </p:sp>
+      <p:sp>
+        <p:nvSpPr>
+          <p:cNvPr id="8" name="">
+            <a:extLst xmlns:a="http://schemas.openxmlformats.org/drawingml/2006/main">
+              <a:ext uri="{FF2B5EF4-FFF2-40B4-BE49-F238E27FC236}">
+                <a16:creationId xmlns:a16="http://schemas.microsoft.com/office/drawing/2014/main" id="{4BFC21E1-4364-4523-A89E-6447C1B8EB11}"/>
+              </a:ext>
+            </a:extLst>
+          </p:cNvPr>
+          <p:cNvSpPr>
+            <a:spLocks xmlns:a="http://schemas.openxmlformats.org/drawingml/2006/main" noGrp="1"/>
+          </p:cNvSpPr>
+          <p:nvPr/>
+        </p:nvSpPr>
+        <p:spPr>
+          <a:xfrm xmlns:a="http://schemas.openxmlformats.org/drawingml/2006/main">
+            <a:off x="9410700" y="4533900"/>
+            <a:ext cx="8077200" cy="419100"/>
           </a:xfrm>
           <a:prstGeom xmlns:a="http://schemas.openxmlformats.org/drawingml/2006/main" prst="rect">
             <a:avLst/>
@@ -4931,246 +4954,169 @@
                 <a:spcPct val="100000"/>
               </a:lnSpc>
               <a:buNone/>
-              <a:defRPr sz="2850" b="1" i="0">
-                <a:solidFill>
-                  <a:srgbClr val="596579"/>
-                </a:solidFill>
-              </a:defRPr>
-            </a:pPr>
-            <a:r>
-              <a:rPr sz="2850" b="1" i="0">
-                <a:solidFill>
-                  <a:srgbClr val="596579"/>
-                </a:solidFill>
-              </a:rPr>
-              <a:t>-&gt;</a:t>
-            </a:r>
-          </a:p>
-        </p:txBody>
-      </p:sp>
-      <p:sp>
-        <p:nvSpPr>
-          <p:cNvPr id="19" name="">
-            <a:extLst xmlns:a="http://schemas.openxmlformats.org/drawingml/2006/main">
-              <a:ext uri="{FF2B5EF4-FFF2-40B4-BE49-F238E27FC236}">
-                <a16:creationId xmlns:a16="http://schemas.microsoft.com/office/drawing/2014/main" id="{5A73E11E-4C13-457C-B8C5-78AD62C71F7C}"/>
-              </a:ext>
-            </a:extLst>
-          </p:cNvPr>
-          <p:cNvSpPr>
-            <a:spLocks xmlns:a="http://schemas.openxmlformats.org/drawingml/2006/main" noGrp="1"/>
-          </p:cNvSpPr>
-          <p:nvPr/>
-        </p:nvSpPr>
-        <p:spPr>
-          <a:xfrm xmlns:a="http://schemas.openxmlformats.org/drawingml/2006/main">
-            <a:off x="11963400" y="5067300"/>
-            <a:ext cx="1714500" cy="895350"/>
+              <a:defRPr sz="2700" b="1" i="0">
+                <a:solidFill>
+                  <a:srgbClr val="2563EB"/>
+                </a:solidFill>
+              </a:defRPr>
+            </a:pPr>
+            <a:r>
+              <a:rPr sz="2700" b="1" i="0">
+                <a:solidFill>
+                  <a:srgbClr val="2563EB"/>
+                </a:solidFill>
+              </a:rPr>
+              <a:t>2. Run against the target</a:t>
+            </a:r>
+          </a:p>
+        </p:txBody>
+      </p:sp>
+      <p:sp>
+        <p:nvSpPr>
+          <p:cNvPr id="9" name="code-block">
+            <a:extLst xmlns:a="http://schemas.openxmlformats.org/drawingml/2006/main">
+              <a:ext uri="{FF2B5EF4-FFF2-40B4-BE49-F238E27FC236}">
+                <a16:creationId xmlns:a16="http://schemas.microsoft.com/office/drawing/2014/main" id="{2A44610B-09D1-44E7-8284-80432DE99F11}"/>
+              </a:ext>
+            </a:extLst>
+          </p:cNvPr>
+          <p:cNvSpPr>
+            <a:spLocks xmlns:a="http://schemas.openxmlformats.org/drawingml/2006/main" noGrp="1"/>
+          </p:cNvSpPr>
+          <p:nvPr/>
+        </p:nvSpPr>
+        <p:spPr>
+          <a:xfrm xmlns:a="http://schemas.openxmlformats.org/drawingml/2006/main">
+            <a:off x="9401175" y="5147577"/>
+            <a:ext cx="8067675" cy="1131570"/>
           </a:xfrm>
           <a:prstGeom xmlns:a="http://schemas.openxmlformats.org/drawingml/2006/main" prst="roundRect">
             <a:avLst>
-              <a:gd name="adj" fmla="val 25532"/>
+              <a:gd name="adj" fmla="val 16835"/>
             </a:avLst>
           </a:prstGeom>
           <a:solidFill xmlns:a="http://schemas.openxmlformats.org/drawingml/2006/main">
-            <a:srgbClr val="FFFFFF"/>
+            <a:srgbClr val="111827"/>
           </a:solidFill>
         </p:spPr>
       </p:sp>
       <p:sp>
         <p:nvSpPr>
-          <p:cNvPr id="20" name="">
-            <a:extLst xmlns:a="http://schemas.openxmlformats.org/drawingml/2006/main">
-              <a:ext uri="{FF2B5EF4-FFF2-40B4-BE49-F238E27FC236}">
-                <a16:creationId xmlns:a16="http://schemas.microsoft.com/office/drawing/2014/main" id="{B0E99445-09B8-47FF-87BD-C53B777E3A80}"/>
-              </a:ext>
-            </a:extLst>
-          </p:cNvPr>
-          <p:cNvSpPr>
-            <a:spLocks xmlns:a="http://schemas.openxmlformats.org/drawingml/2006/main" noGrp="1"/>
-          </p:cNvSpPr>
-          <p:nvPr/>
-        </p:nvSpPr>
-        <p:spPr>
-          <a:xfrm xmlns:a="http://schemas.openxmlformats.org/drawingml/2006/main">
-            <a:off x="12134850" y="5372100"/>
-            <a:ext cx="1371600" cy="304800"/>
-          </a:xfrm>
-          <a:prstGeom xmlns:a="http://schemas.openxmlformats.org/drawingml/2006/main" prst="rect">
-            <a:avLst/>
-          </a:prstGeom>
-        </p:spPr>
-        <p:txBody>
-          <a:bodyPr xmlns:a="http://schemas.openxmlformats.org/drawingml/2006/main" lIns="0" tIns="0" rIns="0" bIns="0"/>
-          <a:lstStyle xmlns:a="http://schemas.openxmlformats.org/drawingml/2006/main"/>
-          <a:p xmlns:a="http://schemas.openxmlformats.org/drawingml/2006/main">
-            <a:pPr>
-              <a:lnSpc>
-                <a:spcPct val="100000"/>
-              </a:lnSpc>
-              <a:buNone/>
-              <a:defRPr sz="1875" b="1" i="0">
-                <a:solidFill>
-                  <a:srgbClr val="2563EB"/>
-                </a:solidFill>
-              </a:defRPr>
-            </a:pPr>
-            <a:r>
-              <a:rPr sz="1875" b="1" i="0">
-                <a:solidFill>
-                  <a:srgbClr val="2563EB"/>
-                </a:solidFill>
-              </a:rPr>
-              <a:t>Generate</a:t>
-            </a:r>
-          </a:p>
-        </p:txBody>
-      </p:sp>
-      <p:sp>
-        <p:nvSpPr>
-          <p:cNvPr id="21" name="">
-            <a:extLst xmlns:a="http://schemas.openxmlformats.org/drawingml/2006/main">
-              <a:ext uri="{FF2B5EF4-FFF2-40B4-BE49-F238E27FC236}">
-                <a16:creationId xmlns:a16="http://schemas.microsoft.com/office/drawing/2014/main" id="{9E7AB8F9-B108-4247-9492-E5F1499154DE}"/>
-              </a:ext>
-            </a:extLst>
-          </p:cNvPr>
-          <p:cNvSpPr>
-            <a:spLocks xmlns:a="http://schemas.openxmlformats.org/drawingml/2006/main" noGrp="1"/>
-          </p:cNvSpPr>
-          <p:nvPr/>
-        </p:nvSpPr>
-        <p:spPr>
-          <a:xfrm xmlns:a="http://schemas.openxmlformats.org/drawingml/2006/main">
-            <a:off x="12344400" y="6057900"/>
-            <a:ext cx="952500" cy="228600"/>
-          </a:xfrm>
-          <a:prstGeom xmlns:a="http://schemas.openxmlformats.org/drawingml/2006/main" prst="rect">
-            <a:avLst/>
-          </a:prstGeom>
-        </p:spPr>
-        <p:txBody>
-          <a:bodyPr xmlns:a="http://schemas.openxmlformats.org/drawingml/2006/main" lIns="0" tIns="0" rIns="0" bIns="0"/>
-          <a:lstStyle xmlns:a="http://schemas.openxmlformats.org/drawingml/2006/main"/>
-          <a:p xmlns:a="http://schemas.openxmlformats.org/drawingml/2006/main">
-            <a:pPr>
-              <a:lnSpc>
-                <a:spcPct val="110000"/>
-              </a:lnSpc>
-              <a:buNone/>
-              <a:defRPr sz="1350" b="0" i="0">
-                <a:solidFill>
-                  <a:srgbClr val="596579"/>
-                </a:solidFill>
-              </a:defRPr>
-            </a:pPr>
-            <a:r>
-              <a:rPr sz="1350" b="0" i="0">
-                <a:solidFill>
-                  <a:srgbClr val="596579"/>
-                </a:solidFill>
-              </a:rPr>
-              <a:t>tests refresh</a:t>
-            </a:r>
-          </a:p>
-        </p:txBody>
-      </p:sp>
-      <p:sp>
-        <p:nvSpPr>
-          <p:cNvPr id="22" name="">
-            <a:extLst xmlns:a="http://schemas.openxmlformats.org/drawingml/2006/main">
-              <a:ext uri="{FF2B5EF4-FFF2-40B4-BE49-F238E27FC236}">
-                <a16:creationId xmlns:a16="http://schemas.microsoft.com/office/drawing/2014/main" id="{89739FDA-F0A8-4ED6-8FCA-A2FC8D027FAD}"/>
-              </a:ext>
-            </a:extLst>
-          </p:cNvPr>
-          <p:cNvSpPr>
-            <a:spLocks xmlns:a="http://schemas.openxmlformats.org/drawingml/2006/main" noGrp="1"/>
-          </p:cNvSpPr>
-          <p:nvPr/>
-        </p:nvSpPr>
-        <p:spPr>
-          <a:xfrm xmlns:a="http://schemas.openxmlformats.org/drawingml/2006/main">
-            <a:off x="13792200" y="5467350"/>
-            <a:ext cx="590550" cy="419100"/>
-          </a:xfrm>
-          <a:prstGeom xmlns:a="http://schemas.openxmlformats.org/drawingml/2006/main" prst="rect">
-            <a:avLst/>
-          </a:prstGeom>
-        </p:spPr>
-        <p:txBody>
-          <a:bodyPr xmlns:a="http://schemas.openxmlformats.org/drawingml/2006/main" lIns="0" tIns="0" rIns="0" bIns="0"/>
-          <a:lstStyle xmlns:a="http://schemas.openxmlformats.org/drawingml/2006/main"/>
-          <a:p xmlns:a="http://schemas.openxmlformats.org/drawingml/2006/main">
-            <a:pPr>
-              <a:lnSpc>
-                <a:spcPct val="100000"/>
-              </a:lnSpc>
-              <a:buNone/>
-              <a:defRPr sz="2850" b="1" i="0">
-                <a:solidFill>
-                  <a:srgbClr val="596579"/>
-                </a:solidFill>
-              </a:defRPr>
-            </a:pPr>
-            <a:r>
-              <a:rPr sz="2850" b="1" i="0">
-                <a:solidFill>
-                  <a:srgbClr val="596579"/>
-                </a:solidFill>
-              </a:rPr>
-              <a:t>-&gt;</a:t>
-            </a:r>
-          </a:p>
-        </p:txBody>
-      </p:sp>
-      <p:sp>
-        <p:nvSpPr>
-          <p:cNvPr id="23" name="">
-            <a:extLst xmlns:a="http://schemas.openxmlformats.org/drawingml/2006/main">
-              <a:ext uri="{FF2B5EF4-FFF2-40B4-BE49-F238E27FC236}">
-                <a16:creationId xmlns:a16="http://schemas.microsoft.com/office/drawing/2014/main" id="{5D42C586-C892-43EE-A31F-BD23E4E36A4D}"/>
-              </a:ext>
-            </a:extLst>
-          </p:cNvPr>
-          <p:cNvSpPr>
-            <a:spLocks xmlns:a="http://schemas.openxmlformats.org/drawingml/2006/main" noGrp="1"/>
-          </p:cNvSpPr>
-          <p:nvPr/>
-        </p:nvSpPr>
-        <p:spPr>
-          <a:xfrm xmlns:a="http://schemas.openxmlformats.org/drawingml/2006/main">
-            <a:off x="14497050" y="5067300"/>
-            <a:ext cx="1714500" cy="895350"/>
+          <p:cNvPr id="10" name="">
+            <a:extLst xmlns:a="http://schemas.openxmlformats.org/drawingml/2006/main">
+              <a:ext uri="{FF2B5EF4-FFF2-40B4-BE49-F238E27FC236}">
+                <a16:creationId xmlns:a16="http://schemas.microsoft.com/office/drawing/2014/main" id="{69D01BDA-2FD7-4E3F-9F21-7FC5016D290D}"/>
+              </a:ext>
+            </a:extLst>
+          </p:cNvPr>
+          <p:cNvSpPr>
+            <a:spLocks xmlns:a="http://schemas.openxmlformats.org/drawingml/2006/main" noGrp="1"/>
+          </p:cNvSpPr>
+          <p:nvPr/>
+        </p:nvSpPr>
+        <p:spPr>
+          <a:xfrm xmlns:a="http://schemas.openxmlformats.org/drawingml/2006/main">
+            <a:off x="9677400" y="5372100"/>
+            <a:ext cx="7543800" cy="685800"/>
+          </a:xfrm>
+          <a:prstGeom xmlns:a="http://schemas.openxmlformats.org/drawingml/2006/main" prst="rect">
+            <a:avLst/>
+          </a:prstGeom>
+        </p:spPr>
+        <p:txBody>
+          <a:bodyPr xmlns:a="http://schemas.openxmlformats.org/drawingml/2006/main" lIns="0" tIns="0" rIns="0" bIns="0"/>
+          <a:lstStyle xmlns:a="http://schemas.openxmlformats.org/drawingml/2006/main"/>
+          <a:p xmlns:a="http://schemas.openxmlformats.org/drawingml/2006/main">
+            <a:pPr>
+              <a:lnSpc>
+                <a:spcPct val="118000"/>
+              </a:lnSpc>
+              <a:buNone/>
+              <a:defRPr sz="1875" b="0" i="0">
+                <a:solidFill>
+                  <a:srgbClr val="D1E7FF"/>
+                </a:solidFill>
+              </a:defRPr>
+            </a:pPr>
+            <a:r>
+              <a:rPr sz="1875" b="0" i="0">
+                <a:solidFill>
+                  <a:srgbClr val="D1E7FF"/>
+                </a:solidFill>
+              </a:rPr>
+              <a:t>BASE_URL=https://api.example.com \</a:t>
+            </a:r>
+          </a:p>
+          <a:p xmlns:a="http://schemas.openxmlformats.org/drawingml/2006/main">
+            <a:pPr>
+              <a:lnSpc>
+                <a:spcPct val="118000"/>
+              </a:lnSpc>
+              <a:buNone/>
+              <a:defRPr sz="1875" b="0" i="0">
+                <a:solidFill>
+                  <a:srgbClr val="D1E7FF"/>
+                </a:solidFill>
+              </a:defRPr>
+            </a:pPr>
+            <a:r>
+              <a:rPr sz="1875" b="0" i="0">
+                <a:solidFill>
+                  <a:srgbClr val="D1E7FF"/>
+                </a:solidFill>
+              </a:rPr>
+              <a:t>  npm run test:generated</a:t>
+            </a:r>
+          </a:p>
+        </p:txBody>
+      </p:sp>
+      <p:sp>
+        <p:nvSpPr>
+          <p:cNvPr id="11" name="pill-BASE_URL set">
+            <a:extLst xmlns:a="http://schemas.openxmlformats.org/drawingml/2006/main">
+              <a:ext uri="{FF2B5EF4-FFF2-40B4-BE49-F238E27FC236}">
+                <a16:creationId xmlns:a16="http://schemas.microsoft.com/office/drawing/2014/main" id="{03A9AE33-C58D-4284-B674-61BE80730E2B}"/>
+              </a:ext>
+            </a:extLst>
+          </p:cNvPr>
+          <p:cNvSpPr>
+            <a:spLocks xmlns:a="http://schemas.openxmlformats.org/drawingml/2006/main" noGrp="1"/>
+          </p:cNvSpPr>
+          <p:nvPr/>
+        </p:nvSpPr>
+        <p:spPr>
+          <a:xfrm xmlns:a="http://schemas.openxmlformats.org/drawingml/2006/main">
+            <a:off x="9401175" y="6515100"/>
+            <a:ext cx="2381250" cy="514350"/>
           </a:xfrm>
           <a:prstGeom xmlns:a="http://schemas.openxmlformats.org/drawingml/2006/main" prst="roundRect">
             <a:avLst>
-              <a:gd name="adj" fmla="val 25532"/>
+              <a:gd name="adj" fmla="val 50000"/>
             </a:avLst>
           </a:prstGeom>
           <a:solidFill xmlns:a="http://schemas.openxmlformats.org/drawingml/2006/main">
-            <a:srgbClr val="FFFFFF"/>
+            <a:srgbClr val="2563EB"/>
           </a:solidFill>
         </p:spPr>
       </p:sp>
       <p:sp>
         <p:nvSpPr>
-          <p:cNvPr id="24" name="">
-            <a:extLst xmlns:a="http://schemas.openxmlformats.org/drawingml/2006/main">
-              <a:ext uri="{FF2B5EF4-FFF2-40B4-BE49-F238E27FC236}">
-                <a16:creationId xmlns:a16="http://schemas.microsoft.com/office/drawing/2014/main" id="{57FE4C5F-C36E-41DF-80D6-F9E762188AAC}"/>
-              </a:ext>
-            </a:extLst>
-          </p:cNvPr>
-          <p:cNvSpPr>
-            <a:spLocks xmlns:a="http://schemas.openxmlformats.org/drawingml/2006/main" noGrp="1"/>
-          </p:cNvSpPr>
-          <p:nvPr/>
-        </p:nvSpPr>
-        <p:spPr>
-          <a:xfrm xmlns:a="http://schemas.openxmlformats.org/drawingml/2006/main">
-            <a:off x="14668500" y="5372100"/>
-            <a:ext cx="1371600" cy="304800"/>
+          <p:cNvPr id="12" name="">
+            <a:extLst xmlns:a="http://schemas.openxmlformats.org/drawingml/2006/main">
+              <a:ext uri="{FF2B5EF4-FFF2-40B4-BE49-F238E27FC236}">
+                <a16:creationId xmlns:a16="http://schemas.microsoft.com/office/drawing/2014/main" id="{80A8AB3C-D6DF-4F62-AF4D-BF738E22DA52}"/>
+              </a:ext>
+            </a:extLst>
+          </p:cNvPr>
+          <p:cNvSpPr>
+            <a:spLocks xmlns:a="http://schemas.openxmlformats.org/drawingml/2006/main" noGrp="1"/>
+          </p:cNvSpPr>
+          <p:nvPr/>
+        </p:nvSpPr>
+        <p:spPr>
+          <a:xfrm xmlns:a="http://schemas.openxmlformats.org/drawingml/2006/main">
+            <a:off x="9563100" y="6667500"/>
+            <a:ext cx="2057400" cy="228600"/>
           </a:xfrm>
           <a:prstGeom xmlns:a="http://schemas.openxmlformats.org/drawingml/2006/main" prst="rect">
             <a:avLst/>
@@ -5185,160 +5131,78 @@
                 <a:spcPct val="100000"/>
               </a:lnSpc>
               <a:buNone/>
-              <a:defRPr sz="1875" b="1" i="0">
-                <a:solidFill>
-                  <a:srgbClr val="2F7D32"/>
-                </a:solidFill>
-              </a:defRPr>
-            </a:pPr>
-            <a:r>
-              <a:rPr sz="1875" b="1" i="0">
-                <a:solidFill>
-                  <a:srgbClr val="2F7D32"/>
-                </a:solidFill>
-              </a:rPr>
-              <a:t>Run</a:t>
-            </a:r>
-          </a:p>
-        </p:txBody>
-      </p:sp>
-      <p:sp>
-        <p:nvSpPr>
-          <p:cNvPr id="25" name="">
-            <a:extLst xmlns:a="http://schemas.openxmlformats.org/drawingml/2006/main">
-              <a:ext uri="{FF2B5EF4-FFF2-40B4-BE49-F238E27FC236}">
-                <a16:creationId xmlns:a16="http://schemas.microsoft.com/office/drawing/2014/main" id="{867299B4-AF58-45A9-9D5B-9AD1F20E85D1}"/>
-              </a:ext>
-            </a:extLst>
-          </p:cNvPr>
-          <p:cNvSpPr>
-            <a:spLocks xmlns:a="http://schemas.openxmlformats.org/drawingml/2006/main" noGrp="1"/>
-          </p:cNvSpPr>
-          <p:nvPr/>
-        </p:nvSpPr>
-        <p:spPr>
-          <a:xfrm xmlns:a="http://schemas.openxmlformats.org/drawingml/2006/main">
-            <a:off x="14744700" y="6057900"/>
-            <a:ext cx="1219200" cy="228600"/>
-          </a:xfrm>
-          <a:prstGeom xmlns:a="http://schemas.openxmlformats.org/drawingml/2006/main" prst="rect">
-            <a:avLst/>
-          </a:prstGeom>
-        </p:spPr>
-        <p:txBody>
-          <a:bodyPr xmlns:a="http://schemas.openxmlformats.org/drawingml/2006/main" lIns="0" tIns="0" rIns="0" bIns="0"/>
-          <a:lstStyle xmlns:a="http://schemas.openxmlformats.org/drawingml/2006/main"/>
-          <a:p xmlns:a="http://schemas.openxmlformats.org/drawingml/2006/main">
-            <a:pPr>
-              <a:lnSpc>
-                <a:spcPct val="110000"/>
-              </a:lnSpc>
-              <a:buNone/>
-              <a:defRPr sz="1350" b="0" i="0">
-                <a:solidFill>
-                  <a:srgbClr val="596579"/>
-                </a:solidFill>
-              </a:defRPr>
-            </a:pPr>
-            <a:r>
-              <a:rPr sz="1350" b="0" i="0">
-                <a:solidFill>
-                  <a:srgbClr val="596579"/>
-                </a:solidFill>
-              </a:rPr>
-              <a:t>contract checks</a:t>
-            </a:r>
-          </a:p>
-        </p:txBody>
-      </p:sp>
-      <p:sp>
-        <p:nvSpPr>
-          <p:cNvPr id="26" name="">
-            <a:extLst xmlns:a="http://schemas.openxmlformats.org/drawingml/2006/main">
-              <a:ext uri="{FF2B5EF4-FFF2-40B4-BE49-F238E27FC236}">
-                <a16:creationId xmlns:a16="http://schemas.microsoft.com/office/drawing/2014/main" id="{DEC54058-652A-4DAA-8B79-C91C4341AD09}"/>
-              </a:ext>
-            </a:extLst>
-          </p:cNvPr>
-          <p:cNvSpPr>
-            <a:spLocks xmlns:a="http://schemas.openxmlformats.org/drawingml/2006/main" noGrp="1"/>
-          </p:cNvSpPr>
-          <p:nvPr/>
-        </p:nvSpPr>
-        <p:spPr>
-          <a:xfrm xmlns:a="http://schemas.openxmlformats.org/drawingml/2006/main">
-            <a:off x="9429750" y="6629400"/>
-            <a:ext cx="5905500" cy="28575"/>
-          </a:xfrm>
-          <a:prstGeom xmlns:a="http://schemas.openxmlformats.org/drawingml/2006/main" prst="rect">
-            <a:avLst/>
-          </a:prstGeom>
-          <a:solidFill xmlns:a="http://schemas.openxmlformats.org/drawingml/2006/main">
-            <a:srgbClr val="D6CAB7"/>
-          </a:solidFill>
-          <a:ln xmlns:a="http://schemas.openxmlformats.org/drawingml/2006/main" w="0">
-            <a:solidFill>
-              <a:srgbClr val="D6CAB7"/>
-            </a:solidFill>
-            <a:prstDash val="solid"/>
-          </a:ln>
-        </p:spPr>
-      </p:sp>
-      <p:sp>
-        <p:nvSpPr>
-          <p:cNvPr id="27" name="">
-            <a:extLst xmlns:a="http://schemas.openxmlformats.org/drawingml/2006/main">
-              <a:ext uri="{FF2B5EF4-FFF2-40B4-BE49-F238E27FC236}">
-                <a16:creationId xmlns:a16="http://schemas.microsoft.com/office/drawing/2014/main" id="{384D9A6A-B8B8-44D0-9FF8-B1D1DB690BFF}"/>
-              </a:ext>
-            </a:extLst>
-          </p:cNvPr>
-          <p:cNvSpPr>
-            <a:spLocks xmlns:a="http://schemas.openxmlformats.org/drawingml/2006/main" noGrp="1"/>
-          </p:cNvSpPr>
-          <p:nvPr/>
-        </p:nvSpPr>
-        <p:spPr>
-          <a:xfrm xmlns:a="http://schemas.openxmlformats.org/drawingml/2006/main">
-            <a:off x="9429750" y="6877050"/>
-            <a:ext cx="6591300" cy="742950"/>
-          </a:xfrm>
-          <a:prstGeom xmlns:a="http://schemas.openxmlformats.org/drawingml/2006/main" prst="rect">
-            <a:avLst/>
-          </a:prstGeom>
-        </p:spPr>
-        <p:txBody>
-          <a:bodyPr xmlns:a="http://schemas.openxmlformats.org/drawingml/2006/main" lIns="0" tIns="0" rIns="0" bIns="0"/>
-          <a:lstStyle xmlns:a="http://schemas.openxmlformats.org/drawingml/2006/main"/>
-          <a:p xmlns:a="http://schemas.openxmlformats.org/drawingml/2006/main">
-            <a:pPr>
-              <a:lnSpc>
-                <a:spcPct val="112000"/>
-              </a:lnSpc>
-              <a:buNone/>
-              <a:defRPr sz="2175" b="0" i="0">
-                <a:solidFill>
-                  <a:srgbClr val="172033"/>
-                </a:solidFill>
-              </a:defRPr>
-            </a:pPr>
-            <a:r>
-              <a:rPr sz="2175" b="0" i="0">
-                <a:solidFill>
-                  <a:srgbClr val="172033"/>
-                </a:solidFill>
-              </a:rPr>
-              <a:t>Next: schema validation, negative tests, auth profiles, multi-example generation, and CI.</a:t>
-            </a:r>
-          </a:p>
-        </p:txBody>
-      </p:sp>
-      <p:sp>
-        <p:nvSpPr>
-          <p:cNvPr id="28" name="">
-            <a:extLst xmlns:a="http://schemas.openxmlformats.org/drawingml/2006/main">
-              <a:ext uri="{FF2B5EF4-FFF2-40B4-BE49-F238E27FC236}">
-                <a16:creationId xmlns:a16="http://schemas.microsoft.com/office/drawing/2014/main" id="{00EDD92C-70E7-4146-931F-8669A48ADBC5}"/>
+              <a:defRPr sz="1575" b="1" i="0">
+                <a:solidFill>
+                  <a:srgbClr val="FFFFFF"/>
+                </a:solidFill>
+              </a:defRPr>
+            </a:pPr>
+            <a:r>
+              <a:rPr sz="1575" b="1" i="0">
+                <a:solidFill>
+                  <a:srgbClr val="FFFFFF"/>
+                </a:solidFill>
+              </a:rPr>
+              <a:t>BASE_URL set</a:t>
+            </a:r>
+          </a:p>
+        </p:txBody>
+      </p:sp>
+      <p:sp>
+        <p:nvSpPr>
+          <p:cNvPr id="13" name="">
+            <a:extLst xmlns:a="http://schemas.openxmlformats.org/drawingml/2006/main">
+              <a:ext uri="{FF2B5EF4-FFF2-40B4-BE49-F238E27FC236}">
+                <a16:creationId xmlns:a16="http://schemas.microsoft.com/office/drawing/2014/main" id="{59A88923-A802-453B-85E6-CC546D78AF9F}"/>
+              </a:ext>
+            </a:extLst>
+          </p:cNvPr>
+          <p:cNvSpPr>
+            <a:spLocks xmlns:a="http://schemas.openxmlformats.org/drawingml/2006/main" noGrp="1"/>
+          </p:cNvSpPr>
+          <p:nvPr/>
+        </p:nvSpPr>
+        <p:spPr>
+          <a:xfrm xmlns:a="http://schemas.openxmlformats.org/drawingml/2006/main">
+            <a:off x="11925300" y="6496050"/>
+            <a:ext cx="3733800" cy="533400"/>
+          </a:xfrm>
+          <a:prstGeom xmlns:a="http://schemas.openxmlformats.org/drawingml/2006/main" prst="rect">
+            <a:avLst/>
+          </a:prstGeom>
+        </p:spPr>
+        <p:txBody>
+          <a:bodyPr xmlns:a="http://schemas.openxmlformats.org/drawingml/2006/main" lIns="0" tIns="0" rIns="0" bIns="0"/>
+          <a:lstStyle xmlns:a="http://schemas.openxmlformats.org/drawingml/2006/main"/>
+          <a:p xmlns:a="http://schemas.openxmlformats.org/drawingml/2006/main">
+            <a:pPr>
+              <a:lnSpc>
+                <a:spcPct val="100000"/>
+              </a:lnSpc>
+              <a:buNone/>
+              <a:defRPr sz="1800" b="0" i="0">
+                <a:solidFill>
+                  <a:srgbClr val="596579"/>
+                </a:solidFill>
+              </a:defRPr>
+            </a:pPr>
+            <a:r>
+              <a:rPr sz="1800" b="0" i="0">
+                <a:solidFill>
+                  <a:srgbClr val="596579"/>
+                </a:solidFill>
+              </a:rPr>
+              <a:t>Playwright skips local server startup.</a:t>
+            </a:r>
+          </a:p>
+        </p:txBody>
+      </p:sp>
+      <p:sp>
+        <p:nvSpPr>
+          <p:cNvPr id="14" name="">
+            <a:extLst xmlns:a="http://schemas.openxmlformats.org/drawingml/2006/main">
+              <a:ext uri="{FF2B5EF4-FFF2-40B4-BE49-F238E27FC236}">
+                <a16:creationId xmlns:a16="http://schemas.microsoft.com/office/drawing/2014/main" id="{F2CFDFBF-0282-43C9-B625-4A2E6F97202C}"/>
               </a:ext>
             </a:extLst>
           </p:cNvPr>
@@ -5377,7 +5241,7 @@
                   <a:srgbClr val="8B7D68"/>
                 </a:solidFill>
               </a:rPr>
-              <a:t>Close the loop: spec changes should regenerate executable evidence.</a:t>
+              <a:t>Spec-driven API test automation learning project</a:t>
             </a:r>
           </a:p>
         </p:txBody>
@@ -5385,7 +5249,7 @@
     </p:spTree>
     <p:extLst>
       <p:ext uri="{BB962C8B-B14F-4D97-AF65-F5344CB8AC3E}">
-        <p14:creationId xmlns:p14="http://schemas.microsoft.com/office/powerpoint/2010/main" val="1677435666"/>
+        <p14:creationId xmlns:p14="http://schemas.microsoft.com/office/powerpoint/2010/main" val="89283115"/>
       </p:ext>
     </p:extLst>
   </p:cSld>
@@ -5409,7 +5273,7 @@
           <p:cNvPr id="1" name="slide-bg">
             <a:extLst xmlns:a="http://schemas.openxmlformats.org/drawingml/2006/main">
               <a:ext uri="{FF2B5EF4-FFF2-40B4-BE49-F238E27FC236}">
-                <a16:creationId xmlns:a16="http://schemas.microsoft.com/office/drawing/2014/main" id="{1C449279-E0AA-45F5-B13B-B5E0E7C65D93}"/>
+                <a16:creationId xmlns:a16="http://schemas.microsoft.com/office/drawing/2014/main" id="{BF0C364C-D1AB-4DD8-9B9F-E80E09E2C895}"/>
               </a:ext>
             </a:extLst>
           </p:cNvPr>
@@ -5433,10 +5297,10 @@
       </p:sp>
       <p:sp>
         <p:nvSpPr>
-          <p:cNvPr id="2" name="homework-title">
-            <a:extLst xmlns:a="http://schemas.openxmlformats.org/drawingml/2006/main">
-              <a:ext uri="{FF2B5EF4-FFF2-40B4-BE49-F238E27FC236}">
-                <a16:creationId xmlns:a16="http://schemas.microsoft.com/office/drawing/2014/main" id="{D29B3286-47E0-41C2-A786-D69899764900}"/>
+          <p:cNvPr id="2" name="slide-title">
+            <a:extLst xmlns:a="http://schemas.openxmlformats.org/drawingml/2006/main">
+              <a:ext uri="{FF2B5EF4-FFF2-40B4-BE49-F238E27FC236}">
+                <a16:creationId xmlns:a16="http://schemas.microsoft.com/office/drawing/2014/main" id="{5F51DF18-E8ED-4E48-9617-BFCE3624EFE3}"/>
               </a:ext>
             </a:extLst>
           </p:cNvPr>
@@ -5448,105 +5312,644 @@
         <p:spPr>
           <a:xfrm xmlns:a="http://schemas.openxmlformats.org/drawingml/2006/main">
             <a:off x="819150" y="533400"/>
-            <a:ext cx="7810500" cy="781050"/>
-          </a:xfrm>
-          <a:prstGeom xmlns:a="http://schemas.openxmlformats.org/drawingml/2006/main" prst="rect">
-            <a:avLst/>
-          </a:prstGeom>
-        </p:spPr>
-        <p:txBody>
-          <a:bodyPr xmlns:a="http://schemas.openxmlformats.org/drawingml/2006/main" lIns="0" tIns="0" rIns="0" bIns="0"/>
-          <a:lstStyle xmlns:a="http://schemas.openxmlformats.org/drawingml/2006/main"/>
-          <a:p xmlns:a="http://schemas.openxmlformats.org/drawingml/2006/main">
-            <a:pPr>
-              <a:lnSpc>
-                <a:spcPct val="94000"/>
+            <a:ext cx="7677150" cy="1257300"/>
+          </a:xfrm>
+          <a:prstGeom xmlns:a="http://schemas.openxmlformats.org/drawingml/2006/main" prst="rect">
+            <a:avLst/>
+          </a:prstGeom>
+        </p:spPr>
+        <p:txBody>
+          <a:bodyPr xmlns:a="http://schemas.openxmlformats.org/drawingml/2006/main" lIns="0" tIns="0" rIns="0" bIns="0"/>
+          <a:lstStyle xmlns:a="http://schemas.openxmlformats.org/drawingml/2006/main"/>
+          <a:p xmlns:a="http://schemas.openxmlformats.org/drawingml/2006/main">
+            <a:pPr>
+              <a:lnSpc>
+                <a:spcPct val="98000"/>
+              </a:lnSpc>
+              <a:buNone/>
+              <a:defRPr sz="4200" b="1" i="0">
+                <a:solidFill>
+                  <a:srgbClr val="172033"/>
+                </a:solidFill>
+              </a:defRPr>
+            </a:pPr>
+            <a:r>
+              <a:rPr sz="4200" b="1" i="0">
+                <a:solidFill>
+                  <a:srgbClr val="172033"/>
+                </a:solidFill>
+              </a:rPr>
+              <a:t>Limits and next improvements</a:t>
+            </a:r>
+          </a:p>
+        </p:txBody>
+      </p:sp>
+      <p:sp>
+        <p:nvSpPr>
+          <p:cNvPr id="3" name="slide-subtitle">
+            <a:extLst xmlns:a="http://schemas.openxmlformats.org/drawingml/2006/main">
+              <a:ext uri="{FF2B5EF4-FFF2-40B4-BE49-F238E27FC236}">
+                <a16:creationId xmlns:a16="http://schemas.microsoft.com/office/drawing/2014/main" id="{72948699-7DB8-4117-B832-112B278841C8}"/>
+              </a:ext>
+            </a:extLst>
+          </p:cNvPr>
+          <p:cNvSpPr>
+            <a:spLocks xmlns:a="http://schemas.openxmlformats.org/drawingml/2006/main" noGrp="1"/>
+          </p:cNvSpPr>
+          <p:nvPr/>
+        </p:nvSpPr>
+        <p:spPr>
+          <a:xfrm xmlns:a="http://schemas.openxmlformats.org/drawingml/2006/main">
+            <a:off x="819150" y="1943100"/>
+            <a:ext cx="8134350" cy="342900"/>
+          </a:xfrm>
+          <a:prstGeom xmlns:a="http://schemas.openxmlformats.org/drawingml/2006/main" prst="rect">
+            <a:avLst/>
+          </a:prstGeom>
+        </p:spPr>
+        <p:txBody>
+          <a:bodyPr xmlns:a="http://schemas.openxmlformats.org/drawingml/2006/main" lIns="0" tIns="0" rIns="0" bIns="0"/>
+          <a:lstStyle xmlns:a="http://schemas.openxmlformats.org/drawingml/2006/main"/>
+          <a:p xmlns:a="http://schemas.openxmlformats.org/drawingml/2006/main">
+            <a:pPr>
+              <a:lnSpc>
+                <a:spcPct val="115000"/>
+              </a:lnSpc>
+              <a:buNone/>
+              <a:defRPr sz="1875" b="0" i="0">
+                <a:solidFill>
+                  <a:srgbClr val="596579"/>
+                </a:solidFill>
+              </a:defRPr>
+            </a:pPr>
+            <a:r>
+              <a:rPr sz="1875" b="0" i="0">
+                <a:solidFill>
+                  <a:srgbClr val="596579"/>
+                </a:solidFill>
+              </a:rPr>
+              <a:t>The current generator is intentionally teachable. The next upgrades are clear.</a:t>
+            </a:r>
+          </a:p>
+        </p:txBody>
+      </p:sp>
+      <p:sp>
+        <p:nvSpPr>
+          <p:cNvPr id="4" name="">
+            <a:extLst xmlns:a="http://schemas.openxmlformats.org/drawingml/2006/main">
+              <a:ext uri="{FF2B5EF4-FFF2-40B4-BE49-F238E27FC236}">
+                <a16:creationId xmlns:a16="http://schemas.microsoft.com/office/drawing/2014/main" id="{BD8B39E4-0BD5-42F9-8E57-D4B7E6444AE3}"/>
+              </a:ext>
+            </a:extLst>
+          </p:cNvPr>
+          <p:cNvSpPr>
+            <a:spLocks xmlns:a="http://schemas.openxmlformats.org/drawingml/2006/main" noGrp="1"/>
+          </p:cNvSpPr>
+          <p:nvPr/>
+        </p:nvSpPr>
+        <p:spPr>
+          <a:xfrm xmlns:a="http://schemas.openxmlformats.org/drawingml/2006/main">
+            <a:off x="819150" y="3581400"/>
+            <a:ext cx="8039100" cy="495300"/>
+          </a:xfrm>
+          <a:prstGeom xmlns:a="http://schemas.openxmlformats.org/drawingml/2006/main" prst="rect">
+            <a:avLst/>
+          </a:prstGeom>
+        </p:spPr>
+        <p:txBody>
+          <a:bodyPr xmlns:a="http://schemas.openxmlformats.org/drawingml/2006/main" lIns="0" tIns="0" rIns="0" bIns="0"/>
+          <a:lstStyle xmlns:a="http://schemas.openxmlformats.org/drawingml/2006/main"/>
+          <a:p xmlns:a="http://schemas.openxmlformats.org/drawingml/2006/main">
+            <a:pPr>
+              <a:lnSpc>
+                <a:spcPct val="100000"/>
+              </a:lnSpc>
+              <a:buNone/>
+              <a:defRPr sz="3150" b="1" i="0">
+                <a:solidFill>
+                  <a:srgbClr val="F97316"/>
+                </a:solidFill>
+              </a:defRPr>
+            </a:pPr>
+            <a:r>
+              <a:rPr sz="3150" b="1" i="0">
+                <a:solidFill>
+                  <a:srgbClr val="F97316"/>
+                </a:solidFill>
+              </a:rPr>
+              <a:t>Current limits</a:t>
+            </a:r>
+          </a:p>
+        </p:txBody>
+      </p:sp>
+      <p:sp>
+        <p:nvSpPr>
+          <p:cNvPr id="5" name="">
+            <a:extLst xmlns:a="http://schemas.openxmlformats.org/drawingml/2006/main">
+              <a:ext uri="{FF2B5EF4-FFF2-40B4-BE49-F238E27FC236}">
+                <a16:creationId xmlns:a16="http://schemas.microsoft.com/office/drawing/2014/main" id="{71C444D4-BACC-4191-B14E-A08484B1B7CA}"/>
+              </a:ext>
+            </a:extLst>
+          </p:cNvPr>
+          <p:cNvSpPr>
+            <a:spLocks xmlns:a="http://schemas.openxmlformats.org/drawingml/2006/main" noGrp="1"/>
+          </p:cNvSpPr>
+          <p:nvPr/>
+        </p:nvSpPr>
+        <p:spPr>
+          <a:xfrm xmlns:a="http://schemas.openxmlformats.org/drawingml/2006/main">
+            <a:off x="819150" y="4457700"/>
+            <a:ext cx="800100" cy="838200"/>
+          </a:xfrm>
+          <a:prstGeom xmlns:a="http://schemas.openxmlformats.org/drawingml/2006/main" prst="rect">
+            <a:avLst/>
+          </a:prstGeom>
+        </p:spPr>
+        <p:txBody>
+          <a:bodyPr xmlns:a="http://schemas.openxmlformats.org/drawingml/2006/main" lIns="0" tIns="0" rIns="0" bIns="0"/>
+          <a:lstStyle xmlns:a="http://schemas.openxmlformats.org/drawingml/2006/main"/>
+          <a:p xmlns:a="http://schemas.openxmlformats.org/drawingml/2006/main">
+            <a:pPr>
+              <a:lnSpc>
+                <a:spcPct val="100000"/>
               </a:lnSpc>
               <a:buNone/>
               <a:defRPr sz="5400" b="1" i="0">
                 <a:solidFill>
+                  <a:srgbClr val="F97316"/>
+                </a:solidFill>
+              </a:defRPr>
+            </a:pPr>
+            <a:r>
+              <a:rPr sz="5400" b="1" i="0">
+                <a:solidFill>
+                  <a:srgbClr val="F97316"/>
+                </a:solidFill>
+              </a:rPr>
+              <a:t>L1</a:t>
+            </a:r>
+          </a:p>
+        </p:txBody>
+      </p:sp>
+      <p:sp>
+        <p:nvSpPr>
+          <p:cNvPr id="6" name="">
+            <a:extLst xmlns:a="http://schemas.openxmlformats.org/drawingml/2006/main">
+              <a:ext uri="{FF2B5EF4-FFF2-40B4-BE49-F238E27FC236}">
+                <a16:creationId xmlns:a16="http://schemas.microsoft.com/office/drawing/2014/main" id="{1B32355C-60E8-4CAC-AC48-ABB6C0D0C8BE}"/>
+              </a:ext>
+            </a:extLst>
+          </p:cNvPr>
+          <p:cNvSpPr>
+            <a:spLocks xmlns:a="http://schemas.openxmlformats.org/drawingml/2006/main" noGrp="1"/>
+          </p:cNvSpPr>
+          <p:nvPr/>
+        </p:nvSpPr>
+        <p:spPr>
+          <a:xfrm xmlns:a="http://schemas.openxmlformats.org/drawingml/2006/main">
+            <a:off x="1866900" y="4362450"/>
+            <a:ext cx="6991350" cy="400050"/>
+          </a:xfrm>
+          <a:prstGeom xmlns:a="http://schemas.openxmlformats.org/drawingml/2006/main" prst="rect">
+            <a:avLst/>
+          </a:prstGeom>
+        </p:spPr>
+        <p:txBody>
+          <a:bodyPr xmlns:a="http://schemas.openxmlformats.org/drawingml/2006/main" lIns="0" tIns="0" rIns="0" bIns="0"/>
+          <a:lstStyle xmlns:a="http://schemas.openxmlformats.org/drawingml/2006/main"/>
+          <a:p xmlns:a="http://schemas.openxmlformats.org/drawingml/2006/main">
+            <a:pPr>
+              <a:lnSpc>
+                <a:spcPct val="100000"/>
+              </a:lnSpc>
+              <a:buNone/>
+              <a:defRPr sz="2550" b="1" i="0">
+                <a:solidFill>
                   <a:srgbClr val="172033"/>
                 </a:solidFill>
               </a:defRPr>
             </a:pPr>
             <a:r>
+              <a:rPr sz="2550" b="1" i="0">
+                <a:solidFill>
+                  <a:srgbClr val="172033"/>
+                </a:solidFill>
+              </a:rPr>
+              <a:t>$ref and composed schemas</a:t>
+            </a:r>
+          </a:p>
+        </p:txBody>
+      </p:sp>
+      <p:sp>
+        <p:nvSpPr>
+          <p:cNvPr id="7" name="">
+            <a:extLst xmlns:a="http://schemas.openxmlformats.org/drawingml/2006/main">
+              <a:ext uri="{FF2B5EF4-FFF2-40B4-BE49-F238E27FC236}">
+                <a16:creationId xmlns:a16="http://schemas.microsoft.com/office/drawing/2014/main" id="{27090AA6-A547-4006-9071-4687BDCA6C20}"/>
+              </a:ext>
+            </a:extLst>
+          </p:cNvPr>
+          <p:cNvSpPr>
+            <a:spLocks xmlns:a="http://schemas.openxmlformats.org/drawingml/2006/main" noGrp="1"/>
+          </p:cNvSpPr>
+          <p:nvPr/>
+        </p:nvSpPr>
+        <p:spPr>
+          <a:xfrm xmlns:a="http://schemas.openxmlformats.org/drawingml/2006/main">
+            <a:off x="1866900" y="4819650"/>
+            <a:ext cx="4400550" cy="590550"/>
+          </a:xfrm>
+          <a:prstGeom xmlns:a="http://schemas.openxmlformats.org/drawingml/2006/main" prst="rect">
+            <a:avLst/>
+          </a:prstGeom>
+        </p:spPr>
+        <p:txBody>
+          <a:bodyPr xmlns:a="http://schemas.openxmlformats.org/drawingml/2006/main" lIns="0" tIns="0" rIns="0" bIns="0"/>
+          <a:lstStyle xmlns:a="http://schemas.openxmlformats.org/drawingml/2006/main"/>
+          <a:p xmlns:a="http://schemas.openxmlformats.org/drawingml/2006/main">
+            <a:pPr>
+              <a:lnSpc>
+                <a:spcPct val="106000"/>
+              </a:lnSpc>
+              <a:buNone/>
+              <a:defRPr sz="1800" b="0" i="0">
+                <a:solidFill>
+                  <a:srgbClr val="596579"/>
+                </a:solidFill>
+              </a:defRPr>
+            </a:pPr>
+            <a:r>
+              <a:rPr sz="1800" b="0" i="0">
+                <a:solidFill>
+                  <a:srgbClr val="596579"/>
+                </a:solidFill>
+              </a:rPr>
+              <a:t>Only simple inline cases are handled today.</a:t>
+            </a:r>
+          </a:p>
+        </p:txBody>
+      </p:sp>
+      <p:sp>
+        <p:nvSpPr>
+          <p:cNvPr id="8" name="">
+            <a:extLst xmlns:a="http://schemas.openxmlformats.org/drawingml/2006/main">
+              <a:ext uri="{FF2B5EF4-FFF2-40B4-BE49-F238E27FC236}">
+                <a16:creationId xmlns:a16="http://schemas.microsoft.com/office/drawing/2014/main" id="{6EA7251D-9584-44FF-897B-7E069A32C08A}"/>
+              </a:ext>
+            </a:extLst>
+          </p:cNvPr>
+          <p:cNvSpPr>
+            <a:spLocks xmlns:a="http://schemas.openxmlformats.org/drawingml/2006/main" noGrp="1"/>
+          </p:cNvSpPr>
+          <p:nvPr/>
+        </p:nvSpPr>
+        <p:spPr>
+          <a:xfrm xmlns:a="http://schemas.openxmlformats.org/drawingml/2006/main">
+            <a:off x="819150" y="5867400"/>
+            <a:ext cx="800100" cy="838200"/>
+          </a:xfrm>
+          <a:prstGeom xmlns:a="http://schemas.openxmlformats.org/drawingml/2006/main" prst="rect">
+            <a:avLst/>
+          </a:prstGeom>
+        </p:spPr>
+        <p:txBody>
+          <a:bodyPr xmlns:a="http://schemas.openxmlformats.org/drawingml/2006/main" lIns="0" tIns="0" rIns="0" bIns="0"/>
+          <a:lstStyle xmlns:a="http://schemas.openxmlformats.org/drawingml/2006/main"/>
+          <a:p xmlns:a="http://schemas.openxmlformats.org/drawingml/2006/main">
+            <a:pPr>
+              <a:lnSpc>
+                <a:spcPct val="100000"/>
+              </a:lnSpc>
+              <a:buNone/>
+              <a:defRPr sz="5400" b="1" i="0">
+                <a:solidFill>
+                  <a:srgbClr val="F97316"/>
+                </a:solidFill>
+              </a:defRPr>
+            </a:pPr>
+            <a:r>
               <a:rPr sz="5400" b="1" i="0">
                 <a:solidFill>
+                  <a:srgbClr val="F97316"/>
+                </a:solidFill>
+              </a:rPr>
+              <a:t>L2</a:t>
+            </a:r>
+          </a:p>
+        </p:txBody>
+      </p:sp>
+      <p:sp>
+        <p:nvSpPr>
+          <p:cNvPr id="9" name="">
+            <a:extLst xmlns:a="http://schemas.openxmlformats.org/drawingml/2006/main">
+              <a:ext uri="{FF2B5EF4-FFF2-40B4-BE49-F238E27FC236}">
+                <a16:creationId xmlns:a16="http://schemas.microsoft.com/office/drawing/2014/main" id="{5F86A0A1-C01B-471F-9B90-1430DA0665D2}"/>
+              </a:ext>
+            </a:extLst>
+          </p:cNvPr>
+          <p:cNvSpPr>
+            <a:spLocks xmlns:a="http://schemas.openxmlformats.org/drawingml/2006/main" noGrp="1"/>
+          </p:cNvSpPr>
+          <p:nvPr/>
+        </p:nvSpPr>
+        <p:spPr>
+          <a:xfrm xmlns:a="http://schemas.openxmlformats.org/drawingml/2006/main">
+            <a:off x="1866900" y="5772150"/>
+            <a:ext cx="6991350" cy="400050"/>
+          </a:xfrm>
+          <a:prstGeom xmlns:a="http://schemas.openxmlformats.org/drawingml/2006/main" prst="rect">
+            <a:avLst/>
+          </a:prstGeom>
+        </p:spPr>
+        <p:txBody>
+          <a:bodyPr xmlns:a="http://schemas.openxmlformats.org/drawingml/2006/main" lIns="0" tIns="0" rIns="0" bIns="0"/>
+          <a:lstStyle xmlns:a="http://schemas.openxmlformats.org/drawingml/2006/main"/>
+          <a:p xmlns:a="http://schemas.openxmlformats.org/drawingml/2006/main">
+            <a:pPr>
+              <a:lnSpc>
+                <a:spcPct val="100000"/>
+              </a:lnSpc>
+              <a:buNone/>
+              <a:defRPr sz="2550" b="1" i="0">
+                <a:solidFill>
                   <a:srgbClr val="172033"/>
                 </a:solidFill>
-              </a:rPr>
-              <a:t>Homework</a:t>
-            </a:r>
-          </a:p>
-        </p:txBody>
-      </p:sp>
-      <p:sp>
-        <p:nvSpPr>
-          <p:cNvPr id="3" name="homework-subtitle">
-            <a:extLst xmlns:a="http://schemas.openxmlformats.org/drawingml/2006/main">
-              <a:ext uri="{FF2B5EF4-FFF2-40B4-BE49-F238E27FC236}">
-                <a16:creationId xmlns:a16="http://schemas.microsoft.com/office/drawing/2014/main" id="{B5E036C2-49FB-4D63-92B9-652158393141}"/>
-              </a:ext>
-            </a:extLst>
-          </p:cNvPr>
-          <p:cNvSpPr>
-            <a:spLocks xmlns:a="http://schemas.openxmlformats.org/drawingml/2006/main" noGrp="1"/>
-          </p:cNvSpPr>
-          <p:nvPr/>
-        </p:nvSpPr>
-        <p:spPr>
-          <a:xfrm xmlns:a="http://schemas.openxmlformats.org/drawingml/2006/main">
-            <a:off x="819150" y="1466850"/>
-            <a:ext cx="8458200" cy="381000"/>
-          </a:xfrm>
-          <a:prstGeom xmlns:a="http://schemas.openxmlformats.org/drawingml/2006/main" prst="rect">
-            <a:avLst/>
-          </a:prstGeom>
-        </p:spPr>
-        <p:txBody>
-          <a:bodyPr xmlns:a="http://schemas.openxmlformats.org/drawingml/2006/main" lIns="0" tIns="0" rIns="0" bIns="0"/>
-          <a:lstStyle xmlns:a="http://schemas.openxmlformats.org/drawingml/2006/main"/>
-          <a:p xmlns:a="http://schemas.openxmlformats.org/drawingml/2006/main">
-            <a:pPr>
-              <a:lnSpc>
-                <a:spcPct val="112000"/>
-              </a:lnSpc>
-              <a:buNone/>
-              <a:defRPr sz="2175" b="0" i="0">
-                <a:solidFill>
-                  <a:srgbClr val="596579"/>
-                </a:solidFill>
-              </a:defRPr>
-            </a:pPr>
-            <a:r>
-              <a:rPr sz="2175" b="0" i="0">
-                <a:solidFill>
-                  <a:srgbClr val="596579"/>
-                </a:solidFill>
-              </a:rPr>
-              <a:t>Explore public test APIs: read docs, write Playwright tests, run them.</a:t>
-            </a:r>
-          </a:p>
-        </p:txBody>
-      </p:sp>
-      <p:sp>
-        <p:nvSpPr>
-          <p:cNvPr id="4" name="">
-            <a:extLst xmlns:a="http://schemas.openxmlformats.org/drawingml/2006/main">
-              <a:ext uri="{FF2B5EF4-FFF2-40B4-BE49-F238E27FC236}">
-                <a16:creationId xmlns:a16="http://schemas.microsoft.com/office/drawing/2014/main" id="{06F46DCB-E320-4C15-A92D-9E6692802F65}"/>
-              </a:ext>
-            </a:extLst>
-          </p:cNvPr>
-          <p:cNvSpPr>
-            <a:spLocks xmlns:a="http://schemas.openxmlformats.org/drawingml/2006/main" noGrp="1"/>
-          </p:cNvSpPr>
-          <p:nvPr/>
-        </p:nvSpPr>
-        <p:spPr>
-          <a:xfrm xmlns:a="http://schemas.openxmlformats.org/drawingml/2006/main">
-            <a:off x="4857750" y="2266950"/>
-            <a:ext cx="2286000" cy="895350"/>
+              </a:defRPr>
+            </a:pPr>
+            <a:r>
+              <a:rPr sz="2550" b="1" i="0">
+                <a:solidFill>
+                  <a:srgbClr val="172033"/>
+                </a:solidFill>
+              </a:rPr>
+              <a:t>Schema-only responses</a:t>
+            </a:r>
+          </a:p>
+        </p:txBody>
+      </p:sp>
+      <p:sp>
+        <p:nvSpPr>
+          <p:cNvPr id="10" name="">
+            <a:extLst xmlns:a="http://schemas.openxmlformats.org/drawingml/2006/main">
+              <a:ext uri="{FF2B5EF4-FFF2-40B4-BE49-F238E27FC236}">
+                <a16:creationId xmlns:a16="http://schemas.microsoft.com/office/drawing/2014/main" id="{20DB38B9-A95D-4F14-82AC-3C1DD17E70E0}"/>
+              </a:ext>
+            </a:extLst>
+          </p:cNvPr>
+          <p:cNvSpPr>
+            <a:spLocks xmlns:a="http://schemas.openxmlformats.org/drawingml/2006/main" noGrp="1"/>
+          </p:cNvSpPr>
+          <p:nvPr/>
+        </p:nvSpPr>
+        <p:spPr>
+          <a:xfrm xmlns:a="http://schemas.openxmlformats.org/drawingml/2006/main">
+            <a:off x="1866900" y="6229350"/>
+            <a:ext cx="3924300" cy="590550"/>
+          </a:xfrm>
+          <a:prstGeom xmlns:a="http://schemas.openxmlformats.org/drawingml/2006/main" prst="rect">
+            <a:avLst/>
+          </a:prstGeom>
+        </p:spPr>
+        <p:txBody>
+          <a:bodyPr xmlns:a="http://schemas.openxmlformats.org/drawingml/2006/main" lIns="0" tIns="0" rIns="0" bIns="0"/>
+          <a:lstStyle xmlns:a="http://schemas.openxmlformats.org/drawingml/2006/main"/>
+          <a:p xmlns:a="http://schemas.openxmlformats.org/drawingml/2006/main">
+            <a:pPr>
+              <a:lnSpc>
+                <a:spcPct val="106000"/>
+              </a:lnSpc>
+              <a:buNone/>
+              <a:defRPr sz="1800" b="0" i="0">
+                <a:solidFill>
+                  <a:srgbClr val="596579"/>
+                </a:solidFill>
+              </a:defRPr>
+            </a:pPr>
+            <a:r>
+              <a:rPr sz="1800" b="0" i="0">
+                <a:solidFill>
+                  <a:srgbClr val="596579"/>
+                </a:solidFill>
+              </a:rPr>
+              <a:t>Produce status-only happy-path tests.</a:t>
+            </a:r>
+          </a:p>
+        </p:txBody>
+      </p:sp>
+      <p:sp>
+        <p:nvSpPr>
+          <p:cNvPr id="11" name="">
+            <a:extLst xmlns:a="http://schemas.openxmlformats.org/drawingml/2006/main">
+              <a:ext uri="{FF2B5EF4-FFF2-40B4-BE49-F238E27FC236}">
+                <a16:creationId xmlns:a16="http://schemas.microsoft.com/office/drawing/2014/main" id="{AE065421-2A27-40A8-A2E3-1629D09B435C}"/>
+              </a:ext>
+            </a:extLst>
+          </p:cNvPr>
+          <p:cNvSpPr>
+            <a:spLocks xmlns:a="http://schemas.openxmlformats.org/drawingml/2006/main" noGrp="1"/>
+          </p:cNvSpPr>
+          <p:nvPr/>
+        </p:nvSpPr>
+        <p:spPr>
+          <a:xfrm xmlns:a="http://schemas.openxmlformats.org/drawingml/2006/main">
+            <a:off x="819150" y="7277100"/>
+            <a:ext cx="800100" cy="838200"/>
+          </a:xfrm>
+          <a:prstGeom xmlns:a="http://schemas.openxmlformats.org/drawingml/2006/main" prst="rect">
+            <a:avLst/>
+          </a:prstGeom>
+        </p:spPr>
+        <p:txBody>
+          <a:bodyPr xmlns:a="http://schemas.openxmlformats.org/drawingml/2006/main" lIns="0" tIns="0" rIns="0" bIns="0"/>
+          <a:lstStyle xmlns:a="http://schemas.openxmlformats.org/drawingml/2006/main"/>
+          <a:p xmlns:a="http://schemas.openxmlformats.org/drawingml/2006/main">
+            <a:pPr>
+              <a:lnSpc>
+                <a:spcPct val="100000"/>
+              </a:lnSpc>
+              <a:buNone/>
+              <a:defRPr sz="5400" b="1" i="0">
+                <a:solidFill>
+                  <a:srgbClr val="F97316"/>
+                </a:solidFill>
+              </a:defRPr>
+            </a:pPr>
+            <a:r>
+              <a:rPr sz="5400" b="1" i="0">
+                <a:solidFill>
+                  <a:srgbClr val="F97316"/>
+                </a:solidFill>
+              </a:rPr>
+              <a:t>L3</a:t>
+            </a:r>
+          </a:p>
+        </p:txBody>
+      </p:sp>
+      <p:sp>
+        <p:nvSpPr>
+          <p:cNvPr id="12" name="">
+            <a:extLst xmlns:a="http://schemas.openxmlformats.org/drawingml/2006/main">
+              <a:ext uri="{FF2B5EF4-FFF2-40B4-BE49-F238E27FC236}">
+                <a16:creationId xmlns:a16="http://schemas.microsoft.com/office/drawing/2014/main" id="{1C7CA0C1-938C-491A-B3E0-329BB8DC243C}"/>
+              </a:ext>
+            </a:extLst>
+          </p:cNvPr>
+          <p:cNvSpPr>
+            <a:spLocks xmlns:a="http://schemas.openxmlformats.org/drawingml/2006/main" noGrp="1"/>
+          </p:cNvSpPr>
+          <p:nvPr/>
+        </p:nvSpPr>
+        <p:spPr>
+          <a:xfrm xmlns:a="http://schemas.openxmlformats.org/drawingml/2006/main">
+            <a:off x="1866900" y="7315200"/>
+            <a:ext cx="6991350" cy="400050"/>
+          </a:xfrm>
+          <a:prstGeom xmlns:a="http://schemas.openxmlformats.org/drawingml/2006/main" prst="rect">
+            <a:avLst/>
+          </a:prstGeom>
+        </p:spPr>
+        <p:txBody>
+          <a:bodyPr xmlns:a="http://schemas.openxmlformats.org/drawingml/2006/main" lIns="0" tIns="0" rIns="0" bIns="0"/>
+          <a:lstStyle xmlns:a="http://schemas.openxmlformats.org/drawingml/2006/main"/>
+          <a:p xmlns:a="http://schemas.openxmlformats.org/drawingml/2006/main">
+            <a:pPr>
+              <a:lnSpc>
+                <a:spcPct val="100000"/>
+              </a:lnSpc>
+              <a:buNone/>
+              <a:defRPr sz="2550" b="1" i="0">
+                <a:solidFill>
+                  <a:srgbClr val="172033"/>
+                </a:solidFill>
+              </a:defRPr>
+            </a:pPr>
+            <a:r>
+              <a:rPr sz="2550" b="1" i="0">
+                <a:solidFill>
+                  <a:srgbClr val="172033"/>
+                </a:solidFill>
+              </a:rPr>
+              <a:t>Validation required</a:t>
+            </a:r>
+          </a:p>
+        </p:txBody>
+      </p:sp>
+      <p:sp>
+        <p:nvSpPr>
+          <p:cNvPr id="13" name="">
+            <a:extLst xmlns:a="http://schemas.openxmlformats.org/drawingml/2006/main">
+              <a:ext uri="{FF2B5EF4-FFF2-40B4-BE49-F238E27FC236}">
+                <a16:creationId xmlns:a16="http://schemas.microsoft.com/office/drawing/2014/main" id="{C26FD17F-2351-4956-879A-E8336282BBF7}"/>
+              </a:ext>
+            </a:extLst>
+          </p:cNvPr>
+          <p:cNvSpPr>
+            <a:spLocks xmlns:a="http://schemas.openxmlformats.org/drawingml/2006/main" noGrp="1"/>
+          </p:cNvSpPr>
+          <p:nvPr/>
+        </p:nvSpPr>
+        <p:spPr>
+          <a:xfrm xmlns:a="http://schemas.openxmlformats.org/drawingml/2006/main">
+            <a:off x="1866900" y="7791450"/>
+            <a:ext cx="6019800" cy="304800"/>
+          </a:xfrm>
+          <a:prstGeom xmlns:a="http://schemas.openxmlformats.org/drawingml/2006/main" prst="rect">
+            <a:avLst/>
+          </a:prstGeom>
+        </p:spPr>
+        <p:txBody>
+          <a:bodyPr xmlns:a="http://schemas.openxmlformats.org/drawingml/2006/main" lIns="0" tIns="0" rIns="0" bIns="0"/>
+          <a:lstStyle xmlns:a="http://schemas.openxmlformats.org/drawingml/2006/main"/>
+          <a:p xmlns:a="http://schemas.openxmlformats.org/drawingml/2006/main">
+            <a:pPr>
+              <a:lnSpc>
+                <a:spcPct val="106000"/>
+              </a:lnSpc>
+              <a:buNone/>
+              <a:defRPr sz="1800" b="0" i="0">
+                <a:solidFill>
+                  <a:srgbClr val="596579"/>
+                </a:solidFill>
+              </a:defRPr>
+            </a:pPr>
+            <a:r>
+              <a:rPr sz="1800" b="0" i="0">
+                <a:solidFill>
+                  <a:srgbClr val="596579"/>
+                </a:solidFill>
+              </a:rPr>
+              <a:t>Edge tests pass when the target API enforces the contract.</a:t>
+            </a:r>
+          </a:p>
+        </p:txBody>
+      </p:sp>
+      <p:sp>
+        <p:nvSpPr>
+          <p:cNvPr id="14" name="">
+            <a:extLst xmlns:a="http://schemas.openxmlformats.org/drawingml/2006/main">
+              <a:ext uri="{FF2B5EF4-FFF2-40B4-BE49-F238E27FC236}">
+                <a16:creationId xmlns:a16="http://schemas.microsoft.com/office/drawing/2014/main" id="{88ED2C44-CD5C-4CE2-B28A-775FDED6C706}"/>
+              </a:ext>
+            </a:extLst>
+          </p:cNvPr>
+          <p:cNvSpPr>
+            <a:spLocks xmlns:a="http://schemas.openxmlformats.org/drawingml/2006/main" noGrp="1"/>
+          </p:cNvSpPr>
+          <p:nvPr/>
+        </p:nvSpPr>
+        <p:spPr>
+          <a:xfrm xmlns:a="http://schemas.openxmlformats.org/drawingml/2006/main">
+            <a:off x="9429750" y="4057650"/>
+            <a:ext cx="8039100" cy="495300"/>
+          </a:xfrm>
+          <a:prstGeom xmlns:a="http://schemas.openxmlformats.org/drawingml/2006/main" prst="rect">
+            <a:avLst/>
+          </a:prstGeom>
+        </p:spPr>
+        <p:txBody>
+          <a:bodyPr xmlns:a="http://schemas.openxmlformats.org/drawingml/2006/main" lIns="0" tIns="0" rIns="0" bIns="0"/>
+          <a:lstStyle xmlns:a="http://schemas.openxmlformats.org/drawingml/2006/main"/>
+          <a:p xmlns:a="http://schemas.openxmlformats.org/drawingml/2006/main">
+            <a:pPr>
+              <a:lnSpc>
+                <a:spcPct val="100000"/>
+              </a:lnSpc>
+              <a:buNone/>
+              <a:defRPr sz="3150" b="1" i="0">
+                <a:solidFill>
+                  <a:srgbClr val="2F7D32"/>
+                </a:solidFill>
+              </a:defRPr>
+            </a:pPr>
+            <a:r>
+              <a:rPr sz="3150" b="1" i="0">
+                <a:solidFill>
+                  <a:srgbClr val="2F7D32"/>
+                </a:solidFill>
+              </a:rPr>
+              <a:t>Upgrade path</a:t>
+            </a:r>
+          </a:p>
+        </p:txBody>
+      </p:sp>
+      <p:sp>
+        <p:nvSpPr>
+          <p:cNvPr id="15" name="">
+            <a:extLst xmlns:a="http://schemas.openxmlformats.org/drawingml/2006/main">
+              <a:ext uri="{FF2B5EF4-FFF2-40B4-BE49-F238E27FC236}">
+                <a16:creationId xmlns:a16="http://schemas.microsoft.com/office/drawing/2014/main" id="{BD07DD79-17DB-4D84-A6FD-B0ED541A25C2}"/>
+              </a:ext>
+            </a:extLst>
+          </p:cNvPr>
+          <p:cNvSpPr>
+            <a:spLocks xmlns:a="http://schemas.openxmlformats.org/drawingml/2006/main" noGrp="1"/>
+          </p:cNvSpPr>
+          <p:nvPr/>
+        </p:nvSpPr>
+        <p:spPr>
+          <a:xfrm xmlns:a="http://schemas.openxmlformats.org/drawingml/2006/main">
+            <a:off x="9429750" y="4762500"/>
+            <a:ext cx="1714500" cy="895350"/>
           </a:xfrm>
           <a:prstGeom xmlns:a="http://schemas.openxmlformats.org/drawingml/2006/main" prst="roundRect">
             <a:avLst>
@@ -5560,22 +5963,22 @@
       </p:sp>
       <p:sp>
         <p:nvSpPr>
-          <p:cNvPr id="5" name="">
-            <a:extLst xmlns:a="http://schemas.openxmlformats.org/drawingml/2006/main">
-              <a:ext uri="{FF2B5EF4-FFF2-40B4-BE49-F238E27FC236}">
-                <a16:creationId xmlns:a16="http://schemas.microsoft.com/office/drawing/2014/main" id="{C3E9035C-071A-432D-91F7-CD2D943E36D1}"/>
-              </a:ext>
-            </a:extLst>
-          </p:cNvPr>
-          <p:cNvSpPr>
-            <a:spLocks xmlns:a="http://schemas.openxmlformats.org/drawingml/2006/main" noGrp="1"/>
-          </p:cNvSpPr>
-          <p:nvPr/>
-        </p:nvSpPr>
-        <p:spPr>
-          <a:xfrm xmlns:a="http://schemas.openxmlformats.org/drawingml/2006/main">
-            <a:off x="5029200" y="2571750"/>
-            <a:ext cx="1943100" cy="304800"/>
+          <p:cNvPr id="16" name="">
+            <a:extLst xmlns:a="http://schemas.openxmlformats.org/drawingml/2006/main">
+              <a:ext uri="{FF2B5EF4-FFF2-40B4-BE49-F238E27FC236}">
+                <a16:creationId xmlns:a16="http://schemas.microsoft.com/office/drawing/2014/main" id="{4A473EC4-B508-4D5D-96E6-EC5152EC5DA2}"/>
+              </a:ext>
+            </a:extLst>
+          </p:cNvPr>
+          <p:cNvSpPr>
+            <a:spLocks xmlns:a="http://schemas.openxmlformats.org/drawingml/2006/main" noGrp="1"/>
+          </p:cNvSpPr>
+          <p:nvPr/>
+        </p:nvSpPr>
+        <p:spPr>
+          <a:xfrm xmlns:a="http://schemas.openxmlformats.org/drawingml/2006/main">
+            <a:off x="9601200" y="5067300"/>
+            <a:ext cx="1371600" cy="304800"/>
           </a:xfrm>
           <a:prstGeom xmlns:a="http://schemas.openxmlformats.org/drawingml/2006/main" prst="rect">
             <a:avLst/>
@@ -5602,29 +6005,29 @@
                   <a:srgbClr val="65B32E"/>
                 </a:solidFill>
               </a:rPr>
-              <a:t>Read docs</a:t>
-            </a:r>
-          </a:p>
-        </p:txBody>
-      </p:sp>
-      <p:sp>
-        <p:nvSpPr>
-          <p:cNvPr id="6" name="">
-            <a:extLst xmlns:a="http://schemas.openxmlformats.org/drawingml/2006/main">
-              <a:ext uri="{FF2B5EF4-FFF2-40B4-BE49-F238E27FC236}">
-                <a16:creationId xmlns:a16="http://schemas.microsoft.com/office/drawing/2014/main" id="{BF8D6C24-EC84-422F-AF2D-4CFCB2078F7F}"/>
-              </a:ext>
-            </a:extLst>
-          </p:cNvPr>
-          <p:cNvSpPr>
-            <a:spLocks xmlns:a="http://schemas.openxmlformats.org/drawingml/2006/main" noGrp="1"/>
-          </p:cNvSpPr>
-          <p:nvPr/>
-        </p:nvSpPr>
-        <p:spPr>
-          <a:xfrm xmlns:a="http://schemas.openxmlformats.org/drawingml/2006/main">
-            <a:off x="5162550" y="3257550"/>
-            <a:ext cx="1676400" cy="228600"/>
+              <a:t>Edit spec</a:t>
+            </a:r>
+          </a:p>
+        </p:txBody>
+      </p:sp>
+      <p:sp>
+        <p:nvSpPr>
+          <p:cNvPr id="17" name="">
+            <a:extLst xmlns:a="http://schemas.openxmlformats.org/drawingml/2006/main">
+              <a:ext uri="{FF2B5EF4-FFF2-40B4-BE49-F238E27FC236}">
+                <a16:creationId xmlns:a16="http://schemas.microsoft.com/office/drawing/2014/main" id="{DE1099AF-3D5C-42CF-AE57-F0A9947107D7}"/>
+              </a:ext>
+            </a:extLst>
+          </p:cNvPr>
+          <p:cNvSpPr>
+            <a:spLocks xmlns:a="http://schemas.openxmlformats.org/drawingml/2006/main" noGrp="1"/>
+          </p:cNvSpPr>
+          <p:nvPr/>
+        </p:nvSpPr>
+        <p:spPr>
+          <a:xfrm xmlns:a="http://schemas.openxmlformats.org/drawingml/2006/main">
+            <a:off x="9467850" y="5753100"/>
+            <a:ext cx="1638300" cy="457200"/>
           </a:xfrm>
           <a:prstGeom xmlns:a="http://schemas.openxmlformats.org/drawingml/2006/main" prst="rect">
             <a:avLst/>
@@ -5651,28 +6054,28 @@
                   <a:srgbClr val="596579"/>
                 </a:solidFill>
               </a:rPr>
-              <a:t>understand endpoints</a:t>
-            </a:r>
-          </a:p>
-        </p:txBody>
-      </p:sp>
-      <p:sp>
-        <p:nvSpPr>
-          <p:cNvPr id="7" name="">
-            <a:extLst xmlns:a="http://schemas.openxmlformats.org/drawingml/2006/main">
-              <a:ext uri="{FF2B5EF4-FFF2-40B4-BE49-F238E27FC236}">
-                <a16:creationId xmlns:a16="http://schemas.microsoft.com/office/drawing/2014/main" id="{304E6603-AC52-4107-BE90-28DA55708E71}"/>
-              </a:ext>
-            </a:extLst>
-          </p:cNvPr>
-          <p:cNvSpPr>
-            <a:spLocks xmlns:a="http://schemas.openxmlformats.org/drawingml/2006/main" noGrp="1"/>
-          </p:cNvSpPr>
-          <p:nvPr/>
-        </p:nvSpPr>
-        <p:spPr>
-          <a:xfrm xmlns:a="http://schemas.openxmlformats.org/drawingml/2006/main">
-            <a:off x="7277100" y="2667000"/>
+              <a:t>examples + schemas</a:t>
+            </a:r>
+          </a:p>
+        </p:txBody>
+      </p:sp>
+      <p:sp>
+        <p:nvSpPr>
+          <p:cNvPr id="18" name="">
+            <a:extLst xmlns:a="http://schemas.openxmlformats.org/drawingml/2006/main">
+              <a:ext uri="{FF2B5EF4-FFF2-40B4-BE49-F238E27FC236}">
+                <a16:creationId xmlns:a16="http://schemas.microsoft.com/office/drawing/2014/main" id="{D36326B1-DBA2-4DFB-8944-A4D8D052EC3A}"/>
+              </a:ext>
+            </a:extLst>
+          </p:cNvPr>
+          <p:cNvSpPr>
+            <a:spLocks xmlns:a="http://schemas.openxmlformats.org/drawingml/2006/main" noGrp="1"/>
+          </p:cNvSpPr>
+          <p:nvPr/>
+        </p:nvSpPr>
+        <p:spPr>
+          <a:xfrm xmlns:a="http://schemas.openxmlformats.org/drawingml/2006/main">
+            <a:off x="11258550" y="5276850"/>
             <a:ext cx="590550" cy="419100"/>
           </a:xfrm>
           <a:prstGeom xmlns:a="http://schemas.openxmlformats.org/drawingml/2006/main" prst="rect">
@@ -5707,22 +6110,22 @@
       </p:sp>
       <p:sp>
         <p:nvSpPr>
-          <p:cNvPr id="8" name="">
-            <a:extLst xmlns:a="http://schemas.openxmlformats.org/drawingml/2006/main">
-              <a:ext uri="{FF2B5EF4-FFF2-40B4-BE49-F238E27FC236}">
-                <a16:creationId xmlns:a16="http://schemas.microsoft.com/office/drawing/2014/main" id="{E9327227-E637-41E1-9EE8-F3B72B7E81D8}"/>
-              </a:ext>
-            </a:extLst>
-          </p:cNvPr>
-          <p:cNvSpPr>
-            <a:spLocks xmlns:a="http://schemas.openxmlformats.org/drawingml/2006/main" noGrp="1"/>
-          </p:cNvSpPr>
-          <p:nvPr/>
-        </p:nvSpPr>
-        <p:spPr>
-          <a:xfrm xmlns:a="http://schemas.openxmlformats.org/drawingml/2006/main">
-            <a:off x="8001000" y="2152650"/>
-            <a:ext cx="2286000" cy="895350"/>
+          <p:cNvPr id="19" name="">
+            <a:extLst xmlns:a="http://schemas.openxmlformats.org/drawingml/2006/main">
+              <a:ext uri="{FF2B5EF4-FFF2-40B4-BE49-F238E27FC236}">
+                <a16:creationId xmlns:a16="http://schemas.microsoft.com/office/drawing/2014/main" id="{1430B298-B3FA-4CD7-AE26-105D835C0BFA}"/>
+              </a:ext>
+            </a:extLst>
+          </p:cNvPr>
+          <p:cNvSpPr>
+            <a:spLocks xmlns:a="http://schemas.openxmlformats.org/drawingml/2006/main" noGrp="1"/>
+          </p:cNvSpPr>
+          <p:nvPr/>
+        </p:nvSpPr>
+        <p:spPr>
+          <a:xfrm xmlns:a="http://schemas.openxmlformats.org/drawingml/2006/main">
+            <a:off x="11963400" y="4876800"/>
+            <a:ext cx="1714500" cy="895350"/>
           </a:xfrm>
           <a:prstGeom xmlns:a="http://schemas.openxmlformats.org/drawingml/2006/main" prst="roundRect">
             <a:avLst>
@@ -5736,22 +6139,22 @@
       </p:sp>
       <p:sp>
         <p:nvSpPr>
-          <p:cNvPr id="9" name="">
-            <a:extLst xmlns:a="http://schemas.openxmlformats.org/drawingml/2006/main">
-              <a:ext uri="{FF2B5EF4-FFF2-40B4-BE49-F238E27FC236}">
-                <a16:creationId xmlns:a16="http://schemas.microsoft.com/office/drawing/2014/main" id="{2235DDC9-6BCF-4FAF-A536-2F8B375C5753}"/>
-              </a:ext>
-            </a:extLst>
-          </p:cNvPr>
-          <p:cNvSpPr>
-            <a:spLocks xmlns:a="http://schemas.openxmlformats.org/drawingml/2006/main" noGrp="1"/>
-          </p:cNvSpPr>
-          <p:nvPr/>
-        </p:nvSpPr>
-        <p:spPr>
-          <a:xfrm xmlns:a="http://schemas.openxmlformats.org/drawingml/2006/main">
-            <a:off x="8172450" y="2457450"/>
-            <a:ext cx="1943100" cy="304800"/>
+          <p:cNvPr id="20" name="">
+            <a:extLst xmlns:a="http://schemas.openxmlformats.org/drawingml/2006/main">
+              <a:ext uri="{FF2B5EF4-FFF2-40B4-BE49-F238E27FC236}">
+                <a16:creationId xmlns:a16="http://schemas.microsoft.com/office/drawing/2014/main" id="{53B2AE9C-40A9-4E2C-85F8-97EC2436DF5F}"/>
+              </a:ext>
+            </a:extLst>
+          </p:cNvPr>
+          <p:cNvSpPr>
+            <a:spLocks xmlns:a="http://schemas.openxmlformats.org/drawingml/2006/main" noGrp="1"/>
+          </p:cNvSpPr>
+          <p:nvPr/>
+        </p:nvSpPr>
+        <p:spPr>
+          <a:xfrm xmlns:a="http://schemas.openxmlformats.org/drawingml/2006/main">
+            <a:off x="12134850" y="5181600"/>
+            <a:ext cx="1371600" cy="304800"/>
           </a:xfrm>
           <a:prstGeom xmlns:a="http://schemas.openxmlformats.org/drawingml/2006/main" prst="rect">
             <a:avLst/>
@@ -5778,29 +6181,29 @@
                   <a:srgbClr val="2563EB"/>
                 </a:solidFill>
               </a:rPr>
-              <a:t>Write tests</a:t>
-            </a:r>
-          </a:p>
-        </p:txBody>
-      </p:sp>
-      <p:sp>
-        <p:nvSpPr>
-          <p:cNvPr id="10" name="">
-            <a:extLst xmlns:a="http://schemas.openxmlformats.org/drawingml/2006/main">
-              <a:ext uri="{FF2B5EF4-FFF2-40B4-BE49-F238E27FC236}">
-                <a16:creationId xmlns:a16="http://schemas.microsoft.com/office/drawing/2014/main" id="{626801A2-BDA0-4897-A659-326F38A34226}"/>
-              </a:ext>
-            </a:extLst>
-          </p:cNvPr>
-          <p:cNvSpPr>
-            <a:spLocks xmlns:a="http://schemas.openxmlformats.org/drawingml/2006/main" noGrp="1"/>
-          </p:cNvSpPr>
-          <p:nvPr/>
-        </p:nvSpPr>
-        <p:spPr>
-          <a:xfrm xmlns:a="http://schemas.openxmlformats.org/drawingml/2006/main">
-            <a:off x="8439150" y="3143250"/>
-            <a:ext cx="1409700" cy="457200"/>
+              <a:t>Generate</a:t>
+            </a:r>
+          </a:p>
+        </p:txBody>
+      </p:sp>
+      <p:sp>
+        <p:nvSpPr>
+          <p:cNvPr id="21" name="">
+            <a:extLst xmlns:a="http://schemas.openxmlformats.org/drawingml/2006/main">
+              <a:ext uri="{FF2B5EF4-FFF2-40B4-BE49-F238E27FC236}">
+                <a16:creationId xmlns:a16="http://schemas.microsoft.com/office/drawing/2014/main" id="{707B5D99-0B45-444F-8263-F802AAA569D3}"/>
+              </a:ext>
+            </a:extLst>
+          </p:cNvPr>
+          <p:cNvSpPr>
+            <a:spLocks xmlns:a="http://schemas.openxmlformats.org/drawingml/2006/main" noGrp="1"/>
+          </p:cNvSpPr>
+          <p:nvPr/>
+        </p:nvSpPr>
+        <p:spPr>
+          <a:xfrm xmlns:a="http://schemas.openxmlformats.org/drawingml/2006/main">
+            <a:off x="12344400" y="5867400"/>
+            <a:ext cx="952500" cy="228600"/>
           </a:xfrm>
           <a:prstGeom xmlns:a="http://schemas.openxmlformats.org/drawingml/2006/main" prst="rect">
             <a:avLst/>
@@ -5827,28 +6230,28 @@
                   <a:srgbClr val="596579"/>
                 </a:solidFill>
               </a:rPr>
-              <a:t>use request fixture</a:t>
-            </a:r>
-          </a:p>
-        </p:txBody>
-      </p:sp>
-      <p:sp>
-        <p:nvSpPr>
-          <p:cNvPr id="11" name="">
-            <a:extLst xmlns:a="http://schemas.openxmlformats.org/drawingml/2006/main">
-              <a:ext uri="{FF2B5EF4-FFF2-40B4-BE49-F238E27FC236}">
-                <a16:creationId xmlns:a16="http://schemas.microsoft.com/office/drawing/2014/main" id="{418F7251-818F-41ED-BC7A-A51DF346C901}"/>
-              </a:ext>
-            </a:extLst>
-          </p:cNvPr>
-          <p:cNvSpPr>
-            <a:spLocks xmlns:a="http://schemas.openxmlformats.org/drawingml/2006/main" noGrp="1"/>
-          </p:cNvSpPr>
-          <p:nvPr/>
-        </p:nvSpPr>
-        <p:spPr>
-          <a:xfrm xmlns:a="http://schemas.openxmlformats.org/drawingml/2006/main">
-            <a:off x="10420350" y="2667000"/>
+              <a:t>tests refresh</a:t>
+            </a:r>
+          </a:p>
+        </p:txBody>
+      </p:sp>
+      <p:sp>
+        <p:nvSpPr>
+          <p:cNvPr id="22" name="">
+            <a:extLst xmlns:a="http://schemas.openxmlformats.org/drawingml/2006/main">
+              <a:ext uri="{FF2B5EF4-FFF2-40B4-BE49-F238E27FC236}">
+                <a16:creationId xmlns:a16="http://schemas.microsoft.com/office/drawing/2014/main" id="{EE3A578E-E25A-4353-902C-10C413C6CF7D}"/>
+              </a:ext>
+            </a:extLst>
+          </p:cNvPr>
+          <p:cNvSpPr>
+            <a:spLocks xmlns:a="http://schemas.openxmlformats.org/drawingml/2006/main" noGrp="1"/>
+          </p:cNvSpPr>
+          <p:nvPr/>
+        </p:nvSpPr>
+        <p:spPr>
+          <a:xfrm xmlns:a="http://schemas.openxmlformats.org/drawingml/2006/main">
+            <a:off x="13792200" y="5276850"/>
             <a:ext cx="590550" cy="419100"/>
           </a:xfrm>
           <a:prstGeom xmlns:a="http://schemas.openxmlformats.org/drawingml/2006/main" prst="rect">
@@ -5883,22 +6286,22 @@
       </p:sp>
       <p:sp>
         <p:nvSpPr>
-          <p:cNvPr id="12" name="">
-            <a:extLst xmlns:a="http://schemas.openxmlformats.org/drawingml/2006/main">
-              <a:ext uri="{FF2B5EF4-FFF2-40B4-BE49-F238E27FC236}">
-                <a16:creationId xmlns:a16="http://schemas.microsoft.com/office/drawing/2014/main" id="{C88A8C11-CDAE-4A7F-8CB2-A286D6595999}"/>
-              </a:ext>
-            </a:extLst>
-          </p:cNvPr>
-          <p:cNvSpPr>
-            <a:spLocks xmlns:a="http://schemas.openxmlformats.org/drawingml/2006/main" noGrp="1"/>
-          </p:cNvSpPr>
-          <p:nvPr/>
-        </p:nvSpPr>
-        <p:spPr>
-          <a:xfrm xmlns:a="http://schemas.openxmlformats.org/drawingml/2006/main">
-            <a:off x="11144250" y="2266950"/>
-            <a:ext cx="2286000" cy="895350"/>
+          <p:cNvPr id="23" name="">
+            <a:extLst xmlns:a="http://schemas.openxmlformats.org/drawingml/2006/main">
+              <a:ext uri="{FF2B5EF4-FFF2-40B4-BE49-F238E27FC236}">
+                <a16:creationId xmlns:a16="http://schemas.microsoft.com/office/drawing/2014/main" id="{067A609D-F929-4C0F-AD99-11A902243FCA}"/>
+              </a:ext>
+            </a:extLst>
+          </p:cNvPr>
+          <p:cNvSpPr>
+            <a:spLocks xmlns:a="http://schemas.openxmlformats.org/drawingml/2006/main" noGrp="1"/>
+          </p:cNvSpPr>
+          <p:nvPr/>
+        </p:nvSpPr>
+        <p:spPr>
+          <a:xfrm xmlns:a="http://schemas.openxmlformats.org/drawingml/2006/main">
+            <a:off x="14497050" y="4876800"/>
+            <a:ext cx="1714500" cy="895350"/>
           </a:xfrm>
           <a:prstGeom xmlns:a="http://schemas.openxmlformats.org/drawingml/2006/main" prst="roundRect">
             <a:avLst>
@@ -5912,22 +6315,22 @@
       </p:sp>
       <p:sp>
         <p:nvSpPr>
-          <p:cNvPr id="13" name="">
-            <a:extLst xmlns:a="http://schemas.openxmlformats.org/drawingml/2006/main">
-              <a:ext uri="{FF2B5EF4-FFF2-40B4-BE49-F238E27FC236}">
-                <a16:creationId xmlns:a16="http://schemas.microsoft.com/office/drawing/2014/main" id="{B080FF93-714C-411B-B835-3216C5404E80}"/>
-              </a:ext>
-            </a:extLst>
-          </p:cNvPr>
-          <p:cNvSpPr>
-            <a:spLocks xmlns:a="http://schemas.openxmlformats.org/drawingml/2006/main" noGrp="1"/>
-          </p:cNvSpPr>
-          <p:nvPr/>
-        </p:nvSpPr>
-        <p:spPr>
-          <a:xfrm xmlns:a="http://schemas.openxmlformats.org/drawingml/2006/main">
-            <a:off x="11315700" y="2571750"/>
-            <a:ext cx="1943100" cy="304800"/>
+          <p:cNvPr id="24" name="">
+            <a:extLst xmlns:a="http://schemas.openxmlformats.org/drawingml/2006/main">
+              <a:ext uri="{FF2B5EF4-FFF2-40B4-BE49-F238E27FC236}">
+                <a16:creationId xmlns:a16="http://schemas.microsoft.com/office/drawing/2014/main" id="{F3A8AD81-19FE-4815-A78B-AB4BC2E02592}"/>
+              </a:ext>
+            </a:extLst>
+          </p:cNvPr>
+          <p:cNvSpPr>
+            <a:spLocks xmlns:a="http://schemas.openxmlformats.org/drawingml/2006/main" noGrp="1"/>
+          </p:cNvSpPr>
+          <p:nvPr/>
+        </p:nvSpPr>
+        <p:spPr>
+          <a:xfrm xmlns:a="http://schemas.openxmlformats.org/drawingml/2006/main">
+            <a:off x="14668500" y="5181600"/>
+            <a:ext cx="1371600" cy="304800"/>
           </a:xfrm>
           <a:prstGeom xmlns:a="http://schemas.openxmlformats.org/drawingml/2006/main" prst="rect">
             <a:avLst/>
@@ -5944,39 +6347,39 @@
               <a:buNone/>
               <a:defRPr sz="1875" b="1" i="0">
                 <a:solidFill>
-                  <a:srgbClr val="F97316"/>
+                  <a:srgbClr val="2F7D32"/>
                 </a:solidFill>
               </a:defRPr>
             </a:pPr>
             <a:r>
               <a:rPr sz="1875" b="1" i="0">
                 <a:solidFill>
-                  <a:srgbClr val="F97316"/>
-                </a:solidFill>
-              </a:rPr>
-              <a:t>Run tests</a:t>
-            </a:r>
-          </a:p>
-        </p:txBody>
-      </p:sp>
-      <p:sp>
-        <p:nvSpPr>
-          <p:cNvPr id="14" name="">
-            <a:extLst xmlns:a="http://schemas.openxmlformats.org/drawingml/2006/main">
-              <a:ext uri="{FF2B5EF4-FFF2-40B4-BE49-F238E27FC236}">
-                <a16:creationId xmlns:a16="http://schemas.microsoft.com/office/drawing/2014/main" id="{7787DC6F-5F08-4AE5-86C8-DB390A75C517}"/>
-              </a:ext>
-            </a:extLst>
-          </p:cNvPr>
-          <p:cNvSpPr>
-            <a:spLocks xmlns:a="http://schemas.openxmlformats.org/drawingml/2006/main" noGrp="1"/>
-          </p:cNvSpPr>
-          <p:nvPr/>
-        </p:nvSpPr>
-        <p:spPr>
-          <a:xfrm xmlns:a="http://schemas.openxmlformats.org/drawingml/2006/main">
-            <a:off x="11658600" y="3257550"/>
-            <a:ext cx="1257300" cy="228600"/>
+                  <a:srgbClr val="2F7D32"/>
+                </a:solidFill>
+              </a:rPr>
+              <a:t>Run</a:t>
+            </a:r>
+          </a:p>
+        </p:txBody>
+      </p:sp>
+      <p:sp>
+        <p:nvSpPr>
+          <p:cNvPr id="25" name="">
+            <a:extLst xmlns:a="http://schemas.openxmlformats.org/drawingml/2006/main">
+              <a:ext uri="{FF2B5EF4-FFF2-40B4-BE49-F238E27FC236}">
+                <a16:creationId xmlns:a16="http://schemas.microsoft.com/office/drawing/2014/main" id="{23FACDFB-87AD-456F-A676-3363BDD20301}"/>
+              </a:ext>
+            </a:extLst>
+          </p:cNvPr>
+          <p:cNvSpPr>
+            <a:spLocks xmlns:a="http://schemas.openxmlformats.org/drawingml/2006/main" noGrp="1"/>
+          </p:cNvSpPr>
+          <p:nvPr/>
+        </p:nvSpPr>
+        <p:spPr>
+          <a:xfrm xmlns:a="http://schemas.openxmlformats.org/drawingml/2006/main">
+            <a:off x="14744700" y="5867400"/>
+            <a:ext cx="1219200" cy="228600"/>
           </a:xfrm>
           <a:prstGeom xmlns:a="http://schemas.openxmlformats.org/drawingml/2006/main" prst="rect">
             <a:avLst/>
@@ -6003,156 +6406,29 @@
                   <a:srgbClr val="596579"/>
                 </a:solidFill>
               </a:rPr>
-              <a:t>inspect behavior</a:t>
-            </a:r>
-          </a:p>
-        </p:txBody>
-      </p:sp>
-      <p:sp>
-        <p:nvSpPr>
-          <p:cNvPr id="15" name="homework-Swagger Petstore">
-            <a:extLst xmlns:a="http://schemas.openxmlformats.org/drawingml/2006/main">
-              <a:ext uri="{FF2B5EF4-FFF2-40B4-BE49-F238E27FC236}">
-                <a16:creationId xmlns:a16="http://schemas.microsoft.com/office/drawing/2014/main" id="{4BCA9AE5-E713-460C-8E08-A11CB436E733}"/>
-              </a:ext>
-            </a:extLst>
-          </p:cNvPr>
-          <p:cNvSpPr>
-            <a:spLocks xmlns:a="http://schemas.openxmlformats.org/drawingml/2006/main" noGrp="1"/>
-          </p:cNvSpPr>
-          <p:nvPr/>
-        </p:nvSpPr>
-        <p:spPr>
-          <a:xfrm xmlns:a="http://schemas.openxmlformats.org/drawingml/2006/main">
-            <a:off x="819150" y="3921557"/>
-            <a:ext cx="5384800" cy="3429000"/>
-          </a:xfrm>
-          <a:prstGeom xmlns:a="http://schemas.openxmlformats.org/drawingml/2006/main" prst="roundRect">
-            <a:avLst>
-              <a:gd name="adj" fmla="val 7222"/>
-            </a:avLst>
-          </a:prstGeom>
-          <a:solidFill xmlns:a="http://schemas.openxmlformats.org/drawingml/2006/main">
-            <a:srgbClr val="FFFFFF"/>
-          </a:solidFill>
-        </p:spPr>
-      </p:sp>
-      <p:sp>
-        <p:nvSpPr>
-          <p:cNvPr id="16" name="">
-            <a:extLst xmlns:a="http://schemas.openxmlformats.org/drawingml/2006/main">
-              <a:ext uri="{FF2B5EF4-FFF2-40B4-BE49-F238E27FC236}">
-                <a16:creationId xmlns:a16="http://schemas.microsoft.com/office/drawing/2014/main" id="{59C2F846-DB23-4079-A78C-DE5B962A3CFC}"/>
-              </a:ext>
-            </a:extLst>
-          </p:cNvPr>
-          <p:cNvSpPr>
-            <a:spLocks xmlns:a="http://schemas.openxmlformats.org/drawingml/2006/main" noGrp="1"/>
-          </p:cNvSpPr>
-          <p:nvPr/>
-        </p:nvSpPr>
-        <p:spPr>
-          <a:xfrm xmlns:a="http://schemas.openxmlformats.org/drawingml/2006/main">
-            <a:off x="1085850" y="4171950"/>
-            <a:ext cx="4857750" cy="361950"/>
-          </a:xfrm>
-          <a:prstGeom xmlns:a="http://schemas.openxmlformats.org/drawingml/2006/main" prst="rect">
-            <a:avLst/>
-          </a:prstGeom>
-        </p:spPr>
-        <p:txBody>
-          <a:bodyPr xmlns:a="http://schemas.openxmlformats.org/drawingml/2006/main" lIns="0" tIns="0" rIns="0" bIns="0"/>
-          <a:lstStyle xmlns:a="http://schemas.openxmlformats.org/drawingml/2006/main"/>
-          <a:p xmlns:a="http://schemas.openxmlformats.org/drawingml/2006/main">
-            <a:pPr>
-              <a:lnSpc>
-                <a:spcPct val="100000"/>
-              </a:lnSpc>
-              <a:buNone/>
-              <a:defRPr sz="2325" b="1" i="0">
-                <a:solidFill>
-                  <a:srgbClr val="2F7D32"/>
-                </a:solidFill>
-              </a:defRPr>
-            </a:pPr>
-            <a:r>
-              <a:rPr sz="2325" b="1" i="0">
-                <a:solidFill>
-                  <a:srgbClr val="2F7D32"/>
-                </a:solidFill>
-              </a:rPr>
-              <a:t>Swagger Petstore</a:t>
-            </a:r>
-          </a:p>
-        </p:txBody>
-      </p:sp>
-      <p:sp>
-        <p:nvSpPr>
-          <p:cNvPr id="17" name="">
-            <a:extLst xmlns:a="http://schemas.openxmlformats.org/drawingml/2006/main">
-              <a:ext uri="{FF2B5EF4-FFF2-40B4-BE49-F238E27FC236}">
-                <a16:creationId xmlns:a16="http://schemas.microsoft.com/office/drawing/2014/main" id="{ED9B3AF6-50DC-4CAE-9C66-FDE3B86152FB}"/>
-              </a:ext>
-            </a:extLst>
-          </p:cNvPr>
-          <p:cNvSpPr>
-            <a:spLocks xmlns:a="http://schemas.openxmlformats.org/drawingml/2006/main" noGrp="1"/>
-          </p:cNvSpPr>
-          <p:nvPr/>
-        </p:nvSpPr>
-        <p:spPr>
-          <a:xfrm xmlns:a="http://schemas.openxmlformats.org/drawingml/2006/main">
-            <a:off x="1085850" y="4648200"/>
-            <a:ext cx="4857750" cy="209550"/>
-          </a:xfrm>
-          <a:prstGeom xmlns:a="http://schemas.openxmlformats.org/drawingml/2006/main" prst="rect">
-            <a:avLst/>
-          </a:prstGeom>
-        </p:spPr>
-        <p:txBody>
-          <a:bodyPr xmlns:a="http://schemas.openxmlformats.org/drawingml/2006/main" lIns="0" tIns="0" rIns="0" bIns="0"/>
-          <a:lstStyle xmlns:a="http://schemas.openxmlformats.org/drawingml/2006/main"/>
-          <a:p xmlns:a="http://schemas.openxmlformats.org/drawingml/2006/main">
-            <a:pPr>
-              <a:lnSpc>
-                <a:spcPct val="100000"/>
-              </a:lnSpc>
-              <a:buNone/>
-              <a:defRPr sz="1275" b="0" i="0">
-                <a:solidFill>
-                  <a:srgbClr val="596579"/>
-                </a:solidFill>
-              </a:defRPr>
-            </a:pPr>
-            <a:r>
-              <a:rPr sz="1275" b="0" i="0">
-                <a:solidFill>
-                  <a:srgbClr val="596579"/>
-                </a:solidFill>
-              </a:rPr>
-              <a:t>petstore.swagger.io</a:t>
-            </a:r>
-          </a:p>
-        </p:txBody>
-      </p:sp>
-      <p:sp>
-        <p:nvSpPr>
-          <p:cNvPr id="18" name="">
-            <a:extLst xmlns:a="http://schemas.openxmlformats.org/drawingml/2006/main">
-              <a:ext uri="{FF2B5EF4-FFF2-40B4-BE49-F238E27FC236}">
-                <a16:creationId xmlns:a16="http://schemas.microsoft.com/office/drawing/2014/main" id="{9C61EA40-FF76-47A7-92D3-E50D4E188C14}"/>
-              </a:ext>
-            </a:extLst>
-          </p:cNvPr>
-          <p:cNvSpPr>
-            <a:spLocks xmlns:a="http://schemas.openxmlformats.org/drawingml/2006/main" noGrp="1"/>
-          </p:cNvSpPr>
-          <p:nvPr/>
-        </p:nvSpPr>
-        <p:spPr>
-          <a:xfrm xmlns:a="http://schemas.openxmlformats.org/drawingml/2006/main">
-            <a:off x="1085850" y="4991100"/>
-            <a:ext cx="4857750" cy="19050"/>
+              <a:t>contract checks</a:t>
+            </a:r>
+          </a:p>
+        </p:txBody>
+      </p:sp>
+      <p:sp>
+        <p:nvSpPr>
+          <p:cNvPr id="26" name="">
+            <a:extLst xmlns:a="http://schemas.openxmlformats.org/drawingml/2006/main">
+              <a:ext uri="{FF2B5EF4-FFF2-40B4-BE49-F238E27FC236}">
+                <a16:creationId xmlns:a16="http://schemas.microsoft.com/office/drawing/2014/main" id="{5B7F3D2D-ACCF-4CB4-95CD-92A5B2C51800}"/>
+              </a:ext>
+            </a:extLst>
+          </p:cNvPr>
+          <p:cNvSpPr>
+            <a:spLocks xmlns:a="http://schemas.openxmlformats.org/drawingml/2006/main" noGrp="1"/>
+          </p:cNvSpPr>
+          <p:nvPr/>
+        </p:nvSpPr>
+        <p:spPr>
+          <a:xfrm xmlns:a="http://schemas.openxmlformats.org/drawingml/2006/main">
+            <a:off x="9429750" y="6438900"/>
+            <a:ext cx="5905500" cy="28575"/>
           </a:xfrm>
           <a:prstGeom xmlns:a="http://schemas.openxmlformats.org/drawingml/2006/main" prst="rect">
             <a:avLst/>
@@ -6170,71 +6446,218 @@
       </p:sp>
       <p:sp>
         <p:nvSpPr>
-          <p:cNvPr id="19" name="">
-            <a:extLst xmlns:a="http://schemas.openxmlformats.org/drawingml/2006/main">
-              <a:ext uri="{FF2B5EF4-FFF2-40B4-BE49-F238E27FC236}">
-                <a16:creationId xmlns:a16="http://schemas.microsoft.com/office/drawing/2014/main" id="{A3241992-2822-49BA-A123-7F7B26C76471}"/>
-              </a:ext>
-            </a:extLst>
-          </p:cNvPr>
-          <p:cNvSpPr>
-            <a:spLocks xmlns:a="http://schemas.openxmlformats.org/drawingml/2006/main" noGrp="1"/>
-          </p:cNvSpPr>
-          <p:nvPr/>
-        </p:nvSpPr>
-        <p:spPr>
-          <a:xfrm xmlns:a="http://schemas.openxmlformats.org/drawingml/2006/main">
-            <a:off x="1085850" y="5143500"/>
-            <a:ext cx="4857750" cy="552450"/>
-          </a:xfrm>
-          <a:prstGeom xmlns:a="http://schemas.openxmlformats.org/drawingml/2006/main" prst="rect">
-            <a:avLst/>
-          </a:prstGeom>
-        </p:spPr>
-        <p:txBody>
-          <a:bodyPr xmlns:a="http://schemas.openxmlformats.org/drawingml/2006/main" lIns="0" tIns="0" rIns="0" bIns="0"/>
-          <a:lstStyle xmlns:a="http://schemas.openxmlformats.org/drawingml/2006/main"/>
-          <a:p xmlns:a="http://schemas.openxmlformats.org/drawingml/2006/main">
-            <a:pPr>
-              <a:lnSpc>
-                <a:spcPct val="108000"/>
-              </a:lnSpc>
-              <a:buNone/>
-              <a:defRPr sz="1650" b="1" i="0">
+          <p:cNvPr id="27" name="">
+            <a:extLst xmlns:a="http://schemas.openxmlformats.org/drawingml/2006/main">
+              <a:ext uri="{FF2B5EF4-FFF2-40B4-BE49-F238E27FC236}">
+                <a16:creationId xmlns:a16="http://schemas.microsoft.com/office/drawing/2014/main" id="{983B6C0C-DA40-4F3C-912E-8CDF78BBA1EA}"/>
+              </a:ext>
+            </a:extLst>
+          </p:cNvPr>
+          <p:cNvSpPr>
+            <a:spLocks xmlns:a="http://schemas.openxmlformats.org/drawingml/2006/main" noGrp="1"/>
+          </p:cNvSpPr>
+          <p:nvPr/>
+        </p:nvSpPr>
+        <p:spPr>
+          <a:xfrm xmlns:a="http://schemas.openxmlformats.org/drawingml/2006/main">
+            <a:off x="9429750" y="6686550"/>
+            <a:ext cx="6648450" cy="1123950"/>
+          </a:xfrm>
+          <a:prstGeom xmlns:a="http://schemas.openxmlformats.org/drawingml/2006/main" prst="rect">
+            <a:avLst/>
+          </a:prstGeom>
+        </p:spPr>
+        <p:txBody>
+          <a:bodyPr xmlns:a="http://schemas.openxmlformats.org/drawingml/2006/main" lIns="0" tIns="0" rIns="0" bIns="0"/>
+          <a:lstStyle xmlns:a="http://schemas.openxmlformats.org/drawingml/2006/main"/>
+          <a:p xmlns:a="http://schemas.openxmlformats.org/drawingml/2006/main">
+            <a:pPr>
+              <a:lnSpc>
+                <a:spcPct val="112000"/>
+              </a:lnSpc>
+              <a:buNone/>
+              <a:defRPr sz="2175" b="0" i="0">
                 <a:solidFill>
                   <a:srgbClr val="172033"/>
                 </a:solidFill>
               </a:defRPr>
             </a:pPr>
             <a:r>
-              <a:rPr sz="1650" b="1" i="0">
+              <a:rPr sz="2175" b="0" i="0">
                 <a:solidFill>
                   <a:srgbClr val="172033"/>
                 </a:solidFill>
               </a:rPr>
-              <a:t>Best for: OpenAPI basics and tooling compatibility.</a:t>
-            </a:r>
-          </a:p>
-        </p:txBody>
-      </p:sp>
-      <p:sp>
-        <p:nvSpPr>
-          <p:cNvPr id="20" name="">
-            <a:extLst xmlns:a="http://schemas.openxmlformats.org/drawingml/2006/main">
-              <a:ext uri="{FF2B5EF4-FFF2-40B4-BE49-F238E27FC236}">
-                <a16:creationId xmlns:a16="http://schemas.microsoft.com/office/drawing/2014/main" id="{AD9BDCDE-8C21-496D-B4F3-942250970F0F}"/>
-              </a:ext>
-            </a:extLst>
-          </p:cNvPr>
-          <p:cNvSpPr>
-            <a:spLocks xmlns:a="http://schemas.openxmlformats.org/drawingml/2006/main" noGrp="1"/>
-          </p:cNvSpPr>
-          <p:nvPr/>
-        </p:nvSpPr>
-        <p:spPr>
-          <a:xfrm xmlns:a="http://schemas.openxmlformats.org/drawingml/2006/main">
-            <a:off x="1085850" y="5810250"/>
-            <a:ext cx="4857750" cy="571500"/>
+              <a:t>Next: deeper schema validation, auth profiles, multi-example generation, boundary matrices, and CI.</a:t>
+            </a:r>
+          </a:p>
+        </p:txBody>
+      </p:sp>
+      <p:sp>
+        <p:nvSpPr>
+          <p:cNvPr id="28" name="">
+            <a:extLst xmlns:a="http://schemas.openxmlformats.org/drawingml/2006/main">
+              <a:ext uri="{FF2B5EF4-FFF2-40B4-BE49-F238E27FC236}">
+                <a16:creationId xmlns:a16="http://schemas.microsoft.com/office/drawing/2014/main" id="{17646B84-0B42-4E06-966F-C2D4BEADD280}"/>
+              </a:ext>
+            </a:extLst>
+          </p:cNvPr>
+          <p:cNvSpPr>
+            <a:spLocks xmlns:a="http://schemas.openxmlformats.org/drawingml/2006/main" noGrp="1"/>
+          </p:cNvSpPr>
+          <p:nvPr/>
+        </p:nvSpPr>
+        <p:spPr>
+          <a:xfrm xmlns:a="http://schemas.openxmlformats.org/drawingml/2006/main">
+            <a:off x="819150" y="9601200"/>
+            <a:ext cx="16649700" cy="171450"/>
+          </a:xfrm>
+          <a:prstGeom xmlns:a="http://schemas.openxmlformats.org/drawingml/2006/main" prst="rect">
+            <a:avLst/>
+          </a:prstGeom>
+        </p:spPr>
+        <p:txBody>
+          <a:bodyPr xmlns:a="http://schemas.openxmlformats.org/drawingml/2006/main" lIns="0" tIns="0" rIns="0" bIns="0"/>
+          <a:lstStyle xmlns:a="http://schemas.openxmlformats.org/drawingml/2006/main"/>
+          <a:p xmlns:a="http://schemas.openxmlformats.org/drawingml/2006/main">
+            <a:pPr>
+              <a:lnSpc>
+                <a:spcPct val="100000"/>
+              </a:lnSpc>
+              <a:buNone/>
+              <a:defRPr sz="1050" b="0" i="0">
+                <a:solidFill>
+                  <a:srgbClr val="8B7D68"/>
+                </a:solidFill>
+              </a:defRPr>
+            </a:pPr>
+            <a:r>
+              <a:rPr sz="1050" b="0" i="0">
+                <a:solidFill>
+                  <a:srgbClr val="8B7D68"/>
+                </a:solidFill>
+              </a:rPr>
+              <a:t>Close the loop: spec changes should regenerate executable evidence.</a:t>
+            </a:r>
+          </a:p>
+        </p:txBody>
+      </p:sp>
+    </p:spTree>
+    <p:extLst>
+      <p:ext uri="{BB962C8B-B14F-4D97-AF65-F5344CB8AC3E}">
+        <p14:creationId xmlns:p14="http://schemas.microsoft.com/office/powerpoint/2010/main" val="1621484292"/>
+      </p:ext>
+    </p:extLst>
+  </p:cSld>
+</p:sld>
+</file>
+
+<file path=ppt/slides/slide14.xml><?xml version="1.0" encoding="utf-8"?>
+<p:sld xmlns:p="http://schemas.openxmlformats.org/presentationml/2006/main">
+  <p:cSld>
+    <p:spTree>
+      <p:nvGrpSpPr>
+        <p:cNvPr id="1" name=""/>
+        <p:cNvGrpSpPr/>
+        <p:nvPr/>
+      </p:nvGrpSpPr>
+      <p:grpSpPr>
+        <a:xfrm xmlns:a="http://schemas.openxmlformats.org/drawingml/2006/main"/>
+      </p:grpSpPr>
+      <p:sp>
+        <p:nvSpPr>
+          <p:cNvPr id="1" name="slide-bg">
+            <a:extLst xmlns:a="http://schemas.openxmlformats.org/drawingml/2006/main">
+              <a:ext uri="{FF2B5EF4-FFF2-40B4-BE49-F238E27FC236}">
+                <a16:creationId xmlns:a16="http://schemas.microsoft.com/office/drawing/2014/main" id="{5BF3172C-AF6E-49E1-B797-81721F007289}"/>
+              </a:ext>
+            </a:extLst>
+          </p:cNvPr>
+          <p:cNvSpPr>
+            <a:spLocks xmlns:a="http://schemas.openxmlformats.org/drawingml/2006/main" noGrp="1"/>
+          </p:cNvSpPr>
+          <p:nvPr/>
+        </p:nvSpPr>
+        <p:spPr>
+          <a:xfrm xmlns:a="http://schemas.openxmlformats.org/drawingml/2006/main">
+            <a:off x="0" y="0"/>
+            <a:ext cx="18288000" cy="10287000"/>
+          </a:xfrm>
+          <a:prstGeom xmlns:a="http://schemas.openxmlformats.org/drawingml/2006/main" prst="rect">
+            <a:avLst/>
+          </a:prstGeom>
+          <a:solidFill xmlns:a="http://schemas.openxmlformats.org/drawingml/2006/main">
+            <a:srgbClr val="F7F3EA"/>
+          </a:solidFill>
+        </p:spPr>
+      </p:sp>
+      <p:sp>
+        <p:nvSpPr>
+          <p:cNvPr id="2" name="homework-title">
+            <a:extLst xmlns:a="http://schemas.openxmlformats.org/drawingml/2006/main">
+              <a:ext uri="{FF2B5EF4-FFF2-40B4-BE49-F238E27FC236}">
+                <a16:creationId xmlns:a16="http://schemas.microsoft.com/office/drawing/2014/main" id="{31A6F9A4-FEFB-41FE-8B6D-38BD4AB05226}"/>
+              </a:ext>
+            </a:extLst>
+          </p:cNvPr>
+          <p:cNvSpPr>
+            <a:spLocks xmlns:a="http://schemas.openxmlformats.org/drawingml/2006/main" noGrp="1"/>
+          </p:cNvSpPr>
+          <p:nvPr/>
+        </p:nvSpPr>
+        <p:spPr>
+          <a:xfrm xmlns:a="http://schemas.openxmlformats.org/drawingml/2006/main">
+            <a:off x="819150" y="533400"/>
+            <a:ext cx="7810500" cy="781050"/>
+          </a:xfrm>
+          <a:prstGeom xmlns:a="http://schemas.openxmlformats.org/drawingml/2006/main" prst="rect">
+            <a:avLst/>
+          </a:prstGeom>
+        </p:spPr>
+        <p:txBody>
+          <a:bodyPr xmlns:a="http://schemas.openxmlformats.org/drawingml/2006/main" lIns="0" tIns="0" rIns="0" bIns="0"/>
+          <a:lstStyle xmlns:a="http://schemas.openxmlformats.org/drawingml/2006/main"/>
+          <a:p xmlns:a="http://schemas.openxmlformats.org/drawingml/2006/main">
+            <a:pPr>
+              <a:lnSpc>
+                <a:spcPct val="94000"/>
+              </a:lnSpc>
+              <a:buNone/>
+              <a:defRPr sz="5400" b="1" i="0">
+                <a:solidFill>
+                  <a:srgbClr val="172033"/>
+                </a:solidFill>
+              </a:defRPr>
+            </a:pPr>
+            <a:r>
+              <a:rPr sz="5400" b="1" i="0">
+                <a:solidFill>
+                  <a:srgbClr val="172033"/>
+                </a:solidFill>
+              </a:rPr>
+              <a:t>Homework</a:t>
+            </a:r>
+          </a:p>
+        </p:txBody>
+      </p:sp>
+      <p:sp>
+        <p:nvSpPr>
+          <p:cNvPr id="3" name="homework-subtitle">
+            <a:extLst xmlns:a="http://schemas.openxmlformats.org/drawingml/2006/main">
+              <a:ext uri="{FF2B5EF4-FFF2-40B4-BE49-F238E27FC236}">
+                <a16:creationId xmlns:a16="http://schemas.microsoft.com/office/drawing/2014/main" id="{BE46468E-A1CB-4FD8-93CE-8B9D5CFF9D8E}"/>
+              </a:ext>
+            </a:extLst>
+          </p:cNvPr>
+          <p:cNvSpPr>
+            <a:spLocks xmlns:a="http://schemas.openxmlformats.org/drawingml/2006/main" noGrp="1"/>
+          </p:cNvSpPr>
+          <p:nvPr/>
+        </p:nvSpPr>
+        <p:spPr>
+          <a:xfrm xmlns:a="http://schemas.openxmlformats.org/drawingml/2006/main">
+            <a:off x="819150" y="1466850"/>
+            <a:ext cx="8458200" cy="381000"/>
           </a:xfrm>
           <a:prstGeom xmlns:a="http://schemas.openxmlformats.org/drawingml/2006/main" prst="rect">
             <a:avLst/>
@@ -6249,40 +6672,519 @@
                 <a:spcPct val="112000"/>
               </a:lnSpc>
               <a:buNone/>
-              <a:defRPr sz="1650" b="0" i="0">
-                <a:solidFill>
-                  <a:srgbClr val="596579"/>
-                </a:solidFill>
-              </a:defRPr>
-            </a:pPr>
-            <a:r>
-              <a:rPr sz="1650" b="0" i="0">
-                <a:solidFill>
-                  <a:srgbClr val="596579"/>
-                </a:solidFill>
-              </a:rPr>
-              <a:t>Cover at least one GET and one POST using the Swagger UI spec.</a:t>
-            </a:r>
-          </a:p>
-        </p:txBody>
-      </p:sp>
-      <p:sp>
-        <p:nvSpPr>
-          <p:cNvPr id="21" name="homework-Restful-Booker">
-            <a:extLst xmlns:a="http://schemas.openxmlformats.org/drawingml/2006/main">
-              <a:ext uri="{FF2B5EF4-FFF2-40B4-BE49-F238E27FC236}">
-                <a16:creationId xmlns:a16="http://schemas.microsoft.com/office/drawing/2014/main" id="{C53097DE-38E3-455D-8CC7-99D8066990D9}"/>
-              </a:ext>
-            </a:extLst>
-          </p:cNvPr>
-          <p:cNvSpPr>
-            <a:spLocks xmlns:a="http://schemas.openxmlformats.org/drawingml/2006/main" noGrp="1"/>
-          </p:cNvSpPr>
-          <p:nvPr/>
-        </p:nvSpPr>
-        <p:spPr>
-          <a:xfrm xmlns:a="http://schemas.openxmlformats.org/drawingml/2006/main">
-            <a:off x="6451600" y="3921557"/>
+              <a:defRPr sz="2175" b="0" i="0">
+                <a:solidFill>
+                  <a:srgbClr val="596579"/>
+                </a:solidFill>
+              </a:defRPr>
+            </a:pPr>
+            <a:r>
+              <a:rPr sz="2175" b="0" i="0">
+                <a:solidFill>
+                  <a:srgbClr val="596579"/>
+                </a:solidFill>
+              </a:rPr>
+              <a:t>Explore public test APIs: read docs, write Playwright tests, run them.</a:t>
+            </a:r>
+          </a:p>
+        </p:txBody>
+      </p:sp>
+      <p:sp>
+        <p:nvSpPr>
+          <p:cNvPr id="4" name="">
+            <a:extLst xmlns:a="http://schemas.openxmlformats.org/drawingml/2006/main">
+              <a:ext uri="{FF2B5EF4-FFF2-40B4-BE49-F238E27FC236}">
+                <a16:creationId xmlns:a16="http://schemas.microsoft.com/office/drawing/2014/main" id="{75E69418-308E-4188-87F0-DE5C7D391084}"/>
+              </a:ext>
+            </a:extLst>
+          </p:cNvPr>
+          <p:cNvSpPr>
+            <a:spLocks xmlns:a="http://schemas.openxmlformats.org/drawingml/2006/main" noGrp="1"/>
+          </p:cNvSpPr>
+          <p:nvPr/>
+        </p:nvSpPr>
+        <p:spPr>
+          <a:xfrm xmlns:a="http://schemas.openxmlformats.org/drawingml/2006/main">
+            <a:off x="4857750" y="2266950"/>
+            <a:ext cx="2286000" cy="895350"/>
+          </a:xfrm>
+          <a:prstGeom xmlns:a="http://schemas.openxmlformats.org/drawingml/2006/main" prst="roundRect">
+            <a:avLst>
+              <a:gd name="adj" fmla="val 25532"/>
+            </a:avLst>
+          </a:prstGeom>
+          <a:solidFill xmlns:a="http://schemas.openxmlformats.org/drawingml/2006/main">
+            <a:srgbClr val="FFFFFF"/>
+          </a:solidFill>
+        </p:spPr>
+      </p:sp>
+      <p:sp>
+        <p:nvSpPr>
+          <p:cNvPr id="5" name="">
+            <a:extLst xmlns:a="http://schemas.openxmlformats.org/drawingml/2006/main">
+              <a:ext uri="{FF2B5EF4-FFF2-40B4-BE49-F238E27FC236}">
+                <a16:creationId xmlns:a16="http://schemas.microsoft.com/office/drawing/2014/main" id="{8D147F6D-EFE8-4B54-8889-F1ACCE0D112F}"/>
+              </a:ext>
+            </a:extLst>
+          </p:cNvPr>
+          <p:cNvSpPr>
+            <a:spLocks xmlns:a="http://schemas.openxmlformats.org/drawingml/2006/main" noGrp="1"/>
+          </p:cNvSpPr>
+          <p:nvPr/>
+        </p:nvSpPr>
+        <p:spPr>
+          <a:xfrm xmlns:a="http://schemas.openxmlformats.org/drawingml/2006/main">
+            <a:off x="5029200" y="2571750"/>
+            <a:ext cx="1943100" cy="304800"/>
+          </a:xfrm>
+          <a:prstGeom xmlns:a="http://schemas.openxmlformats.org/drawingml/2006/main" prst="rect">
+            <a:avLst/>
+          </a:prstGeom>
+        </p:spPr>
+        <p:txBody>
+          <a:bodyPr xmlns:a="http://schemas.openxmlformats.org/drawingml/2006/main" lIns="0" tIns="0" rIns="0" bIns="0"/>
+          <a:lstStyle xmlns:a="http://schemas.openxmlformats.org/drawingml/2006/main"/>
+          <a:p xmlns:a="http://schemas.openxmlformats.org/drawingml/2006/main">
+            <a:pPr>
+              <a:lnSpc>
+                <a:spcPct val="100000"/>
+              </a:lnSpc>
+              <a:buNone/>
+              <a:defRPr sz="1875" b="1" i="0">
+                <a:solidFill>
+                  <a:srgbClr val="65B32E"/>
+                </a:solidFill>
+              </a:defRPr>
+            </a:pPr>
+            <a:r>
+              <a:rPr sz="1875" b="1" i="0">
+                <a:solidFill>
+                  <a:srgbClr val="65B32E"/>
+                </a:solidFill>
+              </a:rPr>
+              <a:t>Read docs</a:t>
+            </a:r>
+          </a:p>
+        </p:txBody>
+      </p:sp>
+      <p:sp>
+        <p:nvSpPr>
+          <p:cNvPr id="6" name="">
+            <a:extLst xmlns:a="http://schemas.openxmlformats.org/drawingml/2006/main">
+              <a:ext uri="{FF2B5EF4-FFF2-40B4-BE49-F238E27FC236}">
+                <a16:creationId xmlns:a16="http://schemas.microsoft.com/office/drawing/2014/main" id="{3F33835D-621A-4708-93EA-977B8D0445B0}"/>
+              </a:ext>
+            </a:extLst>
+          </p:cNvPr>
+          <p:cNvSpPr>
+            <a:spLocks xmlns:a="http://schemas.openxmlformats.org/drawingml/2006/main" noGrp="1"/>
+          </p:cNvSpPr>
+          <p:nvPr/>
+        </p:nvSpPr>
+        <p:spPr>
+          <a:xfrm xmlns:a="http://schemas.openxmlformats.org/drawingml/2006/main">
+            <a:off x="5162550" y="3257550"/>
+            <a:ext cx="1676400" cy="228600"/>
+          </a:xfrm>
+          <a:prstGeom xmlns:a="http://schemas.openxmlformats.org/drawingml/2006/main" prst="rect">
+            <a:avLst/>
+          </a:prstGeom>
+        </p:spPr>
+        <p:txBody>
+          <a:bodyPr xmlns:a="http://schemas.openxmlformats.org/drawingml/2006/main" lIns="0" tIns="0" rIns="0" bIns="0"/>
+          <a:lstStyle xmlns:a="http://schemas.openxmlformats.org/drawingml/2006/main"/>
+          <a:p xmlns:a="http://schemas.openxmlformats.org/drawingml/2006/main">
+            <a:pPr>
+              <a:lnSpc>
+                <a:spcPct val="110000"/>
+              </a:lnSpc>
+              <a:buNone/>
+              <a:defRPr sz="1350" b="0" i="0">
+                <a:solidFill>
+                  <a:srgbClr val="596579"/>
+                </a:solidFill>
+              </a:defRPr>
+            </a:pPr>
+            <a:r>
+              <a:rPr sz="1350" b="0" i="0">
+                <a:solidFill>
+                  <a:srgbClr val="596579"/>
+                </a:solidFill>
+              </a:rPr>
+              <a:t>understand endpoints</a:t>
+            </a:r>
+          </a:p>
+        </p:txBody>
+      </p:sp>
+      <p:sp>
+        <p:nvSpPr>
+          <p:cNvPr id="7" name="">
+            <a:extLst xmlns:a="http://schemas.openxmlformats.org/drawingml/2006/main">
+              <a:ext uri="{FF2B5EF4-FFF2-40B4-BE49-F238E27FC236}">
+                <a16:creationId xmlns:a16="http://schemas.microsoft.com/office/drawing/2014/main" id="{1B7DD333-2A32-471F-8858-257573FA0CE9}"/>
+              </a:ext>
+            </a:extLst>
+          </p:cNvPr>
+          <p:cNvSpPr>
+            <a:spLocks xmlns:a="http://schemas.openxmlformats.org/drawingml/2006/main" noGrp="1"/>
+          </p:cNvSpPr>
+          <p:nvPr/>
+        </p:nvSpPr>
+        <p:spPr>
+          <a:xfrm xmlns:a="http://schemas.openxmlformats.org/drawingml/2006/main">
+            <a:off x="7277100" y="2667000"/>
+            <a:ext cx="590550" cy="419100"/>
+          </a:xfrm>
+          <a:prstGeom xmlns:a="http://schemas.openxmlformats.org/drawingml/2006/main" prst="rect">
+            <a:avLst/>
+          </a:prstGeom>
+        </p:spPr>
+        <p:txBody>
+          <a:bodyPr xmlns:a="http://schemas.openxmlformats.org/drawingml/2006/main" lIns="0" tIns="0" rIns="0" bIns="0"/>
+          <a:lstStyle xmlns:a="http://schemas.openxmlformats.org/drawingml/2006/main"/>
+          <a:p xmlns:a="http://schemas.openxmlformats.org/drawingml/2006/main">
+            <a:pPr>
+              <a:lnSpc>
+                <a:spcPct val="100000"/>
+              </a:lnSpc>
+              <a:buNone/>
+              <a:defRPr sz="2850" b="1" i="0">
+                <a:solidFill>
+                  <a:srgbClr val="596579"/>
+                </a:solidFill>
+              </a:defRPr>
+            </a:pPr>
+            <a:r>
+              <a:rPr sz="2850" b="1" i="0">
+                <a:solidFill>
+                  <a:srgbClr val="596579"/>
+                </a:solidFill>
+              </a:rPr>
+              <a:t>-&gt;</a:t>
+            </a:r>
+          </a:p>
+        </p:txBody>
+      </p:sp>
+      <p:sp>
+        <p:nvSpPr>
+          <p:cNvPr id="8" name="">
+            <a:extLst xmlns:a="http://schemas.openxmlformats.org/drawingml/2006/main">
+              <a:ext uri="{FF2B5EF4-FFF2-40B4-BE49-F238E27FC236}">
+                <a16:creationId xmlns:a16="http://schemas.microsoft.com/office/drawing/2014/main" id="{994B9E74-80B1-4A7F-899D-1277517F5736}"/>
+              </a:ext>
+            </a:extLst>
+          </p:cNvPr>
+          <p:cNvSpPr>
+            <a:spLocks xmlns:a="http://schemas.openxmlformats.org/drawingml/2006/main" noGrp="1"/>
+          </p:cNvSpPr>
+          <p:nvPr/>
+        </p:nvSpPr>
+        <p:spPr>
+          <a:xfrm xmlns:a="http://schemas.openxmlformats.org/drawingml/2006/main">
+            <a:off x="8001000" y="2152650"/>
+            <a:ext cx="2286000" cy="895350"/>
+          </a:xfrm>
+          <a:prstGeom xmlns:a="http://schemas.openxmlformats.org/drawingml/2006/main" prst="roundRect">
+            <a:avLst>
+              <a:gd name="adj" fmla="val 25532"/>
+            </a:avLst>
+          </a:prstGeom>
+          <a:solidFill xmlns:a="http://schemas.openxmlformats.org/drawingml/2006/main">
+            <a:srgbClr val="FFFFFF"/>
+          </a:solidFill>
+        </p:spPr>
+      </p:sp>
+      <p:sp>
+        <p:nvSpPr>
+          <p:cNvPr id="9" name="">
+            <a:extLst xmlns:a="http://schemas.openxmlformats.org/drawingml/2006/main">
+              <a:ext uri="{FF2B5EF4-FFF2-40B4-BE49-F238E27FC236}">
+                <a16:creationId xmlns:a16="http://schemas.microsoft.com/office/drawing/2014/main" id="{DC4F73B8-19F3-43CC-A32A-EFB1D8D67FAD}"/>
+              </a:ext>
+            </a:extLst>
+          </p:cNvPr>
+          <p:cNvSpPr>
+            <a:spLocks xmlns:a="http://schemas.openxmlformats.org/drawingml/2006/main" noGrp="1"/>
+          </p:cNvSpPr>
+          <p:nvPr/>
+        </p:nvSpPr>
+        <p:spPr>
+          <a:xfrm xmlns:a="http://schemas.openxmlformats.org/drawingml/2006/main">
+            <a:off x="8172450" y="2457450"/>
+            <a:ext cx="1943100" cy="304800"/>
+          </a:xfrm>
+          <a:prstGeom xmlns:a="http://schemas.openxmlformats.org/drawingml/2006/main" prst="rect">
+            <a:avLst/>
+          </a:prstGeom>
+        </p:spPr>
+        <p:txBody>
+          <a:bodyPr xmlns:a="http://schemas.openxmlformats.org/drawingml/2006/main" lIns="0" tIns="0" rIns="0" bIns="0"/>
+          <a:lstStyle xmlns:a="http://schemas.openxmlformats.org/drawingml/2006/main"/>
+          <a:p xmlns:a="http://schemas.openxmlformats.org/drawingml/2006/main">
+            <a:pPr>
+              <a:lnSpc>
+                <a:spcPct val="100000"/>
+              </a:lnSpc>
+              <a:buNone/>
+              <a:defRPr sz="1875" b="1" i="0">
+                <a:solidFill>
+                  <a:srgbClr val="2563EB"/>
+                </a:solidFill>
+              </a:defRPr>
+            </a:pPr>
+            <a:r>
+              <a:rPr sz="1875" b="1" i="0">
+                <a:solidFill>
+                  <a:srgbClr val="2563EB"/>
+                </a:solidFill>
+              </a:rPr>
+              <a:t>Write tests</a:t>
+            </a:r>
+          </a:p>
+        </p:txBody>
+      </p:sp>
+      <p:sp>
+        <p:nvSpPr>
+          <p:cNvPr id="10" name="">
+            <a:extLst xmlns:a="http://schemas.openxmlformats.org/drawingml/2006/main">
+              <a:ext uri="{FF2B5EF4-FFF2-40B4-BE49-F238E27FC236}">
+                <a16:creationId xmlns:a16="http://schemas.microsoft.com/office/drawing/2014/main" id="{54281237-7346-4EFE-9CB5-406E8EC33BF6}"/>
+              </a:ext>
+            </a:extLst>
+          </p:cNvPr>
+          <p:cNvSpPr>
+            <a:spLocks xmlns:a="http://schemas.openxmlformats.org/drawingml/2006/main" noGrp="1"/>
+          </p:cNvSpPr>
+          <p:nvPr/>
+        </p:nvSpPr>
+        <p:spPr>
+          <a:xfrm xmlns:a="http://schemas.openxmlformats.org/drawingml/2006/main">
+            <a:off x="8439150" y="3143250"/>
+            <a:ext cx="1409700" cy="457200"/>
+          </a:xfrm>
+          <a:prstGeom xmlns:a="http://schemas.openxmlformats.org/drawingml/2006/main" prst="rect">
+            <a:avLst/>
+          </a:prstGeom>
+        </p:spPr>
+        <p:txBody>
+          <a:bodyPr xmlns:a="http://schemas.openxmlformats.org/drawingml/2006/main" lIns="0" tIns="0" rIns="0" bIns="0"/>
+          <a:lstStyle xmlns:a="http://schemas.openxmlformats.org/drawingml/2006/main"/>
+          <a:p xmlns:a="http://schemas.openxmlformats.org/drawingml/2006/main">
+            <a:pPr>
+              <a:lnSpc>
+                <a:spcPct val="110000"/>
+              </a:lnSpc>
+              <a:buNone/>
+              <a:defRPr sz="1350" b="0" i="0">
+                <a:solidFill>
+                  <a:srgbClr val="596579"/>
+                </a:solidFill>
+              </a:defRPr>
+            </a:pPr>
+            <a:r>
+              <a:rPr sz="1350" b="0" i="0">
+                <a:solidFill>
+                  <a:srgbClr val="596579"/>
+                </a:solidFill>
+              </a:rPr>
+              <a:t>use request fixture</a:t>
+            </a:r>
+          </a:p>
+        </p:txBody>
+      </p:sp>
+      <p:sp>
+        <p:nvSpPr>
+          <p:cNvPr id="11" name="">
+            <a:extLst xmlns:a="http://schemas.openxmlformats.org/drawingml/2006/main">
+              <a:ext uri="{FF2B5EF4-FFF2-40B4-BE49-F238E27FC236}">
+                <a16:creationId xmlns:a16="http://schemas.microsoft.com/office/drawing/2014/main" id="{F69A01A8-7F87-496D-9034-1B8A189ACA6F}"/>
+              </a:ext>
+            </a:extLst>
+          </p:cNvPr>
+          <p:cNvSpPr>
+            <a:spLocks xmlns:a="http://schemas.openxmlformats.org/drawingml/2006/main" noGrp="1"/>
+          </p:cNvSpPr>
+          <p:nvPr/>
+        </p:nvSpPr>
+        <p:spPr>
+          <a:xfrm xmlns:a="http://schemas.openxmlformats.org/drawingml/2006/main">
+            <a:off x="10420350" y="2667000"/>
+            <a:ext cx="590550" cy="419100"/>
+          </a:xfrm>
+          <a:prstGeom xmlns:a="http://schemas.openxmlformats.org/drawingml/2006/main" prst="rect">
+            <a:avLst/>
+          </a:prstGeom>
+        </p:spPr>
+        <p:txBody>
+          <a:bodyPr xmlns:a="http://schemas.openxmlformats.org/drawingml/2006/main" lIns="0" tIns="0" rIns="0" bIns="0"/>
+          <a:lstStyle xmlns:a="http://schemas.openxmlformats.org/drawingml/2006/main"/>
+          <a:p xmlns:a="http://schemas.openxmlformats.org/drawingml/2006/main">
+            <a:pPr>
+              <a:lnSpc>
+                <a:spcPct val="100000"/>
+              </a:lnSpc>
+              <a:buNone/>
+              <a:defRPr sz="2850" b="1" i="0">
+                <a:solidFill>
+                  <a:srgbClr val="596579"/>
+                </a:solidFill>
+              </a:defRPr>
+            </a:pPr>
+            <a:r>
+              <a:rPr sz="2850" b="1" i="0">
+                <a:solidFill>
+                  <a:srgbClr val="596579"/>
+                </a:solidFill>
+              </a:rPr>
+              <a:t>-&gt;</a:t>
+            </a:r>
+          </a:p>
+        </p:txBody>
+      </p:sp>
+      <p:sp>
+        <p:nvSpPr>
+          <p:cNvPr id="12" name="">
+            <a:extLst xmlns:a="http://schemas.openxmlformats.org/drawingml/2006/main">
+              <a:ext uri="{FF2B5EF4-FFF2-40B4-BE49-F238E27FC236}">
+                <a16:creationId xmlns:a16="http://schemas.microsoft.com/office/drawing/2014/main" id="{DF45EFFF-AF3F-496A-A0DF-361F1553B210}"/>
+              </a:ext>
+            </a:extLst>
+          </p:cNvPr>
+          <p:cNvSpPr>
+            <a:spLocks xmlns:a="http://schemas.openxmlformats.org/drawingml/2006/main" noGrp="1"/>
+          </p:cNvSpPr>
+          <p:nvPr/>
+        </p:nvSpPr>
+        <p:spPr>
+          <a:xfrm xmlns:a="http://schemas.openxmlformats.org/drawingml/2006/main">
+            <a:off x="11144250" y="2266950"/>
+            <a:ext cx="2286000" cy="895350"/>
+          </a:xfrm>
+          <a:prstGeom xmlns:a="http://schemas.openxmlformats.org/drawingml/2006/main" prst="roundRect">
+            <a:avLst>
+              <a:gd name="adj" fmla="val 25532"/>
+            </a:avLst>
+          </a:prstGeom>
+          <a:solidFill xmlns:a="http://schemas.openxmlformats.org/drawingml/2006/main">
+            <a:srgbClr val="FFFFFF"/>
+          </a:solidFill>
+        </p:spPr>
+      </p:sp>
+      <p:sp>
+        <p:nvSpPr>
+          <p:cNvPr id="13" name="">
+            <a:extLst xmlns:a="http://schemas.openxmlformats.org/drawingml/2006/main">
+              <a:ext uri="{FF2B5EF4-FFF2-40B4-BE49-F238E27FC236}">
+                <a16:creationId xmlns:a16="http://schemas.microsoft.com/office/drawing/2014/main" id="{34ADB6A0-7764-4AEF-8A0F-4A0CE5114C5D}"/>
+              </a:ext>
+            </a:extLst>
+          </p:cNvPr>
+          <p:cNvSpPr>
+            <a:spLocks xmlns:a="http://schemas.openxmlformats.org/drawingml/2006/main" noGrp="1"/>
+          </p:cNvSpPr>
+          <p:nvPr/>
+        </p:nvSpPr>
+        <p:spPr>
+          <a:xfrm xmlns:a="http://schemas.openxmlformats.org/drawingml/2006/main">
+            <a:off x="11315700" y="2571750"/>
+            <a:ext cx="1943100" cy="304800"/>
+          </a:xfrm>
+          <a:prstGeom xmlns:a="http://schemas.openxmlformats.org/drawingml/2006/main" prst="rect">
+            <a:avLst/>
+          </a:prstGeom>
+        </p:spPr>
+        <p:txBody>
+          <a:bodyPr xmlns:a="http://schemas.openxmlformats.org/drawingml/2006/main" lIns="0" tIns="0" rIns="0" bIns="0"/>
+          <a:lstStyle xmlns:a="http://schemas.openxmlformats.org/drawingml/2006/main"/>
+          <a:p xmlns:a="http://schemas.openxmlformats.org/drawingml/2006/main">
+            <a:pPr>
+              <a:lnSpc>
+                <a:spcPct val="100000"/>
+              </a:lnSpc>
+              <a:buNone/>
+              <a:defRPr sz="1875" b="1" i="0">
+                <a:solidFill>
+                  <a:srgbClr val="F97316"/>
+                </a:solidFill>
+              </a:defRPr>
+            </a:pPr>
+            <a:r>
+              <a:rPr sz="1875" b="1" i="0">
+                <a:solidFill>
+                  <a:srgbClr val="F97316"/>
+                </a:solidFill>
+              </a:rPr>
+              <a:t>Run tests</a:t>
+            </a:r>
+          </a:p>
+        </p:txBody>
+      </p:sp>
+      <p:sp>
+        <p:nvSpPr>
+          <p:cNvPr id="14" name="">
+            <a:extLst xmlns:a="http://schemas.openxmlformats.org/drawingml/2006/main">
+              <a:ext uri="{FF2B5EF4-FFF2-40B4-BE49-F238E27FC236}">
+                <a16:creationId xmlns:a16="http://schemas.microsoft.com/office/drawing/2014/main" id="{A167DC52-A356-4620-8B2D-B5DFF5EDA9B6}"/>
+              </a:ext>
+            </a:extLst>
+          </p:cNvPr>
+          <p:cNvSpPr>
+            <a:spLocks xmlns:a="http://schemas.openxmlformats.org/drawingml/2006/main" noGrp="1"/>
+          </p:cNvSpPr>
+          <p:nvPr/>
+        </p:nvSpPr>
+        <p:spPr>
+          <a:xfrm xmlns:a="http://schemas.openxmlformats.org/drawingml/2006/main">
+            <a:off x="11658600" y="3257550"/>
+            <a:ext cx="1257300" cy="228600"/>
+          </a:xfrm>
+          <a:prstGeom xmlns:a="http://schemas.openxmlformats.org/drawingml/2006/main" prst="rect">
+            <a:avLst/>
+          </a:prstGeom>
+        </p:spPr>
+        <p:txBody>
+          <a:bodyPr xmlns:a="http://schemas.openxmlformats.org/drawingml/2006/main" lIns="0" tIns="0" rIns="0" bIns="0"/>
+          <a:lstStyle xmlns:a="http://schemas.openxmlformats.org/drawingml/2006/main"/>
+          <a:p xmlns:a="http://schemas.openxmlformats.org/drawingml/2006/main">
+            <a:pPr>
+              <a:lnSpc>
+                <a:spcPct val="110000"/>
+              </a:lnSpc>
+              <a:buNone/>
+              <a:defRPr sz="1350" b="0" i="0">
+                <a:solidFill>
+                  <a:srgbClr val="596579"/>
+                </a:solidFill>
+              </a:defRPr>
+            </a:pPr>
+            <a:r>
+              <a:rPr sz="1350" b="0" i="0">
+                <a:solidFill>
+                  <a:srgbClr val="596579"/>
+                </a:solidFill>
+              </a:rPr>
+              <a:t>inspect behavior</a:t>
+            </a:r>
+          </a:p>
+        </p:txBody>
+      </p:sp>
+      <p:sp>
+        <p:nvSpPr>
+          <p:cNvPr id="15" name="homework-Swagger Petstore">
+            <a:extLst xmlns:a="http://schemas.openxmlformats.org/drawingml/2006/main">
+              <a:ext uri="{FF2B5EF4-FFF2-40B4-BE49-F238E27FC236}">
+                <a16:creationId xmlns:a16="http://schemas.microsoft.com/office/drawing/2014/main" id="{68B02282-3E0F-4683-B18A-50B218B75E26}"/>
+              </a:ext>
+            </a:extLst>
+          </p:cNvPr>
+          <p:cNvSpPr>
+            <a:spLocks xmlns:a="http://schemas.openxmlformats.org/drawingml/2006/main" noGrp="1"/>
+          </p:cNvSpPr>
+          <p:nvPr/>
+        </p:nvSpPr>
+        <p:spPr>
+          <a:xfrm xmlns:a="http://schemas.openxmlformats.org/drawingml/2006/main">
+            <a:off x="819150" y="3921557"/>
             <a:ext cx="5384800" cy="3429000"/>
           </a:xfrm>
           <a:prstGeom xmlns:a="http://schemas.openxmlformats.org/drawingml/2006/main" prst="roundRect">
@@ -6297,21 +7199,21 @@
       </p:sp>
       <p:sp>
         <p:nvSpPr>
-          <p:cNvPr id="22" name="">
-            <a:extLst xmlns:a="http://schemas.openxmlformats.org/drawingml/2006/main">
-              <a:ext uri="{FF2B5EF4-FFF2-40B4-BE49-F238E27FC236}">
-                <a16:creationId xmlns:a16="http://schemas.microsoft.com/office/drawing/2014/main" id="{E67EDBD0-F9BC-47B9-85B8-04A70F8ACA24}"/>
-              </a:ext>
-            </a:extLst>
-          </p:cNvPr>
-          <p:cNvSpPr>
-            <a:spLocks xmlns:a="http://schemas.openxmlformats.org/drawingml/2006/main" noGrp="1"/>
-          </p:cNvSpPr>
-          <p:nvPr/>
-        </p:nvSpPr>
-        <p:spPr>
-          <a:xfrm xmlns:a="http://schemas.openxmlformats.org/drawingml/2006/main">
-            <a:off x="6724650" y="4171950"/>
+          <p:cNvPr id="16" name="">
+            <a:extLst xmlns:a="http://schemas.openxmlformats.org/drawingml/2006/main">
+              <a:ext uri="{FF2B5EF4-FFF2-40B4-BE49-F238E27FC236}">
+                <a16:creationId xmlns:a16="http://schemas.microsoft.com/office/drawing/2014/main" id="{9FDDB083-90D8-4115-B2BA-D19EFD264110}"/>
+              </a:ext>
+            </a:extLst>
+          </p:cNvPr>
+          <p:cNvSpPr>
+            <a:spLocks xmlns:a="http://schemas.openxmlformats.org/drawingml/2006/main" noGrp="1"/>
+          </p:cNvSpPr>
+          <p:nvPr/>
+        </p:nvSpPr>
+        <p:spPr>
+          <a:xfrm xmlns:a="http://schemas.openxmlformats.org/drawingml/2006/main">
+            <a:off x="1085850" y="4171950"/>
             <a:ext cx="4857750" cy="361950"/>
           </a:xfrm>
           <a:prstGeom xmlns:a="http://schemas.openxmlformats.org/drawingml/2006/main" prst="rect">
@@ -6329,38 +7231,38 @@
               <a:buNone/>
               <a:defRPr sz="2325" b="1" i="0">
                 <a:solidFill>
-                  <a:srgbClr val="2563EB"/>
+                  <a:srgbClr val="2F7D32"/>
                 </a:solidFill>
               </a:defRPr>
             </a:pPr>
             <a:r>
               <a:rPr sz="2325" b="1" i="0">
                 <a:solidFill>
-                  <a:srgbClr val="2563EB"/>
-                </a:solidFill>
-              </a:rPr>
-              <a:t>Restful-Booker</a:t>
-            </a:r>
-          </a:p>
-        </p:txBody>
-      </p:sp>
-      <p:sp>
-        <p:nvSpPr>
-          <p:cNvPr id="23" name="">
-            <a:extLst xmlns:a="http://schemas.openxmlformats.org/drawingml/2006/main">
-              <a:ext uri="{FF2B5EF4-FFF2-40B4-BE49-F238E27FC236}">
-                <a16:creationId xmlns:a16="http://schemas.microsoft.com/office/drawing/2014/main" id="{18896B60-14A5-4E17-84BB-AFA62C5B25A7}"/>
-              </a:ext>
-            </a:extLst>
-          </p:cNvPr>
-          <p:cNvSpPr>
-            <a:spLocks xmlns:a="http://schemas.openxmlformats.org/drawingml/2006/main" noGrp="1"/>
-          </p:cNvSpPr>
-          <p:nvPr/>
-        </p:nvSpPr>
-        <p:spPr>
-          <a:xfrm xmlns:a="http://schemas.openxmlformats.org/drawingml/2006/main">
-            <a:off x="6724650" y="4648200"/>
+                  <a:srgbClr val="2F7D32"/>
+                </a:solidFill>
+              </a:rPr>
+              <a:t>Swagger Petstore</a:t>
+            </a:r>
+          </a:p>
+        </p:txBody>
+      </p:sp>
+      <p:sp>
+        <p:nvSpPr>
+          <p:cNvPr id="17" name="">
+            <a:extLst xmlns:a="http://schemas.openxmlformats.org/drawingml/2006/main">
+              <a:ext uri="{FF2B5EF4-FFF2-40B4-BE49-F238E27FC236}">
+                <a16:creationId xmlns:a16="http://schemas.microsoft.com/office/drawing/2014/main" id="{104E1A46-1D58-4B2C-8D07-CA204FB9F0E6}"/>
+              </a:ext>
+            </a:extLst>
+          </p:cNvPr>
+          <p:cNvSpPr>
+            <a:spLocks xmlns:a="http://schemas.openxmlformats.org/drawingml/2006/main" noGrp="1"/>
+          </p:cNvSpPr>
+          <p:nvPr/>
+        </p:nvSpPr>
+        <p:spPr>
+          <a:xfrm xmlns:a="http://schemas.openxmlformats.org/drawingml/2006/main">
+            <a:off x="1085850" y="4648200"/>
             <a:ext cx="4857750" cy="209550"/>
           </a:xfrm>
           <a:prstGeom xmlns:a="http://schemas.openxmlformats.org/drawingml/2006/main" prst="rect">
@@ -6388,28 +7290,28 @@
                   <a:srgbClr val="596579"/>
                 </a:solidFill>
               </a:rPr>
-              <a:t>restful-booker.herokuapp.com</a:t>
-            </a:r>
-          </a:p>
-        </p:txBody>
-      </p:sp>
-      <p:sp>
-        <p:nvSpPr>
-          <p:cNvPr id="24" name="">
-            <a:extLst xmlns:a="http://schemas.openxmlformats.org/drawingml/2006/main">
-              <a:ext uri="{FF2B5EF4-FFF2-40B4-BE49-F238E27FC236}">
-                <a16:creationId xmlns:a16="http://schemas.microsoft.com/office/drawing/2014/main" id="{A9A8B12F-B23A-4FCC-8FA1-227834735100}"/>
-              </a:ext>
-            </a:extLst>
-          </p:cNvPr>
-          <p:cNvSpPr>
-            <a:spLocks xmlns:a="http://schemas.openxmlformats.org/drawingml/2006/main" noGrp="1"/>
-          </p:cNvSpPr>
-          <p:nvPr/>
-        </p:nvSpPr>
-        <p:spPr>
-          <a:xfrm xmlns:a="http://schemas.openxmlformats.org/drawingml/2006/main">
-            <a:off x="6724650" y="4991100"/>
+              <a:t>petstore.swagger.io</a:t>
+            </a:r>
+          </a:p>
+        </p:txBody>
+      </p:sp>
+      <p:sp>
+        <p:nvSpPr>
+          <p:cNvPr id="18" name="">
+            <a:extLst xmlns:a="http://schemas.openxmlformats.org/drawingml/2006/main">
+              <a:ext uri="{FF2B5EF4-FFF2-40B4-BE49-F238E27FC236}">
+                <a16:creationId xmlns:a16="http://schemas.microsoft.com/office/drawing/2014/main" id="{2EDFBE04-7DC5-422E-8777-DD5683CD55F7}"/>
+              </a:ext>
+            </a:extLst>
+          </p:cNvPr>
+          <p:cNvSpPr>
+            <a:spLocks xmlns:a="http://schemas.openxmlformats.org/drawingml/2006/main" noGrp="1"/>
+          </p:cNvSpPr>
+          <p:nvPr/>
+        </p:nvSpPr>
+        <p:spPr>
+          <a:xfrm xmlns:a="http://schemas.openxmlformats.org/drawingml/2006/main">
+            <a:off x="1085850" y="4991100"/>
             <a:ext cx="4857750" cy="19050"/>
           </a:xfrm>
           <a:prstGeom xmlns:a="http://schemas.openxmlformats.org/drawingml/2006/main" prst="rect">
@@ -6428,22 +7330,22 @@
       </p:sp>
       <p:sp>
         <p:nvSpPr>
-          <p:cNvPr id="25" name="">
-            <a:extLst xmlns:a="http://schemas.openxmlformats.org/drawingml/2006/main">
-              <a:ext uri="{FF2B5EF4-FFF2-40B4-BE49-F238E27FC236}">
-                <a16:creationId xmlns:a16="http://schemas.microsoft.com/office/drawing/2014/main" id="{7A946589-1C5B-43EE-8625-F685AE72BA3B}"/>
-              </a:ext>
-            </a:extLst>
-          </p:cNvPr>
-          <p:cNvSpPr>
-            <a:spLocks xmlns:a="http://schemas.openxmlformats.org/drawingml/2006/main" noGrp="1"/>
-          </p:cNvSpPr>
-          <p:nvPr/>
-        </p:nvSpPr>
-        <p:spPr>
-          <a:xfrm xmlns:a="http://schemas.openxmlformats.org/drawingml/2006/main">
-            <a:off x="6724650" y="5143500"/>
-            <a:ext cx="4857750" cy="285750"/>
+          <p:cNvPr id="19" name="">
+            <a:extLst xmlns:a="http://schemas.openxmlformats.org/drawingml/2006/main">
+              <a:ext uri="{FF2B5EF4-FFF2-40B4-BE49-F238E27FC236}">
+                <a16:creationId xmlns:a16="http://schemas.microsoft.com/office/drawing/2014/main" id="{F987026F-F055-42A8-8150-812F250A9E5F}"/>
+              </a:ext>
+            </a:extLst>
+          </p:cNvPr>
+          <p:cNvSpPr>
+            <a:spLocks xmlns:a="http://schemas.openxmlformats.org/drawingml/2006/main" noGrp="1"/>
+          </p:cNvSpPr>
+          <p:nvPr/>
+        </p:nvSpPr>
+        <p:spPr>
+          <a:xfrm xmlns:a="http://schemas.openxmlformats.org/drawingml/2006/main">
+            <a:off x="1085850" y="5143500"/>
+            <a:ext cx="4857750" cy="552450"/>
           </a:xfrm>
           <a:prstGeom xmlns:a="http://schemas.openxmlformats.org/drawingml/2006/main" prst="rect">
             <a:avLst/>
@@ -6470,28 +7372,28 @@
                   <a:srgbClr val="172033"/>
                 </a:solidFill>
               </a:rPr>
-              <a:t>Best for: CRUD flows, auth, and bug discovery.</a:t>
-            </a:r>
-          </a:p>
-        </p:txBody>
-      </p:sp>
-      <p:sp>
-        <p:nvSpPr>
-          <p:cNvPr id="26" name="">
-            <a:extLst xmlns:a="http://schemas.openxmlformats.org/drawingml/2006/main">
-              <a:ext uri="{FF2B5EF4-FFF2-40B4-BE49-F238E27FC236}">
-                <a16:creationId xmlns:a16="http://schemas.microsoft.com/office/drawing/2014/main" id="{2083C1D1-2E81-4636-9B89-235B802EDE28}"/>
-              </a:ext>
-            </a:extLst>
-          </p:cNvPr>
-          <p:cNvSpPr>
-            <a:spLocks xmlns:a="http://schemas.openxmlformats.org/drawingml/2006/main" noGrp="1"/>
-          </p:cNvSpPr>
-          <p:nvPr/>
-        </p:nvSpPr>
-        <p:spPr>
-          <a:xfrm xmlns:a="http://schemas.openxmlformats.org/drawingml/2006/main">
-            <a:off x="6724650" y="5543550"/>
+              <a:t>Best for: OpenAPI basics and tooling compatibility.</a:t>
+            </a:r>
+          </a:p>
+        </p:txBody>
+      </p:sp>
+      <p:sp>
+        <p:nvSpPr>
+          <p:cNvPr id="20" name="">
+            <a:extLst xmlns:a="http://schemas.openxmlformats.org/drawingml/2006/main">
+              <a:ext uri="{FF2B5EF4-FFF2-40B4-BE49-F238E27FC236}">
+                <a16:creationId xmlns:a16="http://schemas.microsoft.com/office/drawing/2014/main" id="{00E797F5-E4A3-4B38-81AA-65A2E9FBF2CF}"/>
+              </a:ext>
+            </a:extLst>
+          </p:cNvPr>
+          <p:cNvSpPr>
+            <a:spLocks xmlns:a="http://schemas.openxmlformats.org/drawingml/2006/main" noGrp="1"/>
+          </p:cNvSpPr>
+          <p:nvPr/>
+        </p:nvSpPr>
+        <p:spPr>
+          <a:xfrm xmlns:a="http://schemas.openxmlformats.org/drawingml/2006/main">
+            <a:off x="1085850" y="5810250"/>
             <a:ext cx="4857750" cy="571500"/>
           </a:xfrm>
           <a:prstGeom xmlns:a="http://schemas.openxmlformats.org/drawingml/2006/main" prst="rect">
@@ -6519,28 +7421,28 @@
                   <a:srgbClr val="596579"/>
                 </a:solidFill>
               </a:rPr>
-              <a:t>Authenticate, then create, retrieve, and delete a booking.</a:t>
-            </a:r>
-          </a:p>
-        </p:txBody>
-      </p:sp>
-      <p:sp>
-        <p:nvSpPr>
-          <p:cNvPr id="27" name="homework-Beeceptor Samples">
-            <a:extLst xmlns:a="http://schemas.openxmlformats.org/drawingml/2006/main">
-              <a:ext uri="{FF2B5EF4-FFF2-40B4-BE49-F238E27FC236}">
-                <a16:creationId xmlns:a16="http://schemas.microsoft.com/office/drawing/2014/main" id="{B602648D-7CC5-4523-9C45-F673D1323856}"/>
-              </a:ext>
-            </a:extLst>
-          </p:cNvPr>
-          <p:cNvSpPr>
-            <a:spLocks xmlns:a="http://schemas.openxmlformats.org/drawingml/2006/main" noGrp="1"/>
-          </p:cNvSpPr>
-          <p:nvPr/>
-        </p:nvSpPr>
-        <p:spPr>
-          <a:xfrm xmlns:a="http://schemas.openxmlformats.org/drawingml/2006/main">
-            <a:off x="12084050" y="3921557"/>
+              <a:t>Cover at least one GET and one POST using the Swagger UI spec.</a:t>
+            </a:r>
+          </a:p>
+        </p:txBody>
+      </p:sp>
+      <p:sp>
+        <p:nvSpPr>
+          <p:cNvPr id="21" name="homework-Restful-Booker">
+            <a:extLst xmlns:a="http://schemas.openxmlformats.org/drawingml/2006/main">
+              <a:ext uri="{FF2B5EF4-FFF2-40B4-BE49-F238E27FC236}">
+                <a16:creationId xmlns:a16="http://schemas.microsoft.com/office/drawing/2014/main" id="{119ECFC8-5C1A-48CF-A6D5-08C66A2C3C0D}"/>
+              </a:ext>
+            </a:extLst>
+          </p:cNvPr>
+          <p:cNvSpPr>
+            <a:spLocks xmlns:a="http://schemas.openxmlformats.org/drawingml/2006/main" noGrp="1"/>
+          </p:cNvSpPr>
+          <p:nvPr/>
+        </p:nvSpPr>
+        <p:spPr>
+          <a:xfrm xmlns:a="http://schemas.openxmlformats.org/drawingml/2006/main">
+            <a:off x="6451600" y="3921557"/>
             <a:ext cx="5384800" cy="3429000"/>
           </a:xfrm>
           <a:prstGeom xmlns:a="http://schemas.openxmlformats.org/drawingml/2006/main" prst="roundRect">
@@ -6555,21 +7457,21 @@
       </p:sp>
       <p:sp>
         <p:nvSpPr>
-          <p:cNvPr id="28" name="">
-            <a:extLst xmlns:a="http://schemas.openxmlformats.org/drawingml/2006/main">
-              <a:ext uri="{FF2B5EF4-FFF2-40B4-BE49-F238E27FC236}">
-                <a16:creationId xmlns:a16="http://schemas.microsoft.com/office/drawing/2014/main" id="{E3D509C9-E97E-41B3-B00B-586097684631}"/>
-              </a:ext>
-            </a:extLst>
-          </p:cNvPr>
-          <p:cNvSpPr>
-            <a:spLocks xmlns:a="http://schemas.openxmlformats.org/drawingml/2006/main" noGrp="1"/>
-          </p:cNvSpPr>
-          <p:nvPr/>
-        </p:nvSpPr>
-        <p:spPr>
-          <a:xfrm xmlns:a="http://schemas.openxmlformats.org/drawingml/2006/main">
-            <a:off x="12344400" y="4171950"/>
+          <p:cNvPr id="22" name="">
+            <a:extLst xmlns:a="http://schemas.openxmlformats.org/drawingml/2006/main">
+              <a:ext uri="{FF2B5EF4-FFF2-40B4-BE49-F238E27FC236}">
+                <a16:creationId xmlns:a16="http://schemas.microsoft.com/office/drawing/2014/main" id="{8FD7133F-180A-4E58-879B-36253B857445}"/>
+              </a:ext>
+            </a:extLst>
+          </p:cNvPr>
+          <p:cNvSpPr>
+            <a:spLocks xmlns:a="http://schemas.openxmlformats.org/drawingml/2006/main" noGrp="1"/>
+          </p:cNvSpPr>
+          <p:nvPr/>
+        </p:nvSpPr>
+        <p:spPr>
+          <a:xfrm xmlns:a="http://schemas.openxmlformats.org/drawingml/2006/main">
+            <a:off x="6724650" y="4171950"/>
             <a:ext cx="4857750" cy="361950"/>
           </a:xfrm>
           <a:prstGeom xmlns:a="http://schemas.openxmlformats.org/drawingml/2006/main" prst="rect">
@@ -6587,38 +7489,38 @@
               <a:buNone/>
               <a:defRPr sz="2325" b="1" i="0">
                 <a:solidFill>
-                  <a:srgbClr val="F97316"/>
+                  <a:srgbClr val="2563EB"/>
                 </a:solidFill>
               </a:defRPr>
             </a:pPr>
             <a:r>
               <a:rPr sz="2325" b="1" i="0">
                 <a:solidFill>
-                  <a:srgbClr val="F97316"/>
-                </a:solidFill>
-              </a:rPr>
-              <a:t>Beeceptor Samples</a:t>
-            </a:r>
-          </a:p>
-        </p:txBody>
-      </p:sp>
-      <p:sp>
-        <p:nvSpPr>
-          <p:cNvPr id="29" name="">
-            <a:extLst xmlns:a="http://schemas.openxmlformats.org/drawingml/2006/main">
-              <a:ext uri="{FF2B5EF4-FFF2-40B4-BE49-F238E27FC236}">
-                <a16:creationId xmlns:a16="http://schemas.microsoft.com/office/drawing/2014/main" id="{DAC9C8D5-61F0-4ADE-9C8C-2D97080AAF33}"/>
-              </a:ext>
-            </a:extLst>
-          </p:cNvPr>
-          <p:cNvSpPr>
-            <a:spLocks xmlns:a="http://schemas.openxmlformats.org/drawingml/2006/main" noGrp="1"/>
-          </p:cNvSpPr>
-          <p:nvPr/>
-        </p:nvSpPr>
-        <p:spPr>
-          <a:xfrm xmlns:a="http://schemas.openxmlformats.org/drawingml/2006/main">
-            <a:off x="12344400" y="4648200"/>
+                  <a:srgbClr val="2563EB"/>
+                </a:solidFill>
+              </a:rPr>
+              <a:t>Restful-Booker</a:t>
+            </a:r>
+          </a:p>
+        </p:txBody>
+      </p:sp>
+      <p:sp>
+        <p:nvSpPr>
+          <p:cNvPr id="23" name="">
+            <a:extLst xmlns:a="http://schemas.openxmlformats.org/drawingml/2006/main">
+              <a:ext uri="{FF2B5EF4-FFF2-40B4-BE49-F238E27FC236}">
+                <a16:creationId xmlns:a16="http://schemas.microsoft.com/office/drawing/2014/main" id="{49158F12-404A-4F0A-9E3F-B2709BDEB3C8}"/>
+              </a:ext>
+            </a:extLst>
+          </p:cNvPr>
+          <p:cNvSpPr>
+            <a:spLocks xmlns:a="http://schemas.openxmlformats.org/drawingml/2006/main" noGrp="1"/>
+          </p:cNvSpPr>
+          <p:nvPr/>
+        </p:nvSpPr>
+        <p:spPr>
+          <a:xfrm xmlns:a="http://schemas.openxmlformats.org/drawingml/2006/main">
+            <a:off x="6724650" y="4648200"/>
             <a:ext cx="4857750" cy="209550"/>
           </a:xfrm>
           <a:prstGeom xmlns:a="http://schemas.openxmlformats.org/drawingml/2006/main" prst="rect">
@@ -6646,28 +7548,28 @@
                   <a:srgbClr val="596579"/>
                 </a:solidFill>
               </a:rPr>
-              <a:t>beeceptor.com/docs/sample-api-for-testing</a:t>
-            </a:r>
-          </a:p>
-        </p:txBody>
-      </p:sp>
-      <p:sp>
-        <p:nvSpPr>
-          <p:cNvPr id="30" name="">
-            <a:extLst xmlns:a="http://schemas.openxmlformats.org/drawingml/2006/main">
-              <a:ext uri="{FF2B5EF4-FFF2-40B4-BE49-F238E27FC236}">
-                <a16:creationId xmlns:a16="http://schemas.microsoft.com/office/drawing/2014/main" id="{3C61C57D-6437-44FD-AC70-1BE0644E1451}"/>
-              </a:ext>
-            </a:extLst>
-          </p:cNvPr>
-          <p:cNvSpPr>
-            <a:spLocks xmlns:a="http://schemas.openxmlformats.org/drawingml/2006/main" noGrp="1"/>
-          </p:cNvSpPr>
-          <p:nvPr/>
-        </p:nvSpPr>
-        <p:spPr>
-          <a:xfrm xmlns:a="http://schemas.openxmlformats.org/drawingml/2006/main">
-            <a:off x="12344400" y="4991100"/>
+              <a:t>restful-booker.herokuapp.com</a:t>
+            </a:r>
+          </a:p>
+        </p:txBody>
+      </p:sp>
+      <p:sp>
+        <p:nvSpPr>
+          <p:cNvPr id="24" name="">
+            <a:extLst xmlns:a="http://schemas.openxmlformats.org/drawingml/2006/main">
+              <a:ext uri="{FF2B5EF4-FFF2-40B4-BE49-F238E27FC236}">
+                <a16:creationId xmlns:a16="http://schemas.microsoft.com/office/drawing/2014/main" id="{C5C770FF-8F79-4876-8C11-5A474C21D9E4}"/>
+              </a:ext>
+            </a:extLst>
+          </p:cNvPr>
+          <p:cNvSpPr>
+            <a:spLocks xmlns:a="http://schemas.openxmlformats.org/drawingml/2006/main" noGrp="1"/>
+          </p:cNvSpPr>
+          <p:nvPr/>
+        </p:nvSpPr>
+        <p:spPr>
+          <a:xfrm xmlns:a="http://schemas.openxmlformats.org/drawingml/2006/main">
+            <a:off x="6724650" y="4991100"/>
             <a:ext cx="4857750" cy="19050"/>
           </a:xfrm>
           <a:prstGeom xmlns:a="http://schemas.openxmlformats.org/drawingml/2006/main" prst="rect">
@@ -6686,10 +7588,268 @@
       </p:sp>
       <p:sp>
         <p:nvSpPr>
+          <p:cNvPr id="25" name="">
+            <a:extLst xmlns:a="http://schemas.openxmlformats.org/drawingml/2006/main">
+              <a:ext uri="{FF2B5EF4-FFF2-40B4-BE49-F238E27FC236}">
+                <a16:creationId xmlns:a16="http://schemas.microsoft.com/office/drawing/2014/main" id="{46358C85-6EF2-4266-8FBE-5FA42887854D}"/>
+              </a:ext>
+            </a:extLst>
+          </p:cNvPr>
+          <p:cNvSpPr>
+            <a:spLocks xmlns:a="http://schemas.openxmlformats.org/drawingml/2006/main" noGrp="1"/>
+          </p:cNvSpPr>
+          <p:nvPr/>
+        </p:nvSpPr>
+        <p:spPr>
+          <a:xfrm xmlns:a="http://schemas.openxmlformats.org/drawingml/2006/main">
+            <a:off x="6724650" y="5143500"/>
+            <a:ext cx="4857750" cy="285750"/>
+          </a:xfrm>
+          <a:prstGeom xmlns:a="http://schemas.openxmlformats.org/drawingml/2006/main" prst="rect">
+            <a:avLst/>
+          </a:prstGeom>
+        </p:spPr>
+        <p:txBody>
+          <a:bodyPr xmlns:a="http://schemas.openxmlformats.org/drawingml/2006/main" lIns="0" tIns="0" rIns="0" bIns="0"/>
+          <a:lstStyle xmlns:a="http://schemas.openxmlformats.org/drawingml/2006/main"/>
+          <a:p xmlns:a="http://schemas.openxmlformats.org/drawingml/2006/main">
+            <a:pPr>
+              <a:lnSpc>
+                <a:spcPct val="108000"/>
+              </a:lnSpc>
+              <a:buNone/>
+              <a:defRPr sz="1650" b="1" i="0">
+                <a:solidFill>
+                  <a:srgbClr val="172033"/>
+                </a:solidFill>
+              </a:defRPr>
+            </a:pPr>
+            <a:r>
+              <a:rPr sz="1650" b="1" i="0">
+                <a:solidFill>
+                  <a:srgbClr val="172033"/>
+                </a:solidFill>
+              </a:rPr>
+              <a:t>Best for: CRUD flows, auth, and bug discovery.</a:t>
+            </a:r>
+          </a:p>
+        </p:txBody>
+      </p:sp>
+      <p:sp>
+        <p:nvSpPr>
+          <p:cNvPr id="26" name="">
+            <a:extLst xmlns:a="http://schemas.openxmlformats.org/drawingml/2006/main">
+              <a:ext uri="{FF2B5EF4-FFF2-40B4-BE49-F238E27FC236}">
+                <a16:creationId xmlns:a16="http://schemas.microsoft.com/office/drawing/2014/main" id="{F14B8BD7-75C4-4E22-893A-2920BB0F88D8}"/>
+              </a:ext>
+            </a:extLst>
+          </p:cNvPr>
+          <p:cNvSpPr>
+            <a:spLocks xmlns:a="http://schemas.openxmlformats.org/drawingml/2006/main" noGrp="1"/>
+          </p:cNvSpPr>
+          <p:nvPr/>
+        </p:nvSpPr>
+        <p:spPr>
+          <a:xfrm xmlns:a="http://schemas.openxmlformats.org/drawingml/2006/main">
+            <a:off x="6724650" y="5543550"/>
+            <a:ext cx="4857750" cy="571500"/>
+          </a:xfrm>
+          <a:prstGeom xmlns:a="http://schemas.openxmlformats.org/drawingml/2006/main" prst="rect">
+            <a:avLst/>
+          </a:prstGeom>
+        </p:spPr>
+        <p:txBody>
+          <a:bodyPr xmlns:a="http://schemas.openxmlformats.org/drawingml/2006/main" lIns="0" tIns="0" rIns="0" bIns="0"/>
+          <a:lstStyle xmlns:a="http://schemas.openxmlformats.org/drawingml/2006/main"/>
+          <a:p xmlns:a="http://schemas.openxmlformats.org/drawingml/2006/main">
+            <a:pPr>
+              <a:lnSpc>
+                <a:spcPct val="112000"/>
+              </a:lnSpc>
+              <a:buNone/>
+              <a:defRPr sz="1650" b="0" i="0">
+                <a:solidFill>
+                  <a:srgbClr val="596579"/>
+                </a:solidFill>
+              </a:defRPr>
+            </a:pPr>
+            <a:r>
+              <a:rPr sz="1650" b="0" i="0">
+                <a:solidFill>
+                  <a:srgbClr val="596579"/>
+                </a:solidFill>
+              </a:rPr>
+              <a:t>Authenticate, then create, retrieve, and delete a booking.</a:t>
+            </a:r>
+          </a:p>
+        </p:txBody>
+      </p:sp>
+      <p:sp>
+        <p:nvSpPr>
+          <p:cNvPr id="27" name="homework-Beeceptor Samples">
+            <a:extLst xmlns:a="http://schemas.openxmlformats.org/drawingml/2006/main">
+              <a:ext uri="{FF2B5EF4-FFF2-40B4-BE49-F238E27FC236}">
+                <a16:creationId xmlns:a16="http://schemas.microsoft.com/office/drawing/2014/main" id="{5A3AD6DB-012E-49C9-BB2A-E316D107AAB1}"/>
+              </a:ext>
+            </a:extLst>
+          </p:cNvPr>
+          <p:cNvSpPr>
+            <a:spLocks xmlns:a="http://schemas.openxmlformats.org/drawingml/2006/main" noGrp="1"/>
+          </p:cNvSpPr>
+          <p:nvPr/>
+        </p:nvSpPr>
+        <p:spPr>
+          <a:xfrm xmlns:a="http://schemas.openxmlformats.org/drawingml/2006/main">
+            <a:off x="12084050" y="3921557"/>
+            <a:ext cx="5384800" cy="3429000"/>
+          </a:xfrm>
+          <a:prstGeom xmlns:a="http://schemas.openxmlformats.org/drawingml/2006/main" prst="roundRect">
+            <a:avLst>
+              <a:gd name="adj" fmla="val 7222"/>
+            </a:avLst>
+          </a:prstGeom>
+          <a:solidFill xmlns:a="http://schemas.openxmlformats.org/drawingml/2006/main">
+            <a:srgbClr val="FFFFFF"/>
+          </a:solidFill>
+        </p:spPr>
+      </p:sp>
+      <p:sp>
+        <p:nvSpPr>
+          <p:cNvPr id="28" name="">
+            <a:extLst xmlns:a="http://schemas.openxmlformats.org/drawingml/2006/main">
+              <a:ext uri="{FF2B5EF4-FFF2-40B4-BE49-F238E27FC236}">
+                <a16:creationId xmlns:a16="http://schemas.microsoft.com/office/drawing/2014/main" id="{E6DEAA80-981F-4EDD-B764-7826D9A5EE33}"/>
+              </a:ext>
+            </a:extLst>
+          </p:cNvPr>
+          <p:cNvSpPr>
+            <a:spLocks xmlns:a="http://schemas.openxmlformats.org/drawingml/2006/main" noGrp="1"/>
+          </p:cNvSpPr>
+          <p:nvPr/>
+        </p:nvSpPr>
+        <p:spPr>
+          <a:xfrm xmlns:a="http://schemas.openxmlformats.org/drawingml/2006/main">
+            <a:off x="12344400" y="4171950"/>
+            <a:ext cx="4857750" cy="361950"/>
+          </a:xfrm>
+          <a:prstGeom xmlns:a="http://schemas.openxmlformats.org/drawingml/2006/main" prst="rect">
+            <a:avLst/>
+          </a:prstGeom>
+        </p:spPr>
+        <p:txBody>
+          <a:bodyPr xmlns:a="http://schemas.openxmlformats.org/drawingml/2006/main" lIns="0" tIns="0" rIns="0" bIns="0"/>
+          <a:lstStyle xmlns:a="http://schemas.openxmlformats.org/drawingml/2006/main"/>
+          <a:p xmlns:a="http://schemas.openxmlformats.org/drawingml/2006/main">
+            <a:pPr>
+              <a:lnSpc>
+                <a:spcPct val="100000"/>
+              </a:lnSpc>
+              <a:buNone/>
+              <a:defRPr sz="2325" b="1" i="0">
+                <a:solidFill>
+                  <a:srgbClr val="F97316"/>
+                </a:solidFill>
+              </a:defRPr>
+            </a:pPr>
+            <a:r>
+              <a:rPr sz="2325" b="1" i="0">
+                <a:solidFill>
+                  <a:srgbClr val="F97316"/>
+                </a:solidFill>
+              </a:rPr>
+              <a:t>Beeceptor Samples</a:t>
+            </a:r>
+          </a:p>
+        </p:txBody>
+      </p:sp>
+      <p:sp>
+        <p:nvSpPr>
+          <p:cNvPr id="29" name="">
+            <a:extLst xmlns:a="http://schemas.openxmlformats.org/drawingml/2006/main">
+              <a:ext uri="{FF2B5EF4-FFF2-40B4-BE49-F238E27FC236}">
+                <a16:creationId xmlns:a16="http://schemas.microsoft.com/office/drawing/2014/main" id="{F0C00033-5CFB-48C5-BFC6-4449A6E9EE3F}"/>
+              </a:ext>
+            </a:extLst>
+          </p:cNvPr>
+          <p:cNvSpPr>
+            <a:spLocks xmlns:a="http://schemas.openxmlformats.org/drawingml/2006/main" noGrp="1"/>
+          </p:cNvSpPr>
+          <p:nvPr/>
+        </p:nvSpPr>
+        <p:spPr>
+          <a:xfrm xmlns:a="http://schemas.openxmlformats.org/drawingml/2006/main">
+            <a:off x="12344400" y="4648200"/>
+            <a:ext cx="4857750" cy="209550"/>
+          </a:xfrm>
+          <a:prstGeom xmlns:a="http://schemas.openxmlformats.org/drawingml/2006/main" prst="rect">
+            <a:avLst/>
+          </a:prstGeom>
+        </p:spPr>
+        <p:txBody>
+          <a:bodyPr xmlns:a="http://schemas.openxmlformats.org/drawingml/2006/main" lIns="0" tIns="0" rIns="0" bIns="0"/>
+          <a:lstStyle xmlns:a="http://schemas.openxmlformats.org/drawingml/2006/main"/>
+          <a:p xmlns:a="http://schemas.openxmlformats.org/drawingml/2006/main">
+            <a:pPr>
+              <a:lnSpc>
+                <a:spcPct val="100000"/>
+              </a:lnSpc>
+              <a:buNone/>
+              <a:defRPr sz="1275" b="0" i="0">
+                <a:solidFill>
+                  <a:srgbClr val="596579"/>
+                </a:solidFill>
+              </a:defRPr>
+            </a:pPr>
+            <a:r>
+              <a:rPr sz="1275" b="0" i="0">
+                <a:solidFill>
+                  <a:srgbClr val="596579"/>
+                </a:solidFill>
+              </a:rPr>
+              <a:t>beeceptor.com/docs/sample-api-for-testing</a:t>
+            </a:r>
+          </a:p>
+        </p:txBody>
+      </p:sp>
+      <p:sp>
+        <p:nvSpPr>
+          <p:cNvPr id="30" name="">
+            <a:extLst xmlns:a="http://schemas.openxmlformats.org/drawingml/2006/main">
+              <a:ext uri="{FF2B5EF4-FFF2-40B4-BE49-F238E27FC236}">
+                <a16:creationId xmlns:a16="http://schemas.microsoft.com/office/drawing/2014/main" id="{EA0009E9-7AC3-4834-B4BE-5A173E309BB2}"/>
+              </a:ext>
+            </a:extLst>
+          </p:cNvPr>
+          <p:cNvSpPr>
+            <a:spLocks xmlns:a="http://schemas.openxmlformats.org/drawingml/2006/main" noGrp="1"/>
+          </p:cNvSpPr>
+          <p:nvPr/>
+        </p:nvSpPr>
+        <p:spPr>
+          <a:xfrm xmlns:a="http://schemas.openxmlformats.org/drawingml/2006/main">
+            <a:off x="12344400" y="4991100"/>
+            <a:ext cx="4857750" cy="19050"/>
+          </a:xfrm>
+          <a:prstGeom xmlns:a="http://schemas.openxmlformats.org/drawingml/2006/main" prst="rect">
+            <a:avLst/>
+          </a:prstGeom>
+          <a:solidFill xmlns:a="http://schemas.openxmlformats.org/drawingml/2006/main">
+            <a:srgbClr val="D6CAB7"/>
+          </a:solidFill>
+          <a:ln xmlns:a="http://schemas.openxmlformats.org/drawingml/2006/main" w="0">
+            <a:solidFill>
+              <a:srgbClr val="D6CAB7"/>
+            </a:solidFill>
+            <a:prstDash val="solid"/>
+          </a:ln>
+        </p:spPr>
+      </p:sp>
+      <p:sp>
+        <p:nvSpPr>
           <p:cNvPr id="31" name="">
             <a:extLst xmlns:a="http://schemas.openxmlformats.org/drawingml/2006/main">
               <a:ext uri="{FF2B5EF4-FFF2-40B4-BE49-F238E27FC236}">
-                <a16:creationId xmlns:a16="http://schemas.microsoft.com/office/drawing/2014/main" id="{CC2C2C2E-EF68-433E-BE8A-656CDA5D4583}"/>
+                <a16:creationId xmlns:a16="http://schemas.microsoft.com/office/drawing/2014/main" id="{B960EBCF-A799-4AD0-9BB0-8CB74A335C6E}"/>
               </a:ext>
             </a:extLst>
           </p:cNvPr>
@@ -6738,7 +7898,7 @@
           <p:cNvPr id="32" name="">
             <a:extLst xmlns:a="http://schemas.openxmlformats.org/drawingml/2006/main">
               <a:ext uri="{FF2B5EF4-FFF2-40B4-BE49-F238E27FC236}">
-                <a16:creationId xmlns:a16="http://schemas.microsoft.com/office/drawing/2014/main" id="{B8EB8BC7-65A3-4750-850F-A3937497A271}"/>
+                <a16:creationId xmlns:a16="http://schemas.microsoft.com/office/drawing/2014/main" id="{97E6297A-18DB-4FF5-8478-9A230B246E86}"/>
               </a:ext>
             </a:extLst>
           </p:cNvPr>
@@ -6787,7 +7947,7 @@
           <p:cNvPr id="33" name="">
             <a:extLst xmlns:a="http://schemas.openxmlformats.org/drawingml/2006/main">
               <a:ext uri="{FF2B5EF4-FFF2-40B4-BE49-F238E27FC236}">
-                <a16:creationId xmlns:a16="http://schemas.microsoft.com/office/drawing/2014/main" id="{8E9358D1-67A9-4B25-ADFF-4822CD15E64C}"/>
+                <a16:creationId xmlns:a16="http://schemas.microsoft.com/office/drawing/2014/main" id="{AD884CBD-0F1D-4E96-A5F0-3F97CB1EBB2B}"/>
               </a:ext>
             </a:extLst>
           </p:cNvPr>
@@ -6834,7 +7994,7 @@
     </p:spTree>
     <p:extLst>
       <p:ext uri="{BB962C8B-B14F-4D97-AF65-F5344CB8AC3E}">
-        <p14:creationId xmlns:p14="http://schemas.microsoft.com/office/powerpoint/2010/main" val="1445692697"/>
+        <p14:creationId xmlns:p14="http://schemas.microsoft.com/office/powerpoint/2010/main" val="1200542020"/>
       </p:ext>
     </p:extLst>
   </p:cSld>
@@ -6858,7 +8018,7 @@
           <p:cNvPr id="1" name="slide-bg">
             <a:extLst xmlns:a="http://schemas.openxmlformats.org/drawingml/2006/main">
               <a:ext uri="{FF2B5EF4-FFF2-40B4-BE49-F238E27FC236}">
-                <a16:creationId xmlns:a16="http://schemas.microsoft.com/office/drawing/2014/main" id="{5A85D7D7-65A5-4374-9E70-8842F4C60ED1}"/>
+                <a16:creationId xmlns:a16="http://schemas.microsoft.com/office/drawing/2014/main" id="{67AFBF79-BD7A-471F-BC70-06860DEF7B13}"/>
               </a:ext>
             </a:extLst>
           </p:cNvPr>
@@ -6885,7 +8045,7 @@
           <p:cNvPr id="2" name="slide-title">
             <a:extLst xmlns:a="http://schemas.openxmlformats.org/drawingml/2006/main">
               <a:ext uri="{FF2B5EF4-FFF2-40B4-BE49-F238E27FC236}">
-                <a16:creationId xmlns:a16="http://schemas.microsoft.com/office/drawing/2014/main" id="{16D0796F-F5E4-488D-AFF1-53C4FD1DD455}"/>
+                <a16:creationId xmlns:a16="http://schemas.microsoft.com/office/drawing/2014/main" id="{A0329ED5-8EF5-4449-A34E-72E3A21B2283}"/>
               </a:ext>
             </a:extLst>
           </p:cNvPr>
@@ -6934,7 +8094,7 @@
           <p:cNvPr id="3" name="slide-subtitle">
             <a:extLst xmlns:a="http://schemas.openxmlformats.org/drawingml/2006/main">
               <a:ext uri="{FF2B5EF4-FFF2-40B4-BE49-F238E27FC236}">
-                <a16:creationId xmlns:a16="http://schemas.microsoft.com/office/drawing/2014/main" id="{A2436E0E-1976-47E6-BD55-E27B3F5D0992}"/>
+                <a16:creationId xmlns:a16="http://schemas.microsoft.com/office/drawing/2014/main" id="{7926C4F9-15BC-42C1-8AA1-C53BC729C141}"/>
               </a:ext>
             </a:extLst>
           </p:cNvPr>
@@ -6983,7 +8143,7 @@
           <p:cNvPr id="4" name="">
             <a:extLst xmlns:a="http://schemas.openxmlformats.org/drawingml/2006/main">
               <a:ext uri="{FF2B5EF4-FFF2-40B4-BE49-F238E27FC236}">
-                <a16:creationId xmlns:a16="http://schemas.microsoft.com/office/drawing/2014/main" id="{FA8F56CD-85A6-4225-AA6D-16E8FEA78821}"/>
+                <a16:creationId xmlns:a16="http://schemas.microsoft.com/office/drawing/2014/main" id="{B3BA318B-E935-496F-B35D-D588775451D5}"/>
               </a:ext>
             </a:extLst>
           </p:cNvPr>
@@ -7032,7 +8192,7 @@
           <p:cNvPr id="5" name="">
             <a:extLst xmlns:a="http://schemas.openxmlformats.org/drawingml/2006/main">
               <a:ext uri="{FF2B5EF4-FFF2-40B4-BE49-F238E27FC236}">
-                <a16:creationId xmlns:a16="http://schemas.microsoft.com/office/drawing/2014/main" id="{CC54C5C5-E47F-4283-A289-648E6EB218AC}"/>
+                <a16:creationId xmlns:a16="http://schemas.microsoft.com/office/drawing/2014/main" id="{C98E6E49-00E9-4DF9-97B7-0A89EA73FABC}"/>
               </a:ext>
             </a:extLst>
           </p:cNvPr>
@@ -7081,7 +8241,7 @@
           <p:cNvPr id="6" name="">
             <a:extLst xmlns:a="http://schemas.openxmlformats.org/drawingml/2006/main">
               <a:ext uri="{FF2B5EF4-FFF2-40B4-BE49-F238E27FC236}">
-                <a16:creationId xmlns:a16="http://schemas.microsoft.com/office/drawing/2014/main" id="{E14669D7-E105-4B2A-AEDD-9BBE93B1D70F}"/>
+                <a16:creationId xmlns:a16="http://schemas.microsoft.com/office/drawing/2014/main" id="{EFFEBE6A-5E64-4083-A9EB-87CA71BFFF63}"/>
               </a:ext>
             </a:extLst>
           </p:cNvPr>
@@ -7130,7 +8290,7 @@
           <p:cNvPr id="7" name="">
             <a:extLst xmlns:a="http://schemas.openxmlformats.org/drawingml/2006/main">
               <a:ext uri="{FF2B5EF4-FFF2-40B4-BE49-F238E27FC236}">
-                <a16:creationId xmlns:a16="http://schemas.microsoft.com/office/drawing/2014/main" id="{2BA0B5D2-40B7-452F-8562-EC3741C90AC0}"/>
+                <a16:creationId xmlns:a16="http://schemas.microsoft.com/office/drawing/2014/main" id="{8D3DEDCA-09F7-4D4A-BFC4-C1EFA0B082C8}"/>
               </a:ext>
             </a:extLst>
           </p:cNvPr>
@@ -7179,7 +8339,7 @@
           <p:cNvPr id="8" name="">
             <a:extLst xmlns:a="http://schemas.openxmlformats.org/drawingml/2006/main">
               <a:ext uri="{FF2B5EF4-FFF2-40B4-BE49-F238E27FC236}">
-                <a16:creationId xmlns:a16="http://schemas.microsoft.com/office/drawing/2014/main" id="{0CB0AF71-2CFB-4183-9ADA-2015DE90663A}"/>
+                <a16:creationId xmlns:a16="http://schemas.microsoft.com/office/drawing/2014/main" id="{58BDB067-93D4-4D1A-B25F-4750BB446579}"/>
               </a:ext>
             </a:extLst>
           </p:cNvPr>
@@ -7228,7 +8388,7 @@
           <p:cNvPr id="9" name="">
             <a:extLst xmlns:a="http://schemas.openxmlformats.org/drawingml/2006/main">
               <a:ext uri="{FF2B5EF4-FFF2-40B4-BE49-F238E27FC236}">
-                <a16:creationId xmlns:a16="http://schemas.microsoft.com/office/drawing/2014/main" id="{53E38842-2CE7-4E2A-BDCF-8F75F601225E}"/>
+                <a16:creationId xmlns:a16="http://schemas.microsoft.com/office/drawing/2014/main" id="{F07E8307-15A0-46D7-9C81-0EAB2EAC0DF2}"/>
               </a:ext>
             </a:extLst>
           </p:cNvPr>
@@ -7277,7 +8437,7 @@
           <p:cNvPr id="10" name="">
             <a:extLst xmlns:a="http://schemas.openxmlformats.org/drawingml/2006/main">
               <a:ext uri="{FF2B5EF4-FFF2-40B4-BE49-F238E27FC236}">
-                <a16:creationId xmlns:a16="http://schemas.microsoft.com/office/drawing/2014/main" id="{BEBB1822-E3BD-4080-8BC9-EDD053B81802}"/>
+                <a16:creationId xmlns:a16="http://schemas.microsoft.com/office/drawing/2014/main" id="{FF45A361-FB05-464C-A181-618F9FC7419A}"/>
               </a:ext>
             </a:extLst>
           </p:cNvPr>
@@ -7326,7 +8486,7 @@
           <p:cNvPr id="11" name="">
             <a:extLst xmlns:a="http://schemas.openxmlformats.org/drawingml/2006/main">
               <a:ext uri="{FF2B5EF4-FFF2-40B4-BE49-F238E27FC236}">
-                <a16:creationId xmlns:a16="http://schemas.microsoft.com/office/drawing/2014/main" id="{F10D2412-34C4-4395-90F6-44EB10FA8AD2}"/>
+                <a16:creationId xmlns:a16="http://schemas.microsoft.com/office/drawing/2014/main" id="{8A5B3C91-CAC4-4774-9738-CF103BFA6E73}"/>
               </a:ext>
             </a:extLst>
           </p:cNvPr>
@@ -7375,7 +8535,7 @@
           <p:cNvPr id="12" name="">
             <a:extLst xmlns:a="http://schemas.openxmlformats.org/drawingml/2006/main">
               <a:ext uri="{FF2B5EF4-FFF2-40B4-BE49-F238E27FC236}">
-                <a16:creationId xmlns:a16="http://schemas.microsoft.com/office/drawing/2014/main" id="{920EC21C-AE72-456E-A541-1499F33E005B}"/>
+                <a16:creationId xmlns:a16="http://schemas.microsoft.com/office/drawing/2014/main" id="{5E42CE8A-1473-4CDB-9CAB-1DE01C083B87}"/>
               </a:ext>
             </a:extLst>
           </p:cNvPr>
@@ -7424,7 +8584,7 @@
           <p:cNvPr id="13" name="">
             <a:extLst xmlns:a="http://schemas.openxmlformats.org/drawingml/2006/main">
               <a:ext uri="{FF2B5EF4-FFF2-40B4-BE49-F238E27FC236}">
-                <a16:creationId xmlns:a16="http://schemas.microsoft.com/office/drawing/2014/main" id="{F0F5442B-461D-44EA-A52B-4D25C5F100B9}"/>
+                <a16:creationId xmlns:a16="http://schemas.microsoft.com/office/drawing/2014/main" id="{305BF1CB-A000-4E65-B58B-8A9D74F78991}"/>
               </a:ext>
             </a:extLst>
           </p:cNvPr>
@@ -7471,7 +8631,7 @@
     </p:spTree>
     <p:extLst>
       <p:ext uri="{BB962C8B-B14F-4D97-AF65-F5344CB8AC3E}">
-        <p14:creationId xmlns:p14="http://schemas.microsoft.com/office/powerpoint/2010/main" val="1390518119"/>
+        <p14:creationId xmlns:p14="http://schemas.microsoft.com/office/powerpoint/2010/main" val="1302939167"/>
       </p:ext>
     </p:extLst>
   </p:cSld>
@@ -7495,7 +8655,7 @@
           <p:cNvPr id="1" name="slide-bg">
             <a:extLst xmlns:a="http://schemas.openxmlformats.org/drawingml/2006/main">
               <a:ext uri="{FF2B5EF4-FFF2-40B4-BE49-F238E27FC236}">
-                <a16:creationId xmlns:a16="http://schemas.microsoft.com/office/drawing/2014/main" id="{46180146-C48A-4526-A58E-0B05F3A0FF94}"/>
+                <a16:creationId xmlns:a16="http://schemas.microsoft.com/office/drawing/2014/main" id="{6DA31DD7-439E-4F47-8E5D-958F83BC5B9E}"/>
               </a:ext>
             </a:extLst>
           </p:cNvPr>
@@ -7522,7 +8682,7 @@
           <p:cNvPr id="2" name="slide-title">
             <a:extLst xmlns:a="http://schemas.openxmlformats.org/drawingml/2006/main">
               <a:ext uri="{FF2B5EF4-FFF2-40B4-BE49-F238E27FC236}">
-                <a16:creationId xmlns:a16="http://schemas.microsoft.com/office/drawing/2014/main" id="{F282F101-C02F-49AC-A880-01B598AA6648}"/>
+                <a16:creationId xmlns:a16="http://schemas.microsoft.com/office/drawing/2014/main" id="{47803CE8-3C68-4985-8D48-2CA735FA40DB}"/>
               </a:ext>
             </a:extLst>
           </p:cNvPr>
@@ -7571,7 +8731,7 @@
           <p:cNvPr id="3" name="slide-subtitle">
             <a:extLst xmlns:a="http://schemas.openxmlformats.org/drawingml/2006/main">
               <a:ext uri="{FF2B5EF4-FFF2-40B4-BE49-F238E27FC236}">
-                <a16:creationId xmlns:a16="http://schemas.microsoft.com/office/drawing/2014/main" id="{D0343931-1477-4598-86EF-80F1DC9A4293}"/>
+                <a16:creationId xmlns:a16="http://schemas.microsoft.com/office/drawing/2014/main" id="{BFC2F92D-D3A0-4BBB-8ABD-FFF22C1EB42E}"/>
               </a:ext>
             </a:extLst>
           </p:cNvPr>
@@ -7620,7 +8780,7 @@
           <p:cNvPr id="4" name="">
             <a:extLst xmlns:a="http://schemas.openxmlformats.org/drawingml/2006/main">
               <a:ext uri="{FF2B5EF4-FFF2-40B4-BE49-F238E27FC236}">
-                <a16:creationId xmlns:a16="http://schemas.microsoft.com/office/drawing/2014/main" id="{6459A219-4EB1-4961-B6F8-481DA7E9204D}"/>
+                <a16:creationId xmlns:a16="http://schemas.microsoft.com/office/drawing/2014/main" id="{B1ADA706-39E7-45FB-935C-2402F8A66982}"/>
               </a:ext>
             </a:extLst>
           </p:cNvPr>
@@ -7669,7 +8829,7 @@
           <p:cNvPr id="5" name="">
             <a:extLst xmlns:a="http://schemas.openxmlformats.org/drawingml/2006/main">
               <a:ext uri="{FF2B5EF4-FFF2-40B4-BE49-F238E27FC236}">
-                <a16:creationId xmlns:a16="http://schemas.microsoft.com/office/drawing/2014/main" id="{72C90903-354B-4ED9-8498-501C3B5A74BA}"/>
+                <a16:creationId xmlns:a16="http://schemas.microsoft.com/office/drawing/2014/main" id="{BB364AB9-AF9A-40F0-A81D-87F358B40528}"/>
               </a:ext>
             </a:extLst>
           </p:cNvPr>
@@ -7698,7 +8858,7 @@
           <p:cNvPr id="6" name="">
             <a:extLst xmlns:a="http://schemas.openxmlformats.org/drawingml/2006/main">
               <a:ext uri="{FF2B5EF4-FFF2-40B4-BE49-F238E27FC236}">
-                <a16:creationId xmlns:a16="http://schemas.microsoft.com/office/drawing/2014/main" id="{4A99DCAD-2C75-4EE9-8F28-74B811DB0392}"/>
+                <a16:creationId xmlns:a16="http://schemas.microsoft.com/office/drawing/2014/main" id="{45B8E00F-D333-4772-86F3-9363A36513CA}"/>
               </a:ext>
             </a:extLst>
           </p:cNvPr>
@@ -7747,7 +8907,7 @@
           <p:cNvPr id="7" name="">
             <a:extLst xmlns:a="http://schemas.openxmlformats.org/drawingml/2006/main">
               <a:ext uri="{FF2B5EF4-FFF2-40B4-BE49-F238E27FC236}">
-                <a16:creationId xmlns:a16="http://schemas.microsoft.com/office/drawing/2014/main" id="{EAEBEC45-6636-4D3B-98A7-6C30E57686C4}"/>
+                <a16:creationId xmlns:a16="http://schemas.microsoft.com/office/drawing/2014/main" id="{19718A4D-8BAA-4132-9928-C6E574853D6C}"/>
               </a:ext>
             </a:extLst>
           </p:cNvPr>
@@ -7796,7 +8956,7 @@
           <p:cNvPr id="8" name="">
             <a:extLst xmlns:a="http://schemas.openxmlformats.org/drawingml/2006/main">
               <a:ext uri="{FF2B5EF4-FFF2-40B4-BE49-F238E27FC236}">
-                <a16:creationId xmlns:a16="http://schemas.microsoft.com/office/drawing/2014/main" id="{A5278813-61A1-4ED9-BA97-D6EE22BE818F}"/>
+                <a16:creationId xmlns:a16="http://schemas.microsoft.com/office/drawing/2014/main" id="{D8EAE47C-FBE3-4625-930A-D6EC57A8BEE6}"/>
               </a:ext>
             </a:extLst>
           </p:cNvPr>
@@ -7845,7 +9005,7 @@
           <p:cNvPr id="9" name="">
             <a:extLst xmlns:a="http://schemas.openxmlformats.org/drawingml/2006/main">
               <a:ext uri="{FF2B5EF4-FFF2-40B4-BE49-F238E27FC236}">
-                <a16:creationId xmlns:a16="http://schemas.microsoft.com/office/drawing/2014/main" id="{CB3CE198-F486-4155-AEC7-8A10A71110BE}"/>
+                <a16:creationId xmlns:a16="http://schemas.microsoft.com/office/drawing/2014/main" id="{1EA5FC0A-48CE-4AEF-8882-829D9D068859}"/>
               </a:ext>
             </a:extLst>
           </p:cNvPr>
@@ -7874,7 +9034,7 @@
           <p:cNvPr id="10" name="">
             <a:extLst xmlns:a="http://schemas.openxmlformats.org/drawingml/2006/main">
               <a:ext uri="{FF2B5EF4-FFF2-40B4-BE49-F238E27FC236}">
-                <a16:creationId xmlns:a16="http://schemas.microsoft.com/office/drawing/2014/main" id="{32C169E3-F7EE-4B22-B393-9624E96A4A9A}"/>
+                <a16:creationId xmlns:a16="http://schemas.microsoft.com/office/drawing/2014/main" id="{56179D0C-C21F-400B-8C8A-F09BEA1587A9}"/>
               </a:ext>
             </a:extLst>
           </p:cNvPr>
@@ -7923,7 +9083,7 @@
           <p:cNvPr id="11" name="">
             <a:extLst xmlns:a="http://schemas.openxmlformats.org/drawingml/2006/main">
               <a:ext uri="{FF2B5EF4-FFF2-40B4-BE49-F238E27FC236}">
-                <a16:creationId xmlns:a16="http://schemas.microsoft.com/office/drawing/2014/main" id="{F6E72944-ACC0-46F3-A8B0-F98BE301C022}"/>
+                <a16:creationId xmlns:a16="http://schemas.microsoft.com/office/drawing/2014/main" id="{B41EA9D0-84FE-40AB-BC8B-5EF5B0E6E006}"/>
               </a:ext>
             </a:extLst>
           </p:cNvPr>
@@ -7972,7 +9132,7 @@
           <p:cNvPr id="12" name="">
             <a:extLst xmlns:a="http://schemas.openxmlformats.org/drawingml/2006/main">
               <a:ext uri="{FF2B5EF4-FFF2-40B4-BE49-F238E27FC236}">
-                <a16:creationId xmlns:a16="http://schemas.microsoft.com/office/drawing/2014/main" id="{E6C9DBA9-4F46-48C8-8BE6-5246AEB5C8BF}"/>
+                <a16:creationId xmlns:a16="http://schemas.microsoft.com/office/drawing/2014/main" id="{DE45AC87-F68F-42A0-9F73-647E29527B49}"/>
               </a:ext>
             </a:extLst>
           </p:cNvPr>
@@ -8021,7 +9181,7 @@
           <p:cNvPr id="13" name="">
             <a:extLst xmlns:a="http://schemas.openxmlformats.org/drawingml/2006/main">
               <a:ext uri="{FF2B5EF4-FFF2-40B4-BE49-F238E27FC236}">
-                <a16:creationId xmlns:a16="http://schemas.microsoft.com/office/drawing/2014/main" id="{F0D263B5-C2CD-4935-BF53-97500D92CA25}"/>
+                <a16:creationId xmlns:a16="http://schemas.microsoft.com/office/drawing/2014/main" id="{F786C7A7-9E9F-4001-B36E-C5D064216E7F}"/>
               </a:ext>
             </a:extLst>
           </p:cNvPr>
@@ -8050,7 +9210,7 @@
           <p:cNvPr id="14" name="">
             <a:extLst xmlns:a="http://schemas.openxmlformats.org/drawingml/2006/main">
               <a:ext uri="{FF2B5EF4-FFF2-40B4-BE49-F238E27FC236}">
-                <a16:creationId xmlns:a16="http://schemas.microsoft.com/office/drawing/2014/main" id="{3248E34A-7206-4DC3-8C14-0D252822662D}"/>
+                <a16:creationId xmlns:a16="http://schemas.microsoft.com/office/drawing/2014/main" id="{B8F04EDD-AC82-4FC8-8D80-86F797D33857}"/>
               </a:ext>
             </a:extLst>
           </p:cNvPr>
@@ -8099,7 +9259,7 @@
           <p:cNvPr id="15" name="">
             <a:extLst xmlns:a="http://schemas.openxmlformats.org/drawingml/2006/main">
               <a:ext uri="{FF2B5EF4-FFF2-40B4-BE49-F238E27FC236}">
-                <a16:creationId xmlns:a16="http://schemas.microsoft.com/office/drawing/2014/main" id="{6EB3FB62-C563-4E22-A29E-8F84C9ED67E4}"/>
+                <a16:creationId xmlns:a16="http://schemas.microsoft.com/office/drawing/2014/main" id="{DDF87147-9DC0-4C8C-A07A-FB49B49EC4CF}"/>
               </a:ext>
             </a:extLst>
           </p:cNvPr>
@@ -8148,7 +9308,7 @@
           <p:cNvPr id="16" name="code-block">
             <a:extLst xmlns:a="http://schemas.openxmlformats.org/drawingml/2006/main">
               <a:ext uri="{FF2B5EF4-FFF2-40B4-BE49-F238E27FC236}">
-                <a16:creationId xmlns:a16="http://schemas.microsoft.com/office/drawing/2014/main" id="{F7767D41-5D24-49C8-93BD-29190E7F62B3}"/>
+                <a16:creationId xmlns:a16="http://schemas.microsoft.com/office/drawing/2014/main" id="{4863F5B6-9B1B-4835-9EA6-BEE7DF659197}"/>
               </a:ext>
             </a:extLst>
           </p:cNvPr>
@@ -8177,7 +9337,7 @@
           <p:cNvPr id="17" name="">
             <a:extLst xmlns:a="http://schemas.openxmlformats.org/drawingml/2006/main">
               <a:ext uri="{FF2B5EF4-FFF2-40B4-BE49-F238E27FC236}">
-                <a16:creationId xmlns:a16="http://schemas.microsoft.com/office/drawing/2014/main" id="{3F7A9F42-C478-497E-97AB-6F5C6DCA1D37}"/>
+                <a16:creationId xmlns:a16="http://schemas.microsoft.com/office/drawing/2014/main" id="{19135871-13D2-419A-94BF-0B03FCEF2575}"/>
               </a:ext>
             </a:extLst>
           </p:cNvPr>
@@ -8247,7 +9407,7 @@
           <p:cNvPr id="18" name="">
             <a:extLst xmlns:a="http://schemas.openxmlformats.org/drawingml/2006/main">
               <a:ext uri="{FF2B5EF4-FFF2-40B4-BE49-F238E27FC236}">
-                <a16:creationId xmlns:a16="http://schemas.microsoft.com/office/drawing/2014/main" id="{7BD324E7-EF45-4A8D-9BF0-FCA47C1731B3}"/>
+                <a16:creationId xmlns:a16="http://schemas.microsoft.com/office/drawing/2014/main" id="{7F71C758-1E31-4CDA-B921-34BB92F2B27F}"/>
               </a:ext>
             </a:extLst>
           </p:cNvPr>
@@ -8296,7 +9456,7 @@
           <p:cNvPr id="19" name="">
             <a:extLst xmlns:a="http://schemas.openxmlformats.org/drawingml/2006/main">
               <a:ext uri="{FF2B5EF4-FFF2-40B4-BE49-F238E27FC236}">
-                <a16:creationId xmlns:a16="http://schemas.microsoft.com/office/drawing/2014/main" id="{4906AFCC-C1EF-4E8C-8940-A44BC6D281DE}"/>
+                <a16:creationId xmlns:a16="http://schemas.microsoft.com/office/drawing/2014/main" id="{2405A077-FA9E-459E-90D2-8D38E5D95632}"/>
               </a:ext>
             </a:extLst>
           </p:cNvPr>
@@ -8325,7 +9485,7 @@
           <p:cNvPr id="20" name="">
             <a:extLst xmlns:a="http://schemas.openxmlformats.org/drawingml/2006/main">
               <a:ext uri="{FF2B5EF4-FFF2-40B4-BE49-F238E27FC236}">
-                <a16:creationId xmlns:a16="http://schemas.microsoft.com/office/drawing/2014/main" id="{E10628E8-F285-4022-A875-E5B5A9FB8DE8}"/>
+                <a16:creationId xmlns:a16="http://schemas.microsoft.com/office/drawing/2014/main" id="{B731ACB0-BDA6-4FF0-9392-D84AAEC520B4}"/>
               </a:ext>
             </a:extLst>
           </p:cNvPr>
@@ -8374,7 +9534,7 @@
           <p:cNvPr id="21" name="">
             <a:extLst xmlns:a="http://schemas.openxmlformats.org/drawingml/2006/main">
               <a:ext uri="{FF2B5EF4-FFF2-40B4-BE49-F238E27FC236}">
-                <a16:creationId xmlns:a16="http://schemas.microsoft.com/office/drawing/2014/main" id="{A50038F8-8B1A-4D3F-872F-0AF318AC058F}"/>
+                <a16:creationId xmlns:a16="http://schemas.microsoft.com/office/drawing/2014/main" id="{EC9D68E2-C33C-4F2F-8657-906ACDD23087}"/>
               </a:ext>
             </a:extLst>
           </p:cNvPr>
@@ -8423,7 +9583,7 @@
           <p:cNvPr id="22" name="">
             <a:extLst xmlns:a="http://schemas.openxmlformats.org/drawingml/2006/main">
               <a:ext uri="{FF2B5EF4-FFF2-40B4-BE49-F238E27FC236}">
-                <a16:creationId xmlns:a16="http://schemas.microsoft.com/office/drawing/2014/main" id="{BB487187-2F90-4970-B246-40243666EDA5}"/>
+                <a16:creationId xmlns:a16="http://schemas.microsoft.com/office/drawing/2014/main" id="{61B62D4C-4BAD-4BE0-8CEE-6FF8FEAC4B70}"/>
               </a:ext>
             </a:extLst>
           </p:cNvPr>
@@ -8472,7 +9632,7 @@
           <p:cNvPr id="23" name="">
             <a:extLst xmlns:a="http://schemas.openxmlformats.org/drawingml/2006/main">
               <a:ext uri="{FF2B5EF4-FFF2-40B4-BE49-F238E27FC236}">
-                <a16:creationId xmlns:a16="http://schemas.microsoft.com/office/drawing/2014/main" id="{BA35A5A1-83F5-4FA2-A765-8E226470A0E2}"/>
+                <a16:creationId xmlns:a16="http://schemas.microsoft.com/office/drawing/2014/main" id="{8266A2E5-0D3B-4AAB-AFD1-0CD3FF0E8043}"/>
               </a:ext>
             </a:extLst>
           </p:cNvPr>
@@ -8501,7 +9661,7 @@
           <p:cNvPr id="24" name="">
             <a:extLst xmlns:a="http://schemas.openxmlformats.org/drawingml/2006/main">
               <a:ext uri="{FF2B5EF4-FFF2-40B4-BE49-F238E27FC236}">
-                <a16:creationId xmlns:a16="http://schemas.microsoft.com/office/drawing/2014/main" id="{5F6CC7E5-BA0D-4DFF-86C8-CEE28BECE90B}"/>
+                <a16:creationId xmlns:a16="http://schemas.microsoft.com/office/drawing/2014/main" id="{283E58AF-CE2C-4C2C-8402-AA2EFF111543}"/>
               </a:ext>
             </a:extLst>
           </p:cNvPr>
@@ -8550,7 +9710,7 @@
           <p:cNvPr id="25" name="">
             <a:extLst xmlns:a="http://schemas.openxmlformats.org/drawingml/2006/main">
               <a:ext uri="{FF2B5EF4-FFF2-40B4-BE49-F238E27FC236}">
-                <a16:creationId xmlns:a16="http://schemas.microsoft.com/office/drawing/2014/main" id="{F00A27F6-B989-4C19-A9EB-A0C1361C655E}"/>
+                <a16:creationId xmlns:a16="http://schemas.microsoft.com/office/drawing/2014/main" id="{4B88C537-59C6-4FE3-A214-49C0607BF71D}"/>
               </a:ext>
             </a:extLst>
           </p:cNvPr>
@@ -8599,7 +9759,7 @@
           <p:cNvPr id="26" name="">
             <a:extLst xmlns:a="http://schemas.openxmlformats.org/drawingml/2006/main">
               <a:ext uri="{FF2B5EF4-FFF2-40B4-BE49-F238E27FC236}">
-                <a16:creationId xmlns:a16="http://schemas.microsoft.com/office/drawing/2014/main" id="{39EECF97-5380-47AB-8CE7-7556C692E22F}"/>
+                <a16:creationId xmlns:a16="http://schemas.microsoft.com/office/drawing/2014/main" id="{4E44C206-BC54-43C2-953F-917248EBD501}"/>
               </a:ext>
             </a:extLst>
           </p:cNvPr>
@@ -8648,7 +9808,7 @@
           <p:cNvPr id="27" name="">
             <a:extLst xmlns:a="http://schemas.openxmlformats.org/drawingml/2006/main">
               <a:ext uri="{FF2B5EF4-FFF2-40B4-BE49-F238E27FC236}">
-                <a16:creationId xmlns:a16="http://schemas.microsoft.com/office/drawing/2014/main" id="{74877896-73AC-4C9F-B527-8DE001AB82C8}"/>
+                <a16:creationId xmlns:a16="http://schemas.microsoft.com/office/drawing/2014/main" id="{E4D08352-9C1E-4FEE-823A-E9B219E7FB46}"/>
               </a:ext>
             </a:extLst>
           </p:cNvPr>
@@ -8677,7 +9837,7 @@
           <p:cNvPr id="28" name="">
             <a:extLst xmlns:a="http://schemas.openxmlformats.org/drawingml/2006/main">
               <a:ext uri="{FF2B5EF4-FFF2-40B4-BE49-F238E27FC236}">
-                <a16:creationId xmlns:a16="http://schemas.microsoft.com/office/drawing/2014/main" id="{D337E5F8-7FBB-4B4E-8A26-776D53685BC1}"/>
+                <a16:creationId xmlns:a16="http://schemas.microsoft.com/office/drawing/2014/main" id="{F53755E9-1714-4164-9F56-4CB81B06E14D}"/>
               </a:ext>
             </a:extLst>
           </p:cNvPr>
@@ -8726,7 +9886,7 @@
           <p:cNvPr id="29" name="">
             <a:extLst xmlns:a="http://schemas.openxmlformats.org/drawingml/2006/main">
               <a:ext uri="{FF2B5EF4-FFF2-40B4-BE49-F238E27FC236}">
-                <a16:creationId xmlns:a16="http://schemas.microsoft.com/office/drawing/2014/main" id="{70B00CBA-AFD7-4AFF-8DD1-49D1868C860B}"/>
+                <a16:creationId xmlns:a16="http://schemas.microsoft.com/office/drawing/2014/main" id="{DDE8D1C7-46AF-45D9-89D8-D1FDECEDE66B}"/>
               </a:ext>
             </a:extLst>
           </p:cNvPr>
@@ -8775,7 +9935,7 @@
           <p:cNvPr id="30" name="code-block">
             <a:extLst xmlns:a="http://schemas.openxmlformats.org/drawingml/2006/main">
               <a:ext uri="{FF2B5EF4-FFF2-40B4-BE49-F238E27FC236}">
-                <a16:creationId xmlns:a16="http://schemas.microsoft.com/office/drawing/2014/main" id="{0FE95F1C-C62A-4517-BB54-D2594FE34D86}"/>
+                <a16:creationId xmlns:a16="http://schemas.microsoft.com/office/drawing/2014/main" id="{814078E8-E712-4E9D-B8F7-970E89665479}"/>
               </a:ext>
             </a:extLst>
           </p:cNvPr>
@@ -8804,7 +9964,7 @@
           <p:cNvPr id="31" name="">
             <a:extLst xmlns:a="http://schemas.openxmlformats.org/drawingml/2006/main">
               <a:ext uri="{FF2B5EF4-FFF2-40B4-BE49-F238E27FC236}">
-                <a16:creationId xmlns:a16="http://schemas.microsoft.com/office/drawing/2014/main" id="{627C72F8-CF20-4C38-A2C0-631EC5238AEA}"/>
+                <a16:creationId xmlns:a16="http://schemas.microsoft.com/office/drawing/2014/main" id="{90DAE396-1265-4693-8C3C-4148D7A1E8A6}"/>
               </a:ext>
             </a:extLst>
           </p:cNvPr>
@@ -8874,7 +10034,7 @@
           <p:cNvPr id="32" name="">
             <a:extLst xmlns:a="http://schemas.openxmlformats.org/drawingml/2006/main">
               <a:ext uri="{FF2B5EF4-FFF2-40B4-BE49-F238E27FC236}">
-                <a16:creationId xmlns:a16="http://schemas.microsoft.com/office/drawing/2014/main" id="{75510804-83EE-4101-9186-1D3A1A0BDAC8}"/>
+                <a16:creationId xmlns:a16="http://schemas.microsoft.com/office/drawing/2014/main" id="{5230952D-CFFB-4061-A7BA-5F8FFF17CCD7}"/>
               </a:ext>
             </a:extLst>
           </p:cNvPr>
@@ -8921,7 +10081,7 @@
     </p:spTree>
     <p:extLst>
       <p:ext uri="{BB962C8B-B14F-4D97-AF65-F5344CB8AC3E}">
-        <p14:creationId xmlns:p14="http://schemas.microsoft.com/office/powerpoint/2010/main" val="327669202"/>
+        <p14:creationId xmlns:p14="http://schemas.microsoft.com/office/powerpoint/2010/main" val="1851148569"/>
       </p:ext>
     </p:extLst>
   </p:cSld>
@@ -8945,7 +10105,7 @@
           <p:cNvPr id="1" name="slide-bg">
             <a:extLst xmlns:a="http://schemas.openxmlformats.org/drawingml/2006/main">
               <a:ext uri="{FF2B5EF4-FFF2-40B4-BE49-F238E27FC236}">
-                <a16:creationId xmlns:a16="http://schemas.microsoft.com/office/drawing/2014/main" id="{DBE7AF15-8AC9-4876-A4AC-63B0E0F7F6EC}"/>
+                <a16:creationId xmlns:a16="http://schemas.microsoft.com/office/drawing/2014/main" id="{C133FCD5-212B-4040-9099-2926C5766594}"/>
               </a:ext>
             </a:extLst>
           </p:cNvPr>
@@ -8972,7 +10132,7 @@
           <p:cNvPr id="2" name="slide-title">
             <a:extLst xmlns:a="http://schemas.openxmlformats.org/drawingml/2006/main">
               <a:ext uri="{FF2B5EF4-FFF2-40B4-BE49-F238E27FC236}">
-                <a16:creationId xmlns:a16="http://schemas.microsoft.com/office/drawing/2014/main" id="{88A1B8C5-9536-4EBE-9E08-1AFCFC75F00A}"/>
+                <a16:creationId xmlns:a16="http://schemas.microsoft.com/office/drawing/2014/main" id="{56C0E818-23D5-4259-9B9E-715F4496B7DC}"/>
               </a:ext>
             </a:extLst>
           </p:cNvPr>
@@ -9021,7 +10181,7 @@
           <p:cNvPr id="3" name="slide-subtitle">
             <a:extLst xmlns:a="http://schemas.openxmlformats.org/drawingml/2006/main">
               <a:ext uri="{FF2B5EF4-FFF2-40B4-BE49-F238E27FC236}">
-                <a16:creationId xmlns:a16="http://schemas.microsoft.com/office/drawing/2014/main" id="{0AB07297-ABBB-485C-82FF-48B42820D1EE}"/>
+                <a16:creationId xmlns:a16="http://schemas.microsoft.com/office/drawing/2014/main" id="{90C23A51-0034-4597-A14D-4A573B9B4649}"/>
               </a:ext>
             </a:extLst>
           </p:cNvPr>
@@ -9070,7 +10230,7 @@
           <p:cNvPr id="4" name="code-block">
             <a:extLst xmlns:a="http://schemas.openxmlformats.org/drawingml/2006/main">
               <a:ext uri="{FF2B5EF4-FFF2-40B4-BE49-F238E27FC236}">
-                <a16:creationId xmlns:a16="http://schemas.microsoft.com/office/drawing/2014/main" id="{F6887ABF-E42A-4F86-B4BF-366183BEC3C4}"/>
+                <a16:creationId xmlns:a16="http://schemas.microsoft.com/office/drawing/2014/main" id="{638C754E-B707-4E79-A61D-6562340CD5EC}"/>
               </a:ext>
             </a:extLst>
           </p:cNvPr>
@@ -9099,7 +10259,7 @@
           <p:cNvPr id="5" name="">
             <a:extLst xmlns:a="http://schemas.openxmlformats.org/drawingml/2006/main">
               <a:ext uri="{FF2B5EF4-FFF2-40B4-BE49-F238E27FC236}">
-                <a16:creationId xmlns:a16="http://schemas.microsoft.com/office/drawing/2014/main" id="{6915B70A-0F93-4BB1-8B82-72C881F10EFC}"/>
+                <a16:creationId xmlns:a16="http://schemas.microsoft.com/office/drawing/2014/main" id="{99753E14-71D7-45AD-A57E-57F2CD77DE48}"/>
               </a:ext>
             </a:extLst>
           </p:cNvPr>
@@ -9467,7 +10627,7 @@
           <p:nvPr/>
         </p:nvPicPr>
         <p:blipFill>
-          <a:blip xmlns:r="http://schemas.openxmlformats.org/officeDocument/2006/relationships" xmlns:a="http://schemas.openxmlformats.org/drawingml/2006/main" r:embed="R2ddae39c1fb24ac0"/>
+          <a:blip xmlns:r="http://schemas.openxmlformats.org/officeDocument/2006/relationships" xmlns:a="http://schemas.openxmlformats.org/drawingml/2006/main" r:embed="R4a9b816d93804aef"/>
           <a:stretch xmlns:a="http://schemas.openxmlformats.org/drawingml/2006/main"/>
         </p:blipFill>
         <p:spPr>
@@ -9485,7 +10645,7 @@
           <p:cNvPr id="7" name="">
             <a:extLst xmlns:a="http://schemas.openxmlformats.org/drawingml/2006/main">
               <a:ext uri="{FF2B5EF4-FFF2-40B4-BE49-F238E27FC236}">
-                <a16:creationId xmlns:a16="http://schemas.microsoft.com/office/drawing/2014/main" id="{7A75AD98-7767-4441-BCB3-35D1C841F231}"/>
+                <a16:creationId xmlns:a16="http://schemas.microsoft.com/office/drawing/2014/main" id="{FB1F8D2B-3008-40C4-ABC4-04F98D6A4719}"/>
               </a:ext>
             </a:extLst>
           </p:cNvPr>
@@ -9534,7 +10694,7 @@
           <p:cNvPr id="8" name="">
             <a:extLst xmlns:a="http://schemas.openxmlformats.org/drawingml/2006/main">
               <a:ext uri="{FF2B5EF4-FFF2-40B4-BE49-F238E27FC236}">
-                <a16:creationId xmlns:a16="http://schemas.microsoft.com/office/drawing/2014/main" id="{0A46061F-A41D-4376-93BB-E51EF1169D14}"/>
+                <a16:creationId xmlns:a16="http://schemas.microsoft.com/office/drawing/2014/main" id="{6214EC7F-9573-4D3A-98F3-7C65B4E39D25}"/>
               </a:ext>
             </a:extLst>
           </p:cNvPr>
@@ -9583,7 +10743,7 @@
           <p:cNvPr id="9" name="">
             <a:extLst xmlns:a="http://schemas.openxmlformats.org/drawingml/2006/main">
               <a:ext uri="{FF2B5EF4-FFF2-40B4-BE49-F238E27FC236}">
-                <a16:creationId xmlns:a16="http://schemas.microsoft.com/office/drawing/2014/main" id="{45E03697-D447-4F02-96EC-A8F15AF358C3}"/>
+                <a16:creationId xmlns:a16="http://schemas.microsoft.com/office/drawing/2014/main" id="{ED9A54DE-1332-4B61-B607-58EC783D2887}"/>
               </a:ext>
             </a:extLst>
           </p:cNvPr>
@@ -9632,7 +10792,7 @@
           <p:cNvPr id="10" name="">
             <a:extLst xmlns:a="http://schemas.openxmlformats.org/drawingml/2006/main">
               <a:ext uri="{FF2B5EF4-FFF2-40B4-BE49-F238E27FC236}">
-                <a16:creationId xmlns:a16="http://schemas.microsoft.com/office/drawing/2014/main" id="{F65A7201-7B65-478B-BFE2-36CC19704C14}"/>
+                <a16:creationId xmlns:a16="http://schemas.microsoft.com/office/drawing/2014/main" id="{2CDE0AF4-5F12-46A0-9D2D-A81F53C9F2D0}"/>
               </a:ext>
             </a:extLst>
           </p:cNvPr>
@@ -9681,7 +10841,7 @@
           <p:cNvPr id="11" name="">
             <a:extLst xmlns:a="http://schemas.openxmlformats.org/drawingml/2006/main">
               <a:ext uri="{FF2B5EF4-FFF2-40B4-BE49-F238E27FC236}">
-                <a16:creationId xmlns:a16="http://schemas.microsoft.com/office/drawing/2014/main" id="{D2E00454-7F38-4728-9CA9-C9E9A4C48886}"/>
+                <a16:creationId xmlns:a16="http://schemas.microsoft.com/office/drawing/2014/main" id="{07115932-763C-44FF-A1D2-FDA6BAB17F22}"/>
               </a:ext>
             </a:extLst>
           </p:cNvPr>
@@ -9730,7 +10890,7 @@
           <p:cNvPr id="12" name="">
             <a:extLst xmlns:a="http://schemas.openxmlformats.org/drawingml/2006/main">
               <a:ext uri="{FF2B5EF4-FFF2-40B4-BE49-F238E27FC236}">
-                <a16:creationId xmlns:a16="http://schemas.microsoft.com/office/drawing/2014/main" id="{32383506-0860-4669-A7F6-34747E5BC462}"/>
+                <a16:creationId xmlns:a16="http://schemas.microsoft.com/office/drawing/2014/main" id="{33F31BD7-6C6C-44FE-B89D-CE0A3884698D}"/>
               </a:ext>
             </a:extLst>
           </p:cNvPr>
@@ -9779,7 +10939,7 @@
           <p:cNvPr id="13" name="">
             <a:extLst xmlns:a="http://schemas.openxmlformats.org/drawingml/2006/main">
               <a:ext uri="{FF2B5EF4-FFF2-40B4-BE49-F238E27FC236}">
-                <a16:creationId xmlns:a16="http://schemas.microsoft.com/office/drawing/2014/main" id="{7C632B8B-B284-4AA8-870D-E7C8A944AA8F}"/>
+                <a16:creationId xmlns:a16="http://schemas.microsoft.com/office/drawing/2014/main" id="{6987921F-4F89-4DAE-BCC6-63D11BBA4547}"/>
               </a:ext>
             </a:extLst>
           </p:cNvPr>
@@ -9828,7 +10988,7 @@
           <p:cNvPr id="14" name="">
             <a:extLst xmlns:a="http://schemas.openxmlformats.org/drawingml/2006/main">
               <a:ext uri="{FF2B5EF4-FFF2-40B4-BE49-F238E27FC236}">
-                <a16:creationId xmlns:a16="http://schemas.microsoft.com/office/drawing/2014/main" id="{D01C8163-978E-484A-906D-78D7DA02EB1B}"/>
+                <a16:creationId xmlns:a16="http://schemas.microsoft.com/office/drawing/2014/main" id="{0C30DC98-54D6-4288-9E29-DDEDD7B9E15B}"/>
               </a:ext>
             </a:extLst>
           </p:cNvPr>
@@ -9877,7 +11037,7 @@
           <p:cNvPr id="15" name="">
             <a:extLst xmlns:a="http://schemas.openxmlformats.org/drawingml/2006/main">
               <a:ext uri="{FF2B5EF4-FFF2-40B4-BE49-F238E27FC236}">
-                <a16:creationId xmlns:a16="http://schemas.microsoft.com/office/drawing/2014/main" id="{A80CD781-AD74-4402-ACE2-690BE09A358E}"/>
+                <a16:creationId xmlns:a16="http://schemas.microsoft.com/office/drawing/2014/main" id="{06A932ED-EFCD-4980-AD7F-79EAD596234A}"/>
               </a:ext>
             </a:extLst>
           </p:cNvPr>
@@ -9926,7 +11086,7 @@
           <p:cNvPr id="16" name="">
             <a:extLst xmlns:a="http://schemas.openxmlformats.org/drawingml/2006/main">
               <a:ext uri="{FF2B5EF4-FFF2-40B4-BE49-F238E27FC236}">
-                <a16:creationId xmlns:a16="http://schemas.microsoft.com/office/drawing/2014/main" id="{B02627E5-34D9-4BE6-9165-3CF5206C12B4}"/>
+                <a16:creationId xmlns:a16="http://schemas.microsoft.com/office/drawing/2014/main" id="{4947F6B5-DBB7-4DC8-B722-756262DF0F79}"/>
               </a:ext>
             </a:extLst>
           </p:cNvPr>
@@ -9973,7 +11133,7 @@
     </p:spTree>
     <p:extLst>
       <p:ext uri="{BB962C8B-B14F-4D97-AF65-F5344CB8AC3E}">
-        <p14:creationId xmlns:p14="http://schemas.microsoft.com/office/powerpoint/2010/main" val="597901765"/>
+        <p14:creationId xmlns:p14="http://schemas.microsoft.com/office/powerpoint/2010/main" val="221090397"/>
       </p:ext>
     </p:extLst>
   </p:cSld>
@@ -9997,7 +11157,7 @@
           <p:cNvPr id="1" name="slide-bg">
             <a:extLst xmlns:a="http://schemas.openxmlformats.org/drawingml/2006/main">
               <a:ext uri="{FF2B5EF4-FFF2-40B4-BE49-F238E27FC236}">
-                <a16:creationId xmlns:a16="http://schemas.microsoft.com/office/drawing/2014/main" id="{4F369405-E17B-4A5D-A939-92DC2286D672}"/>
+                <a16:creationId xmlns:a16="http://schemas.microsoft.com/office/drawing/2014/main" id="{D2A88A68-B487-4D3D-A88D-2B7B1060A932}"/>
               </a:ext>
             </a:extLst>
           </p:cNvPr>
@@ -10024,7 +11184,7 @@
           <p:cNvPr id="2" name="slide-title">
             <a:extLst xmlns:a="http://schemas.openxmlformats.org/drawingml/2006/main">
               <a:ext uri="{FF2B5EF4-FFF2-40B4-BE49-F238E27FC236}">
-                <a16:creationId xmlns:a16="http://schemas.microsoft.com/office/drawing/2014/main" id="{A01E890F-5FD6-491C-A99F-A56C2DA69799}"/>
+                <a16:creationId xmlns:a16="http://schemas.microsoft.com/office/drawing/2014/main" id="{D3749D78-9234-47E5-BF08-35783711A941}"/>
               </a:ext>
             </a:extLst>
           </p:cNvPr>
@@ -10073,7 +11233,7 @@
           <p:cNvPr id="3" name="slide-subtitle">
             <a:extLst xmlns:a="http://schemas.openxmlformats.org/drawingml/2006/main">
               <a:ext uri="{FF2B5EF4-FFF2-40B4-BE49-F238E27FC236}">
-                <a16:creationId xmlns:a16="http://schemas.microsoft.com/office/drawing/2014/main" id="{5C4176DC-FC14-4F39-9ECE-AB112AB56FE7}"/>
+                <a16:creationId xmlns:a16="http://schemas.microsoft.com/office/drawing/2014/main" id="{13613CC4-579C-48AD-A275-A89B4721A19A}"/>
               </a:ext>
             </a:extLst>
           </p:cNvPr>
@@ -10122,7 +11282,7 @@
           <p:cNvPr id="4" name="">
             <a:extLst xmlns:a="http://schemas.openxmlformats.org/drawingml/2006/main">
               <a:ext uri="{FF2B5EF4-FFF2-40B4-BE49-F238E27FC236}">
-                <a16:creationId xmlns:a16="http://schemas.microsoft.com/office/drawing/2014/main" id="{3FA40384-C22D-41BB-B85E-C53BA4472F07}"/>
+                <a16:creationId xmlns:a16="http://schemas.microsoft.com/office/drawing/2014/main" id="{643168A2-F778-47C7-B998-3D435C2F8E04}"/>
               </a:ext>
             </a:extLst>
           </p:cNvPr>
@@ -10151,7 +11311,7 @@
           <p:cNvPr id="5" name="">
             <a:extLst xmlns:a="http://schemas.openxmlformats.org/drawingml/2006/main">
               <a:ext uri="{FF2B5EF4-FFF2-40B4-BE49-F238E27FC236}">
-                <a16:creationId xmlns:a16="http://schemas.microsoft.com/office/drawing/2014/main" id="{A8AA9C46-B345-47D5-BA0B-FB31D5191E9B}"/>
+                <a16:creationId xmlns:a16="http://schemas.microsoft.com/office/drawing/2014/main" id="{92477AA2-0794-4EA1-A203-A2C703F76ACB}"/>
               </a:ext>
             </a:extLst>
           </p:cNvPr>
@@ -10200,7 +11360,7 @@
           <p:cNvPr id="6" name="">
             <a:extLst xmlns:a="http://schemas.openxmlformats.org/drawingml/2006/main">
               <a:ext uri="{FF2B5EF4-FFF2-40B4-BE49-F238E27FC236}">
-                <a16:creationId xmlns:a16="http://schemas.microsoft.com/office/drawing/2014/main" id="{ECF1651A-BEC8-4400-9228-FA2676C49651}"/>
+                <a16:creationId xmlns:a16="http://schemas.microsoft.com/office/drawing/2014/main" id="{F5EA9AA0-4245-417A-97ED-4BB6CF00E227}"/>
               </a:ext>
             </a:extLst>
           </p:cNvPr>
@@ -10249,7 +11409,7 @@
           <p:cNvPr id="7" name="">
             <a:extLst xmlns:a="http://schemas.openxmlformats.org/drawingml/2006/main">
               <a:ext uri="{FF2B5EF4-FFF2-40B4-BE49-F238E27FC236}">
-                <a16:creationId xmlns:a16="http://schemas.microsoft.com/office/drawing/2014/main" id="{12F03F93-A966-4386-8829-0B5FA209E6FA}"/>
+                <a16:creationId xmlns:a16="http://schemas.microsoft.com/office/drawing/2014/main" id="{B40B639D-0DFD-4952-9079-6AE02B64EA02}"/>
               </a:ext>
             </a:extLst>
           </p:cNvPr>
@@ -10298,7 +11458,7 @@
           <p:cNvPr id="8" name="">
             <a:extLst xmlns:a="http://schemas.openxmlformats.org/drawingml/2006/main">
               <a:ext uri="{FF2B5EF4-FFF2-40B4-BE49-F238E27FC236}">
-                <a16:creationId xmlns:a16="http://schemas.microsoft.com/office/drawing/2014/main" id="{36493F8F-A50D-4C22-94F1-DDF03F63A2AF}"/>
+                <a16:creationId xmlns:a16="http://schemas.microsoft.com/office/drawing/2014/main" id="{C04A316F-0C61-433A-831A-39D3A20A9AF0}"/>
               </a:ext>
             </a:extLst>
           </p:cNvPr>
@@ -10327,7 +11487,7 @@
           <p:cNvPr id="9" name="">
             <a:extLst xmlns:a="http://schemas.openxmlformats.org/drawingml/2006/main">
               <a:ext uri="{FF2B5EF4-FFF2-40B4-BE49-F238E27FC236}">
-                <a16:creationId xmlns:a16="http://schemas.microsoft.com/office/drawing/2014/main" id="{9F21CA16-9F81-454B-A94E-9B8CB74743FD}"/>
+                <a16:creationId xmlns:a16="http://schemas.microsoft.com/office/drawing/2014/main" id="{288C3BD5-FE80-48E1-B086-3E3AB9A2C605}"/>
               </a:ext>
             </a:extLst>
           </p:cNvPr>
@@ -10376,7 +11536,7 @@
           <p:cNvPr id="10" name="">
             <a:extLst xmlns:a="http://schemas.openxmlformats.org/drawingml/2006/main">
               <a:ext uri="{FF2B5EF4-FFF2-40B4-BE49-F238E27FC236}">
-                <a16:creationId xmlns:a16="http://schemas.microsoft.com/office/drawing/2014/main" id="{846B924F-CB29-4A79-9344-546F9E00ECB4}"/>
+                <a16:creationId xmlns:a16="http://schemas.microsoft.com/office/drawing/2014/main" id="{BDD8CAFB-B90A-4473-9449-A95F410B0165}"/>
               </a:ext>
             </a:extLst>
           </p:cNvPr>
@@ -10425,7 +11585,7 @@
           <p:cNvPr id="11" name="">
             <a:extLst xmlns:a="http://schemas.openxmlformats.org/drawingml/2006/main">
               <a:ext uri="{FF2B5EF4-FFF2-40B4-BE49-F238E27FC236}">
-                <a16:creationId xmlns:a16="http://schemas.microsoft.com/office/drawing/2014/main" id="{FD3B28FF-D91B-4DA5-B743-CCAF0C8124E4}"/>
+                <a16:creationId xmlns:a16="http://schemas.microsoft.com/office/drawing/2014/main" id="{57E0B034-9E14-4A05-8685-9FDB471A3297}"/>
               </a:ext>
             </a:extLst>
           </p:cNvPr>
@@ -10474,7 +11634,7 @@
           <p:cNvPr id="12" name="">
             <a:extLst xmlns:a="http://schemas.openxmlformats.org/drawingml/2006/main">
               <a:ext uri="{FF2B5EF4-FFF2-40B4-BE49-F238E27FC236}">
-                <a16:creationId xmlns:a16="http://schemas.microsoft.com/office/drawing/2014/main" id="{E267350A-061F-46C5-A6AB-B689D3ECA5B6}"/>
+                <a16:creationId xmlns:a16="http://schemas.microsoft.com/office/drawing/2014/main" id="{4E70C718-5F17-4BEA-B5EE-789AD230F80E}"/>
               </a:ext>
             </a:extLst>
           </p:cNvPr>
@@ -10503,7 +11663,7 @@
           <p:cNvPr id="13" name="">
             <a:extLst xmlns:a="http://schemas.openxmlformats.org/drawingml/2006/main">
               <a:ext uri="{FF2B5EF4-FFF2-40B4-BE49-F238E27FC236}">
-                <a16:creationId xmlns:a16="http://schemas.microsoft.com/office/drawing/2014/main" id="{A40DE301-1381-4F06-8B33-B2902E3DBFA4}"/>
+                <a16:creationId xmlns:a16="http://schemas.microsoft.com/office/drawing/2014/main" id="{C36C1C60-F943-4F3B-90FE-7060D7074DB7}"/>
               </a:ext>
             </a:extLst>
           </p:cNvPr>
@@ -10552,7 +11712,7 @@
           <p:cNvPr id="14" name="">
             <a:extLst xmlns:a="http://schemas.openxmlformats.org/drawingml/2006/main">
               <a:ext uri="{FF2B5EF4-FFF2-40B4-BE49-F238E27FC236}">
-                <a16:creationId xmlns:a16="http://schemas.microsoft.com/office/drawing/2014/main" id="{38FA8583-C14C-4F5B-953B-05B5ABD25B19}"/>
+                <a16:creationId xmlns:a16="http://schemas.microsoft.com/office/drawing/2014/main" id="{3E3FAF4D-4183-4E89-9A97-14D76CB80903}"/>
               </a:ext>
             </a:extLst>
           </p:cNvPr>
@@ -10601,7 +11761,7 @@
           <p:cNvPr id="15" name="">
             <a:extLst xmlns:a="http://schemas.openxmlformats.org/drawingml/2006/main">
               <a:ext uri="{FF2B5EF4-FFF2-40B4-BE49-F238E27FC236}">
-                <a16:creationId xmlns:a16="http://schemas.microsoft.com/office/drawing/2014/main" id="{53928096-B145-4248-8081-6F7B82341ECA}"/>
+                <a16:creationId xmlns:a16="http://schemas.microsoft.com/office/drawing/2014/main" id="{8E81261A-1F87-42B7-93EA-878183E19E80}"/>
               </a:ext>
             </a:extLst>
           </p:cNvPr>
@@ -10650,7 +11810,7 @@
           <p:cNvPr id="16" name="">
             <a:extLst xmlns:a="http://schemas.openxmlformats.org/drawingml/2006/main">
               <a:ext uri="{FF2B5EF4-FFF2-40B4-BE49-F238E27FC236}">
-                <a16:creationId xmlns:a16="http://schemas.microsoft.com/office/drawing/2014/main" id="{CC5FBD62-3709-431C-AA39-ECF27E9C5937}"/>
+                <a16:creationId xmlns:a16="http://schemas.microsoft.com/office/drawing/2014/main" id="{9B807D6A-8B05-450C-84D6-F3CD3A0172BB}"/>
               </a:ext>
             </a:extLst>
           </p:cNvPr>
@@ -10679,7 +11839,7 @@
           <p:cNvPr id="17" name="">
             <a:extLst xmlns:a="http://schemas.openxmlformats.org/drawingml/2006/main">
               <a:ext uri="{FF2B5EF4-FFF2-40B4-BE49-F238E27FC236}">
-                <a16:creationId xmlns:a16="http://schemas.microsoft.com/office/drawing/2014/main" id="{5B06D52D-B5D2-45B0-AF3D-901A64706B00}"/>
+                <a16:creationId xmlns:a16="http://schemas.microsoft.com/office/drawing/2014/main" id="{EEADC3CC-3695-43DF-B4FB-7E538F97AF36}"/>
               </a:ext>
             </a:extLst>
           </p:cNvPr>
@@ -10728,7 +11888,7 @@
           <p:cNvPr id="18" name="">
             <a:extLst xmlns:a="http://schemas.openxmlformats.org/drawingml/2006/main">
               <a:ext uri="{FF2B5EF4-FFF2-40B4-BE49-F238E27FC236}">
-                <a16:creationId xmlns:a16="http://schemas.microsoft.com/office/drawing/2014/main" id="{B39D9531-5758-4A99-8690-53F52D9F0B08}"/>
+                <a16:creationId xmlns:a16="http://schemas.microsoft.com/office/drawing/2014/main" id="{67EE16A4-59DA-43FC-BCAB-E1CF644CA2FE}"/>
               </a:ext>
             </a:extLst>
           </p:cNvPr>
@@ -10777,7 +11937,7 @@
           <p:cNvPr id="19" name="">
             <a:extLst xmlns:a="http://schemas.openxmlformats.org/drawingml/2006/main">
               <a:ext uri="{FF2B5EF4-FFF2-40B4-BE49-F238E27FC236}">
-                <a16:creationId xmlns:a16="http://schemas.microsoft.com/office/drawing/2014/main" id="{6DBFFD66-4575-4301-BB13-24956142863C}"/>
+                <a16:creationId xmlns:a16="http://schemas.microsoft.com/office/drawing/2014/main" id="{85E2B2A3-C81B-4FE2-A8B9-C2D3E7C9061C}"/>
               </a:ext>
             </a:extLst>
           </p:cNvPr>
@@ -10826,7 +11986,7 @@
           <p:cNvPr id="20" name="">
             <a:extLst xmlns:a="http://schemas.openxmlformats.org/drawingml/2006/main">
               <a:ext uri="{FF2B5EF4-FFF2-40B4-BE49-F238E27FC236}">
-                <a16:creationId xmlns:a16="http://schemas.microsoft.com/office/drawing/2014/main" id="{909202B4-1A87-4931-8F44-CBAF37BCE7B0}"/>
+                <a16:creationId xmlns:a16="http://schemas.microsoft.com/office/drawing/2014/main" id="{59FA5A67-A36E-4AA9-A3A8-C111B564224C}"/>
               </a:ext>
             </a:extLst>
           </p:cNvPr>
@@ -10855,7 +12015,7 @@
           <p:cNvPr id="21" name="">
             <a:extLst xmlns:a="http://schemas.openxmlformats.org/drawingml/2006/main">
               <a:ext uri="{FF2B5EF4-FFF2-40B4-BE49-F238E27FC236}">
-                <a16:creationId xmlns:a16="http://schemas.microsoft.com/office/drawing/2014/main" id="{3C2D5757-20D9-4688-A296-D8B4568E9071}"/>
+                <a16:creationId xmlns:a16="http://schemas.microsoft.com/office/drawing/2014/main" id="{7E128320-1DAC-48EE-BBFA-A60DB9D0647B}"/>
               </a:ext>
             </a:extLst>
           </p:cNvPr>
@@ -10904,7 +12064,7 @@
           <p:cNvPr id="22" name="">
             <a:extLst xmlns:a="http://schemas.openxmlformats.org/drawingml/2006/main">
               <a:ext uri="{FF2B5EF4-FFF2-40B4-BE49-F238E27FC236}">
-                <a16:creationId xmlns:a16="http://schemas.microsoft.com/office/drawing/2014/main" id="{E74A823C-3C69-4385-8352-75895ABDB42E}"/>
+                <a16:creationId xmlns:a16="http://schemas.microsoft.com/office/drawing/2014/main" id="{02AAD6C1-C5D8-4D0B-BA52-704C57D0F566}"/>
               </a:ext>
             </a:extLst>
           </p:cNvPr>
@@ -10953,7 +12113,7 @@
           <p:cNvPr id="23" name="code-block">
             <a:extLst xmlns:a="http://schemas.openxmlformats.org/drawingml/2006/main">
               <a:ext uri="{FF2B5EF4-FFF2-40B4-BE49-F238E27FC236}">
-                <a16:creationId xmlns:a16="http://schemas.microsoft.com/office/drawing/2014/main" id="{EDF9207F-8F30-4814-B5AF-FE1E2D2E394F}"/>
+                <a16:creationId xmlns:a16="http://schemas.microsoft.com/office/drawing/2014/main" id="{921581FA-75D8-49AB-8027-1EF5EE9739A0}"/>
               </a:ext>
             </a:extLst>
           </p:cNvPr>
@@ -10982,7 +12142,7 @@
           <p:cNvPr id="24" name="">
             <a:extLst xmlns:a="http://schemas.openxmlformats.org/drawingml/2006/main">
               <a:ext uri="{FF2B5EF4-FFF2-40B4-BE49-F238E27FC236}">
-                <a16:creationId xmlns:a16="http://schemas.microsoft.com/office/drawing/2014/main" id="{DD02E7BF-278A-478A-B779-2C9ABE70DF21}"/>
+                <a16:creationId xmlns:a16="http://schemas.microsoft.com/office/drawing/2014/main" id="{01891188-4636-48E5-9AE5-4292F4543B42}"/>
               </a:ext>
             </a:extLst>
           </p:cNvPr>
@@ -11099,7 +12259,7 @@
           <p:cNvPr id="25" name="">
             <a:extLst xmlns:a="http://schemas.openxmlformats.org/drawingml/2006/main">
               <a:ext uri="{FF2B5EF4-FFF2-40B4-BE49-F238E27FC236}">
-                <a16:creationId xmlns:a16="http://schemas.microsoft.com/office/drawing/2014/main" id="{8E137CA3-725A-4060-95CF-76BA1D467E4A}"/>
+                <a16:creationId xmlns:a16="http://schemas.microsoft.com/office/drawing/2014/main" id="{41572F8D-CB02-41A0-A97B-5B8BE4B017E1}"/>
               </a:ext>
             </a:extLst>
           </p:cNvPr>
@@ -11146,7 +12306,7 @@
     </p:spTree>
     <p:extLst>
       <p:ext uri="{BB962C8B-B14F-4D97-AF65-F5344CB8AC3E}">
-        <p14:creationId xmlns:p14="http://schemas.microsoft.com/office/powerpoint/2010/main" val="1152082920"/>
+        <p14:creationId xmlns:p14="http://schemas.microsoft.com/office/powerpoint/2010/main" val="1464890471"/>
       </p:ext>
     </p:extLst>
   </p:cSld>
@@ -11170,7 +12330,7 @@
           <p:cNvPr id="1" name="slide-bg">
             <a:extLst xmlns:a="http://schemas.openxmlformats.org/drawingml/2006/main">
               <a:ext uri="{FF2B5EF4-FFF2-40B4-BE49-F238E27FC236}">
-                <a16:creationId xmlns:a16="http://schemas.microsoft.com/office/drawing/2014/main" id="{900EC8A3-B7FF-43AC-A3A8-FA7BFA52C722}"/>
+                <a16:creationId xmlns:a16="http://schemas.microsoft.com/office/drawing/2014/main" id="{4F708DDD-4CFD-4E9E-95BA-3CCE0E8F7C06}"/>
               </a:ext>
             </a:extLst>
           </p:cNvPr>
@@ -11197,7 +12357,7 @@
           <p:cNvPr id="2" name="slide-title">
             <a:extLst xmlns:a="http://schemas.openxmlformats.org/drawingml/2006/main">
               <a:ext uri="{FF2B5EF4-FFF2-40B4-BE49-F238E27FC236}">
-                <a16:creationId xmlns:a16="http://schemas.microsoft.com/office/drawing/2014/main" id="{3405E388-D95C-4145-8FBE-4608F090D4A6}"/>
+                <a16:creationId xmlns:a16="http://schemas.microsoft.com/office/drawing/2014/main" id="{EBE1A8AD-7399-4D1B-B392-79ACACB4B4C2}"/>
               </a:ext>
             </a:extLst>
           </p:cNvPr>
@@ -11246,7 +12406,7 @@
           <p:cNvPr id="3" name="slide-subtitle">
             <a:extLst xmlns:a="http://schemas.openxmlformats.org/drawingml/2006/main">
               <a:ext uri="{FF2B5EF4-FFF2-40B4-BE49-F238E27FC236}">
-                <a16:creationId xmlns:a16="http://schemas.microsoft.com/office/drawing/2014/main" id="{BF5CBF0A-169C-40AC-9553-1BDC71688D53}"/>
+                <a16:creationId xmlns:a16="http://schemas.microsoft.com/office/drawing/2014/main" id="{447F498F-134F-4467-B8A5-24D18C016958}"/>
               </a:ext>
             </a:extLst>
           </p:cNvPr>
@@ -11295,7 +12455,7 @@
           <p:cNvPr id="4" name="code-block">
             <a:extLst xmlns:a="http://schemas.openxmlformats.org/drawingml/2006/main">
               <a:ext uri="{FF2B5EF4-FFF2-40B4-BE49-F238E27FC236}">
-                <a16:creationId xmlns:a16="http://schemas.microsoft.com/office/drawing/2014/main" id="{E2519CC9-D036-47DB-8095-90F2E27B0144}"/>
+                <a16:creationId xmlns:a16="http://schemas.microsoft.com/office/drawing/2014/main" id="{95E2BF01-BC46-44D5-A617-EF125045D4E3}"/>
               </a:ext>
             </a:extLst>
           </p:cNvPr>
@@ -11324,7 +12484,7 @@
           <p:cNvPr id="5" name="">
             <a:extLst xmlns:a="http://schemas.openxmlformats.org/drawingml/2006/main">
               <a:ext uri="{FF2B5EF4-FFF2-40B4-BE49-F238E27FC236}">
-                <a16:creationId xmlns:a16="http://schemas.microsoft.com/office/drawing/2014/main" id="{3C55F80F-AACC-4AC3-BB3A-DF5AB0E97F56}"/>
+                <a16:creationId xmlns:a16="http://schemas.microsoft.com/office/drawing/2014/main" id="{451F66BC-D624-4BC4-8CCC-0B89ADA97A51}"/>
               </a:ext>
             </a:extLst>
           </p:cNvPr>
@@ -11546,7 +12706,7 @@
           <p:cNvPr id="6" name="">
             <a:extLst xmlns:a="http://schemas.openxmlformats.org/drawingml/2006/main">
               <a:ext uri="{FF2B5EF4-FFF2-40B4-BE49-F238E27FC236}">
-                <a16:creationId xmlns:a16="http://schemas.microsoft.com/office/drawing/2014/main" id="{308073A3-8775-4421-9887-B4B81855A07C}"/>
+                <a16:creationId xmlns:a16="http://schemas.microsoft.com/office/drawing/2014/main" id="{B0628F55-DEA5-4672-8C5D-33C9D828BB3E}"/>
               </a:ext>
             </a:extLst>
           </p:cNvPr>
@@ -11595,7 +12755,7 @@
           <p:cNvPr id="7" name="">
             <a:extLst xmlns:a="http://schemas.openxmlformats.org/drawingml/2006/main">
               <a:ext uri="{FF2B5EF4-FFF2-40B4-BE49-F238E27FC236}">
-                <a16:creationId xmlns:a16="http://schemas.microsoft.com/office/drawing/2014/main" id="{76090D2E-5203-4A43-99C3-7C5C61857C6F}"/>
+                <a16:creationId xmlns:a16="http://schemas.microsoft.com/office/drawing/2014/main" id="{E6858282-167A-4A5D-9F5B-724AF62D3F29}"/>
               </a:ext>
             </a:extLst>
           </p:cNvPr>
@@ -11624,7 +12784,7 @@
           <p:cNvPr id="8" name="">
             <a:extLst xmlns:a="http://schemas.openxmlformats.org/drawingml/2006/main">
               <a:ext uri="{FF2B5EF4-FFF2-40B4-BE49-F238E27FC236}">
-                <a16:creationId xmlns:a16="http://schemas.microsoft.com/office/drawing/2014/main" id="{847FCE02-353A-4796-B7E1-E7AC58AFD91B}"/>
+                <a16:creationId xmlns:a16="http://schemas.microsoft.com/office/drawing/2014/main" id="{94325F5B-BA8D-42DD-A5DE-860CC690A58D}"/>
               </a:ext>
             </a:extLst>
           </p:cNvPr>
@@ -11673,7 +12833,7 @@
           <p:cNvPr id="9" name="">
             <a:extLst xmlns:a="http://schemas.openxmlformats.org/drawingml/2006/main">
               <a:ext uri="{FF2B5EF4-FFF2-40B4-BE49-F238E27FC236}">
-                <a16:creationId xmlns:a16="http://schemas.microsoft.com/office/drawing/2014/main" id="{BD8C6A64-A470-41F8-9321-3F820D4B2BFF}"/>
+                <a16:creationId xmlns:a16="http://schemas.microsoft.com/office/drawing/2014/main" id="{F306F078-B5A5-47CC-8F2E-15FAF9863FDE}"/>
               </a:ext>
             </a:extLst>
           </p:cNvPr>
@@ -11722,7 +12882,7 @@
           <p:cNvPr id="10" name="">
             <a:extLst xmlns:a="http://schemas.openxmlformats.org/drawingml/2006/main">
               <a:ext uri="{FF2B5EF4-FFF2-40B4-BE49-F238E27FC236}">
-                <a16:creationId xmlns:a16="http://schemas.microsoft.com/office/drawing/2014/main" id="{06CE4AA1-D1EF-4D3B-A9EF-F3DC60915F5D}"/>
+                <a16:creationId xmlns:a16="http://schemas.microsoft.com/office/drawing/2014/main" id="{1C482EA8-9BFF-4D33-85A5-192109B0021D}"/>
               </a:ext>
             </a:extLst>
           </p:cNvPr>
@@ -11771,7 +12931,7 @@
           <p:cNvPr id="11" name="">
             <a:extLst xmlns:a="http://schemas.openxmlformats.org/drawingml/2006/main">
               <a:ext uri="{FF2B5EF4-FFF2-40B4-BE49-F238E27FC236}">
-                <a16:creationId xmlns:a16="http://schemas.microsoft.com/office/drawing/2014/main" id="{939B2AAA-05D6-445A-A24F-B4E53FD41F4D}"/>
+                <a16:creationId xmlns:a16="http://schemas.microsoft.com/office/drawing/2014/main" id="{C3F2A26C-FA87-41C6-85DC-6D96B449C129}"/>
               </a:ext>
             </a:extLst>
           </p:cNvPr>
@@ -11818,7 +12978,7 @@
     </p:spTree>
     <p:extLst>
       <p:ext uri="{BB962C8B-B14F-4D97-AF65-F5344CB8AC3E}">
-        <p14:creationId xmlns:p14="http://schemas.microsoft.com/office/powerpoint/2010/main" val="577025930"/>
+        <p14:creationId xmlns:p14="http://schemas.microsoft.com/office/powerpoint/2010/main" val="1565274125"/>
       </p:ext>
     </p:extLst>
   </p:cSld>
@@ -11842,7 +13002,7 @@
           <p:cNvPr id="1" name="slide-bg">
             <a:extLst xmlns:a="http://schemas.openxmlformats.org/drawingml/2006/main">
               <a:ext uri="{FF2B5EF4-FFF2-40B4-BE49-F238E27FC236}">
-                <a16:creationId xmlns:a16="http://schemas.microsoft.com/office/drawing/2014/main" id="{5E31E06C-C112-4E7F-B7EB-0FB48B10F073}"/>
+                <a16:creationId xmlns:a16="http://schemas.microsoft.com/office/drawing/2014/main" id="{64C2475E-1975-46FE-B78E-37D047B899A8}"/>
               </a:ext>
             </a:extLst>
           </p:cNvPr>
@@ -11869,7 +13029,7 @@
           <p:cNvPr id="2" name="slide-title">
             <a:extLst xmlns:a="http://schemas.openxmlformats.org/drawingml/2006/main">
               <a:ext uri="{FF2B5EF4-FFF2-40B4-BE49-F238E27FC236}">
-                <a16:creationId xmlns:a16="http://schemas.microsoft.com/office/drawing/2014/main" id="{B9F2AFBD-E5CC-46ED-9AE9-7A91BBECE325}"/>
+                <a16:creationId xmlns:a16="http://schemas.microsoft.com/office/drawing/2014/main" id="{4C6C5328-B19F-458E-826C-EC71B319EAB7}"/>
               </a:ext>
             </a:extLst>
           </p:cNvPr>
@@ -11918,7 +13078,7 @@
           <p:cNvPr id="3" name="slide-subtitle">
             <a:extLst xmlns:a="http://schemas.openxmlformats.org/drawingml/2006/main">
               <a:ext uri="{FF2B5EF4-FFF2-40B4-BE49-F238E27FC236}">
-                <a16:creationId xmlns:a16="http://schemas.microsoft.com/office/drawing/2014/main" id="{7EB0FE51-8874-4565-8078-00277FFFB932}"/>
+                <a16:creationId xmlns:a16="http://schemas.microsoft.com/office/drawing/2014/main" id="{05AD5D9C-F004-4297-85AA-9D0D01079E66}"/>
               </a:ext>
             </a:extLst>
           </p:cNvPr>
@@ -11967,7 +13127,7 @@
           <p:cNvPr id="4" name="">
             <a:extLst xmlns:a="http://schemas.openxmlformats.org/drawingml/2006/main">
               <a:ext uri="{FF2B5EF4-FFF2-40B4-BE49-F238E27FC236}">
-                <a16:creationId xmlns:a16="http://schemas.microsoft.com/office/drawing/2014/main" id="{1B8BCBE6-4197-4014-9382-7997D674D272}"/>
+                <a16:creationId xmlns:a16="http://schemas.microsoft.com/office/drawing/2014/main" id="{E05AA33C-BDAB-4B2D-BD54-093F0653B04B}"/>
               </a:ext>
             </a:extLst>
           </p:cNvPr>
@@ -12016,7 +13176,7 @@
           <p:cNvPr id="5" name="">
             <a:extLst xmlns:a="http://schemas.openxmlformats.org/drawingml/2006/main">
               <a:ext uri="{FF2B5EF4-FFF2-40B4-BE49-F238E27FC236}">
-                <a16:creationId xmlns:a16="http://schemas.microsoft.com/office/drawing/2014/main" id="{95ABF592-F7A4-4ACD-8487-6E3FD10269A2}"/>
+                <a16:creationId xmlns:a16="http://schemas.microsoft.com/office/drawing/2014/main" id="{8EFA19D9-690A-461D-B34A-5990E868BBA3}"/>
               </a:ext>
             </a:extLst>
           </p:cNvPr>
@@ -12065,7 +13225,7 @@
           <p:cNvPr id="6" name="">
             <a:extLst xmlns:a="http://schemas.openxmlformats.org/drawingml/2006/main">
               <a:ext uri="{FF2B5EF4-FFF2-40B4-BE49-F238E27FC236}">
-                <a16:creationId xmlns:a16="http://schemas.microsoft.com/office/drawing/2014/main" id="{2019B218-EF86-4ADD-AABC-FE5E8B1DDD52}"/>
+                <a16:creationId xmlns:a16="http://schemas.microsoft.com/office/drawing/2014/main" id="{B08E31B7-4FD4-4DA0-9B4C-E046F5343261}"/>
               </a:ext>
             </a:extLst>
           </p:cNvPr>
@@ -12114,7 +13274,7 @@
           <p:cNvPr id="7" name="">
             <a:extLst xmlns:a="http://schemas.openxmlformats.org/drawingml/2006/main">
               <a:ext uri="{FF2B5EF4-FFF2-40B4-BE49-F238E27FC236}">
-                <a16:creationId xmlns:a16="http://schemas.microsoft.com/office/drawing/2014/main" id="{173FFB65-BB72-4273-B5E7-6E98A68D44C5}"/>
+                <a16:creationId xmlns:a16="http://schemas.microsoft.com/office/drawing/2014/main" id="{CA6A5BEA-B506-4189-9661-039A97B4CA3A}"/>
               </a:ext>
             </a:extLst>
           </p:cNvPr>
@@ -12163,7 +13323,7 @@
           <p:cNvPr id="8" name="">
             <a:extLst xmlns:a="http://schemas.openxmlformats.org/drawingml/2006/main">
               <a:ext uri="{FF2B5EF4-FFF2-40B4-BE49-F238E27FC236}">
-                <a16:creationId xmlns:a16="http://schemas.microsoft.com/office/drawing/2014/main" id="{687174E7-53CA-4470-B9E9-21D1E6C350B6}"/>
+                <a16:creationId xmlns:a16="http://schemas.microsoft.com/office/drawing/2014/main" id="{AE5FF14D-A9AA-4711-9092-E6912264DC0B}"/>
               </a:ext>
             </a:extLst>
           </p:cNvPr>
@@ -12212,7 +13372,7 @@
           <p:cNvPr id="9" name="">
             <a:extLst xmlns:a="http://schemas.openxmlformats.org/drawingml/2006/main">
               <a:ext uri="{FF2B5EF4-FFF2-40B4-BE49-F238E27FC236}">
-                <a16:creationId xmlns:a16="http://schemas.microsoft.com/office/drawing/2014/main" id="{B7225127-D685-4407-92C2-42A06D3FE9FA}"/>
+                <a16:creationId xmlns:a16="http://schemas.microsoft.com/office/drawing/2014/main" id="{34F6DCC1-74AD-4A9F-8EDD-DC761A1E2C94}"/>
               </a:ext>
             </a:extLst>
           </p:cNvPr>
@@ -12261,7 +13421,7 @@
           <p:cNvPr id="10" name="">
             <a:extLst xmlns:a="http://schemas.openxmlformats.org/drawingml/2006/main">
               <a:ext uri="{FF2B5EF4-FFF2-40B4-BE49-F238E27FC236}">
-                <a16:creationId xmlns:a16="http://schemas.microsoft.com/office/drawing/2014/main" id="{6C26276D-4222-4C90-9668-522627B4B211}"/>
+                <a16:creationId xmlns:a16="http://schemas.microsoft.com/office/drawing/2014/main" id="{684844B9-4D23-4219-8F93-8C335359F962}"/>
               </a:ext>
             </a:extLst>
           </p:cNvPr>
@@ -12310,7 +13470,7 @@
           <p:cNvPr id="11" name="">
             <a:extLst xmlns:a="http://schemas.openxmlformats.org/drawingml/2006/main">
               <a:ext uri="{FF2B5EF4-FFF2-40B4-BE49-F238E27FC236}">
-                <a16:creationId xmlns:a16="http://schemas.microsoft.com/office/drawing/2014/main" id="{504CCAD3-AAD0-4368-8AE6-42EF66B5DD76}"/>
+                <a16:creationId xmlns:a16="http://schemas.microsoft.com/office/drawing/2014/main" id="{3CA03BD6-7A92-4F8E-BA2B-39EED7373327}"/>
               </a:ext>
             </a:extLst>
           </p:cNvPr>
@@ -12359,7 +13519,7 @@
           <p:cNvPr id="12" name="">
             <a:extLst xmlns:a="http://schemas.openxmlformats.org/drawingml/2006/main">
               <a:ext uri="{FF2B5EF4-FFF2-40B4-BE49-F238E27FC236}">
-                <a16:creationId xmlns:a16="http://schemas.microsoft.com/office/drawing/2014/main" id="{4124772D-AE15-44E9-8749-C9BC55E68C9E}"/>
+                <a16:creationId xmlns:a16="http://schemas.microsoft.com/office/drawing/2014/main" id="{F09B52F5-477E-4CFC-B187-3E8CD4EDFB88}"/>
               </a:ext>
             </a:extLst>
           </p:cNvPr>
@@ -12408,7 +13568,7 @@
           <p:cNvPr id="13" name="">
             <a:extLst xmlns:a="http://schemas.openxmlformats.org/drawingml/2006/main">
               <a:ext uri="{FF2B5EF4-FFF2-40B4-BE49-F238E27FC236}">
-                <a16:creationId xmlns:a16="http://schemas.microsoft.com/office/drawing/2014/main" id="{22817D14-8BA0-4A05-AD80-7AF61A518F87}"/>
+                <a16:creationId xmlns:a16="http://schemas.microsoft.com/office/drawing/2014/main" id="{BF0373AB-548D-4122-B7C6-087842A88B1B}"/>
               </a:ext>
             </a:extLst>
           </p:cNvPr>
@@ -12457,7 +13617,7 @@
           <p:cNvPr id="14" name="code-block">
             <a:extLst xmlns:a="http://schemas.openxmlformats.org/drawingml/2006/main">
               <a:ext uri="{FF2B5EF4-FFF2-40B4-BE49-F238E27FC236}">
-                <a16:creationId xmlns:a16="http://schemas.microsoft.com/office/drawing/2014/main" id="{45946C0F-15C0-4BA6-ADA0-14326402E288}"/>
+                <a16:creationId xmlns:a16="http://schemas.microsoft.com/office/drawing/2014/main" id="{D24052BC-57A8-4AB8-AFF7-31F383042D39}"/>
               </a:ext>
             </a:extLst>
           </p:cNvPr>
@@ -12486,7 +13646,7 @@
           <p:cNvPr id="15" name="">
             <a:extLst xmlns:a="http://schemas.openxmlformats.org/drawingml/2006/main">
               <a:ext uri="{FF2B5EF4-FFF2-40B4-BE49-F238E27FC236}">
-                <a16:creationId xmlns:a16="http://schemas.microsoft.com/office/drawing/2014/main" id="{12DA43FF-4101-488A-885F-2D8771479B9F}"/>
+                <a16:creationId xmlns:a16="http://schemas.microsoft.com/office/drawing/2014/main" id="{92C2312F-A006-48DF-92E4-F05891AEC620}"/>
               </a:ext>
             </a:extLst>
           </p:cNvPr>
@@ -12645,7 +13805,7 @@
           <p:cNvPr id="16" name="">
             <a:extLst xmlns:a="http://schemas.openxmlformats.org/drawingml/2006/main">
               <a:ext uri="{FF2B5EF4-FFF2-40B4-BE49-F238E27FC236}">
-                <a16:creationId xmlns:a16="http://schemas.microsoft.com/office/drawing/2014/main" id="{C72128A4-40DF-4E0D-B1DC-2D15632E769C}"/>
+                <a16:creationId xmlns:a16="http://schemas.microsoft.com/office/drawing/2014/main" id="{9494579C-4C41-4F5B-BA71-A6239E589FF3}"/>
               </a:ext>
             </a:extLst>
           </p:cNvPr>
@@ -12694,7 +13854,7 @@
           <p:cNvPr id="17" name="">
             <a:extLst xmlns:a="http://schemas.openxmlformats.org/drawingml/2006/main">
               <a:ext uri="{FF2B5EF4-FFF2-40B4-BE49-F238E27FC236}">
-                <a16:creationId xmlns:a16="http://schemas.microsoft.com/office/drawing/2014/main" id="{32A67AF3-C019-48E9-AA73-D2C1EDA2303C}"/>
+                <a16:creationId xmlns:a16="http://schemas.microsoft.com/office/drawing/2014/main" id="{585F81E1-5F95-4694-94A7-862A9FF95EFC}"/>
               </a:ext>
             </a:extLst>
           </p:cNvPr>
@@ -12741,7 +13901,7 @@
     </p:spTree>
     <p:extLst>
       <p:ext uri="{BB962C8B-B14F-4D97-AF65-F5344CB8AC3E}">
-        <p14:creationId xmlns:p14="http://schemas.microsoft.com/office/powerpoint/2010/main" val="1721678591"/>
+        <p14:creationId xmlns:p14="http://schemas.microsoft.com/office/powerpoint/2010/main" val="494869806"/>
       </p:ext>
     </p:extLst>
   </p:cSld>
@@ -12765,7 +13925,7 @@
           <p:cNvPr id="1" name="slide-bg">
             <a:extLst xmlns:a="http://schemas.openxmlformats.org/drawingml/2006/main">
               <a:ext uri="{FF2B5EF4-FFF2-40B4-BE49-F238E27FC236}">
-                <a16:creationId xmlns:a16="http://schemas.microsoft.com/office/drawing/2014/main" id="{C86A173B-22C6-448C-81B7-6B5977F1C224}"/>
+                <a16:creationId xmlns:a16="http://schemas.microsoft.com/office/drawing/2014/main" id="{939B3361-602D-47F8-BF61-96E624752185}"/>
               </a:ext>
             </a:extLst>
           </p:cNvPr>
@@ -12792,7 +13952,7 @@
           <p:cNvPr id="2" name="slide-title">
             <a:extLst xmlns:a="http://schemas.openxmlformats.org/drawingml/2006/main">
               <a:ext uri="{FF2B5EF4-FFF2-40B4-BE49-F238E27FC236}">
-                <a16:creationId xmlns:a16="http://schemas.microsoft.com/office/drawing/2014/main" id="{9E003B99-933D-41E2-88D0-630C07475161}"/>
+                <a16:creationId xmlns:a16="http://schemas.microsoft.com/office/drawing/2014/main" id="{8B5E33A4-9352-4D7C-9252-59A75F2A113D}"/>
               </a:ext>
             </a:extLst>
           </p:cNvPr>
@@ -12841,7 +14001,7 @@
           <p:cNvPr id="3" name="slide-subtitle">
             <a:extLst xmlns:a="http://schemas.openxmlformats.org/drawingml/2006/main">
               <a:ext uri="{FF2B5EF4-FFF2-40B4-BE49-F238E27FC236}">
-                <a16:creationId xmlns:a16="http://schemas.microsoft.com/office/drawing/2014/main" id="{E1FA2EC1-035E-483F-ACAC-99AD86B841CF}"/>
+                <a16:creationId xmlns:a16="http://schemas.microsoft.com/office/drawing/2014/main" id="{C84F05D8-1928-4CDF-B4DD-C1080BAE811A}"/>
               </a:ext>
             </a:extLst>
           </p:cNvPr>
@@ -12890,7 +14050,7 @@
           <p:cNvPr id="4" name="">
             <a:extLst xmlns:a="http://schemas.openxmlformats.org/drawingml/2006/main">
               <a:ext uri="{FF2B5EF4-FFF2-40B4-BE49-F238E27FC236}">
-                <a16:creationId xmlns:a16="http://schemas.microsoft.com/office/drawing/2014/main" id="{CA498862-D0B3-4939-920C-FC108E22A2C6}"/>
+                <a16:creationId xmlns:a16="http://schemas.microsoft.com/office/drawing/2014/main" id="{593427D7-3772-48A6-BE3D-AAD265D0619D}"/>
               </a:ext>
             </a:extLst>
           </p:cNvPr>
@@ -12919,7 +14079,7 @@
           <p:cNvPr id="5" name="">
             <a:extLst xmlns:a="http://schemas.openxmlformats.org/drawingml/2006/main">
               <a:ext uri="{FF2B5EF4-FFF2-40B4-BE49-F238E27FC236}">
-                <a16:creationId xmlns:a16="http://schemas.microsoft.com/office/drawing/2014/main" id="{3F0202E4-DD7D-4E2C-8958-64977931EFCD}"/>
+                <a16:creationId xmlns:a16="http://schemas.microsoft.com/office/drawing/2014/main" id="{A433F75D-DEBB-4B50-9115-513D3F8B1A3D}"/>
               </a:ext>
             </a:extLst>
           </p:cNvPr>
@@ -12968,7 +14128,7 @@
           <p:cNvPr id="6" name="">
             <a:extLst xmlns:a="http://schemas.openxmlformats.org/drawingml/2006/main">
               <a:ext uri="{FF2B5EF4-FFF2-40B4-BE49-F238E27FC236}">
-                <a16:creationId xmlns:a16="http://schemas.microsoft.com/office/drawing/2014/main" id="{063675BF-CBA4-4B85-AD08-21A4DC2B067E}"/>
+                <a16:creationId xmlns:a16="http://schemas.microsoft.com/office/drawing/2014/main" id="{8565481A-B3B3-4D04-837E-A3911FDF55DC}"/>
               </a:ext>
             </a:extLst>
           </p:cNvPr>
@@ -13017,7 +14177,7 @@
           <p:cNvPr id="7" name="">
             <a:extLst xmlns:a="http://schemas.openxmlformats.org/drawingml/2006/main">
               <a:ext uri="{FF2B5EF4-FFF2-40B4-BE49-F238E27FC236}">
-                <a16:creationId xmlns:a16="http://schemas.microsoft.com/office/drawing/2014/main" id="{67DECC14-50D1-4FC3-A062-D9F4ABA32E0B}"/>
+                <a16:creationId xmlns:a16="http://schemas.microsoft.com/office/drawing/2014/main" id="{DCD72CF3-AE9D-4F9F-9EBB-97E5F0CA124B}"/>
               </a:ext>
             </a:extLst>
           </p:cNvPr>
@@ -13066,7 +14226,7 @@
           <p:cNvPr id="8" name="">
             <a:extLst xmlns:a="http://schemas.openxmlformats.org/drawingml/2006/main">
               <a:ext uri="{FF2B5EF4-FFF2-40B4-BE49-F238E27FC236}">
-                <a16:creationId xmlns:a16="http://schemas.microsoft.com/office/drawing/2014/main" id="{E1896FC5-088F-49EC-BCA9-83B56CA62B0A}"/>
+                <a16:creationId xmlns:a16="http://schemas.microsoft.com/office/drawing/2014/main" id="{659CE000-7734-4A3E-A785-482E997BBE2C}"/>
               </a:ext>
             </a:extLst>
           </p:cNvPr>
@@ -13095,7 +14255,7 @@
           <p:cNvPr id="9" name="">
             <a:extLst xmlns:a="http://schemas.openxmlformats.org/drawingml/2006/main">
               <a:ext uri="{FF2B5EF4-FFF2-40B4-BE49-F238E27FC236}">
-                <a16:creationId xmlns:a16="http://schemas.microsoft.com/office/drawing/2014/main" id="{22F9AB58-FC45-4434-AB37-F2D624A10D7E}"/>
+                <a16:creationId xmlns:a16="http://schemas.microsoft.com/office/drawing/2014/main" id="{2B5CA5BC-8CDB-43E8-BF93-B7DF5E9434AB}"/>
               </a:ext>
             </a:extLst>
           </p:cNvPr>
@@ -13144,7 +14304,7 @@
           <p:cNvPr id="10" name="">
             <a:extLst xmlns:a="http://schemas.openxmlformats.org/drawingml/2006/main">
               <a:ext uri="{FF2B5EF4-FFF2-40B4-BE49-F238E27FC236}">
-                <a16:creationId xmlns:a16="http://schemas.microsoft.com/office/drawing/2014/main" id="{B436B5A9-9586-4C33-9321-E2C0531B41B1}"/>
+                <a16:creationId xmlns:a16="http://schemas.microsoft.com/office/drawing/2014/main" id="{848534F0-1195-4E7A-9D8F-F00DA55BE879}"/>
               </a:ext>
             </a:extLst>
           </p:cNvPr>
@@ -13193,7 +14353,7 @@
           <p:cNvPr id="11" name="">
             <a:extLst xmlns:a="http://schemas.openxmlformats.org/drawingml/2006/main">
               <a:ext uri="{FF2B5EF4-FFF2-40B4-BE49-F238E27FC236}">
-                <a16:creationId xmlns:a16="http://schemas.microsoft.com/office/drawing/2014/main" id="{47038A17-196C-402E-B087-994B1B9D4A78}"/>
+                <a16:creationId xmlns:a16="http://schemas.microsoft.com/office/drawing/2014/main" id="{A54C2D7B-9167-477E-B2B1-80FB3FC174CC}"/>
               </a:ext>
             </a:extLst>
           </p:cNvPr>
@@ -13242,7 +14402,7 @@
           <p:cNvPr id="12" name="">
             <a:extLst xmlns:a="http://schemas.openxmlformats.org/drawingml/2006/main">
               <a:ext uri="{FF2B5EF4-FFF2-40B4-BE49-F238E27FC236}">
-                <a16:creationId xmlns:a16="http://schemas.microsoft.com/office/drawing/2014/main" id="{4AF4CD27-6B5F-48E7-845E-FB0FCBB63AEA}"/>
+                <a16:creationId xmlns:a16="http://schemas.microsoft.com/office/drawing/2014/main" id="{1D85417D-0A90-4C37-8FF2-DEC86EBC1D28}"/>
               </a:ext>
             </a:extLst>
           </p:cNvPr>
@@ -13271,7 +14431,7 @@
           <p:cNvPr id="13" name="">
             <a:extLst xmlns:a="http://schemas.openxmlformats.org/drawingml/2006/main">
               <a:ext uri="{FF2B5EF4-FFF2-40B4-BE49-F238E27FC236}">
-                <a16:creationId xmlns:a16="http://schemas.microsoft.com/office/drawing/2014/main" id="{5225B0E8-7059-4EFC-9111-3FB8FD63C56A}"/>
+                <a16:creationId xmlns:a16="http://schemas.microsoft.com/office/drawing/2014/main" id="{1E9BEC84-A71A-423E-8BF7-3875F7E2A81C}"/>
               </a:ext>
             </a:extLst>
           </p:cNvPr>
@@ -13320,7 +14480,7 @@
           <p:cNvPr id="14" name="">
             <a:extLst xmlns:a="http://schemas.openxmlformats.org/drawingml/2006/main">
               <a:ext uri="{FF2B5EF4-FFF2-40B4-BE49-F238E27FC236}">
-                <a16:creationId xmlns:a16="http://schemas.microsoft.com/office/drawing/2014/main" id="{FB86D7D3-D400-4095-9C73-2BC69B80A9E2}"/>
+                <a16:creationId xmlns:a16="http://schemas.microsoft.com/office/drawing/2014/main" id="{3FD5048E-2D45-45A2-9E8E-70A332C0EA36}"/>
               </a:ext>
             </a:extLst>
           </p:cNvPr>
@@ -13369,7 +14529,7 @@
           <p:cNvPr id="15" name="code-block">
             <a:extLst xmlns:a="http://schemas.openxmlformats.org/drawingml/2006/main">
               <a:ext uri="{FF2B5EF4-FFF2-40B4-BE49-F238E27FC236}">
-                <a16:creationId xmlns:a16="http://schemas.microsoft.com/office/drawing/2014/main" id="{E038934D-3116-4B1B-9733-D699D6273E90}"/>
+                <a16:creationId xmlns:a16="http://schemas.microsoft.com/office/drawing/2014/main" id="{A82CEDD4-F936-436B-A90D-37345A59847F}"/>
               </a:ext>
             </a:extLst>
           </p:cNvPr>
@@ -13398,7 +14558,7 @@
           <p:cNvPr id="16" name="">
             <a:extLst xmlns:a="http://schemas.openxmlformats.org/drawingml/2006/main">
               <a:ext uri="{FF2B5EF4-FFF2-40B4-BE49-F238E27FC236}">
-                <a16:creationId xmlns:a16="http://schemas.microsoft.com/office/drawing/2014/main" id="{82D315C6-7E18-4B47-AFB0-55A35C5B5009}"/>
+                <a16:creationId xmlns:a16="http://schemas.microsoft.com/office/drawing/2014/main" id="{40B479EC-0B2A-4172-A9BF-2C4C382766E9}"/>
               </a:ext>
             </a:extLst>
           </p:cNvPr>
@@ -13541,7 +14701,7 @@
           <p:cNvPr id="17" name="">
             <a:extLst xmlns:a="http://schemas.openxmlformats.org/drawingml/2006/main">
               <a:ext uri="{FF2B5EF4-FFF2-40B4-BE49-F238E27FC236}">
-                <a16:creationId xmlns:a16="http://schemas.microsoft.com/office/drawing/2014/main" id="{543091D0-87B8-4AB8-8029-C65A86CDE10D}"/>
+                <a16:creationId xmlns:a16="http://schemas.microsoft.com/office/drawing/2014/main" id="{F282B0BF-91FE-489D-8CF8-0FB1CB57FC1B}"/>
               </a:ext>
             </a:extLst>
           </p:cNvPr>
@@ -13590,7 +14750,7 @@
           <p:cNvPr id="18" name="">
             <a:extLst xmlns:a="http://schemas.openxmlformats.org/drawingml/2006/main">
               <a:ext uri="{FF2B5EF4-FFF2-40B4-BE49-F238E27FC236}">
-                <a16:creationId xmlns:a16="http://schemas.microsoft.com/office/drawing/2014/main" id="{D7B4D1C8-F6AF-4A80-99E1-D1B6AD21AD26}"/>
+                <a16:creationId xmlns:a16="http://schemas.microsoft.com/office/drawing/2014/main" id="{B7A484E3-E146-4805-A1DD-72DBAB9FB193}"/>
               </a:ext>
             </a:extLst>
           </p:cNvPr>
@@ -13637,7 +14797,7 @@
     </p:spTree>
     <p:extLst>
       <p:ext uri="{BB962C8B-B14F-4D97-AF65-F5344CB8AC3E}">
-        <p14:creationId xmlns:p14="http://schemas.microsoft.com/office/powerpoint/2010/main" val="1161828354"/>
+        <p14:creationId xmlns:p14="http://schemas.microsoft.com/office/powerpoint/2010/main" val="1660118596"/>
       </p:ext>
     </p:extLst>
   </p:cSld>
@@ -13661,7 +14821,7 @@
           <p:cNvPr id="1" name="slide-bg">
             <a:extLst xmlns:a="http://schemas.openxmlformats.org/drawingml/2006/main">
               <a:ext uri="{FF2B5EF4-FFF2-40B4-BE49-F238E27FC236}">
-                <a16:creationId xmlns:a16="http://schemas.microsoft.com/office/drawing/2014/main" id="{70F6A0DF-0224-44B1-971D-1965BEC54D9A}"/>
+                <a16:creationId xmlns:a16="http://schemas.microsoft.com/office/drawing/2014/main" id="{34439AC4-E589-45C2-A032-2053C29375F1}"/>
               </a:ext>
             </a:extLst>
           </p:cNvPr>
@@ -13688,7 +14848,7 @@
           <p:cNvPr id="2" name="slide-title">
             <a:extLst xmlns:a="http://schemas.openxmlformats.org/drawingml/2006/main">
               <a:ext uri="{FF2B5EF4-FFF2-40B4-BE49-F238E27FC236}">
-                <a16:creationId xmlns:a16="http://schemas.microsoft.com/office/drawing/2014/main" id="{93F4AD74-925E-4724-91E5-2F72E98BE024}"/>
+                <a16:creationId xmlns:a16="http://schemas.microsoft.com/office/drawing/2014/main" id="{AF9858EC-1E5A-4684-A208-EBDB54E3FE1F}"/>
               </a:ext>
             </a:extLst>
           </p:cNvPr>
@@ -13737,7 +14897,7 @@
           <p:cNvPr id="3" name="slide-subtitle">
             <a:extLst xmlns:a="http://schemas.openxmlformats.org/drawingml/2006/main">
               <a:ext uri="{FF2B5EF4-FFF2-40B4-BE49-F238E27FC236}">
-                <a16:creationId xmlns:a16="http://schemas.microsoft.com/office/drawing/2014/main" id="{5FAF2F67-A08F-4248-B4A3-144711129686}"/>
+                <a16:creationId xmlns:a16="http://schemas.microsoft.com/office/drawing/2014/main" id="{CE7D8B33-BEA2-4957-A853-BDF40A3C6007}"/>
               </a:ext>
             </a:extLst>
           </p:cNvPr>
@@ -13790,7 +14950,7 @@
           <p:nvPr/>
         </p:nvPicPr>
         <p:blipFill>
-          <a:blip xmlns:r="http://schemas.openxmlformats.org/officeDocument/2006/relationships" xmlns:a="http://schemas.openxmlformats.org/drawingml/2006/main" r:embed="Rd4ea525082144292"/>
+          <a:blip xmlns:r="http://schemas.openxmlformats.org/officeDocument/2006/relationships" xmlns:a="http://schemas.openxmlformats.org/drawingml/2006/main" r:embed="R6153993d6ad44f79"/>
           <a:stretch xmlns:a="http://schemas.openxmlformats.org/drawingml/2006/main"/>
         </p:blipFill>
         <p:spPr>
@@ -13808,7 +14968,7 @@
           <p:cNvPr id="5" name="">
             <a:extLst xmlns:a="http://schemas.openxmlformats.org/drawingml/2006/main">
               <a:ext uri="{FF2B5EF4-FFF2-40B4-BE49-F238E27FC236}">
-                <a16:creationId xmlns:a16="http://schemas.microsoft.com/office/drawing/2014/main" id="{64DC9D8B-C5EF-4758-89D2-96D8D32A9267}"/>
+                <a16:creationId xmlns:a16="http://schemas.microsoft.com/office/drawing/2014/main" id="{8B59D6FF-23E7-4CE6-82ED-C3A585F7BDEE}"/>
               </a:ext>
             </a:extLst>
           </p:cNvPr>
@@ -13837,7 +14997,7 @@
           <p:cNvPr id="6" name="">
             <a:extLst xmlns:a="http://schemas.openxmlformats.org/drawingml/2006/main">
               <a:ext uri="{FF2B5EF4-FFF2-40B4-BE49-F238E27FC236}">
-                <a16:creationId xmlns:a16="http://schemas.microsoft.com/office/drawing/2014/main" id="{8B5EE7EE-829D-4EF6-8929-5CF4643CEB85}"/>
+                <a16:creationId xmlns:a16="http://schemas.microsoft.com/office/drawing/2014/main" id="{9DBF1246-5148-483F-91E9-A0E7EB1A9938}"/>
               </a:ext>
             </a:extLst>
           </p:cNvPr>
@@ -13886,7 +15046,7 @@
           <p:cNvPr id="7" name="">
             <a:extLst xmlns:a="http://schemas.openxmlformats.org/drawingml/2006/main">
               <a:ext uri="{FF2B5EF4-FFF2-40B4-BE49-F238E27FC236}">
-                <a16:creationId xmlns:a16="http://schemas.microsoft.com/office/drawing/2014/main" id="{8D3E9645-7120-41DF-8B48-766AAD835D96}"/>
+                <a16:creationId xmlns:a16="http://schemas.microsoft.com/office/drawing/2014/main" id="{0ECAC6E0-9FAA-4EAB-AF94-12F17B6D48C6}"/>
               </a:ext>
             </a:extLst>
           </p:cNvPr>
@@ -13935,7 +15095,7 @@
           <p:cNvPr id="8" name="">
             <a:extLst xmlns:a="http://schemas.openxmlformats.org/drawingml/2006/main">
               <a:ext uri="{FF2B5EF4-FFF2-40B4-BE49-F238E27FC236}">
-                <a16:creationId xmlns:a16="http://schemas.microsoft.com/office/drawing/2014/main" id="{704B4715-14CB-4663-BBF1-95A3E9375A16}"/>
+                <a16:creationId xmlns:a16="http://schemas.microsoft.com/office/drawing/2014/main" id="{32B2A1BC-4CF8-40CE-A66A-390270900289}"/>
               </a:ext>
             </a:extLst>
           </p:cNvPr>
@@ -13984,7 +15144,7 @@
           <p:cNvPr id="9" name="">
             <a:extLst xmlns:a="http://schemas.openxmlformats.org/drawingml/2006/main">
               <a:ext uri="{FF2B5EF4-FFF2-40B4-BE49-F238E27FC236}">
-                <a16:creationId xmlns:a16="http://schemas.microsoft.com/office/drawing/2014/main" id="{1481B0B1-F73D-4FDA-ACD1-4584198D2968}"/>
+                <a16:creationId xmlns:a16="http://schemas.microsoft.com/office/drawing/2014/main" id="{97378A48-0596-43FE-A658-6A2A9913DB83}"/>
               </a:ext>
             </a:extLst>
           </p:cNvPr>
@@ -14013,7 +15173,7 @@
           <p:cNvPr id="10" name="">
             <a:extLst xmlns:a="http://schemas.openxmlformats.org/drawingml/2006/main">
               <a:ext uri="{FF2B5EF4-FFF2-40B4-BE49-F238E27FC236}">
-                <a16:creationId xmlns:a16="http://schemas.microsoft.com/office/drawing/2014/main" id="{C2ECF917-75AC-4E90-A2E9-273D96C42AD1}"/>
+                <a16:creationId xmlns:a16="http://schemas.microsoft.com/office/drawing/2014/main" id="{6189526B-5517-4EAE-A221-EAB8D3B31CE8}"/>
               </a:ext>
             </a:extLst>
           </p:cNvPr>
@@ -14062,7 +15222,7 @@
           <p:cNvPr id="11" name="">
             <a:extLst xmlns:a="http://schemas.openxmlformats.org/drawingml/2006/main">
               <a:ext uri="{FF2B5EF4-FFF2-40B4-BE49-F238E27FC236}">
-                <a16:creationId xmlns:a16="http://schemas.microsoft.com/office/drawing/2014/main" id="{B1B3E88B-B587-4E09-8647-C964DF026253}"/>
+                <a16:creationId xmlns:a16="http://schemas.microsoft.com/office/drawing/2014/main" id="{FB2D7BB5-2BEB-4790-8257-3E0120CE84C4}"/>
               </a:ext>
             </a:extLst>
           </p:cNvPr>
@@ -14111,7 +15271,7 @@
           <p:cNvPr id="12" name="">
             <a:extLst xmlns:a="http://schemas.openxmlformats.org/drawingml/2006/main">
               <a:ext uri="{FF2B5EF4-FFF2-40B4-BE49-F238E27FC236}">
-                <a16:creationId xmlns:a16="http://schemas.microsoft.com/office/drawing/2014/main" id="{83C470AD-9C5A-495C-8F6E-F61681E4290F}"/>
+                <a16:creationId xmlns:a16="http://schemas.microsoft.com/office/drawing/2014/main" id="{C7B8B769-FFB1-4041-BB87-D5297314D909}"/>
               </a:ext>
             </a:extLst>
           </p:cNvPr>
@@ -14160,7 +15320,7 @@
           <p:cNvPr id="13" name="code-block">
             <a:extLst xmlns:a="http://schemas.openxmlformats.org/drawingml/2006/main">
               <a:ext uri="{FF2B5EF4-FFF2-40B4-BE49-F238E27FC236}">
-                <a16:creationId xmlns:a16="http://schemas.microsoft.com/office/drawing/2014/main" id="{BD2570A0-C6E0-43D5-9ADF-3D1D2243993D}"/>
+                <a16:creationId xmlns:a16="http://schemas.microsoft.com/office/drawing/2014/main" id="{223FE121-A821-4E4C-83BD-C83BA4C4CB8B}"/>
               </a:ext>
             </a:extLst>
           </p:cNvPr>
@@ -14189,7 +15349,7 @@
           <p:cNvPr id="14" name="">
             <a:extLst xmlns:a="http://schemas.openxmlformats.org/drawingml/2006/main">
               <a:ext uri="{FF2B5EF4-FFF2-40B4-BE49-F238E27FC236}">
-                <a16:creationId xmlns:a16="http://schemas.microsoft.com/office/drawing/2014/main" id="{252C883B-595E-4BB6-A96B-E57C92E5FFE3}"/>
+                <a16:creationId xmlns:a16="http://schemas.microsoft.com/office/drawing/2014/main" id="{7057B512-0651-44EA-99F9-0A01FA46F63E}"/>
               </a:ext>
             </a:extLst>
           </p:cNvPr>
@@ -14411,7 +15571,7 @@
           <p:cNvPr id="15" name="">
             <a:extLst xmlns:a="http://schemas.openxmlformats.org/drawingml/2006/main">
               <a:ext uri="{FF2B5EF4-FFF2-40B4-BE49-F238E27FC236}">
-                <a16:creationId xmlns:a16="http://schemas.microsoft.com/office/drawing/2014/main" id="{54A7D0C2-FC23-4FA3-BAA4-BEB57F7EE0CD}"/>
+                <a16:creationId xmlns:a16="http://schemas.microsoft.com/office/drawing/2014/main" id="{D1852227-3D43-48A8-8AA7-88EA54F2CDC9}"/>
               </a:ext>
             </a:extLst>
           </p:cNvPr>
@@ -14458,7 +15618,7 @@
     </p:spTree>
     <p:extLst>
       <p:ext uri="{BB962C8B-B14F-4D97-AF65-F5344CB8AC3E}">
-        <p14:creationId xmlns:p14="http://schemas.microsoft.com/office/powerpoint/2010/main" val="371942507"/>
+        <p14:creationId xmlns:p14="http://schemas.microsoft.com/office/powerpoint/2010/main" val="1864045088"/>
       </p:ext>
     </p:extLst>
   </p:cSld>
